--- a/slides/minkowski.pptx
+++ b/slides/minkowski.pptx
@@ -6715,31 +6715,41 @@
           </p:sp>
         </mc:Fallback>
       </mc:AlternateContent>
-      <p:sp>
-        <p:nvSpPr>
-          <p:cNvPr id="9" name="Content Placeholder 8">
+      <p:pic>
+        <p:nvPicPr>
+          <p:cNvPr id="3" name="Content Placeholder 2">
             <a:extLst>
               <a:ext uri="{FF2B5EF4-FFF2-40B4-BE49-F238E27FC236}">
-                <a16:creationId xmlns:a16="http://schemas.microsoft.com/office/drawing/2014/main" id="{0F3DB207-AA7B-4670-D21D-6D29559D8E82}"/>
+                <a16:creationId xmlns:a16="http://schemas.microsoft.com/office/drawing/2014/main" id="{D0ED1845-5D53-9C2D-C3E7-8D5081335D50}"/>
               </a:ext>
             </a:extLst>
           </p:cNvPr>
-          <p:cNvSpPr>
-            <a:spLocks noGrp="1"/>
-          </p:cNvSpPr>
+          <p:cNvPicPr>
+            <a:picLocks noGrp="1" noChangeAspect="1"/>
+          </p:cNvPicPr>
           <p:nvPr>
             <p:ph sz="half" idx="2"/>
           </p:nvPr>
-        </p:nvSpPr>
-        <p:spPr/>
-        <p:txBody>
-          <a:bodyPr/>
-          <a:lstStyle/>
-          <a:p>
-            <a:endParaRPr lang="en-CH"/>
-          </a:p>
-        </p:txBody>
-      </p:sp>
+        </p:nvPicPr>
+        <p:blipFill>
+          <a:blip r:embed="rId3">
+            <a:extLst>
+              <a:ext uri="{96DAC541-7B7A-43D3-8B79-37D633B846F1}">
+                <asvg:svgBlip xmlns:asvg="http://schemas.microsoft.com/office/drawing/2016/SVG/main" r:embed="rId4"/>
+              </a:ext>
+            </a:extLst>
+          </a:blip>
+          <a:stretch>
+            <a:fillRect/>
+          </a:stretch>
+        </p:blipFill>
+        <p:spPr>
+          <a:xfrm>
+            <a:off x="6732396" y="1877028"/>
+            <a:ext cx="4350935" cy="4350935"/>
+          </a:xfrm>
+        </p:spPr>
+      </p:pic>
       <p:sp>
         <p:nvSpPr>
           <p:cNvPr id="4" name="Date Placeholder 3">

--- a/slides/minkowski.pptx
+++ b/slides/minkowski.pptx
@@ -6,11 +6,13 @@
     <p:sldMasterId id="2147483798" r:id="rId2"/>
   </p:sldMasterIdLst>
   <p:notesMasterIdLst>
-    <p:notesMasterId r:id="rId5"/>
+    <p:notesMasterId r:id="rId7"/>
   </p:notesMasterIdLst>
   <p:sldIdLst>
     <p:sldId id="256" r:id="rId3"/>
     <p:sldId id="257" r:id="rId4"/>
+    <p:sldId id="258" r:id="rId5"/>
+    <p:sldId id="259" r:id="rId6"/>
   </p:sldIdLst>
   <p:sldSz cx="12192000" cy="6858000"/>
   <p:notesSz cx="6858000" cy="9144000"/>
@@ -6845,6 +6847,141 @@
 </p:sld>
 </file>
 
+<file path=ppt/slides/slide3.xml><?xml version="1.0" encoding="utf-8"?>
+<p:sld xmlns:a="http://schemas.openxmlformats.org/drawingml/2006/main" xmlns:r="http://schemas.openxmlformats.org/officeDocument/2006/relationships" xmlns:p="http://schemas.openxmlformats.org/presentationml/2006/main">
+  <p:cSld>
+    <p:spTree>
+      <p:nvGrpSpPr>
+        <p:cNvPr id="1" name=""/>
+        <p:cNvGrpSpPr/>
+        <p:nvPr/>
+      </p:nvGrpSpPr>
+      <p:grpSpPr>
+        <a:xfrm>
+          <a:off x="0" y="0"/>
+          <a:ext cx="0" cy="0"/>
+          <a:chOff x="0" y="0"/>
+          <a:chExt cx="0" cy="0"/>
+        </a:xfrm>
+      </p:grpSpPr>
+      <p:pic>
+        <p:nvPicPr>
+          <p:cNvPr id="4" name="Content Placeholder 3">
+            <a:extLst>
+              <a:ext uri="{FF2B5EF4-FFF2-40B4-BE49-F238E27FC236}">
+                <a16:creationId xmlns:a16="http://schemas.microsoft.com/office/drawing/2014/main" id="{4EFB6D94-F4BB-5913-9AAD-D25FB00F3F4D}"/>
+              </a:ext>
+            </a:extLst>
+          </p:cNvPr>
+          <p:cNvPicPr>
+            <a:picLocks noGrp="1" noChangeAspect="1"/>
+          </p:cNvPicPr>
+          <p:nvPr>
+            <p:ph idx="1"/>
+          </p:nvPr>
+        </p:nvPicPr>
+        <p:blipFill>
+          <a:blip r:embed="rId2">
+            <a:extLst>
+              <a:ext uri="{96DAC541-7B7A-43D3-8B79-37D633B846F1}">
+                <asvg:svgBlip xmlns:asvg="http://schemas.microsoft.com/office/drawing/2016/SVG/main" r:embed="rId3"/>
+              </a:ext>
+            </a:extLst>
+          </a:blip>
+          <a:srcRect/>
+          <a:stretch/>
+        </p:blipFill>
+        <p:spPr>
+          <a:xfrm>
+            <a:off x="439948" y="-422692"/>
+            <a:ext cx="7556740" cy="7556740"/>
+          </a:xfrm>
+        </p:spPr>
+      </p:pic>
+    </p:spTree>
+    <p:extLst>
+      <p:ext uri="{BB962C8B-B14F-4D97-AF65-F5344CB8AC3E}">
+        <p14:creationId xmlns:p14="http://schemas.microsoft.com/office/powerpoint/2010/main" val="260439997"/>
+      </p:ext>
+    </p:extLst>
+  </p:cSld>
+  <p:clrMapOvr>
+    <a:masterClrMapping/>
+  </p:clrMapOvr>
+</p:sld>
+</file>
+
+<file path=ppt/slides/slide4.xml><?xml version="1.0" encoding="utf-8"?>
+<p:sld xmlns:a="http://schemas.openxmlformats.org/drawingml/2006/main" xmlns:r="http://schemas.openxmlformats.org/officeDocument/2006/relationships" xmlns:p="http://schemas.openxmlformats.org/presentationml/2006/main">
+  <p:cSld>
+    <p:spTree>
+      <p:nvGrpSpPr>
+        <p:cNvPr id="1" name="">
+          <a:extLst>
+            <a:ext uri="{FF2B5EF4-FFF2-40B4-BE49-F238E27FC236}">
+              <a16:creationId xmlns:a16="http://schemas.microsoft.com/office/drawing/2014/main" id="{78433A00-2C99-2075-FCE1-683B869DA7A7}"/>
+            </a:ext>
+          </a:extLst>
+        </p:cNvPr>
+        <p:cNvGrpSpPr/>
+        <p:nvPr/>
+      </p:nvGrpSpPr>
+      <p:grpSpPr>
+        <a:xfrm>
+          <a:off x="0" y="0"/>
+          <a:ext cx="0" cy="0"/>
+          <a:chOff x="0" y="0"/>
+          <a:chExt cx="0" cy="0"/>
+        </a:xfrm>
+      </p:grpSpPr>
+      <p:pic>
+        <p:nvPicPr>
+          <p:cNvPr id="4" name="Content Placeholder 3">
+            <a:extLst>
+              <a:ext uri="{FF2B5EF4-FFF2-40B4-BE49-F238E27FC236}">
+                <a16:creationId xmlns:a16="http://schemas.microsoft.com/office/drawing/2014/main" id="{54F5FABB-B0FA-DCB2-041A-419C82B20932}"/>
+              </a:ext>
+            </a:extLst>
+          </p:cNvPr>
+          <p:cNvPicPr>
+            <a:picLocks noGrp="1" noChangeAspect="1"/>
+          </p:cNvPicPr>
+          <p:nvPr>
+            <p:ph idx="1"/>
+          </p:nvPr>
+        </p:nvPicPr>
+        <p:blipFill>
+          <a:blip r:embed="rId2">
+            <a:extLst>
+              <a:ext uri="{96DAC541-7B7A-43D3-8B79-37D633B846F1}">
+                <asvg:svgBlip xmlns:asvg="http://schemas.microsoft.com/office/drawing/2016/SVG/main" r:link="rId3"/>
+              </a:ext>
+            </a:extLst>
+          </a:blip>
+          <a:stretch>
+            <a:fillRect/>
+          </a:stretch>
+        </p:blipFill>
+        <p:spPr>
+          <a:xfrm>
+            <a:off x="439948" y="-422692"/>
+            <a:ext cx="7556740" cy="7556740"/>
+          </a:xfrm>
+        </p:spPr>
+      </p:pic>
+    </p:spTree>
+    <p:extLst>
+      <p:ext uri="{BB962C8B-B14F-4D97-AF65-F5344CB8AC3E}">
+        <p14:creationId xmlns:p14="http://schemas.microsoft.com/office/powerpoint/2010/main" val="4206889277"/>
+      </p:ext>
+    </p:extLst>
+  </p:cSld>
+  <p:clrMapOvr>
+    <a:masterClrMapping/>
+  </p:clrMapOvr>
+</p:sld>
+</file>
+
 <file path=ppt/theme/theme1.xml><?xml version="1.0" encoding="utf-8"?>
 <a:theme xmlns:a="http://schemas.openxmlformats.org/drawingml/2006/main" name="Dividende">
   <a:themeElements>

--- a/slides/minkowski.pptx
+++ b/slides/minkowski.pptx
@@ -6,13 +6,16 @@
     <p:sldMasterId id="2147483798" r:id="rId2"/>
   </p:sldMasterIdLst>
   <p:notesMasterIdLst>
-    <p:notesMasterId r:id="rId7"/>
+    <p:notesMasterId r:id="rId10"/>
   </p:notesMasterIdLst>
   <p:sldIdLst>
     <p:sldId id="256" r:id="rId3"/>
     <p:sldId id="257" r:id="rId4"/>
     <p:sldId id="258" r:id="rId5"/>
-    <p:sldId id="259" r:id="rId6"/>
+    <p:sldId id="260" r:id="rId6"/>
+    <p:sldId id="261" r:id="rId7"/>
+    <p:sldId id="262" r:id="rId8"/>
+    <p:sldId id="259" r:id="rId9"/>
   </p:sldIdLst>
   <p:sldSz cx="12192000" cy="6858000"/>
   <p:notesSz cx="6858000" cy="9144000"/>
@@ -201,7 +204,7 @@
           <a:p>
             <a:fld id="{FE946714-66A9-4331-9687-D7DE69600F8C}" type="datetimeFigureOut">
               <a:rPr lang="de-DE" smtClean="0"/>
-              <a:t>20.03.2025</a:t>
+              <a:t>21.03.2025</a:t>
             </a:fld>
             <a:endParaRPr lang="de-DE"/>
           </a:p>
@@ -800,7 +803,7 @@
           <a:p>
             <a:fld id="{BC81DDBC-4466-4E4D-8348-9E61A07BBB23}" type="datetime2">
               <a:rPr lang="en-CA" smtClean="0"/>
-              <a:t>Thursday, March 20, 2025</a:t>
+              <a:t>Friday, March 21, 2025</a:t>
             </a:fld>
             <a:endParaRPr lang="de-DE"/>
           </a:p>
@@ -1209,7 +1212,7 @@
           <a:p>
             <a:fld id="{4A011472-C2FB-4557-976A-45B9E45E41B8}" type="datetime2">
               <a:rPr lang="en-CA" smtClean="0"/>
-              <a:t>Thursday, March 20, 2025</a:t>
+              <a:t>Friday, March 21, 2025</a:t>
             </a:fld>
             <a:endParaRPr lang="de-DE"/>
           </a:p>
@@ -1497,7 +1500,7 @@
           <a:p>
             <a:fld id="{0AB1A5E8-2D2A-4061-8930-BA891F6E5824}" type="datetime2">
               <a:rPr lang="en-CA" smtClean="0"/>
-              <a:t>Thursday, March 20, 2025</a:t>
+              <a:t>Friday, March 21, 2025</a:t>
             </a:fld>
             <a:endParaRPr lang="de-DE"/>
           </a:p>
@@ -1726,7 +1729,7 @@
           <a:p>
             <a:fld id="{5FB79B12-0087-499C-8708-C48C1D5EFD8A}" type="datetime2">
               <a:rPr lang="en-CA" smtClean="0"/>
-              <a:t>Thursday, March 20, 2025</a:t>
+              <a:t>Friday, March 21, 2025</a:t>
             </a:fld>
             <a:endParaRPr lang="de-DE"/>
           </a:p>
@@ -1960,7 +1963,7 @@
           <a:p>
             <a:fld id="{1F664A41-A95B-4B58-B281-ED13D91A7603}" type="datetime2">
               <a:rPr lang="en-CA" smtClean="0"/>
-              <a:t>Thursday, March 20, 2025</a:t>
+              <a:t>Friday, March 21, 2025</a:t>
             </a:fld>
             <a:endParaRPr lang="de-DE"/>
           </a:p>
@@ -2122,7 +2125,7 @@
           <a:p>
             <a:fld id="{12F3EEEF-9270-448B-8799-2AA9B50D0F5B}" type="datetime2">
               <a:rPr lang="en-CA" smtClean="0"/>
-              <a:t>Thursday, March 20, 2025</a:t>
+              <a:t>Friday, March 21, 2025</a:t>
             </a:fld>
             <a:endParaRPr lang="de-DE" dirty="0"/>
           </a:p>
@@ -2394,7 +2397,7 @@
           <a:p>
             <a:fld id="{19A37E33-DCA0-4C7F-A116-3D7ECA99B758}" type="datetime2">
               <a:rPr lang="en-CA" smtClean="0"/>
-              <a:t>Thursday, March 20, 2025</a:t>
+              <a:t>Friday, March 21, 2025</a:t>
             </a:fld>
             <a:endParaRPr lang="de-DE"/>
           </a:p>
@@ -2700,7 +2703,7 @@
           <a:p>
             <a:fld id="{5B55F0DF-0DE4-46A6-89EE-D85721A78BFF}" type="datetime2">
               <a:rPr lang="en-CA" smtClean="0"/>
-              <a:t>Thursday, March 20, 2025</a:t>
+              <a:t>Friday, March 21, 2025</a:t>
             </a:fld>
             <a:endParaRPr lang="de-DE"/>
           </a:p>
@@ -3001,7 +3004,7 @@
           <a:p>
             <a:fld id="{E996B742-5549-4C1E-A4A7-964958457E23}" type="datetime2">
               <a:rPr lang="en-CA" smtClean="0"/>
-              <a:t>Thursday, March 20, 2025</a:t>
+              <a:t>Friday, March 21, 2025</a:t>
             </a:fld>
             <a:endParaRPr lang="de-DE"/>
           </a:p>
@@ -3168,7 +3171,7 @@
           <a:p>
             <a:fld id="{E6E52A30-8CC1-4184-BF4D-47E2B21E4EAF}" type="datetime2">
               <a:rPr lang="en-CA" smtClean="0"/>
-              <a:t>Thursday, March 20, 2025</a:t>
+              <a:t>Friday, March 21, 2025</a:t>
             </a:fld>
             <a:endParaRPr lang="de-DE"/>
           </a:p>
@@ -3328,7 +3331,7 @@
           <a:p>
             <a:fld id="{32A64B94-830A-44DB-B256-EB4AB7B8943B}" type="datetime2">
               <a:rPr lang="en-CA" smtClean="0"/>
-              <a:t>Thursday, March 20, 2025</a:t>
+              <a:t>Friday, March 21, 2025</a:t>
             </a:fld>
             <a:endParaRPr lang="de-DE"/>
           </a:p>
@@ -3749,7 +3752,7 @@
           <a:p>
             <a:fld id="{4BA684CD-BF8B-4444-AC4B-E9077F770D42}" type="datetime2">
               <a:rPr lang="en-CA" smtClean="0"/>
-              <a:t>Thursday, March 20, 2025</a:t>
+              <a:t>Friday, March 21, 2025</a:t>
             </a:fld>
             <a:endParaRPr lang="de-DE"/>
           </a:p>
@@ -3843,7 +3846,7 @@
           <a:p>
             <a:fld id="{B72ED8E9-D70F-45C4-8048-A836134AE31C}" type="datetime2">
               <a:rPr lang="en-CA" smtClean="0"/>
-              <a:t>Thursday, March 20, 2025</a:t>
+              <a:t>Friday, March 21, 2025</a:t>
             </a:fld>
             <a:endParaRPr lang="de-DE"/>
           </a:p>
@@ -4004,7 +4007,7 @@
           <a:p>
             <a:fld id="{E2FEC878-C261-4EEC-84F8-2911246240CC}" type="datetime2">
               <a:rPr lang="en-CA" smtClean="0"/>
-              <a:t>Thursday, March 20, 2025</a:t>
+              <a:t>Friday, March 21, 2025</a:t>
             </a:fld>
             <a:endParaRPr lang="de-DE"/>
           </a:p>
@@ -5079,7 +5082,7 @@
           <a:p>
             <a:fld id="{5B784850-771A-44E0-8EA9-A966A4C42E11}" type="datetime2">
               <a:rPr lang="en-CA" smtClean="0"/>
-              <a:t>Thursday, March 20, 2025</a:t>
+              <a:t>Friday, March 21, 2025</a:t>
             </a:fld>
             <a:endParaRPr lang="de-DE" dirty="0"/>
           </a:p>
@@ -6775,7 +6778,7 @@
           <a:p>
             <a:fld id="{19A37E33-DCA0-4C7F-A116-3D7ECA99B758}" type="datetime2">
               <a:rPr lang="en-CA" smtClean="0"/>
-              <a:t>Thursday, March 20, 2025</a:t>
+              <a:t>Friday, March 21, 2025</a:t>
             </a:fld>
             <a:endParaRPr lang="de-DE"/>
           </a:p>
@@ -6881,15 +6884,11 @@
           </p:nvPr>
         </p:nvPicPr>
         <p:blipFill>
-          <a:blip r:embed="rId2">
-            <a:extLst>
-              <a:ext uri="{96DAC541-7B7A-43D3-8B79-37D633B846F1}">
-                <asvg:svgBlip xmlns:asvg="http://schemas.microsoft.com/office/drawing/2016/SVG/main" r:embed="rId3"/>
-              </a:ext>
-            </a:extLst>
-          </a:blip>
+          <a:blip r:link="rId2"/>
           <a:srcRect/>
-          <a:stretch/>
+          <a:stretch>
+            <a:fillRect/>
+          </a:stretch>
         </p:blipFill>
         <p:spPr>
           <a:xfrm>
@@ -6912,6 +6911,276 @@
 </file>
 
 <file path=ppt/slides/slide4.xml><?xml version="1.0" encoding="utf-8"?>
+<p:sld xmlns:a="http://schemas.openxmlformats.org/drawingml/2006/main" xmlns:r="http://schemas.openxmlformats.org/officeDocument/2006/relationships" xmlns:p="http://schemas.openxmlformats.org/presentationml/2006/main">
+  <p:cSld>
+    <p:spTree>
+      <p:nvGrpSpPr>
+        <p:cNvPr id="1" name="">
+          <a:extLst>
+            <a:ext uri="{FF2B5EF4-FFF2-40B4-BE49-F238E27FC236}">
+              <a16:creationId xmlns:a16="http://schemas.microsoft.com/office/drawing/2014/main" id="{ECA75F3D-C067-F07F-01E1-A2C97B7E300A}"/>
+            </a:ext>
+          </a:extLst>
+        </p:cNvPr>
+        <p:cNvGrpSpPr/>
+        <p:nvPr/>
+      </p:nvGrpSpPr>
+      <p:grpSpPr>
+        <a:xfrm>
+          <a:off x="0" y="0"/>
+          <a:ext cx="0" cy="0"/>
+          <a:chOff x="0" y="0"/>
+          <a:chExt cx="0" cy="0"/>
+        </a:xfrm>
+      </p:grpSpPr>
+      <p:pic>
+        <p:nvPicPr>
+          <p:cNvPr id="4" name="Content Placeholder 3">
+            <a:extLst>
+              <a:ext uri="{FF2B5EF4-FFF2-40B4-BE49-F238E27FC236}">
+                <a16:creationId xmlns:a16="http://schemas.microsoft.com/office/drawing/2014/main" id="{CE63BCCF-9627-37EA-70AE-96BC7FA375BF}"/>
+              </a:ext>
+            </a:extLst>
+          </p:cNvPr>
+          <p:cNvPicPr>
+            <a:picLocks noGrp="1" noChangeAspect="1"/>
+          </p:cNvPicPr>
+          <p:nvPr>
+            <p:ph idx="1"/>
+          </p:nvPr>
+        </p:nvPicPr>
+        <p:blipFill>
+          <a:blip r:link="rId2"/>
+          <a:srcRect/>
+          <a:stretch>
+            <a:fillRect/>
+          </a:stretch>
+        </p:blipFill>
+        <p:spPr>
+          <a:xfrm>
+            <a:off x="439948" y="-422692"/>
+            <a:ext cx="7556740" cy="7556740"/>
+          </a:xfrm>
+        </p:spPr>
+      </p:pic>
+      <p:sp>
+        <p:nvSpPr>
+          <p:cNvPr id="2" name="TextBox 1">
+            <a:extLst>
+              <a:ext uri="{FF2B5EF4-FFF2-40B4-BE49-F238E27FC236}">
+                <a16:creationId xmlns:a16="http://schemas.microsoft.com/office/drawing/2014/main" id="{63F2C111-F291-2C52-453C-26534E9C5350}"/>
+              </a:ext>
+            </a:extLst>
+          </p:cNvPr>
+          <p:cNvSpPr txBox="1"/>
+          <p:nvPr/>
+        </p:nvSpPr>
+        <p:spPr>
+          <a:xfrm>
+            <a:off x="8672601" y="278296"/>
+            <a:ext cx="2300199" cy="923330"/>
+          </a:xfrm>
+          <a:prstGeom prst="rect">
+            <a:avLst/>
+          </a:prstGeom>
+          <a:noFill/>
+        </p:spPr>
+        <p:txBody>
+          <a:bodyPr wrap="square" rtlCol="0">
+            <a:spAutoFit/>
+          </a:bodyPr>
+          <a:lstStyle/>
+          <a:p>
+            <a:r>
+              <a:rPr lang="en-US" dirty="0">
+                <a:solidFill>
+                  <a:schemeClr val="bg1"/>
+                </a:solidFill>
+              </a:rPr>
+              <a:t>An event at </a:t>
+            </a:r>
+          </a:p>
+          <a:p>
+            <a:r>
+              <a:rPr lang="en-US" dirty="0">
+                <a:solidFill>
+                  <a:schemeClr val="bg1"/>
+                </a:solidFill>
+              </a:rPr>
+              <a:t>z 	= 1</a:t>
+            </a:r>
+          </a:p>
+          <a:p>
+            <a:r>
+              <a:rPr lang="en-US" dirty="0" err="1">
+                <a:solidFill>
+                  <a:schemeClr val="bg1"/>
+                </a:solidFill>
+              </a:rPr>
+              <a:t>ct</a:t>
+            </a:r>
+            <a:r>
+              <a:rPr lang="en-US" dirty="0">
+                <a:solidFill>
+                  <a:schemeClr val="bg1"/>
+                </a:solidFill>
+              </a:rPr>
+              <a:t>	= 1</a:t>
+            </a:r>
+            <a:endParaRPr lang="en-CH" dirty="0">
+              <a:solidFill>
+                <a:schemeClr val="bg1"/>
+              </a:solidFill>
+            </a:endParaRPr>
+          </a:p>
+        </p:txBody>
+      </p:sp>
+    </p:spTree>
+    <p:extLst>
+      <p:ext uri="{BB962C8B-B14F-4D97-AF65-F5344CB8AC3E}">
+        <p14:creationId xmlns:p14="http://schemas.microsoft.com/office/powerpoint/2010/main" val="1341759755"/>
+      </p:ext>
+    </p:extLst>
+  </p:cSld>
+  <p:clrMapOvr>
+    <a:masterClrMapping/>
+  </p:clrMapOvr>
+</p:sld>
+</file>
+
+<file path=ppt/slides/slide5.xml><?xml version="1.0" encoding="utf-8"?>
+<p:sld xmlns:a="http://schemas.openxmlformats.org/drawingml/2006/main" xmlns:r="http://schemas.openxmlformats.org/officeDocument/2006/relationships" xmlns:p="http://schemas.openxmlformats.org/presentationml/2006/main">
+  <p:cSld>
+    <p:spTree>
+      <p:nvGrpSpPr>
+        <p:cNvPr id="1" name="">
+          <a:extLst>
+            <a:ext uri="{FF2B5EF4-FFF2-40B4-BE49-F238E27FC236}">
+              <a16:creationId xmlns:a16="http://schemas.microsoft.com/office/drawing/2014/main" id="{4E3A5333-7ECB-56F6-0F76-15F8C3987DA9}"/>
+            </a:ext>
+          </a:extLst>
+        </p:cNvPr>
+        <p:cNvGrpSpPr/>
+        <p:nvPr/>
+      </p:nvGrpSpPr>
+      <p:grpSpPr>
+        <a:xfrm>
+          <a:off x="0" y="0"/>
+          <a:ext cx="0" cy="0"/>
+          <a:chOff x="0" y="0"/>
+          <a:chExt cx="0" cy="0"/>
+        </a:xfrm>
+      </p:grpSpPr>
+      <p:pic>
+        <p:nvPicPr>
+          <p:cNvPr id="4" name="Content Placeholder 3">
+            <a:extLst>
+              <a:ext uri="{FF2B5EF4-FFF2-40B4-BE49-F238E27FC236}">
+                <a16:creationId xmlns:a16="http://schemas.microsoft.com/office/drawing/2014/main" id="{A9174196-8C4F-894C-F057-BA428C8722D0}"/>
+              </a:ext>
+            </a:extLst>
+          </p:cNvPr>
+          <p:cNvPicPr>
+            <a:picLocks noGrp="1" noChangeAspect="1"/>
+          </p:cNvPicPr>
+          <p:nvPr>
+            <p:ph idx="1"/>
+          </p:nvPr>
+        </p:nvPicPr>
+        <p:blipFill>
+          <a:blip r:link="rId2"/>
+          <a:srcRect/>
+          <a:stretch>
+            <a:fillRect/>
+          </a:stretch>
+        </p:blipFill>
+        <p:spPr>
+          <a:xfrm>
+            <a:off x="439948" y="-422692"/>
+            <a:ext cx="7556740" cy="7556740"/>
+          </a:xfrm>
+        </p:spPr>
+      </p:pic>
+    </p:spTree>
+    <p:extLst>
+      <p:ext uri="{BB962C8B-B14F-4D97-AF65-F5344CB8AC3E}">
+        <p14:creationId xmlns:p14="http://schemas.microsoft.com/office/powerpoint/2010/main" val="2469453100"/>
+      </p:ext>
+    </p:extLst>
+  </p:cSld>
+  <p:clrMapOvr>
+    <a:masterClrMapping/>
+  </p:clrMapOvr>
+</p:sld>
+</file>
+
+<file path=ppt/slides/slide6.xml><?xml version="1.0" encoding="utf-8"?>
+<p:sld xmlns:a="http://schemas.openxmlformats.org/drawingml/2006/main" xmlns:r="http://schemas.openxmlformats.org/officeDocument/2006/relationships" xmlns:p="http://schemas.openxmlformats.org/presentationml/2006/main">
+  <p:cSld>
+    <p:spTree>
+      <p:nvGrpSpPr>
+        <p:cNvPr id="1" name="">
+          <a:extLst>
+            <a:ext uri="{FF2B5EF4-FFF2-40B4-BE49-F238E27FC236}">
+              <a16:creationId xmlns:a16="http://schemas.microsoft.com/office/drawing/2014/main" id="{5E170449-BA57-C04C-4200-A8CF8F3A7E78}"/>
+            </a:ext>
+          </a:extLst>
+        </p:cNvPr>
+        <p:cNvGrpSpPr/>
+        <p:nvPr/>
+      </p:nvGrpSpPr>
+      <p:grpSpPr>
+        <a:xfrm>
+          <a:off x="0" y="0"/>
+          <a:ext cx="0" cy="0"/>
+          <a:chOff x="0" y="0"/>
+          <a:chExt cx="0" cy="0"/>
+        </a:xfrm>
+      </p:grpSpPr>
+      <p:pic>
+        <p:nvPicPr>
+          <p:cNvPr id="4" name="Content Placeholder 3">
+            <a:extLst>
+              <a:ext uri="{FF2B5EF4-FFF2-40B4-BE49-F238E27FC236}">
+                <a16:creationId xmlns:a16="http://schemas.microsoft.com/office/drawing/2014/main" id="{01F24675-C23C-43FC-E722-FDAEAC09ADE2}"/>
+              </a:ext>
+            </a:extLst>
+          </p:cNvPr>
+          <p:cNvPicPr>
+            <a:picLocks noGrp="1" noChangeAspect="1"/>
+          </p:cNvPicPr>
+          <p:nvPr>
+            <p:ph idx="1"/>
+          </p:nvPr>
+        </p:nvPicPr>
+        <p:blipFill>
+          <a:blip r:link="rId2"/>
+          <a:srcRect/>
+          <a:stretch>
+            <a:fillRect/>
+          </a:stretch>
+        </p:blipFill>
+        <p:spPr>
+          <a:xfrm>
+            <a:off x="439948" y="-422692"/>
+            <a:ext cx="7556740" cy="7556740"/>
+          </a:xfrm>
+        </p:spPr>
+      </p:pic>
+    </p:spTree>
+    <p:extLst>
+      <p:ext uri="{BB962C8B-B14F-4D97-AF65-F5344CB8AC3E}">
+        <p14:creationId xmlns:p14="http://schemas.microsoft.com/office/powerpoint/2010/main" val="1932363575"/>
+      </p:ext>
+    </p:extLst>
+  </p:cSld>
+  <p:clrMapOvr>
+    <a:masterClrMapping/>
+  </p:clrMapOvr>
+</p:sld>
+</file>
+
+<file path=ppt/slides/slide7.xml><?xml version="1.0" encoding="utf-8"?>
 <p:sld xmlns:a="http://schemas.openxmlformats.org/drawingml/2006/main" xmlns:r="http://schemas.openxmlformats.org/officeDocument/2006/relationships" xmlns:p="http://schemas.openxmlformats.org/presentationml/2006/main">
   <p:cSld>
     <p:spTree>
@@ -6951,13 +7220,8 @@
           </p:nvPr>
         </p:nvPicPr>
         <p:blipFill>
-          <a:blip r:embed="rId2">
-            <a:extLst>
-              <a:ext uri="{96DAC541-7B7A-43D3-8B79-37D633B846F1}">
-                <asvg:svgBlip xmlns:asvg="http://schemas.microsoft.com/office/drawing/2016/SVG/main" r:link="rId3"/>
-              </a:ext>
-            </a:extLst>
-          </a:blip>
+          <a:blip r:link="rId2"/>
+          <a:srcRect/>
           <a:stretch>
             <a:fillRect/>
           </a:stretch>

--- a/slides/minkowski.pptx
+++ b/slides/minkowski.pptx
@@ -6,7 +6,7 @@
     <p:sldMasterId id="2147483798" r:id="rId2"/>
   </p:sldMasterIdLst>
   <p:notesMasterIdLst>
-    <p:notesMasterId r:id="rId10"/>
+    <p:notesMasterId r:id="rId13"/>
   </p:notesMasterIdLst>
   <p:sldIdLst>
     <p:sldId id="256" r:id="rId3"/>
@@ -15,7 +15,10 @@
     <p:sldId id="260" r:id="rId6"/>
     <p:sldId id="261" r:id="rId7"/>
     <p:sldId id="262" r:id="rId8"/>
-    <p:sldId id="259" r:id="rId9"/>
+    <p:sldId id="263" r:id="rId9"/>
+    <p:sldId id="264" r:id="rId10"/>
+    <p:sldId id="265" r:id="rId11"/>
+    <p:sldId id="259" r:id="rId12"/>
   </p:sldIdLst>
   <p:sldSz cx="12192000" cy="6858000"/>
   <p:notesSz cx="6858000" cy="9144000"/>
@@ -5937,6 +5940,72 @@
     <p:extLst>
       <p:ext uri="{BB962C8B-B14F-4D97-AF65-F5344CB8AC3E}">
         <p14:creationId xmlns:p14="http://schemas.microsoft.com/office/powerpoint/2010/main" val="1013428175"/>
+      </p:ext>
+    </p:extLst>
+  </p:cSld>
+  <p:clrMapOvr>
+    <a:masterClrMapping/>
+  </p:clrMapOvr>
+</p:sld>
+</file>
+
+<file path=ppt/slides/slide10.xml><?xml version="1.0" encoding="utf-8"?>
+<p:sld xmlns:a="http://schemas.openxmlformats.org/drawingml/2006/main" xmlns:r="http://schemas.openxmlformats.org/officeDocument/2006/relationships" xmlns:p="http://schemas.openxmlformats.org/presentationml/2006/main">
+  <p:cSld>
+    <p:spTree>
+      <p:nvGrpSpPr>
+        <p:cNvPr id="1" name="">
+          <a:extLst>
+            <a:ext uri="{FF2B5EF4-FFF2-40B4-BE49-F238E27FC236}">
+              <a16:creationId xmlns:a16="http://schemas.microsoft.com/office/drawing/2014/main" id="{78433A00-2C99-2075-FCE1-683B869DA7A7}"/>
+            </a:ext>
+          </a:extLst>
+        </p:cNvPr>
+        <p:cNvGrpSpPr/>
+        <p:nvPr/>
+      </p:nvGrpSpPr>
+      <p:grpSpPr>
+        <a:xfrm>
+          <a:off x="0" y="0"/>
+          <a:ext cx="0" cy="0"/>
+          <a:chOff x="0" y="0"/>
+          <a:chExt cx="0" cy="0"/>
+        </a:xfrm>
+      </p:grpSpPr>
+      <p:pic>
+        <p:nvPicPr>
+          <p:cNvPr id="4" name="Content Placeholder 3">
+            <a:extLst>
+              <a:ext uri="{FF2B5EF4-FFF2-40B4-BE49-F238E27FC236}">
+                <a16:creationId xmlns:a16="http://schemas.microsoft.com/office/drawing/2014/main" id="{54F5FABB-B0FA-DCB2-041A-419C82B20932}"/>
+              </a:ext>
+            </a:extLst>
+          </p:cNvPr>
+          <p:cNvPicPr>
+            <a:picLocks noGrp="1" noChangeAspect="1"/>
+          </p:cNvPicPr>
+          <p:nvPr>
+            <p:ph idx="1"/>
+          </p:nvPr>
+        </p:nvPicPr>
+        <p:blipFill>
+          <a:blip r:link="rId2"/>
+          <a:srcRect/>
+          <a:stretch>
+            <a:fillRect/>
+          </a:stretch>
+        </p:blipFill>
+        <p:spPr>
+          <a:xfrm>
+            <a:off x="439948" y="-422692"/>
+            <a:ext cx="7556740" cy="7556740"/>
+          </a:xfrm>
+        </p:spPr>
+      </p:pic>
+    </p:spTree>
+    <p:extLst>
+      <p:ext uri="{BB962C8B-B14F-4D97-AF65-F5344CB8AC3E}">
+        <p14:creationId xmlns:p14="http://schemas.microsoft.com/office/powerpoint/2010/main" val="4206889277"/>
       </p:ext>
     </p:extLst>
   </p:cSld>
@@ -6780,7 +6849,7 @@
               <a:rPr lang="en-CA" smtClean="0"/>
               <a:t>Friday, March 21, 2025</a:t>
             </a:fld>
-            <a:endParaRPr lang="de-DE"/>
+            <a:endParaRPr lang="de-DE" dirty="0"/>
           </a:p>
         </p:txBody>
       </p:sp>
@@ -6833,7 +6902,10 @@
           <a:bodyPr/>
           <a:lstStyle/>
           <a:p>
-            <a:endParaRPr lang="de-DE" dirty="0"/>
+            <a:r>
+              <a:rPr lang="de-DE" dirty="0"/>
+              <a:t>Einführung</a:t>
+            </a:r>
           </a:p>
         </p:txBody>
       </p:sp>
@@ -6977,8 +7049,8 @@
         </p:nvSpPr>
         <p:spPr>
           <a:xfrm>
-            <a:off x="8672601" y="278296"/>
-            <a:ext cx="2300199" cy="923330"/>
+            <a:off x="8547652" y="153348"/>
+            <a:ext cx="3475855" cy="923330"/>
           </a:xfrm>
           <a:prstGeom prst="rect">
             <a:avLst/>
@@ -6997,8 +7069,53 @@
                   <a:schemeClr val="bg1"/>
                 </a:solidFill>
               </a:rPr>
-              <a:t>An event at </a:t>
-            </a:r>
+              <a:t>Ein </a:t>
+            </a:r>
+            <a:r>
+              <a:rPr lang="en-US" dirty="0" err="1">
+                <a:solidFill>
+                  <a:schemeClr val="bg1"/>
+                </a:solidFill>
+              </a:rPr>
+              <a:t>Ereignis</a:t>
+            </a:r>
+            <a:r>
+              <a:rPr lang="en-US" dirty="0">
+                <a:solidFill>
+                  <a:schemeClr val="bg1"/>
+                </a:solidFill>
+              </a:rPr>
+              <a:t> </a:t>
+            </a:r>
+            <a:r>
+              <a:rPr lang="en-US" dirty="0" err="1">
+                <a:solidFill>
+                  <a:schemeClr val="bg1"/>
+                </a:solidFill>
+              </a:rPr>
+              <a:t>mit</a:t>
+            </a:r>
+            <a:r>
+              <a:rPr lang="en-US" dirty="0">
+                <a:solidFill>
+                  <a:schemeClr val="bg1"/>
+                </a:solidFill>
+              </a:rPr>
+              <a:t> Ort und </a:t>
+            </a:r>
+            <a:r>
+              <a:rPr lang="en-US" dirty="0" err="1">
+                <a:solidFill>
+                  <a:schemeClr val="bg1"/>
+                </a:solidFill>
+              </a:rPr>
+              <a:t>Zeitpunkt</a:t>
+            </a:r>
+            <a:endParaRPr lang="en-US" dirty="0">
+              <a:solidFill>
+                <a:schemeClr val="bg1"/>
+              </a:solidFill>
+            </a:endParaRPr>
           </a:p>
           <a:p>
             <a:r>
@@ -7025,7 +7142,7 @@
                   <a:schemeClr val="bg1"/>
                 </a:solidFill>
               </a:rPr>
-              <a:t>	= 1</a:t>
+              <a:t>	= 2</a:t>
             </a:r>
             <a:endParaRPr lang="en-CH" dirty="0">
               <a:solidFill>
@@ -7101,6 +7218,236 @@
           </a:xfrm>
         </p:spPr>
       </p:pic>
+      <p:sp>
+        <p:nvSpPr>
+          <p:cNvPr id="3" name="TextBox 2">
+            <a:extLst>
+              <a:ext uri="{FF2B5EF4-FFF2-40B4-BE49-F238E27FC236}">
+                <a16:creationId xmlns:a16="http://schemas.microsoft.com/office/drawing/2014/main" id="{CDD10BD1-7356-F130-A708-E691778DE73F}"/>
+              </a:ext>
+            </a:extLst>
+          </p:cNvPr>
+          <p:cNvSpPr txBox="1"/>
+          <p:nvPr/>
+        </p:nvSpPr>
+        <p:spPr>
+          <a:xfrm>
+            <a:off x="8547652" y="153348"/>
+            <a:ext cx="3475855" cy="1754326"/>
+          </a:xfrm>
+          <a:prstGeom prst="rect">
+            <a:avLst/>
+          </a:prstGeom>
+          <a:noFill/>
+        </p:spPr>
+        <p:txBody>
+          <a:bodyPr wrap="square" rtlCol="0">
+            <a:spAutoFit/>
+          </a:bodyPr>
+          <a:lstStyle/>
+          <a:p>
+            <a:r>
+              <a:rPr lang="en-US" dirty="0">
+                <a:solidFill>
+                  <a:schemeClr val="bg1"/>
+                </a:solidFill>
+              </a:rPr>
+              <a:t>Ein </a:t>
+            </a:r>
+            <a:r>
+              <a:rPr lang="en-US" dirty="0" err="1">
+                <a:solidFill>
+                  <a:schemeClr val="bg1"/>
+                </a:solidFill>
+              </a:rPr>
+              <a:t>Ereignis</a:t>
+            </a:r>
+            <a:r>
+              <a:rPr lang="en-US" dirty="0">
+                <a:solidFill>
+                  <a:schemeClr val="bg1"/>
+                </a:solidFill>
+              </a:rPr>
+              <a:t> </a:t>
+            </a:r>
+            <a:r>
+              <a:rPr lang="en-US" dirty="0" err="1">
+                <a:solidFill>
+                  <a:schemeClr val="bg1"/>
+                </a:solidFill>
+              </a:rPr>
+              <a:t>mit</a:t>
+            </a:r>
+            <a:r>
+              <a:rPr lang="en-US" dirty="0">
+                <a:solidFill>
+                  <a:schemeClr val="bg1"/>
+                </a:solidFill>
+              </a:rPr>
+              <a:t> Ort und </a:t>
+            </a:r>
+            <a:r>
+              <a:rPr lang="en-US" dirty="0" err="1">
+                <a:solidFill>
+                  <a:schemeClr val="bg1"/>
+                </a:solidFill>
+              </a:rPr>
+              <a:t>Zeitpunkt</a:t>
+            </a:r>
+            <a:endParaRPr lang="en-US" dirty="0">
+              <a:solidFill>
+                <a:schemeClr val="bg1"/>
+              </a:solidFill>
+            </a:endParaRPr>
+          </a:p>
+          <a:p>
+            <a:r>
+              <a:rPr lang="en-US" dirty="0">
+                <a:solidFill>
+                  <a:schemeClr val="bg1"/>
+                </a:solidFill>
+              </a:rPr>
+              <a:t>z 	= 1</a:t>
+            </a:r>
+          </a:p>
+          <a:p>
+            <a:r>
+              <a:rPr lang="en-US" dirty="0" err="1">
+                <a:solidFill>
+                  <a:schemeClr val="bg1"/>
+                </a:solidFill>
+              </a:rPr>
+              <a:t>ct</a:t>
+            </a:r>
+            <a:r>
+              <a:rPr lang="en-US" dirty="0">
+                <a:solidFill>
+                  <a:schemeClr val="bg1"/>
+                </a:solidFill>
+              </a:rPr>
+              <a:t>	= 2</a:t>
+            </a:r>
+          </a:p>
+          <a:p>
+            <a:endParaRPr lang="en-US" dirty="0">
+              <a:solidFill>
+                <a:schemeClr val="bg1"/>
+              </a:solidFill>
+            </a:endParaRPr>
+          </a:p>
+          <a:p>
+            <a:r>
+              <a:rPr lang="en-US" dirty="0" err="1">
+                <a:solidFill>
+                  <a:schemeClr val="bg1"/>
+                </a:solidFill>
+              </a:rPr>
+              <a:t>Verbindung</a:t>
+            </a:r>
+            <a:r>
+              <a:rPr lang="en-US" dirty="0">
+                <a:solidFill>
+                  <a:schemeClr val="bg1"/>
+                </a:solidFill>
+              </a:rPr>
+              <a:t> </a:t>
+            </a:r>
+            <a:r>
+              <a:rPr lang="en-US" dirty="0" err="1">
+                <a:solidFill>
+                  <a:schemeClr val="bg1"/>
+                </a:solidFill>
+              </a:rPr>
+              <a:t>zu</a:t>
+            </a:r>
+            <a:r>
+              <a:rPr lang="en-US" dirty="0">
+                <a:solidFill>
+                  <a:schemeClr val="bg1"/>
+                </a:solidFill>
+              </a:rPr>
+              <a:t> den </a:t>
+            </a:r>
+            <a:r>
+              <a:rPr lang="en-US" dirty="0" err="1">
+                <a:solidFill>
+                  <a:schemeClr val="bg1"/>
+                </a:solidFill>
+              </a:rPr>
+              <a:t>Koordinaten</a:t>
+            </a:r>
+            <a:r>
+              <a:rPr lang="en-US" dirty="0">
+                <a:solidFill>
+                  <a:schemeClr val="bg1"/>
+                </a:solidFill>
+              </a:rPr>
+              <a:t>- </a:t>
+            </a:r>
+            <a:r>
+              <a:rPr lang="en-US" dirty="0" err="1">
+                <a:solidFill>
+                  <a:schemeClr val="bg1"/>
+                </a:solidFill>
+              </a:rPr>
+              <a:t>achsen</a:t>
+            </a:r>
+            <a:r>
+              <a:rPr lang="en-US" dirty="0">
+                <a:solidFill>
+                  <a:schemeClr val="bg1"/>
+                </a:solidFill>
+              </a:rPr>
+              <a:t> </a:t>
+            </a:r>
+            <a:r>
+              <a:rPr lang="en-US" dirty="0" err="1">
+                <a:solidFill>
+                  <a:schemeClr val="bg1"/>
+                </a:solidFill>
+              </a:rPr>
+              <a:t>zum</a:t>
+            </a:r>
+            <a:r>
+              <a:rPr lang="en-US" dirty="0">
+                <a:solidFill>
+                  <a:schemeClr val="bg1"/>
+                </a:solidFill>
+              </a:rPr>
+              <a:t> </a:t>
+            </a:r>
+            <a:r>
+              <a:rPr lang="en-US" dirty="0" err="1">
+                <a:solidFill>
+                  <a:schemeClr val="bg1"/>
+                </a:solidFill>
+              </a:rPr>
+              <a:t>Ablesen</a:t>
+            </a:r>
+            <a:r>
+              <a:rPr lang="en-US" dirty="0">
+                <a:solidFill>
+                  <a:schemeClr val="bg1"/>
+                </a:solidFill>
+              </a:rPr>
+              <a:t> der </a:t>
+            </a:r>
+            <a:r>
+              <a:rPr lang="en-US" dirty="0" err="1">
+                <a:solidFill>
+                  <a:schemeClr val="bg1"/>
+                </a:solidFill>
+              </a:rPr>
+              <a:t>Werte</a:t>
+            </a:r>
+            <a:endParaRPr lang="en-CH" dirty="0">
+              <a:solidFill>
+                <a:schemeClr val="bg1"/>
+              </a:solidFill>
+            </a:endParaRPr>
+          </a:p>
+        </p:txBody>
+      </p:sp>
     </p:spTree>
     <p:extLst>
       <p:ext uri="{BB962C8B-B14F-4D97-AF65-F5344CB8AC3E}">
@@ -7167,6 +7514,415 @@
           </a:xfrm>
         </p:spPr>
       </p:pic>
+      <p:sp>
+        <p:nvSpPr>
+          <p:cNvPr id="3" name="TextBox 2">
+            <a:extLst>
+              <a:ext uri="{FF2B5EF4-FFF2-40B4-BE49-F238E27FC236}">
+                <a16:creationId xmlns:a16="http://schemas.microsoft.com/office/drawing/2014/main" id="{538B05DF-B9E2-7032-6C64-AF015E305838}"/>
+              </a:ext>
+            </a:extLst>
+          </p:cNvPr>
+          <p:cNvSpPr txBox="1"/>
+          <p:nvPr/>
+        </p:nvSpPr>
+        <p:spPr>
+          <a:xfrm>
+            <a:off x="8547652" y="153348"/>
+            <a:ext cx="3475855" cy="923330"/>
+          </a:xfrm>
+          <a:prstGeom prst="rect">
+            <a:avLst/>
+          </a:prstGeom>
+          <a:noFill/>
+        </p:spPr>
+        <p:txBody>
+          <a:bodyPr wrap="square" rtlCol="0">
+            <a:spAutoFit/>
+          </a:bodyPr>
+          <a:lstStyle/>
+          <a:p>
+            <a:r>
+              <a:rPr lang="en-US" dirty="0">
+                <a:solidFill>
+                  <a:schemeClr val="bg1"/>
+                </a:solidFill>
+              </a:rPr>
+              <a:t>Ein </a:t>
+            </a:r>
+            <a:r>
+              <a:rPr lang="en-US" dirty="0" err="1">
+                <a:solidFill>
+                  <a:schemeClr val="bg1"/>
+                </a:solidFill>
+              </a:rPr>
+              <a:t>Ereignis</a:t>
+            </a:r>
+            <a:r>
+              <a:rPr lang="en-US" dirty="0">
+                <a:solidFill>
+                  <a:schemeClr val="bg1"/>
+                </a:solidFill>
+              </a:rPr>
+              <a:t> </a:t>
+            </a:r>
+            <a:r>
+              <a:rPr lang="en-US" dirty="0" err="1">
+                <a:solidFill>
+                  <a:schemeClr val="bg1"/>
+                </a:solidFill>
+              </a:rPr>
+              <a:t>mit</a:t>
+            </a:r>
+            <a:r>
+              <a:rPr lang="en-US" dirty="0">
+                <a:solidFill>
+                  <a:schemeClr val="bg1"/>
+                </a:solidFill>
+              </a:rPr>
+              <a:t> Ort und </a:t>
+            </a:r>
+            <a:r>
+              <a:rPr lang="en-US" dirty="0" err="1">
+                <a:solidFill>
+                  <a:schemeClr val="bg1"/>
+                </a:solidFill>
+              </a:rPr>
+              <a:t>Zeitpunkt</a:t>
+            </a:r>
+            <a:endParaRPr lang="en-US" dirty="0">
+              <a:solidFill>
+                <a:schemeClr val="bg1"/>
+              </a:solidFill>
+            </a:endParaRPr>
+          </a:p>
+          <a:p>
+            <a:r>
+              <a:rPr lang="en-US" dirty="0">
+                <a:solidFill>
+                  <a:schemeClr val="bg1"/>
+                </a:solidFill>
+              </a:rPr>
+              <a:t>z 	= 1</a:t>
+            </a:r>
+          </a:p>
+          <a:p>
+            <a:r>
+              <a:rPr lang="en-US" dirty="0" err="1">
+                <a:solidFill>
+                  <a:schemeClr val="bg1"/>
+                </a:solidFill>
+              </a:rPr>
+              <a:t>ct</a:t>
+            </a:r>
+            <a:r>
+              <a:rPr lang="en-US" dirty="0">
+                <a:solidFill>
+                  <a:schemeClr val="bg1"/>
+                </a:solidFill>
+              </a:rPr>
+              <a:t>	= 2</a:t>
+            </a:r>
+            <a:endParaRPr lang="en-CH" dirty="0">
+              <a:solidFill>
+                <a:schemeClr val="bg1"/>
+              </a:solidFill>
+            </a:endParaRPr>
+          </a:p>
+        </p:txBody>
+      </p:sp>
+      <p:sp>
+        <p:nvSpPr>
+          <p:cNvPr id="5" name="TextBox 4">
+            <a:extLst>
+              <a:ext uri="{FF2B5EF4-FFF2-40B4-BE49-F238E27FC236}">
+                <a16:creationId xmlns:a16="http://schemas.microsoft.com/office/drawing/2014/main" id="{2E0203C9-3BCB-351B-5F39-37B652961F47}"/>
+              </a:ext>
+            </a:extLst>
+          </p:cNvPr>
+          <p:cNvSpPr txBox="1"/>
+          <p:nvPr/>
+        </p:nvSpPr>
+        <p:spPr>
+          <a:xfrm>
+            <a:off x="8547652" y="153348"/>
+            <a:ext cx="3475855" cy="2585323"/>
+          </a:xfrm>
+          <a:prstGeom prst="rect">
+            <a:avLst/>
+          </a:prstGeom>
+          <a:noFill/>
+        </p:spPr>
+        <p:txBody>
+          <a:bodyPr wrap="square" rtlCol="0">
+            <a:spAutoFit/>
+          </a:bodyPr>
+          <a:lstStyle/>
+          <a:p>
+            <a:r>
+              <a:rPr lang="en-US" dirty="0">
+                <a:solidFill>
+                  <a:schemeClr val="bg1"/>
+                </a:solidFill>
+              </a:rPr>
+              <a:t>Ein </a:t>
+            </a:r>
+            <a:r>
+              <a:rPr lang="en-US" dirty="0" err="1">
+                <a:solidFill>
+                  <a:schemeClr val="bg1"/>
+                </a:solidFill>
+              </a:rPr>
+              <a:t>Ereignis</a:t>
+            </a:r>
+            <a:r>
+              <a:rPr lang="en-US" dirty="0">
+                <a:solidFill>
+                  <a:schemeClr val="bg1"/>
+                </a:solidFill>
+              </a:rPr>
+              <a:t> </a:t>
+            </a:r>
+            <a:r>
+              <a:rPr lang="en-US" dirty="0" err="1">
+                <a:solidFill>
+                  <a:schemeClr val="bg1"/>
+                </a:solidFill>
+              </a:rPr>
+              <a:t>mit</a:t>
+            </a:r>
+            <a:r>
+              <a:rPr lang="en-US" dirty="0">
+                <a:solidFill>
+                  <a:schemeClr val="bg1"/>
+                </a:solidFill>
+              </a:rPr>
+              <a:t> Ort und </a:t>
+            </a:r>
+            <a:r>
+              <a:rPr lang="en-US" dirty="0" err="1">
+                <a:solidFill>
+                  <a:schemeClr val="bg1"/>
+                </a:solidFill>
+              </a:rPr>
+              <a:t>Zeitpunkt</a:t>
+            </a:r>
+            <a:endParaRPr lang="en-US" dirty="0">
+              <a:solidFill>
+                <a:schemeClr val="bg1"/>
+              </a:solidFill>
+            </a:endParaRPr>
+          </a:p>
+          <a:p>
+            <a:r>
+              <a:rPr lang="en-US" dirty="0">
+                <a:solidFill>
+                  <a:schemeClr val="bg1"/>
+                </a:solidFill>
+              </a:rPr>
+              <a:t>z 	= 1</a:t>
+            </a:r>
+          </a:p>
+          <a:p>
+            <a:r>
+              <a:rPr lang="en-US" dirty="0" err="1">
+                <a:solidFill>
+                  <a:schemeClr val="bg1"/>
+                </a:solidFill>
+              </a:rPr>
+              <a:t>ct</a:t>
+            </a:r>
+            <a:r>
+              <a:rPr lang="en-US" dirty="0">
+                <a:solidFill>
+                  <a:schemeClr val="bg1"/>
+                </a:solidFill>
+              </a:rPr>
+              <a:t>	= 2</a:t>
+            </a:r>
+          </a:p>
+          <a:p>
+            <a:endParaRPr lang="en-US" dirty="0">
+              <a:solidFill>
+                <a:schemeClr val="bg1"/>
+              </a:solidFill>
+            </a:endParaRPr>
+          </a:p>
+          <a:p>
+            <a:r>
+              <a:rPr lang="en-US" dirty="0" err="1">
+                <a:solidFill>
+                  <a:schemeClr val="bg1"/>
+                </a:solidFill>
+              </a:rPr>
+              <a:t>Verbindung</a:t>
+            </a:r>
+            <a:r>
+              <a:rPr lang="en-US" dirty="0">
+                <a:solidFill>
+                  <a:schemeClr val="bg1"/>
+                </a:solidFill>
+              </a:rPr>
+              <a:t> </a:t>
+            </a:r>
+            <a:r>
+              <a:rPr lang="en-US" dirty="0" err="1">
+                <a:solidFill>
+                  <a:schemeClr val="bg1"/>
+                </a:solidFill>
+              </a:rPr>
+              <a:t>zu</a:t>
+            </a:r>
+            <a:r>
+              <a:rPr lang="en-US" dirty="0">
+                <a:solidFill>
+                  <a:schemeClr val="bg1"/>
+                </a:solidFill>
+              </a:rPr>
+              <a:t> den </a:t>
+            </a:r>
+            <a:r>
+              <a:rPr lang="en-US" dirty="0" err="1">
+                <a:solidFill>
+                  <a:schemeClr val="bg1"/>
+                </a:solidFill>
+              </a:rPr>
+              <a:t>Koordinaten</a:t>
+            </a:r>
+            <a:r>
+              <a:rPr lang="en-US" dirty="0">
+                <a:solidFill>
+                  <a:schemeClr val="bg1"/>
+                </a:solidFill>
+              </a:rPr>
+              <a:t>- </a:t>
+            </a:r>
+            <a:r>
+              <a:rPr lang="en-US" dirty="0" err="1">
+                <a:solidFill>
+                  <a:schemeClr val="bg1"/>
+                </a:solidFill>
+              </a:rPr>
+              <a:t>achsen</a:t>
+            </a:r>
+            <a:r>
+              <a:rPr lang="en-US" dirty="0">
+                <a:solidFill>
+                  <a:schemeClr val="bg1"/>
+                </a:solidFill>
+              </a:rPr>
+              <a:t> </a:t>
+            </a:r>
+            <a:r>
+              <a:rPr lang="en-US" dirty="0" err="1">
+                <a:solidFill>
+                  <a:schemeClr val="bg1"/>
+                </a:solidFill>
+              </a:rPr>
+              <a:t>zum</a:t>
+            </a:r>
+            <a:r>
+              <a:rPr lang="en-US" dirty="0">
+                <a:solidFill>
+                  <a:schemeClr val="bg1"/>
+                </a:solidFill>
+              </a:rPr>
+              <a:t> </a:t>
+            </a:r>
+            <a:r>
+              <a:rPr lang="en-US" dirty="0" err="1">
+                <a:solidFill>
+                  <a:schemeClr val="bg1"/>
+                </a:solidFill>
+              </a:rPr>
+              <a:t>Ablesen</a:t>
+            </a:r>
+            <a:r>
+              <a:rPr lang="en-US" dirty="0">
+                <a:solidFill>
+                  <a:schemeClr val="bg1"/>
+                </a:solidFill>
+              </a:rPr>
+              <a:t> der </a:t>
+            </a:r>
+            <a:r>
+              <a:rPr lang="en-US" dirty="0" err="1">
+                <a:solidFill>
+                  <a:schemeClr val="bg1"/>
+                </a:solidFill>
+              </a:rPr>
+              <a:t>Werte</a:t>
+            </a:r>
+            <a:endParaRPr lang="en-US" dirty="0">
+              <a:solidFill>
+                <a:schemeClr val="bg1"/>
+              </a:solidFill>
+            </a:endParaRPr>
+          </a:p>
+          <a:p>
+            <a:endParaRPr lang="en-US" dirty="0">
+              <a:solidFill>
+                <a:schemeClr val="bg1"/>
+              </a:solidFill>
+            </a:endParaRPr>
+          </a:p>
+          <a:p>
+            <a:r>
+              <a:rPr lang="en-US" dirty="0" err="1">
+                <a:solidFill>
+                  <a:schemeClr val="bg1"/>
+                </a:solidFill>
+              </a:rPr>
+              <a:t>Messung</a:t>
+            </a:r>
+            <a:r>
+              <a:rPr lang="en-US" dirty="0">
+                <a:solidFill>
+                  <a:schemeClr val="bg1"/>
+                </a:solidFill>
+              </a:rPr>
+              <a:t> der </a:t>
+            </a:r>
+            <a:r>
+              <a:rPr lang="en-US" dirty="0" err="1">
+                <a:solidFill>
+                  <a:schemeClr val="bg1"/>
+                </a:solidFill>
+              </a:rPr>
+              <a:t>Entfernung</a:t>
+            </a:r>
+            <a:r>
+              <a:rPr lang="en-US" dirty="0">
+                <a:solidFill>
+                  <a:schemeClr val="bg1"/>
+                </a:solidFill>
+              </a:rPr>
+              <a:t> </a:t>
+            </a:r>
+            <a:r>
+              <a:rPr lang="en-US" dirty="0" err="1">
+                <a:solidFill>
+                  <a:schemeClr val="bg1"/>
+                </a:solidFill>
+              </a:rPr>
+              <a:t>zum</a:t>
+            </a:r>
+            <a:r>
+              <a:rPr lang="en-US" dirty="0">
+                <a:solidFill>
+                  <a:schemeClr val="bg1"/>
+                </a:solidFill>
+              </a:rPr>
+              <a:t> Ursprung</a:t>
+            </a:r>
+            <a:endParaRPr lang="en-CH" dirty="0">
+              <a:solidFill>
+                <a:schemeClr val="bg1"/>
+              </a:solidFill>
+            </a:endParaRPr>
+          </a:p>
+        </p:txBody>
+      </p:sp>
     </p:spTree>
     <p:extLst>
       <p:ext uri="{BB962C8B-B14F-4D97-AF65-F5344CB8AC3E}">
@@ -7188,7 +7944,7 @@
         <p:cNvPr id="1" name="">
           <a:extLst>
             <a:ext uri="{FF2B5EF4-FFF2-40B4-BE49-F238E27FC236}">
-              <a16:creationId xmlns:a16="http://schemas.microsoft.com/office/drawing/2014/main" id="{78433A00-2C99-2075-FCE1-683B869DA7A7}"/>
+              <a16:creationId xmlns:a16="http://schemas.microsoft.com/office/drawing/2014/main" id="{509DD356-1BF7-6339-338C-0A37424EF992}"/>
             </a:ext>
           </a:extLst>
         </p:cNvPr>
@@ -7208,7 +7964,7 @@
           <p:cNvPr id="4" name="Content Placeholder 3">
             <a:extLst>
               <a:ext uri="{FF2B5EF4-FFF2-40B4-BE49-F238E27FC236}">
-                <a16:creationId xmlns:a16="http://schemas.microsoft.com/office/drawing/2014/main" id="{54F5FABB-B0FA-DCB2-041A-419C82B20932}"/>
+                <a16:creationId xmlns:a16="http://schemas.microsoft.com/office/drawing/2014/main" id="{B5E22809-61F3-49DF-63AD-BA3E474190E9}"/>
               </a:ext>
             </a:extLst>
           </p:cNvPr>
@@ -7233,10 +7989,1470 @@
           </a:xfrm>
         </p:spPr>
       </p:pic>
+      <p:sp>
+        <p:nvSpPr>
+          <p:cNvPr id="3" name="TextBox 2">
+            <a:extLst>
+              <a:ext uri="{FF2B5EF4-FFF2-40B4-BE49-F238E27FC236}">
+                <a16:creationId xmlns:a16="http://schemas.microsoft.com/office/drawing/2014/main" id="{DA64A5E4-3E56-FFEF-4FEF-09E10D0C516D}"/>
+              </a:ext>
+            </a:extLst>
+          </p:cNvPr>
+          <p:cNvSpPr txBox="1"/>
+          <p:nvPr/>
+        </p:nvSpPr>
+        <p:spPr>
+          <a:xfrm>
+            <a:off x="8547652" y="153348"/>
+            <a:ext cx="3475855" cy="923330"/>
+          </a:xfrm>
+          <a:prstGeom prst="rect">
+            <a:avLst/>
+          </a:prstGeom>
+          <a:noFill/>
+        </p:spPr>
+        <p:txBody>
+          <a:bodyPr wrap="square" rtlCol="0">
+            <a:spAutoFit/>
+          </a:bodyPr>
+          <a:lstStyle/>
+          <a:p>
+            <a:r>
+              <a:rPr lang="en-US" dirty="0">
+                <a:solidFill>
+                  <a:schemeClr val="bg1"/>
+                </a:solidFill>
+              </a:rPr>
+              <a:t>Ein </a:t>
+            </a:r>
+            <a:r>
+              <a:rPr lang="en-US" dirty="0" err="1">
+                <a:solidFill>
+                  <a:schemeClr val="bg1"/>
+                </a:solidFill>
+              </a:rPr>
+              <a:t>Ereignis</a:t>
+            </a:r>
+            <a:r>
+              <a:rPr lang="en-US" dirty="0">
+                <a:solidFill>
+                  <a:schemeClr val="bg1"/>
+                </a:solidFill>
+              </a:rPr>
+              <a:t> </a:t>
+            </a:r>
+            <a:r>
+              <a:rPr lang="en-US" dirty="0" err="1">
+                <a:solidFill>
+                  <a:schemeClr val="bg1"/>
+                </a:solidFill>
+              </a:rPr>
+              <a:t>mit</a:t>
+            </a:r>
+            <a:r>
+              <a:rPr lang="en-US" dirty="0">
+                <a:solidFill>
+                  <a:schemeClr val="bg1"/>
+                </a:solidFill>
+              </a:rPr>
+              <a:t> Ort und </a:t>
+            </a:r>
+            <a:r>
+              <a:rPr lang="en-US" dirty="0" err="1">
+                <a:solidFill>
+                  <a:schemeClr val="bg1"/>
+                </a:solidFill>
+              </a:rPr>
+              <a:t>Zeitpunkt</a:t>
+            </a:r>
+            <a:endParaRPr lang="en-US" dirty="0">
+              <a:solidFill>
+                <a:schemeClr val="bg1"/>
+              </a:solidFill>
+            </a:endParaRPr>
+          </a:p>
+          <a:p>
+            <a:r>
+              <a:rPr lang="en-US" dirty="0">
+                <a:solidFill>
+                  <a:schemeClr val="bg1"/>
+                </a:solidFill>
+              </a:rPr>
+              <a:t>z 	= 1</a:t>
+            </a:r>
+          </a:p>
+          <a:p>
+            <a:r>
+              <a:rPr lang="en-US" dirty="0" err="1">
+                <a:solidFill>
+                  <a:schemeClr val="bg1"/>
+                </a:solidFill>
+              </a:rPr>
+              <a:t>ct</a:t>
+            </a:r>
+            <a:r>
+              <a:rPr lang="en-US" dirty="0">
+                <a:solidFill>
+                  <a:schemeClr val="bg1"/>
+                </a:solidFill>
+              </a:rPr>
+              <a:t>	= 2</a:t>
+            </a:r>
+            <a:endParaRPr lang="en-CH" dirty="0">
+              <a:solidFill>
+                <a:schemeClr val="bg1"/>
+              </a:solidFill>
+            </a:endParaRPr>
+          </a:p>
+        </p:txBody>
+      </p:sp>
+      <p:sp>
+        <p:nvSpPr>
+          <p:cNvPr id="5" name="TextBox 4">
+            <a:extLst>
+              <a:ext uri="{FF2B5EF4-FFF2-40B4-BE49-F238E27FC236}">
+                <a16:creationId xmlns:a16="http://schemas.microsoft.com/office/drawing/2014/main" id="{0DF893C6-E993-9B27-59F6-74AFEB9BA0FD}"/>
+              </a:ext>
+            </a:extLst>
+          </p:cNvPr>
+          <p:cNvSpPr txBox="1"/>
+          <p:nvPr/>
+        </p:nvSpPr>
+        <p:spPr>
+          <a:xfrm>
+            <a:off x="8547652" y="153348"/>
+            <a:ext cx="3475855" cy="2585323"/>
+          </a:xfrm>
+          <a:prstGeom prst="rect">
+            <a:avLst/>
+          </a:prstGeom>
+          <a:noFill/>
+        </p:spPr>
+        <p:txBody>
+          <a:bodyPr wrap="square" rtlCol="0">
+            <a:spAutoFit/>
+          </a:bodyPr>
+          <a:lstStyle/>
+          <a:p>
+            <a:r>
+              <a:rPr lang="en-US" dirty="0">
+                <a:solidFill>
+                  <a:schemeClr val="bg1"/>
+                </a:solidFill>
+              </a:rPr>
+              <a:t>Ein </a:t>
+            </a:r>
+            <a:r>
+              <a:rPr lang="en-US" dirty="0" err="1">
+                <a:solidFill>
+                  <a:schemeClr val="bg1"/>
+                </a:solidFill>
+              </a:rPr>
+              <a:t>Ereignis</a:t>
+            </a:r>
+            <a:r>
+              <a:rPr lang="en-US" dirty="0">
+                <a:solidFill>
+                  <a:schemeClr val="bg1"/>
+                </a:solidFill>
+              </a:rPr>
+              <a:t> </a:t>
+            </a:r>
+            <a:r>
+              <a:rPr lang="en-US" dirty="0" err="1">
+                <a:solidFill>
+                  <a:schemeClr val="bg1"/>
+                </a:solidFill>
+              </a:rPr>
+              <a:t>mit</a:t>
+            </a:r>
+            <a:r>
+              <a:rPr lang="en-US" dirty="0">
+                <a:solidFill>
+                  <a:schemeClr val="bg1"/>
+                </a:solidFill>
+              </a:rPr>
+              <a:t> Ort und </a:t>
+            </a:r>
+            <a:r>
+              <a:rPr lang="en-US" dirty="0" err="1">
+                <a:solidFill>
+                  <a:schemeClr val="bg1"/>
+                </a:solidFill>
+              </a:rPr>
+              <a:t>Zeitpunkt</a:t>
+            </a:r>
+            <a:r>
+              <a:rPr lang="en-US" dirty="0">
+                <a:solidFill>
+                  <a:schemeClr val="bg1"/>
+                </a:solidFill>
+              </a:rPr>
+              <a:t>:</a:t>
+            </a:r>
+          </a:p>
+          <a:p>
+            <a:r>
+              <a:rPr lang="en-US" dirty="0">
+                <a:solidFill>
+                  <a:schemeClr val="bg1"/>
+                </a:solidFill>
+              </a:rPr>
+              <a:t>z 	= 1</a:t>
+            </a:r>
+          </a:p>
+          <a:p>
+            <a:r>
+              <a:rPr lang="en-US" dirty="0" err="1">
+                <a:solidFill>
+                  <a:schemeClr val="bg1"/>
+                </a:solidFill>
+              </a:rPr>
+              <a:t>ct</a:t>
+            </a:r>
+            <a:r>
+              <a:rPr lang="en-US" dirty="0">
+                <a:solidFill>
+                  <a:schemeClr val="bg1"/>
+                </a:solidFill>
+              </a:rPr>
+              <a:t>	= 2</a:t>
+            </a:r>
+          </a:p>
+          <a:p>
+            <a:endParaRPr lang="en-US" dirty="0">
+              <a:solidFill>
+                <a:schemeClr val="bg1"/>
+              </a:solidFill>
+            </a:endParaRPr>
+          </a:p>
+          <a:p>
+            <a:r>
+              <a:rPr lang="en-US" dirty="0">
+                <a:solidFill>
+                  <a:schemeClr val="bg1"/>
+                </a:solidFill>
+              </a:rPr>
+              <a:t>Ein </a:t>
+            </a:r>
+            <a:r>
+              <a:rPr lang="en-US" dirty="0" err="1">
+                <a:solidFill>
+                  <a:schemeClr val="bg1"/>
+                </a:solidFill>
+              </a:rPr>
+              <a:t>zeites</a:t>
+            </a:r>
+            <a:r>
+              <a:rPr lang="en-US" dirty="0">
+                <a:solidFill>
+                  <a:schemeClr val="bg1"/>
+                </a:solidFill>
+              </a:rPr>
+              <a:t> </a:t>
+            </a:r>
+            <a:r>
+              <a:rPr lang="en-US" dirty="0" err="1">
+                <a:solidFill>
+                  <a:schemeClr val="bg1"/>
+                </a:solidFill>
+              </a:rPr>
+              <a:t>Ereignis</a:t>
+            </a:r>
+            <a:r>
+              <a:rPr lang="en-US" dirty="0">
+                <a:solidFill>
+                  <a:schemeClr val="bg1"/>
+                </a:solidFill>
+              </a:rPr>
+              <a:t> </a:t>
+            </a:r>
+            <a:r>
+              <a:rPr lang="en-US" dirty="0" err="1">
+                <a:solidFill>
+                  <a:schemeClr val="bg1"/>
+                </a:solidFill>
+              </a:rPr>
+              <a:t>mit</a:t>
+            </a:r>
+            <a:r>
+              <a:rPr lang="en-US" dirty="0">
+                <a:solidFill>
+                  <a:schemeClr val="bg1"/>
+                </a:solidFill>
+              </a:rPr>
+              <a:t> Ort und </a:t>
+            </a:r>
+            <a:r>
+              <a:rPr lang="en-US" dirty="0" err="1">
+                <a:solidFill>
+                  <a:schemeClr val="bg1"/>
+                </a:solidFill>
+              </a:rPr>
+              <a:t>Zeitpunkt</a:t>
+            </a:r>
+            <a:r>
+              <a:rPr lang="en-US" dirty="0">
+                <a:solidFill>
+                  <a:schemeClr val="bg1"/>
+                </a:solidFill>
+              </a:rPr>
+              <a:t>:</a:t>
+            </a:r>
+          </a:p>
+          <a:p>
+            <a:r>
+              <a:rPr lang="en-US" dirty="0">
+                <a:solidFill>
+                  <a:schemeClr val="bg1"/>
+                </a:solidFill>
+              </a:rPr>
+              <a:t>z 	= 3</a:t>
+            </a:r>
+          </a:p>
+          <a:p>
+            <a:r>
+              <a:rPr lang="en-US" dirty="0" err="1">
+                <a:solidFill>
+                  <a:schemeClr val="bg1"/>
+                </a:solidFill>
+              </a:rPr>
+              <a:t>ct</a:t>
+            </a:r>
+            <a:r>
+              <a:rPr lang="en-US" dirty="0">
+                <a:solidFill>
+                  <a:schemeClr val="bg1"/>
+                </a:solidFill>
+              </a:rPr>
+              <a:t>	= 1</a:t>
+            </a:r>
+          </a:p>
+          <a:p>
+            <a:endParaRPr lang="en-CH" dirty="0">
+              <a:solidFill>
+                <a:schemeClr val="bg1"/>
+              </a:solidFill>
+            </a:endParaRPr>
+          </a:p>
+        </p:txBody>
+      </p:sp>
     </p:spTree>
     <p:extLst>
       <p:ext uri="{BB962C8B-B14F-4D97-AF65-F5344CB8AC3E}">
-        <p14:creationId xmlns:p14="http://schemas.microsoft.com/office/powerpoint/2010/main" val="4206889277"/>
+        <p14:creationId xmlns:p14="http://schemas.microsoft.com/office/powerpoint/2010/main" val="3363626777"/>
+      </p:ext>
+    </p:extLst>
+  </p:cSld>
+  <p:clrMapOvr>
+    <a:masterClrMapping/>
+  </p:clrMapOvr>
+</p:sld>
+</file>
+
+<file path=ppt/slides/slide8.xml><?xml version="1.0" encoding="utf-8"?>
+<p:sld xmlns:a="http://schemas.openxmlformats.org/drawingml/2006/main" xmlns:r="http://schemas.openxmlformats.org/officeDocument/2006/relationships" xmlns:p="http://schemas.openxmlformats.org/presentationml/2006/main">
+  <p:cSld>
+    <p:spTree>
+      <p:nvGrpSpPr>
+        <p:cNvPr id="1" name="">
+          <a:extLst>
+            <a:ext uri="{FF2B5EF4-FFF2-40B4-BE49-F238E27FC236}">
+              <a16:creationId xmlns:a16="http://schemas.microsoft.com/office/drawing/2014/main" id="{064B5F2A-4598-BB3E-F832-5E1EF149002B}"/>
+            </a:ext>
+          </a:extLst>
+        </p:cNvPr>
+        <p:cNvGrpSpPr/>
+        <p:nvPr/>
+      </p:nvGrpSpPr>
+      <p:grpSpPr>
+        <a:xfrm>
+          <a:off x="0" y="0"/>
+          <a:ext cx="0" cy="0"/>
+          <a:chOff x="0" y="0"/>
+          <a:chExt cx="0" cy="0"/>
+        </a:xfrm>
+      </p:grpSpPr>
+      <p:pic>
+        <p:nvPicPr>
+          <p:cNvPr id="4" name="Content Placeholder 3">
+            <a:extLst>
+              <a:ext uri="{FF2B5EF4-FFF2-40B4-BE49-F238E27FC236}">
+                <a16:creationId xmlns:a16="http://schemas.microsoft.com/office/drawing/2014/main" id="{03C497DA-A97E-1FB4-1C1A-E966587F5C28}"/>
+              </a:ext>
+            </a:extLst>
+          </p:cNvPr>
+          <p:cNvPicPr>
+            <a:picLocks noGrp="1" noChangeAspect="1"/>
+          </p:cNvPicPr>
+          <p:nvPr>
+            <p:ph idx="1"/>
+          </p:nvPr>
+        </p:nvPicPr>
+        <p:blipFill>
+          <a:blip r:link="rId2"/>
+          <a:srcRect/>
+          <a:stretch>
+            <a:fillRect/>
+          </a:stretch>
+        </p:blipFill>
+        <p:spPr>
+          <a:xfrm>
+            <a:off x="439948" y="-422692"/>
+            <a:ext cx="7556740" cy="7556740"/>
+          </a:xfrm>
+        </p:spPr>
+      </p:pic>
+      <p:sp>
+        <p:nvSpPr>
+          <p:cNvPr id="3" name="TextBox 2">
+            <a:extLst>
+              <a:ext uri="{FF2B5EF4-FFF2-40B4-BE49-F238E27FC236}">
+                <a16:creationId xmlns:a16="http://schemas.microsoft.com/office/drawing/2014/main" id="{60BBDFDF-8EA0-E515-BA06-79879A661101}"/>
+              </a:ext>
+            </a:extLst>
+          </p:cNvPr>
+          <p:cNvSpPr txBox="1"/>
+          <p:nvPr/>
+        </p:nvSpPr>
+        <p:spPr>
+          <a:xfrm>
+            <a:off x="8547652" y="153348"/>
+            <a:ext cx="3475855" cy="923330"/>
+          </a:xfrm>
+          <a:prstGeom prst="rect">
+            <a:avLst/>
+          </a:prstGeom>
+          <a:noFill/>
+        </p:spPr>
+        <p:txBody>
+          <a:bodyPr wrap="square" rtlCol="0">
+            <a:spAutoFit/>
+          </a:bodyPr>
+          <a:lstStyle/>
+          <a:p>
+            <a:r>
+              <a:rPr lang="en-US" dirty="0">
+                <a:solidFill>
+                  <a:schemeClr val="bg1"/>
+                </a:solidFill>
+              </a:rPr>
+              <a:t>Ein </a:t>
+            </a:r>
+            <a:r>
+              <a:rPr lang="en-US" dirty="0" err="1">
+                <a:solidFill>
+                  <a:schemeClr val="bg1"/>
+                </a:solidFill>
+              </a:rPr>
+              <a:t>Ereignis</a:t>
+            </a:r>
+            <a:r>
+              <a:rPr lang="en-US" dirty="0">
+                <a:solidFill>
+                  <a:schemeClr val="bg1"/>
+                </a:solidFill>
+              </a:rPr>
+              <a:t> </a:t>
+            </a:r>
+            <a:r>
+              <a:rPr lang="en-US" dirty="0" err="1">
+                <a:solidFill>
+                  <a:schemeClr val="bg1"/>
+                </a:solidFill>
+              </a:rPr>
+              <a:t>mit</a:t>
+            </a:r>
+            <a:r>
+              <a:rPr lang="en-US" dirty="0">
+                <a:solidFill>
+                  <a:schemeClr val="bg1"/>
+                </a:solidFill>
+              </a:rPr>
+              <a:t> Ort und </a:t>
+            </a:r>
+            <a:r>
+              <a:rPr lang="en-US" dirty="0" err="1">
+                <a:solidFill>
+                  <a:schemeClr val="bg1"/>
+                </a:solidFill>
+              </a:rPr>
+              <a:t>Zeitpunkt</a:t>
+            </a:r>
+            <a:endParaRPr lang="en-US" dirty="0">
+              <a:solidFill>
+                <a:schemeClr val="bg1"/>
+              </a:solidFill>
+            </a:endParaRPr>
+          </a:p>
+          <a:p>
+            <a:r>
+              <a:rPr lang="en-US" dirty="0">
+                <a:solidFill>
+                  <a:schemeClr val="bg1"/>
+                </a:solidFill>
+              </a:rPr>
+              <a:t>z 	= 1</a:t>
+            </a:r>
+          </a:p>
+          <a:p>
+            <a:r>
+              <a:rPr lang="en-US" dirty="0" err="1">
+                <a:solidFill>
+                  <a:schemeClr val="bg1"/>
+                </a:solidFill>
+              </a:rPr>
+              <a:t>ct</a:t>
+            </a:r>
+            <a:r>
+              <a:rPr lang="en-US" dirty="0">
+                <a:solidFill>
+                  <a:schemeClr val="bg1"/>
+                </a:solidFill>
+              </a:rPr>
+              <a:t>	= 2</a:t>
+            </a:r>
+            <a:endParaRPr lang="en-CH" dirty="0">
+              <a:solidFill>
+                <a:schemeClr val="bg1"/>
+              </a:solidFill>
+            </a:endParaRPr>
+          </a:p>
+        </p:txBody>
+      </p:sp>
+      <p:sp>
+        <p:nvSpPr>
+          <p:cNvPr id="5" name="TextBox 4">
+            <a:extLst>
+              <a:ext uri="{FF2B5EF4-FFF2-40B4-BE49-F238E27FC236}">
+                <a16:creationId xmlns:a16="http://schemas.microsoft.com/office/drawing/2014/main" id="{91696F9E-BD1F-EEF1-24B0-D42DA7A29D7A}"/>
+              </a:ext>
+            </a:extLst>
+          </p:cNvPr>
+          <p:cNvSpPr txBox="1"/>
+          <p:nvPr/>
+        </p:nvSpPr>
+        <p:spPr>
+          <a:xfrm>
+            <a:off x="8547652" y="153348"/>
+            <a:ext cx="3475855" cy="3139321"/>
+          </a:xfrm>
+          <a:prstGeom prst="rect">
+            <a:avLst/>
+          </a:prstGeom>
+          <a:noFill/>
+        </p:spPr>
+        <p:txBody>
+          <a:bodyPr wrap="square" rtlCol="0">
+            <a:spAutoFit/>
+          </a:bodyPr>
+          <a:lstStyle/>
+          <a:p>
+            <a:r>
+              <a:rPr lang="en-US" dirty="0">
+                <a:solidFill>
+                  <a:schemeClr val="bg1"/>
+                </a:solidFill>
+              </a:rPr>
+              <a:t>Ein </a:t>
+            </a:r>
+            <a:r>
+              <a:rPr lang="en-US" dirty="0" err="1">
+                <a:solidFill>
+                  <a:schemeClr val="bg1"/>
+                </a:solidFill>
+              </a:rPr>
+              <a:t>Ereignis</a:t>
+            </a:r>
+            <a:r>
+              <a:rPr lang="en-US" dirty="0">
+                <a:solidFill>
+                  <a:schemeClr val="bg1"/>
+                </a:solidFill>
+              </a:rPr>
+              <a:t> </a:t>
+            </a:r>
+            <a:r>
+              <a:rPr lang="en-US" dirty="0" err="1">
+                <a:solidFill>
+                  <a:schemeClr val="bg1"/>
+                </a:solidFill>
+              </a:rPr>
+              <a:t>mit</a:t>
+            </a:r>
+            <a:r>
+              <a:rPr lang="en-US" dirty="0">
+                <a:solidFill>
+                  <a:schemeClr val="bg1"/>
+                </a:solidFill>
+              </a:rPr>
+              <a:t> Ort und </a:t>
+            </a:r>
+            <a:r>
+              <a:rPr lang="en-US" dirty="0" err="1">
+                <a:solidFill>
+                  <a:schemeClr val="bg1"/>
+                </a:solidFill>
+              </a:rPr>
+              <a:t>Zeitpunkt</a:t>
+            </a:r>
+            <a:r>
+              <a:rPr lang="en-US" dirty="0">
+                <a:solidFill>
+                  <a:schemeClr val="bg1"/>
+                </a:solidFill>
+              </a:rPr>
+              <a:t>:</a:t>
+            </a:r>
+          </a:p>
+          <a:p>
+            <a:r>
+              <a:rPr lang="en-US" dirty="0">
+                <a:solidFill>
+                  <a:schemeClr val="bg1"/>
+                </a:solidFill>
+              </a:rPr>
+              <a:t>z 	= 1</a:t>
+            </a:r>
+          </a:p>
+          <a:p>
+            <a:r>
+              <a:rPr lang="en-US" dirty="0" err="1">
+                <a:solidFill>
+                  <a:schemeClr val="bg1"/>
+                </a:solidFill>
+              </a:rPr>
+              <a:t>ct</a:t>
+            </a:r>
+            <a:r>
+              <a:rPr lang="en-US" dirty="0">
+                <a:solidFill>
+                  <a:schemeClr val="bg1"/>
+                </a:solidFill>
+              </a:rPr>
+              <a:t>	= 2</a:t>
+            </a:r>
+          </a:p>
+          <a:p>
+            <a:endParaRPr lang="en-US" dirty="0">
+              <a:solidFill>
+                <a:schemeClr val="bg1"/>
+              </a:solidFill>
+            </a:endParaRPr>
+          </a:p>
+          <a:p>
+            <a:r>
+              <a:rPr lang="en-US" dirty="0">
+                <a:solidFill>
+                  <a:schemeClr val="bg1"/>
+                </a:solidFill>
+              </a:rPr>
+              <a:t>Ein </a:t>
+            </a:r>
+            <a:r>
+              <a:rPr lang="en-US" dirty="0" err="1">
+                <a:solidFill>
+                  <a:schemeClr val="bg1"/>
+                </a:solidFill>
+              </a:rPr>
+              <a:t>zeites</a:t>
+            </a:r>
+            <a:r>
+              <a:rPr lang="en-US" dirty="0">
+                <a:solidFill>
+                  <a:schemeClr val="bg1"/>
+                </a:solidFill>
+              </a:rPr>
+              <a:t> </a:t>
+            </a:r>
+            <a:r>
+              <a:rPr lang="en-US" dirty="0" err="1">
+                <a:solidFill>
+                  <a:schemeClr val="bg1"/>
+                </a:solidFill>
+              </a:rPr>
+              <a:t>Ereignis</a:t>
+            </a:r>
+            <a:r>
+              <a:rPr lang="en-US" dirty="0">
+                <a:solidFill>
+                  <a:schemeClr val="bg1"/>
+                </a:solidFill>
+              </a:rPr>
+              <a:t> </a:t>
+            </a:r>
+            <a:r>
+              <a:rPr lang="en-US" dirty="0" err="1">
+                <a:solidFill>
+                  <a:schemeClr val="bg1"/>
+                </a:solidFill>
+              </a:rPr>
+              <a:t>mit</a:t>
+            </a:r>
+            <a:r>
+              <a:rPr lang="en-US" dirty="0">
+                <a:solidFill>
+                  <a:schemeClr val="bg1"/>
+                </a:solidFill>
+              </a:rPr>
+              <a:t> Ort und </a:t>
+            </a:r>
+            <a:r>
+              <a:rPr lang="en-US" dirty="0" err="1">
+                <a:solidFill>
+                  <a:schemeClr val="bg1"/>
+                </a:solidFill>
+              </a:rPr>
+              <a:t>Zeitpunkt</a:t>
+            </a:r>
+            <a:r>
+              <a:rPr lang="en-US" dirty="0">
+                <a:solidFill>
+                  <a:schemeClr val="bg1"/>
+                </a:solidFill>
+              </a:rPr>
+              <a:t>:</a:t>
+            </a:r>
+          </a:p>
+          <a:p>
+            <a:r>
+              <a:rPr lang="en-US" dirty="0">
+                <a:solidFill>
+                  <a:schemeClr val="bg1"/>
+                </a:solidFill>
+              </a:rPr>
+              <a:t>z 	= 3</a:t>
+            </a:r>
+          </a:p>
+          <a:p>
+            <a:r>
+              <a:rPr lang="en-US" dirty="0" err="1">
+                <a:solidFill>
+                  <a:schemeClr val="bg1"/>
+                </a:solidFill>
+              </a:rPr>
+              <a:t>ct</a:t>
+            </a:r>
+            <a:r>
+              <a:rPr lang="en-US" dirty="0">
+                <a:solidFill>
+                  <a:schemeClr val="bg1"/>
+                </a:solidFill>
+              </a:rPr>
+              <a:t>	= 1</a:t>
+            </a:r>
+          </a:p>
+          <a:p>
+            <a:endParaRPr lang="en-US" dirty="0">
+              <a:solidFill>
+                <a:schemeClr val="bg1"/>
+              </a:solidFill>
+            </a:endParaRPr>
+          </a:p>
+          <a:p>
+            <a:r>
+              <a:rPr lang="en-US" dirty="0" err="1">
+                <a:solidFill>
+                  <a:schemeClr val="bg1"/>
+                </a:solidFill>
+              </a:rPr>
+              <a:t>Verbindung</a:t>
+            </a:r>
+            <a:r>
+              <a:rPr lang="en-US" dirty="0">
+                <a:solidFill>
+                  <a:schemeClr val="bg1"/>
+                </a:solidFill>
+              </a:rPr>
+              <a:t> </a:t>
+            </a:r>
+            <a:r>
+              <a:rPr lang="en-US" dirty="0" err="1">
+                <a:solidFill>
+                  <a:schemeClr val="bg1"/>
+                </a:solidFill>
+              </a:rPr>
+              <a:t>zu</a:t>
+            </a:r>
+            <a:r>
+              <a:rPr lang="en-US" dirty="0">
+                <a:solidFill>
+                  <a:schemeClr val="bg1"/>
+                </a:solidFill>
+              </a:rPr>
+              <a:t> den </a:t>
+            </a:r>
+            <a:r>
+              <a:rPr lang="en-US" dirty="0" err="1">
+                <a:solidFill>
+                  <a:schemeClr val="bg1"/>
+                </a:solidFill>
+              </a:rPr>
+              <a:t>Koordinaten</a:t>
+            </a:r>
+            <a:r>
+              <a:rPr lang="en-US" dirty="0">
+                <a:solidFill>
+                  <a:schemeClr val="bg1"/>
+                </a:solidFill>
+              </a:rPr>
+              <a:t>- </a:t>
+            </a:r>
+            <a:r>
+              <a:rPr lang="en-US" dirty="0" err="1">
+                <a:solidFill>
+                  <a:schemeClr val="bg1"/>
+                </a:solidFill>
+              </a:rPr>
+              <a:t>achsen</a:t>
+            </a:r>
+            <a:r>
+              <a:rPr lang="en-US" dirty="0">
+                <a:solidFill>
+                  <a:schemeClr val="bg1"/>
+                </a:solidFill>
+              </a:rPr>
+              <a:t> </a:t>
+            </a:r>
+            <a:r>
+              <a:rPr lang="en-US" dirty="0" err="1">
+                <a:solidFill>
+                  <a:schemeClr val="bg1"/>
+                </a:solidFill>
+              </a:rPr>
+              <a:t>zum</a:t>
+            </a:r>
+            <a:r>
+              <a:rPr lang="en-US" dirty="0">
+                <a:solidFill>
+                  <a:schemeClr val="bg1"/>
+                </a:solidFill>
+              </a:rPr>
+              <a:t> </a:t>
+            </a:r>
+            <a:r>
+              <a:rPr lang="en-US" dirty="0" err="1">
+                <a:solidFill>
+                  <a:schemeClr val="bg1"/>
+                </a:solidFill>
+              </a:rPr>
+              <a:t>Ablesen</a:t>
+            </a:r>
+            <a:r>
+              <a:rPr lang="en-US" dirty="0">
+                <a:solidFill>
+                  <a:schemeClr val="bg1"/>
+                </a:solidFill>
+              </a:rPr>
+              <a:t> der </a:t>
+            </a:r>
+            <a:r>
+              <a:rPr lang="en-US" dirty="0" err="1">
+                <a:solidFill>
+                  <a:schemeClr val="bg1"/>
+                </a:solidFill>
+              </a:rPr>
+              <a:t>Werte</a:t>
+            </a:r>
+            <a:endParaRPr lang="en-CH" dirty="0">
+              <a:solidFill>
+                <a:schemeClr val="bg1"/>
+              </a:solidFill>
+            </a:endParaRPr>
+          </a:p>
+        </p:txBody>
+      </p:sp>
+    </p:spTree>
+    <p:extLst>
+      <p:ext uri="{BB962C8B-B14F-4D97-AF65-F5344CB8AC3E}">
+        <p14:creationId xmlns:p14="http://schemas.microsoft.com/office/powerpoint/2010/main" val="175444165"/>
+      </p:ext>
+    </p:extLst>
+  </p:cSld>
+  <p:clrMapOvr>
+    <a:masterClrMapping/>
+  </p:clrMapOvr>
+</p:sld>
+</file>
+
+<file path=ppt/slides/slide9.xml><?xml version="1.0" encoding="utf-8"?>
+<p:sld xmlns:a="http://schemas.openxmlformats.org/drawingml/2006/main" xmlns:r="http://schemas.openxmlformats.org/officeDocument/2006/relationships" xmlns:p="http://schemas.openxmlformats.org/presentationml/2006/main">
+  <p:cSld>
+    <p:spTree>
+      <p:nvGrpSpPr>
+        <p:cNvPr id="1" name="">
+          <a:extLst>
+            <a:ext uri="{FF2B5EF4-FFF2-40B4-BE49-F238E27FC236}">
+              <a16:creationId xmlns:a16="http://schemas.microsoft.com/office/drawing/2014/main" id="{EC9D5E28-A2BD-0C6C-6D8D-693811EDA565}"/>
+            </a:ext>
+          </a:extLst>
+        </p:cNvPr>
+        <p:cNvGrpSpPr/>
+        <p:nvPr/>
+      </p:nvGrpSpPr>
+      <p:grpSpPr>
+        <a:xfrm>
+          <a:off x="0" y="0"/>
+          <a:ext cx="0" cy="0"/>
+          <a:chOff x="0" y="0"/>
+          <a:chExt cx="0" cy="0"/>
+        </a:xfrm>
+      </p:grpSpPr>
+      <p:pic>
+        <p:nvPicPr>
+          <p:cNvPr id="4" name="Content Placeholder 3">
+            <a:extLst>
+              <a:ext uri="{FF2B5EF4-FFF2-40B4-BE49-F238E27FC236}">
+                <a16:creationId xmlns:a16="http://schemas.microsoft.com/office/drawing/2014/main" id="{00BCF266-429B-A1E0-E8F1-D360C0B9EFF4}"/>
+              </a:ext>
+            </a:extLst>
+          </p:cNvPr>
+          <p:cNvPicPr>
+            <a:picLocks noGrp="1" noChangeAspect="1"/>
+          </p:cNvPicPr>
+          <p:nvPr>
+            <p:ph idx="1"/>
+          </p:nvPr>
+        </p:nvPicPr>
+        <p:blipFill>
+          <a:blip r:link="rId2"/>
+          <a:srcRect/>
+          <a:stretch>
+            <a:fillRect/>
+          </a:stretch>
+        </p:blipFill>
+        <p:spPr>
+          <a:xfrm>
+            <a:off x="439948" y="-422692"/>
+            <a:ext cx="7556740" cy="7556740"/>
+          </a:xfrm>
+        </p:spPr>
+      </p:pic>
+      <p:sp>
+        <p:nvSpPr>
+          <p:cNvPr id="3" name="TextBox 2">
+            <a:extLst>
+              <a:ext uri="{FF2B5EF4-FFF2-40B4-BE49-F238E27FC236}">
+                <a16:creationId xmlns:a16="http://schemas.microsoft.com/office/drawing/2014/main" id="{F0DEF13E-F33D-36AB-DCD8-BD2386B2638E}"/>
+              </a:ext>
+            </a:extLst>
+          </p:cNvPr>
+          <p:cNvSpPr txBox="1"/>
+          <p:nvPr/>
+        </p:nvSpPr>
+        <p:spPr>
+          <a:xfrm>
+            <a:off x="8547652" y="153348"/>
+            <a:ext cx="3475855" cy="923330"/>
+          </a:xfrm>
+          <a:prstGeom prst="rect">
+            <a:avLst/>
+          </a:prstGeom>
+          <a:noFill/>
+        </p:spPr>
+        <p:txBody>
+          <a:bodyPr wrap="square" rtlCol="0">
+            <a:spAutoFit/>
+          </a:bodyPr>
+          <a:lstStyle/>
+          <a:p>
+            <a:r>
+              <a:rPr lang="en-US" dirty="0">
+                <a:solidFill>
+                  <a:schemeClr val="bg1"/>
+                </a:solidFill>
+              </a:rPr>
+              <a:t>Ein </a:t>
+            </a:r>
+            <a:r>
+              <a:rPr lang="en-US" dirty="0" err="1">
+                <a:solidFill>
+                  <a:schemeClr val="bg1"/>
+                </a:solidFill>
+              </a:rPr>
+              <a:t>Ereignis</a:t>
+            </a:r>
+            <a:r>
+              <a:rPr lang="en-US" dirty="0">
+                <a:solidFill>
+                  <a:schemeClr val="bg1"/>
+                </a:solidFill>
+              </a:rPr>
+              <a:t> </a:t>
+            </a:r>
+            <a:r>
+              <a:rPr lang="en-US" dirty="0" err="1">
+                <a:solidFill>
+                  <a:schemeClr val="bg1"/>
+                </a:solidFill>
+              </a:rPr>
+              <a:t>mit</a:t>
+            </a:r>
+            <a:r>
+              <a:rPr lang="en-US" dirty="0">
+                <a:solidFill>
+                  <a:schemeClr val="bg1"/>
+                </a:solidFill>
+              </a:rPr>
+              <a:t> Ort und </a:t>
+            </a:r>
+            <a:r>
+              <a:rPr lang="en-US" dirty="0" err="1">
+                <a:solidFill>
+                  <a:schemeClr val="bg1"/>
+                </a:solidFill>
+              </a:rPr>
+              <a:t>Zeitpunkt</a:t>
+            </a:r>
+            <a:endParaRPr lang="en-US" dirty="0">
+              <a:solidFill>
+                <a:schemeClr val="bg1"/>
+              </a:solidFill>
+            </a:endParaRPr>
+          </a:p>
+          <a:p>
+            <a:r>
+              <a:rPr lang="en-US" dirty="0">
+                <a:solidFill>
+                  <a:schemeClr val="bg1"/>
+                </a:solidFill>
+              </a:rPr>
+              <a:t>z 	= 1</a:t>
+            </a:r>
+          </a:p>
+          <a:p>
+            <a:r>
+              <a:rPr lang="en-US" dirty="0" err="1">
+                <a:solidFill>
+                  <a:schemeClr val="bg1"/>
+                </a:solidFill>
+              </a:rPr>
+              <a:t>ct</a:t>
+            </a:r>
+            <a:r>
+              <a:rPr lang="en-US" dirty="0">
+                <a:solidFill>
+                  <a:schemeClr val="bg1"/>
+                </a:solidFill>
+              </a:rPr>
+              <a:t>	= 2</a:t>
+            </a:r>
+            <a:endParaRPr lang="en-CH" dirty="0">
+              <a:solidFill>
+                <a:schemeClr val="bg1"/>
+              </a:solidFill>
+            </a:endParaRPr>
+          </a:p>
+        </p:txBody>
+      </p:sp>
+      <p:sp>
+        <p:nvSpPr>
+          <p:cNvPr id="5" name="TextBox 4">
+            <a:extLst>
+              <a:ext uri="{FF2B5EF4-FFF2-40B4-BE49-F238E27FC236}">
+                <a16:creationId xmlns:a16="http://schemas.microsoft.com/office/drawing/2014/main" id="{4186A8A3-4DB8-397A-4F80-5F9DEE0504B7}"/>
+              </a:ext>
+            </a:extLst>
+          </p:cNvPr>
+          <p:cNvSpPr txBox="1"/>
+          <p:nvPr/>
+        </p:nvSpPr>
+        <p:spPr>
+          <a:xfrm>
+            <a:off x="8547652" y="153348"/>
+            <a:ext cx="3475855" cy="3970318"/>
+          </a:xfrm>
+          <a:prstGeom prst="rect">
+            <a:avLst/>
+          </a:prstGeom>
+          <a:noFill/>
+        </p:spPr>
+        <p:txBody>
+          <a:bodyPr wrap="square" rtlCol="0">
+            <a:spAutoFit/>
+          </a:bodyPr>
+          <a:lstStyle/>
+          <a:p>
+            <a:r>
+              <a:rPr lang="en-US" dirty="0">
+                <a:solidFill>
+                  <a:schemeClr val="bg1"/>
+                </a:solidFill>
+              </a:rPr>
+              <a:t>Ein </a:t>
+            </a:r>
+            <a:r>
+              <a:rPr lang="en-US" dirty="0" err="1">
+                <a:solidFill>
+                  <a:schemeClr val="bg1"/>
+                </a:solidFill>
+              </a:rPr>
+              <a:t>Ereignis</a:t>
+            </a:r>
+            <a:r>
+              <a:rPr lang="en-US" dirty="0">
+                <a:solidFill>
+                  <a:schemeClr val="bg1"/>
+                </a:solidFill>
+              </a:rPr>
+              <a:t> </a:t>
+            </a:r>
+            <a:r>
+              <a:rPr lang="en-US" dirty="0" err="1">
+                <a:solidFill>
+                  <a:schemeClr val="bg1"/>
+                </a:solidFill>
+              </a:rPr>
+              <a:t>mit</a:t>
+            </a:r>
+            <a:r>
+              <a:rPr lang="en-US" dirty="0">
+                <a:solidFill>
+                  <a:schemeClr val="bg1"/>
+                </a:solidFill>
+              </a:rPr>
+              <a:t> Ort und </a:t>
+            </a:r>
+            <a:r>
+              <a:rPr lang="en-US" dirty="0" err="1">
+                <a:solidFill>
+                  <a:schemeClr val="bg1"/>
+                </a:solidFill>
+              </a:rPr>
+              <a:t>Zeitpunkt</a:t>
+            </a:r>
+            <a:r>
+              <a:rPr lang="en-US" dirty="0">
+                <a:solidFill>
+                  <a:schemeClr val="bg1"/>
+                </a:solidFill>
+              </a:rPr>
+              <a:t>:</a:t>
+            </a:r>
+          </a:p>
+          <a:p>
+            <a:r>
+              <a:rPr lang="en-US" dirty="0">
+                <a:solidFill>
+                  <a:schemeClr val="bg1"/>
+                </a:solidFill>
+              </a:rPr>
+              <a:t>z 	= 1</a:t>
+            </a:r>
+          </a:p>
+          <a:p>
+            <a:r>
+              <a:rPr lang="en-US" dirty="0" err="1">
+                <a:solidFill>
+                  <a:schemeClr val="bg1"/>
+                </a:solidFill>
+              </a:rPr>
+              <a:t>ct</a:t>
+            </a:r>
+            <a:r>
+              <a:rPr lang="en-US" dirty="0">
+                <a:solidFill>
+                  <a:schemeClr val="bg1"/>
+                </a:solidFill>
+              </a:rPr>
+              <a:t>	= 2</a:t>
+            </a:r>
+          </a:p>
+          <a:p>
+            <a:endParaRPr lang="en-US" dirty="0">
+              <a:solidFill>
+                <a:schemeClr val="bg1"/>
+              </a:solidFill>
+            </a:endParaRPr>
+          </a:p>
+          <a:p>
+            <a:r>
+              <a:rPr lang="en-US" dirty="0">
+                <a:solidFill>
+                  <a:schemeClr val="bg1"/>
+                </a:solidFill>
+              </a:rPr>
+              <a:t>Ein </a:t>
+            </a:r>
+            <a:r>
+              <a:rPr lang="en-US" dirty="0" err="1">
+                <a:solidFill>
+                  <a:schemeClr val="bg1"/>
+                </a:solidFill>
+              </a:rPr>
+              <a:t>zeites</a:t>
+            </a:r>
+            <a:r>
+              <a:rPr lang="en-US" dirty="0">
+                <a:solidFill>
+                  <a:schemeClr val="bg1"/>
+                </a:solidFill>
+              </a:rPr>
+              <a:t> </a:t>
+            </a:r>
+            <a:r>
+              <a:rPr lang="en-US" dirty="0" err="1">
+                <a:solidFill>
+                  <a:schemeClr val="bg1"/>
+                </a:solidFill>
+              </a:rPr>
+              <a:t>Ereignis</a:t>
+            </a:r>
+            <a:r>
+              <a:rPr lang="en-US" dirty="0">
+                <a:solidFill>
+                  <a:schemeClr val="bg1"/>
+                </a:solidFill>
+              </a:rPr>
+              <a:t> </a:t>
+            </a:r>
+            <a:r>
+              <a:rPr lang="en-US" dirty="0" err="1">
+                <a:solidFill>
+                  <a:schemeClr val="bg1"/>
+                </a:solidFill>
+              </a:rPr>
+              <a:t>mit</a:t>
+            </a:r>
+            <a:r>
+              <a:rPr lang="en-US" dirty="0">
+                <a:solidFill>
+                  <a:schemeClr val="bg1"/>
+                </a:solidFill>
+              </a:rPr>
+              <a:t> Ort und </a:t>
+            </a:r>
+            <a:r>
+              <a:rPr lang="en-US" dirty="0" err="1">
+                <a:solidFill>
+                  <a:schemeClr val="bg1"/>
+                </a:solidFill>
+              </a:rPr>
+              <a:t>Zeitpunkt</a:t>
+            </a:r>
+            <a:r>
+              <a:rPr lang="en-US" dirty="0">
+                <a:solidFill>
+                  <a:schemeClr val="bg1"/>
+                </a:solidFill>
+              </a:rPr>
+              <a:t>:</a:t>
+            </a:r>
+          </a:p>
+          <a:p>
+            <a:r>
+              <a:rPr lang="en-US" dirty="0">
+                <a:solidFill>
+                  <a:schemeClr val="bg1"/>
+                </a:solidFill>
+              </a:rPr>
+              <a:t>z 	= 3</a:t>
+            </a:r>
+          </a:p>
+          <a:p>
+            <a:r>
+              <a:rPr lang="en-US" dirty="0" err="1">
+                <a:solidFill>
+                  <a:schemeClr val="bg1"/>
+                </a:solidFill>
+              </a:rPr>
+              <a:t>ct</a:t>
+            </a:r>
+            <a:r>
+              <a:rPr lang="en-US" dirty="0">
+                <a:solidFill>
+                  <a:schemeClr val="bg1"/>
+                </a:solidFill>
+              </a:rPr>
+              <a:t>	= 1</a:t>
+            </a:r>
+          </a:p>
+          <a:p>
+            <a:endParaRPr lang="en-US" dirty="0">
+              <a:solidFill>
+                <a:schemeClr val="bg1"/>
+              </a:solidFill>
+            </a:endParaRPr>
+          </a:p>
+          <a:p>
+            <a:r>
+              <a:rPr lang="en-US" dirty="0" err="1">
+                <a:solidFill>
+                  <a:schemeClr val="bg1"/>
+                </a:solidFill>
+              </a:rPr>
+              <a:t>Verbindung</a:t>
+            </a:r>
+            <a:r>
+              <a:rPr lang="en-US" dirty="0">
+                <a:solidFill>
+                  <a:schemeClr val="bg1"/>
+                </a:solidFill>
+              </a:rPr>
+              <a:t> </a:t>
+            </a:r>
+            <a:r>
+              <a:rPr lang="en-US" dirty="0" err="1">
+                <a:solidFill>
+                  <a:schemeClr val="bg1"/>
+                </a:solidFill>
+              </a:rPr>
+              <a:t>zu</a:t>
+            </a:r>
+            <a:r>
+              <a:rPr lang="en-US" dirty="0">
+                <a:solidFill>
+                  <a:schemeClr val="bg1"/>
+                </a:solidFill>
+              </a:rPr>
+              <a:t> den </a:t>
+            </a:r>
+            <a:r>
+              <a:rPr lang="en-US" dirty="0" err="1">
+                <a:solidFill>
+                  <a:schemeClr val="bg1"/>
+                </a:solidFill>
+              </a:rPr>
+              <a:t>Koordinaten</a:t>
+            </a:r>
+            <a:r>
+              <a:rPr lang="en-US" dirty="0">
+                <a:solidFill>
+                  <a:schemeClr val="bg1"/>
+                </a:solidFill>
+              </a:rPr>
+              <a:t>- </a:t>
+            </a:r>
+            <a:r>
+              <a:rPr lang="en-US" dirty="0" err="1">
+                <a:solidFill>
+                  <a:schemeClr val="bg1"/>
+                </a:solidFill>
+              </a:rPr>
+              <a:t>achsen</a:t>
+            </a:r>
+            <a:r>
+              <a:rPr lang="en-US" dirty="0">
+                <a:solidFill>
+                  <a:schemeClr val="bg1"/>
+                </a:solidFill>
+              </a:rPr>
+              <a:t> </a:t>
+            </a:r>
+            <a:r>
+              <a:rPr lang="en-US" dirty="0" err="1">
+                <a:solidFill>
+                  <a:schemeClr val="bg1"/>
+                </a:solidFill>
+              </a:rPr>
+              <a:t>zum</a:t>
+            </a:r>
+            <a:r>
+              <a:rPr lang="en-US" dirty="0">
+                <a:solidFill>
+                  <a:schemeClr val="bg1"/>
+                </a:solidFill>
+              </a:rPr>
+              <a:t> </a:t>
+            </a:r>
+            <a:r>
+              <a:rPr lang="en-US" dirty="0" err="1">
+                <a:solidFill>
+                  <a:schemeClr val="bg1"/>
+                </a:solidFill>
+              </a:rPr>
+              <a:t>Ablesen</a:t>
+            </a:r>
+            <a:r>
+              <a:rPr lang="en-US" dirty="0">
+                <a:solidFill>
+                  <a:schemeClr val="bg1"/>
+                </a:solidFill>
+              </a:rPr>
+              <a:t> der </a:t>
+            </a:r>
+            <a:r>
+              <a:rPr lang="en-US" dirty="0" err="1">
+                <a:solidFill>
+                  <a:schemeClr val="bg1"/>
+                </a:solidFill>
+              </a:rPr>
+              <a:t>Werte</a:t>
+            </a:r>
+            <a:endParaRPr lang="en-US" dirty="0">
+              <a:solidFill>
+                <a:schemeClr val="bg1"/>
+              </a:solidFill>
+            </a:endParaRPr>
+          </a:p>
+          <a:p>
+            <a:endParaRPr lang="en-US" dirty="0">
+              <a:solidFill>
+                <a:schemeClr val="bg1"/>
+              </a:solidFill>
+            </a:endParaRPr>
+          </a:p>
+          <a:p>
+            <a:r>
+              <a:rPr lang="en-US" dirty="0" err="1">
+                <a:solidFill>
+                  <a:schemeClr val="bg1"/>
+                </a:solidFill>
+              </a:rPr>
+              <a:t>Messung</a:t>
+            </a:r>
+            <a:r>
+              <a:rPr lang="en-US" dirty="0">
+                <a:solidFill>
+                  <a:schemeClr val="bg1"/>
+                </a:solidFill>
+              </a:rPr>
+              <a:t> der </a:t>
+            </a:r>
+            <a:r>
+              <a:rPr lang="en-US" dirty="0" err="1">
+                <a:solidFill>
+                  <a:schemeClr val="bg1"/>
+                </a:solidFill>
+              </a:rPr>
+              <a:t>Entfernung</a:t>
+            </a:r>
+            <a:r>
+              <a:rPr lang="en-US" dirty="0">
+                <a:solidFill>
+                  <a:schemeClr val="bg1"/>
+                </a:solidFill>
+              </a:rPr>
+              <a:t> </a:t>
+            </a:r>
+            <a:r>
+              <a:rPr lang="en-US" dirty="0" err="1">
+                <a:solidFill>
+                  <a:schemeClr val="bg1"/>
+                </a:solidFill>
+              </a:rPr>
+              <a:t>zum</a:t>
+            </a:r>
+            <a:r>
+              <a:rPr lang="en-US" dirty="0">
+                <a:solidFill>
+                  <a:schemeClr val="bg1"/>
+                </a:solidFill>
+              </a:rPr>
+              <a:t> Ursprung</a:t>
+            </a:r>
+            <a:endParaRPr lang="en-CH" dirty="0">
+              <a:solidFill>
+                <a:schemeClr val="bg1"/>
+              </a:solidFill>
+            </a:endParaRPr>
+          </a:p>
+        </p:txBody>
+      </p:sp>
+    </p:spTree>
+    <p:extLst>
+      <p:ext uri="{BB962C8B-B14F-4D97-AF65-F5344CB8AC3E}">
+        <p14:creationId xmlns:p14="http://schemas.microsoft.com/office/powerpoint/2010/main" val="3197391370"/>
       </p:ext>
     </p:extLst>
   </p:cSld>

--- a/slides/minkowski.pptx
+++ b/slides/minkowski.pptx
@@ -6,7 +6,7 @@
     <p:sldMasterId id="2147483798" r:id="rId2"/>
   </p:sldMasterIdLst>
   <p:notesMasterIdLst>
-    <p:notesMasterId r:id="rId13"/>
+    <p:notesMasterId r:id="rId15"/>
   </p:notesMasterIdLst>
   <p:sldIdLst>
     <p:sldId id="256" r:id="rId3"/>
@@ -18,7 +18,9 @@
     <p:sldId id="263" r:id="rId9"/>
     <p:sldId id="264" r:id="rId10"/>
     <p:sldId id="265" r:id="rId11"/>
-    <p:sldId id="259" r:id="rId12"/>
+    <p:sldId id="266" r:id="rId12"/>
+    <p:sldId id="267" r:id="rId13"/>
+    <p:sldId id="259" r:id="rId14"/>
   </p:sldIdLst>
   <p:sldSz cx="12192000" cy="6858000"/>
   <p:notesSz cx="6858000" cy="9144000"/>
@@ -552,6 +554,90 @@
     <p:extLst>
       <p:ext uri="{BB962C8B-B14F-4D97-AF65-F5344CB8AC3E}">
         <p14:creationId xmlns:p14="http://schemas.microsoft.com/office/powerpoint/2010/main" val="705920574"/>
+      </p:ext>
+    </p:extLst>
+  </p:cSld>
+  <p:clrMapOvr>
+    <a:masterClrMapping/>
+  </p:clrMapOvr>
+</p:notes>
+</file>
+
+<file path=ppt/notesSlides/notesSlide2.xml><?xml version="1.0" encoding="utf-8"?>
+<p:notes xmlns:a="http://schemas.openxmlformats.org/drawingml/2006/main" xmlns:r="http://schemas.openxmlformats.org/officeDocument/2006/relationships" xmlns:p="http://schemas.openxmlformats.org/presentationml/2006/main">
+  <p:cSld>
+    <p:spTree>
+      <p:nvGrpSpPr>
+        <p:cNvPr id="1" name=""/>
+        <p:cNvGrpSpPr/>
+        <p:nvPr/>
+      </p:nvGrpSpPr>
+      <p:grpSpPr>
+        <a:xfrm>
+          <a:off x="0" y="0"/>
+          <a:ext cx="0" cy="0"/>
+          <a:chOff x="0" y="0"/>
+          <a:chExt cx="0" cy="0"/>
+        </a:xfrm>
+      </p:grpSpPr>
+      <p:sp>
+        <p:nvSpPr>
+          <p:cNvPr id="2" name="Slide Image Placeholder 1"/>
+          <p:cNvSpPr>
+            <a:spLocks noGrp="1" noRot="1" noChangeAspect="1"/>
+          </p:cNvSpPr>
+          <p:nvPr>
+            <p:ph type="sldImg"/>
+          </p:nvPr>
+        </p:nvSpPr>
+        <p:spPr/>
+      </p:sp>
+      <p:sp>
+        <p:nvSpPr>
+          <p:cNvPr id="3" name="Notes Placeholder 2"/>
+          <p:cNvSpPr>
+            <a:spLocks noGrp="1"/>
+          </p:cNvSpPr>
+          <p:nvPr>
+            <p:ph type="body" idx="1"/>
+          </p:nvPr>
+        </p:nvSpPr>
+        <p:spPr/>
+        <p:txBody>
+          <a:bodyPr/>
+          <a:lstStyle/>
+          <a:p>
+            <a:endParaRPr lang="en-CH" dirty="0"/>
+          </a:p>
+        </p:txBody>
+      </p:sp>
+      <p:sp>
+        <p:nvSpPr>
+          <p:cNvPr id="4" name="Slide Number Placeholder 3"/>
+          <p:cNvSpPr>
+            <a:spLocks noGrp="1"/>
+          </p:cNvSpPr>
+          <p:nvPr>
+            <p:ph type="sldNum" sz="quarter" idx="5"/>
+          </p:nvPr>
+        </p:nvSpPr>
+        <p:spPr/>
+        <p:txBody>
+          <a:bodyPr/>
+          <a:lstStyle/>
+          <a:p>
+            <a:fld id="{483BE582-3C9C-4E6A-A63A-4ED2653A53B1}" type="slidenum">
+              <a:rPr lang="de-DE" smtClean="0"/>
+              <a:t>9</a:t>
+            </a:fld>
+            <a:endParaRPr lang="de-DE"/>
+          </a:p>
+        </p:txBody>
+      </p:sp>
+    </p:spTree>
+    <p:extLst>
+      <p:ext uri="{BB962C8B-B14F-4D97-AF65-F5344CB8AC3E}">
+        <p14:creationId xmlns:p14="http://schemas.microsoft.com/office/powerpoint/2010/main" val="3565179160"/>
       </p:ext>
     </p:extLst>
   </p:cSld>
@@ -5957,6 +6043,1302 @@
         <p:cNvPr id="1" name="">
           <a:extLst>
             <a:ext uri="{FF2B5EF4-FFF2-40B4-BE49-F238E27FC236}">
+              <a16:creationId xmlns:a16="http://schemas.microsoft.com/office/drawing/2014/main" id="{C75521B2-7518-272D-FB11-E79E8F05E803}"/>
+            </a:ext>
+          </a:extLst>
+        </p:cNvPr>
+        <p:cNvGrpSpPr/>
+        <p:nvPr/>
+      </p:nvGrpSpPr>
+      <p:grpSpPr>
+        <a:xfrm>
+          <a:off x="0" y="0"/>
+          <a:ext cx="0" cy="0"/>
+          <a:chOff x="0" y="0"/>
+          <a:chExt cx="0" cy="0"/>
+        </a:xfrm>
+      </p:grpSpPr>
+      <p:pic>
+        <p:nvPicPr>
+          <p:cNvPr id="4" name="Content Placeholder 3">
+            <a:extLst>
+              <a:ext uri="{FF2B5EF4-FFF2-40B4-BE49-F238E27FC236}">
+                <a16:creationId xmlns:a16="http://schemas.microsoft.com/office/drawing/2014/main" id="{8A0A396A-57DD-4EA9-022B-B215474FBE45}"/>
+              </a:ext>
+            </a:extLst>
+          </p:cNvPr>
+          <p:cNvPicPr>
+            <a:picLocks noGrp="1" noChangeAspect="1"/>
+          </p:cNvPicPr>
+          <p:nvPr>
+            <p:ph idx="1"/>
+          </p:nvPr>
+        </p:nvPicPr>
+        <p:blipFill>
+          <a:blip r:link="rId2"/>
+          <a:srcRect/>
+          <a:stretch>
+            <a:fillRect/>
+          </a:stretch>
+        </p:blipFill>
+        <p:spPr>
+          <a:xfrm>
+            <a:off x="439948" y="-422692"/>
+            <a:ext cx="7556740" cy="7556740"/>
+          </a:xfrm>
+        </p:spPr>
+      </p:pic>
+      <mc:AlternateContent xmlns:mc="http://schemas.openxmlformats.org/markup-compatibility/2006">
+        <mc:Choice xmlns:a14="http://schemas.microsoft.com/office/drawing/2010/main" Requires="a14">
+          <p:sp>
+            <p:nvSpPr>
+              <p:cNvPr id="2" name="TextBox 1">
+                <a:extLst>
+                  <a:ext uri="{FF2B5EF4-FFF2-40B4-BE49-F238E27FC236}">
+                    <a16:creationId xmlns:a16="http://schemas.microsoft.com/office/drawing/2014/main" id="{44D530D4-85C6-CB00-571B-EEBFF6C565CB}"/>
+                  </a:ext>
+                </a:extLst>
+              </p:cNvPr>
+              <p:cNvSpPr txBox="1"/>
+              <p:nvPr/>
+            </p:nvSpPr>
+            <p:spPr>
+              <a:xfrm>
+                <a:off x="8547652" y="153348"/>
+                <a:ext cx="3475855" cy="3139321"/>
+              </a:xfrm>
+              <a:prstGeom prst="rect">
+                <a:avLst/>
+              </a:prstGeom>
+              <a:noFill/>
+            </p:spPr>
+            <p:txBody>
+              <a:bodyPr wrap="square" rtlCol="0">
+                <a:spAutoFit/>
+              </a:bodyPr>
+              <a:lstStyle/>
+              <a:p>
+                <a:r>
+                  <a:rPr lang="en-US" dirty="0">
+                    <a:solidFill>
+                      <a:schemeClr val="bg1"/>
+                    </a:solidFill>
+                  </a:rPr>
+                  <a:t>Ein </a:t>
+                </a:r>
+                <a:r>
+                  <a:rPr lang="en-US" dirty="0" err="1">
+                    <a:solidFill>
+                      <a:schemeClr val="bg1"/>
+                    </a:solidFill>
+                  </a:rPr>
+                  <a:t>Ereignis</a:t>
+                </a:r>
+                <a:r>
+                  <a:rPr lang="en-US" dirty="0">
+                    <a:solidFill>
+                      <a:schemeClr val="bg1"/>
+                    </a:solidFill>
+                  </a:rPr>
+                  <a:t> </a:t>
+                </a:r>
+                <a:r>
+                  <a:rPr lang="en-US" dirty="0" err="1">
+                    <a:solidFill>
+                      <a:schemeClr val="bg1"/>
+                    </a:solidFill>
+                  </a:rPr>
+                  <a:t>mit</a:t>
+                </a:r>
+                <a:r>
+                  <a:rPr lang="en-US" dirty="0">
+                    <a:solidFill>
+                      <a:schemeClr val="bg1"/>
+                    </a:solidFill>
+                  </a:rPr>
+                  <a:t> Ort und </a:t>
+                </a:r>
+                <a:r>
+                  <a:rPr lang="en-US" dirty="0" err="1">
+                    <a:solidFill>
+                      <a:schemeClr val="bg1"/>
+                    </a:solidFill>
+                  </a:rPr>
+                  <a:t>Zeitpunkt</a:t>
+                </a:r>
+                <a:r>
+                  <a:rPr lang="en-US" dirty="0">
+                    <a:solidFill>
+                      <a:schemeClr val="bg1"/>
+                    </a:solidFill>
+                  </a:rPr>
+                  <a:t>:</a:t>
+                </a:r>
+              </a:p>
+              <a:p>
+                <a:pPr/>
+                <a14:m>
+                  <m:oMathPara xmlns:m="http://schemas.openxmlformats.org/officeDocument/2006/math">
+                    <m:oMathParaPr>
+                      <m:jc m:val="left"/>
+                    </m:oMathParaPr>
+                    <m:oMath xmlns:m="http://schemas.openxmlformats.org/officeDocument/2006/math">
+                      <m:r>
+                        <a:rPr lang="en-US" b="0" i="1" smtClean="0">
+                          <a:solidFill>
+                            <a:schemeClr val="bg1"/>
+                          </a:solidFill>
+                          <a:latin typeface="Cambria Math" panose="02040503050406030204" pitchFamily="18" charset="0"/>
+                        </a:rPr>
+                        <m:t> </m:t>
+                      </m:r>
+                      <m:r>
+                        <a:rPr lang="en-US" b="0" i="1" smtClean="0">
+                          <a:solidFill>
+                            <a:schemeClr val="bg1"/>
+                          </a:solidFill>
+                          <a:latin typeface="Cambria Math" panose="02040503050406030204" pitchFamily="18" charset="0"/>
+                        </a:rPr>
+                        <m:t>𝑧</m:t>
+                      </m:r>
+                      <m:r>
+                        <a:rPr lang="en-US" b="0" i="1" smtClean="0">
+                          <a:solidFill>
+                            <a:schemeClr val="bg1"/>
+                          </a:solidFill>
+                          <a:latin typeface="Cambria Math" panose="02040503050406030204" pitchFamily="18" charset="0"/>
+                        </a:rPr>
+                        <m:t>=1</m:t>
+                      </m:r>
+                    </m:oMath>
+                  </m:oMathPara>
+                </a14:m>
+                <a:endParaRPr lang="en-US" dirty="0">
+                  <a:solidFill>
+                    <a:schemeClr val="bg1"/>
+                  </a:solidFill>
+                </a:endParaRPr>
+              </a:p>
+              <a:p>
+                <a:pPr/>
+                <a14:m>
+                  <m:oMathPara xmlns:m="http://schemas.openxmlformats.org/officeDocument/2006/math">
+                    <m:oMathParaPr>
+                      <m:jc m:val="left"/>
+                    </m:oMathParaPr>
+                    <m:oMath xmlns:m="http://schemas.openxmlformats.org/officeDocument/2006/math">
+                      <m:r>
+                        <a:rPr lang="en-US" b="0" i="1" smtClean="0">
+                          <a:solidFill>
+                            <a:schemeClr val="bg1"/>
+                          </a:solidFill>
+                          <a:latin typeface="Cambria Math" panose="02040503050406030204" pitchFamily="18" charset="0"/>
+                        </a:rPr>
+                        <m:t>𝑐𝑡</m:t>
+                      </m:r>
+                      <m:r>
+                        <a:rPr lang="en-US" b="0" i="1" smtClean="0">
+                          <a:solidFill>
+                            <a:schemeClr val="bg1"/>
+                          </a:solidFill>
+                          <a:latin typeface="Cambria Math" panose="02040503050406030204" pitchFamily="18" charset="0"/>
+                        </a:rPr>
+                        <m:t>=2</m:t>
+                      </m:r>
+                    </m:oMath>
+                  </m:oMathPara>
+                </a14:m>
+                <a:endParaRPr lang="en-US" dirty="0">
+                  <a:solidFill>
+                    <a:schemeClr val="bg1"/>
+                  </a:solidFill>
+                </a:endParaRPr>
+              </a:p>
+              <a:p>
+                <a:endParaRPr lang="en-US" dirty="0">
+                  <a:solidFill>
+                    <a:schemeClr val="bg1"/>
+                  </a:solidFill>
+                </a:endParaRPr>
+              </a:p>
+              <a:p>
+                <a:r>
+                  <a:rPr lang="en-US" dirty="0">
+                    <a:solidFill>
+                      <a:schemeClr val="bg1"/>
+                    </a:solidFill>
+                  </a:rPr>
+                  <a:t>Ein </a:t>
+                </a:r>
+                <a:r>
+                  <a:rPr lang="en-US" dirty="0" err="1">
+                    <a:solidFill>
+                      <a:schemeClr val="bg1"/>
+                    </a:solidFill>
+                  </a:rPr>
+                  <a:t>zweites</a:t>
+                </a:r>
+                <a:r>
+                  <a:rPr lang="en-US" dirty="0">
+                    <a:solidFill>
+                      <a:schemeClr val="bg1"/>
+                    </a:solidFill>
+                  </a:rPr>
+                  <a:t> </a:t>
+                </a:r>
+                <a:r>
+                  <a:rPr lang="en-US" dirty="0" err="1">
+                    <a:solidFill>
+                      <a:schemeClr val="bg1"/>
+                    </a:solidFill>
+                  </a:rPr>
+                  <a:t>Ereignis</a:t>
+                </a:r>
+                <a:r>
+                  <a:rPr lang="en-US" dirty="0">
+                    <a:solidFill>
+                      <a:schemeClr val="bg1"/>
+                    </a:solidFill>
+                  </a:rPr>
+                  <a:t> </a:t>
+                </a:r>
+                <a:r>
+                  <a:rPr lang="en-US" dirty="0" err="1">
+                    <a:solidFill>
+                      <a:schemeClr val="bg1"/>
+                    </a:solidFill>
+                  </a:rPr>
+                  <a:t>mit</a:t>
+                </a:r>
+                <a:r>
+                  <a:rPr lang="en-US" dirty="0">
+                    <a:solidFill>
+                      <a:schemeClr val="bg1"/>
+                    </a:solidFill>
+                  </a:rPr>
+                  <a:t> Ort und </a:t>
+                </a:r>
+                <a:r>
+                  <a:rPr lang="en-US" dirty="0" err="1">
+                    <a:solidFill>
+                      <a:schemeClr val="bg1"/>
+                    </a:solidFill>
+                  </a:rPr>
+                  <a:t>Zeitpunkt</a:t>
+                </a:r>
+                <a:r>
+                  <a:rPr lang="en-US" dirty="0">
+                    <a:solidFill>
+                      <a:schemeClr val="bg1"/>
+                    </a:solidFill>
+                  </a:rPr>
+                  <a:t>:</a:t>
+                </a:r>
+              </a:p>
+              <a:p>
+                <a:pPr/>
+                <a14:m>
+                  <m:oMathPara xmlns:m="http://schemas.openxmlformats.org/officeDocument/2006/math">
+                    <m:oMathParaPr>
+                      <m:jc m:val="left"/>
+                    </m:oMathParaPr>
+                    <m:oMath xmlns:m="http://schemas.openxmlformats.org/officeDocument/2006/math">
+                      <m:r>
+                        <a:rPr lang="en-US" b="0" i="1" smtClean="0">
+                          <a:solidFill>
+                            <a:schemeClr val="bg1"/>
+                          </a:solidFill>
+                          <a:latin typeface="Cambria Math" panose="02040503050406030204" pitchFamily="18" charset="0"/>
+                        </a:rPr>
+                        <m:t>  </m:t>
+                      </m:r>
+                      <m:r>
+                        <a:rPr lang="en-US" b="0" i="1" smtClean="0">
+                          <a:solidFill>
+                            <a:schemeClr val="bg1"/>
+                          </a:solidFill>
+                          <a:latin typeface="Cambria Math" panose="02040503050406030204" pitchFamily="18" charset="0"/>
+                        </a:rPr>
+                        <m:t>𝑧</m:t>
+                      </m:r>
+                      <m:r>
+                        <a:rPr lang="en-US" b="0" i="1" smtClean="0">
+                          <a:solidFill>
+                            <a:schemeClr val="bg1"/>
+                          </a:solidFill>
+                          <a:latin typeface="Cambria Math" panose="02040503050406030204" pitchFamily="18" charset="0"/>
+                        </a:rPr>
+                        <m:t>=3</m:t>
+                      </m:r>
+                    </m:oMath>
+                  </m:oMathPara>
+                </a14:m>
+                <a:endParaRPr lang="en-US" dirty="0">
+                  <a:solidFill>
+                    <a:schemeClr val="bg1"/>
+                  </a:solidFill>
+                </a:endParaRPr>
+              </a:p>
+              <a:p>
+                <a:pPr/>
+                <a14:m>
+                  <m:oMathPara xmlns:m="http://schemas.openxmlformats.org/officeDocument/2006/math">
+                    <m:oMathParaPr>
+                      <m:jc m:val="left"/>
+                    </m:oMathParaPr>
+                    <m:oMath xmlns:m="http://schemas.openxmlformats.org/officeDocument/2006/math">
+                      <m:r>
+                        <a:rPr lang="en-US" b="0" i="1" smtClean="0">
+                          <a:solidFill>
+                            <a:schemeClr val="bg1"/>
+                          </a:solidFill>
+                          <a:latin typeface="Cambria Math" panose="02040503050406030204" pitchFamily="18" charset="0"/>
+                        </a:rPr>
+                        <m:t>𝑐𝑡</m:t>
+                      </m:r>
+                      <m:r>
+                        <a:rPr lang="en-US" b="0" i="1" smtClean="0">
+                          <a:solidFill>
+                            <a:schemeClr val="bg1"/>
+                          </a:solidFill>
+                          <a:latin typeface="Cambria Math" panose="02040503050406030204" pitchFamily="18" charset="0"/>
+                        </a:rPr>
+                        <m:t>=1</m:t>
+                      </m:r>
+                    </m:oMath>
+                  </m:oMathPara>
+                </a14:m>
+                <a:endParaRPr lang="en-US" dirty="0">
+                  <a:solidFill>
+                    <a:schemeClr val="bg1"/>
+                  </a:solidFill>
+                </a:endParaRPr>
+              </a:p>
+              <a:p>
+                <a:endParaRPr lang="en-US" dirty="0">
+                  <a:solidFill>
+                    <a:schemeClr val="bg1"/>
+                  </a:solidFill>
+                </a:endParaRPr>
+              </a:p>
+              <a:p>
+                <a:r>
+                  <a:rPr lang="en-US" dirty="0" err="1">
+                    <a:solidFill>
+                      <a:schemeClr val="bg1"/>
+                    </a:solidFill>
+                  </a:rPr>
+                  <a:t>Abstand</a:t>
+                </a:r>
+                <a:r>
+                  <a:rPr lang="en-US" dirty="0">
+                    <a:solidFill>
+                      <a:schemeClr val="bg1"/>
+                    </a:solidFill>
+                  </a:rPr>
+                  <a:t> </a:t>
+                </a:r>
+                <a:r>
+                  <a:rPr lang="en-US" dirty="0" err="1">
+                    <a:solidFill>
+                      <a:schemeClr val="bg1"/>
+                    </a:solidFill>
+                  </a:rPr>
+                  <a:t>zwischen</a:t>
+                </a:r>
+                <a:r>
+                  <a:rPr lang="en-US" dirty="0">
+                    <a:solidFill>
+                      <a:schemeClr val="bg1"/>
+                    </a:solidFill>
+                  </a:rPr>
+                  <a:t> </a:t>
+                </a:r>
+                <a:r>
+                  <a:rPr lang="en-US" dirty="0" err="1">
+                    <a:solidFill>
+                      <a:schemeClr val="bg1"/>
+                    </a:solidFill>
+                  </a:rPr>
+                  <a:t>zwei</a:t>
+                </a:r>
+                <a:r>
+                  <a:rPr lang="en-US" dirty="0">
+                    <a:solidFill>
+                      <a:schemeClr val="bg1"/>
+                    </a:solidFill>
+                  </a:rPr>
+                  <a:t> </a:t>
+                </a:r>
+                <a:r>
+                  <a:rPr lang="en-US" dirty="0" err="1">
+                    <a:solidFill>
+                      <a:schemeClr val="bg1"/>
+                    </a:solidFill>
+                  </a:rPr>
+                  <a:t>Punkten</a:t>
+                </a:r>
+                <a:r>
+                  <a:rPr lang="en-US" dirty="0">
+                    <a:solidFill>
+                      <a:schemeClr val="bg1"/>
+                    </a:solidFill>
+                  </a:rPr>
+                  <a:t> </a:t>
+                </a:r>
+                <a:r>
+                  <a:rPr lang="en-US" dirty="0" err="1">
+                    <a:solidFill>
+                      <a:schemeClr val="bg1"/>
+                    </a:solidFill>
+                  </a:rPr>
+                  <a:t>entspricht</a:t>
+                </a:r>
+                <a:r>
+                  <a:rPr lang="en-US" dirty="0">
+                    <a:solidFill>
+                      <a:schemeClr val="bg1"/>
+                    </a:solidFill>
+                  </a:rPr>
+                  <a:t> </a:t>
+                </a:r>
+                <a:r>
+                  <a:rPr lang="en-US" dirty="0" err="1">
+                    <a:solidFill>
+                      <a:schemeClr val="bg1"/>
+                    </a:solidFill>
+                  </a:rPr>
+                  <a:t>nicht</a:t>
+                </a:r>
+                <a:r>
+                  <a:rPr lang="en-US" dirty="0">
+                    <a:solidFill>
+                      <a:schemeClr val="bg1"/>
+                    </a:solidFill>
+                  </a:rPr>
+                  <a:t> der </a:t>
+                </a:r>
+                <a:r>
+                  <a:rPr lang="en-US" dirty="0" err="1">
+                    <a:solidFill>
+                      <a:schemeClr val="bg1"/>
+                    </a:solidFill>
+                  </a:rPr>
+                  <a:t>direkten</a:t>
+                </a:r>
+                <a:r>
+                  <a:rPr lang="en-US" dirty="0">
+                    <a:solidFill>
+                      <a:schemeClr val="bg1"/>
+                    </a:solidFill>
+                  </a:rPr>
+                  <a:t> Linie</a:t>
+                </a:r>
+              </a:p>
+            </p:txBody>
+          </p:sp>
+        </mc:Choice>
+        <mc:Fallback>
+          <p:sp>
+            <p:nvSpPr>
+              <p:cNvPr id="2" name="TextBox 1">
+                <a:extLst>
+                  <a:ext uri="{FF2B5EF4-FFF2-40B4-BE49-F238E27FC236}">
+                    <a16:creationId xmlns:a16="http://schemas.microsoft.com/office/drawing/2014/main" id="{44D530D4-85C6-CB00-571B-EEBFF6C565CB}"/>
+                  </a:ext>
+                </a:extLst>
+              </p:cNvPr>
+              <p:cNvSpPr txBox="1">
+                <a:spLocks noRot="1" noChangeAspect="1" noMove="1" noResize="1" noEditPoints="1" noAdjustHandles="1" noChangeArrowheads="1" noChangeShapeType="1" noTextEdit="1"/>
+              </p:cNvSpPr>
+              <p:nvPr/>
+            </p:nvSpPr>
+            <p:spPr>
+              <a:xfrm>
+                <a:off x="8547652" y="153348"/>
+                <a:ext cx="3475855" cy="3139321"/>
+              </a:xfrm>
+              <a:prstGeom prst="rect">
+                <a:avLst/>
+              </a:prstGeom>
+              <a:blipFill>
+                <a:blip r:embed="rId3"/>
+                <a:stretch>
+                  <a:fillRect l="-1404" t="-971" r="-1579" b="-2136"/>
+                </a:stretch>
+              </a:blipFill>
+            </p:spPr>
+            <p:txBody>
+              <a:bodyPr/>
+              <a:lstStyle/>
+              <a:p>
+                <a:r>
+                  <a:rPr lang="en-CH">
+                    <a:noFill/>
+                  </a:rPr>
+                  <a:t> </a:t>
+                </a:r>
+              </a:p>
+            </p:txBody>
+          </p:sp>
+        </mc:Fallback>
+      </mc:AlternateContent>
+    </p:spTree>
+    <p:extLst>
+      <p:ext uri="{BB962C8B-B14F-4D97-AF65-F5344CB8AC3E}">
+        <p14:creationId xmlns:p14="http://schemas.microsoft.com/office/powerpoint/2010/main" val="594440476"/>
+      </p:ext>
+    </p:extLst>
+  </p:cSld>
+  <p:clrMapOvr>
+    <a:masterClrMapping/>
+  </p:clrMapOvr>
+</p:sld>
+</file>
+
+<file path=ppt/slides/slide11.xml><?xml version="1.0" encoding="utf-8"?>
+<p:sld xmlns:a="http://schemas.openxmlformats.org/drawingml/2006/main" xmlns:r="http://schemas.openxmlformats.org/officeDocument/2006/relationships" xmlns:p="http://schemas.openxmlformats.org/presentationml/2006/main">
+  <p:cSld>
+    <p:spTree>
+      <p:nvGrpSpPr>
+        <p:cNvPr id="1" name="">
+          <a:extLst>
+            <a:ext uri="{FF2B5EF4-FFF2-40B4-BE49-F238E27FC236}">
+              <a16:creationId xmlns:a16="http://schemas.microsoft.com/office/drawing/2014/main" id="{ADFEFF49-0D6E-2E4F-4A70-5C537334C295}"/>
+            </a:ext>
+          </a:extLst>
+        </p:cNvPr>
+        <p:cNvGrpSpPr/>
+        <p:nvPr/>
+      </p:nvGrpSpPr>
+      <p:grpSpPr>
+        <a:xfrm>
+          <a:off x="0" y="0"/>
+          <a:ext cx="0" cy="0"/>
+          <a:chOff x="0" y="0"/>
+          <a:chExt cx="0" cy="0"/>
+        </a:xfrm>
+      </p:grpSpPr>
+      <mc:AlternateContent xmlns:mc="http://schemas.openxmlformats.org/markup-compatibility/2006">
+        <mc:Choice xmlns:a14="http://schemas.microsoft.com/office/drawing/2010/main" Requires="a14">
+          <p:sp>
+            <p:nvSpPr>
+              <p:cNvPr id="5" name="TextBox 4">
+                <a:extLst>
+                  <a:ext uri="{FF2B5EF4-FFF2-40B4-BE49-F238E27FC236}">
+                    <a16:creationId xmlns:a16="http://schemas.microsoft.com/office/drawing/2014/main" id="{15CCCCA1-C522-ED31-7590-3FC773EEAF07}"/>
+                  </a:ext>
+                </a:extLst>
+              </p:cNvPr>
+              <p:cNvSpPr txBox="1"/>
+              <p:nvPr/>
+            </p:nvSpPr>
+            <p:spPr>
+              <a:xfrm>
+                <a:off x="8547652" y="153348"/>
+                <a:ext cx="3475855" cy="4524315"/>
+              </a:xfrm>
+              <a:prstGeom prst="rect">
+                <a:avLst/>
+              </a:prstGeom>
+              <a:noFill/>
+            </p:spPr>
+            <p:txBody>
+              <a:bodyPr wrap="square" rtlCol="0">
+                <a:spAutoFit/>
+              </a:bodyPr>
+              <a:lstStyle/>
+              <a:p>
+                <a:r>
+                  <a:rPr lang="en-US" dirty="0">
+                    <a:solidFill>
+                      <a:schemeClr val="bg1"/>
+                    </a:solidFill>
+                  </a:rPr>
+                  <a:t>Ein </a:t>
+                </a:r>
+                <a:r>
+                  <a:rPr lang="en-US" dirty="0" err="1">
+                    <a:solidFill>
+                      <a:schemeClr val="bg1"/>
+                    </a:solidFill>
+                  </a:rPr>
+                  <a:t>Ereignis</a:t>
+                </a:r>
+                <a:r>
+                  <a:rPr lang="en-US" dirty="0">
+                    <a:solidFill>
+                      <a:schemeClr val="bg1"/>
+                    </a:solidFill>
+                  </a:rPr>
+                  <a:t> </a:t>
+                </a:r>
+                <a:r>
+                  <a:rPr lang="en-US" dirty="0" err="1">
+                    <a:solidFill>
+                      <a:schemeClr val="bg1"/>
+                    </a:solidFill>
+                  </a:rPr>
+                  <a:t>mit</a:t>
+                </a:r>
+                <a:r>
+                  <a:rPr lang="en-US" dirty="0">
+                    <a:solidFill>
+                      <a:schemeClr val="bg1"/>
+                    </a:solidFill>
+                  </a:rPr>
+                  <a:t> Ort und </a:t>
+                </a:r>
+                <a:r>
+                  <a:rPr lang="en-US" dirty="0" err="1">
+                    <a:solidFill>
+                      <a:schemeClr val="bg1"/>
+                    </a:solidFill>
+                  </a:rPr>
+                  <a:t>Zeitpunkt</a:t>
+                </a:r>
+                <a:r>
+                  <a:rPr lang="en-US" dirty="0">
+                    <a:solidFill>
+                      <a:schemeClr val="bg1"/>
+                    </a:solidFill>
+                  </a:rPr>
+                  <a:t>:</a:t>
+                </a:r>
+              </a:p>
+              <a:p>
+                <a:pPr/>
+                <a14:m>
+                  <m:oMathPara xmlns:m="http://schemas.openxmlformats.org/officeDocument/2006/math">
+                    <m:oMathParaPr>
+                      <m:jc m:val="left"/>
+                    </m:oMathParaPr>
+                    <m:oMath xmlns:m="http://schemas.openxmlformats.org/officeDocument/2006/math">
+                      <m:r>
+                        <a:rPr lang="en-US" b="0" i="1" smtClean="0">
+                          <a:solidFill>
+                            <a:schemeClr val="bg1"/>
+                          </a:solidFill>
+                          <a:latin typeface="Cambria Math" panose="02040503050406030204" pitchFamily="18" charset="0"/>
+                        </a:rPr>
+                        <m:t> </m:t>
+                      </m:r>
+                      <m:r>
+                        <a:rPr lang="en-US" b="0" i="1" smtClean="0">
+                          <a:solidFill>
+                            <a:schemeClr val="bg1"/>
+                          </a:solidFill>
+                          <a:latin typeface="Cambria Math" panose="02040503050406030204" pitchFamily="18" charset="0"/>
+                        </a:rPr>
+                        <m:t>𝑧</m:t>
+                      </m:r>
+                      <m:r>
+                        <a:rPr lang="en-US" b="0" i="1" smtClean="0">
+                          <a:solidFill>
+                            <a:schemeClr val="bg1"/>
+                          </a:solidFill>
+                          <a:latin typeface="Cambria Math" panose="02040503050406030204" pitchFamily="18" charset="0"/>
+                        </a:rPr>
+                        <m:t>=1</m:t>
+                      </m:r>
+                    </m:oMath>
+                  </m:oMathPara>
+                </a14:m>
+                <a:endParaRPr lang="en-US" dirty="0">
+                  <a:solidFill>
+                    <a:schemeClr val="bg1"/>
+                  </a:solidFill>
+                </a:endParaRPr>
+              </a:p>
+              <a:p>
+                <a:pPr/>
+                <a14:m>
+                  <m:oMathPara xmlns:m="http://schemas.openxmlformats.org/officeDocument/2006/math">
+                    <m:oMathParaPr>
+                      <m:jc m:val="left"/>
+                    </m:oMathParaPr>
+                    <m:oMath xmlns:m="http://schemas.openxmlformats.org/officeDocument/2006/math">
+                      <m:r>
+                        <a:rPr lang="en-US" b="0" i="1" smtClean="0">
+                          <a:solidFill>
+                            <a:schemeClr val="bg1"/>
+                          </a:solidFill>
+                          <a:latin typeface="Cambria Math" panose="02040503050406030204" pitchFamily="18" charset="0"/>
+                        </a:rPr>
+                        <m:t>𝑐𝑡</m:t>
+                      </m:r>
+                      <m:r>
+                        <a:rPr lang="en-US" b="0" i="1" smtClean="0">
+                          <a:solidFill>
+                            <a:schemeClr val="bg1"/>
+                          </a:solidFill>
+                          <a:latin typeface="Cambria Math" panose="02040503050406030204" pitchFamily="18" charset="0"/>
+                        </a:rPr>
+                        <m:t>=2</m:t>
+                      </m:r>
+                    </m:oMath>
+                  </m:oMathPara>
+                </a14:m>
+                <a:endParaRPr lang="en-US" dirty="0">
+                  <a:solidFill>
+                    <a:schemeClr val="bg1"/>
+                  </a:solidFill>
+                </a:endParaRPr>
+              </a:p>
+              <a:p>
+                <a:endParaRPr lang="en-US" dirty="0">
+                  <a:solidFill>
+                    <a:schemeClr val="bg1"/>
+                  </a:solidFill>
+                </a:endParaRPr>
+              </a:p>
+              <a:p>
+                <a:r>
+                  <a:rPr lang="en-US" dirty="0">
+                    <a:solidFill>
+                      <a:schemeClr val="bg1"/>
+                    </a:solidFill>
+                  </a:rPr>
+                  <a:t>Ein </a:t>
+                </a:r>
+                <a:r>
+                  <a:rPr lang="en-US" dirty="0" err="1">
+                    <a:solidFill>
+                      <a:schemeClr val="bg1"/>
+                    </a:solidFill>
+                  </a:rPr>
+                  <a:t>zweites</a:t>
+                </a:r>
+                <a:r>
+                  <a:rPr lang="en-US" dirty="0">
+                    <a:solidFill>
+                      <a:schemeClr val="bg1"/>
+                    </a:solidFill>
+                  </a:rPr>
+                  <a:t> </a:t>
+                </a:r>
+                <a:r>
+                  <a:rPr lang="en-US" dirty="0" err="1">
+                    <a:solidFill>
+                      <a:schemeClr val="bg1"/>
+                    </a:solidFill>
+                  </a:rPr>
+                  <a:t>Ereignis</a:t>
+                </a:r>
+                <a:r>
+                  <a:rPr lang="en-US" dirty="0">
+                    <a:solidFill>
+                      <a:schemeClr val="bg1"/>
+                    </a:solidFill>
+                  </a:rPr>
+                  <a:t> </a:t>
+                </a:r>
+                <a:r>
+                  <a:rPr lang="en-US" dirty="0" err="1">
+                    <a:solidFill>
+                      <a:schemeClr val="bg1"/>
+                    </a:solidFill>
+                  </a:rPr>
+                  <a:t>mit</a:t>
+                </a:r>
+                <a:r>
+                  <a:rPr lang="en-US" dirty="0">
+                    <a:solidFill>
+                      <a:schemeClr val="bg1"/>
+                    </a:solidFill>
+                  </a:rPr>
+                  <a:t> Ort und </a:t>
+                </a:r>
+                <a:r>
+                  <a:rPr lang="en-US" dirty="0" err="1">
+                    <a:solidFill>
+                      <a:schemeClr val="bg1"/>
+                    </a:solidFill>
+                  </a:rPr>
+                  <a:t>Zeitpunkt</a:t>
+                </a:r>
+                <a:r>
+                  <a:rPr lang="en-US" dirty="0">
+                    <a:solidFill>
+                      <a:schemeClr val="bg1"/>
+                    </a:solidFill>
+                  </a:rPr>
+                  <a:t>:</a:t>
+                </a:r>
+              </a:p>
+              <a:p>
+                <a:pPr/>
+                <a14:m>
+                  <m:oMathPara xmlns:m="http://schemas.openxmlformats.org/officeDocument/2006/math">
+                    <m:oMathParaPr>
+                      <m:jc m:val="left"/>
+                    </m:oMathParaPr>
+                    <m:oMath xmlns:m="http://schemas.openxmlformats.org/officeDocument/2006/math">
+                      <m:r>
+                        <a:rPr lang="en-US" b="0" i="1" smtClean="0">
+                          <a:solidFill>
+                            <a:schemeClr val="bg1"/>
+                          </a:solidFill>
+                          <a:latin typeface="Cambria Math" panose="02040503050406030204" pitchFamily="18" charset="0"/>
+                        </a:rPr>
+                        <m:t>  </m:t>
+                      </m:r>
+                      <m:r>
+                        <a:rPr lang="en-US" b="0" i="1" smtClean="0">
+                          <a:solidFill>
+                            <a:schemeClr val="bg1"/>
+                          </a:solidFill>
+                          <a:latin typeface="Cambria Math" panose="02040503050406030204" pitchFamily="18" charset="0"/>
+                        </a:rPr>
+                        <m:t>𝑧</m:t>
+                      </m:r>
+                      <m:r>
+                        <a:rPr lang="en-US" b="0" i="1" smtClean="0">
+                          <a:solidFill>
+                            <a:schemeClr val="bg1"/>
+                          </a:solidFill>
+                          <a:latin typeface="Cambria Math" panose="02040503050406030204" pitchFamily="18" charset="0"/>
+                        </a:rPr>
+                        <m:t>=3</m:t>
+                      </m:r>
+                    </m:oMath>
+                  </m:oMathPara>
+                </a14:m>
+                <a:endParaRPr lang="en-US" dirty="0">
+                  <a:solidFill>
+                    <a:schemeClr val="bg1"/>
+                  </a:solidFill>
+                </a:endParaRPr>
+              </a:p>
+              <a:p>
+                <a:pPr/>
+                <a14:m>
+                  <m:oMathPara xmlns:m="http://schemas.openxmlformats.org/officeDocument/2006/math">
+                    <m:oMathParaPr>
+                      <m:jc m:val="left"/>
+                    </m:oMathParaPr>
+                    <m:oMath xmlns:m="http://schemas.openxmlformats.org/officeDocument/2006/math">
+                      <m:r>
+                        <a:rPr lang="en-US" b="0" i="1" smtClean="0">
+                          <a:solidFill>
+                            <a:schemeClr val="bg1"/>
+                          </a:solidFill>
+                          <a:latin typeface="Cambria Math" panose="02040503050406030204" pitchFamily="18" charset="0"/>
+                        </a:rPr>
+                        <m:t>𝑐𝑡</m:t>
+                      </m:r>
+                      <m:r>
+                        <a:rPr lang="en-US" b="0" i="1" smtClean="0">
+                          <a:solidFill>
+                            <a:schemeClr val="bg1"/>
+                          </a:solidFill>
+                          <a:latin typeface="Cambria Math" panose="02040503050406030204" pitchFamily="18" charset="0"/>
+                        </a:rPr>
+                        <m:t>=1</m:t>
+                      </m:r>
+                    </m:oMath>
+                  </m:oMathPara>
+                </a14:m>
+                <a:endParaRPr lang="en-US" dirty="0">
+                  <a:solidFill>
+                    <a:schemeClr val="bg1"/>
+                  </a:solidFill>
+                </a:endParaRPr>
+              </a:p>
+              <a:p>
+                <a:endParaRPr lang="en-US" dirty="0">
+                  <a:solidFill>
+                    <a:schemeClr val="bg1"/>
+                  </a:solidFill>
+                </a:endParaRPr>
+              </a:p>
+              <a:p>
+                <a:r>
+                  <a:rPr lang="en-US" dirty="0" err="1">
+                    <a:solidFill>
+                      <a:schemeClr val="bg1"/>
+                    </a:solidFill>
+                  </a:rPr>
+                  <a:t>Abstand</a:t>
+                </a:r>
+                <a:r>
+                  <a:rPr lang="en-US" dirty="0">
+                    <a:solidFill>
+                      <a:schemeClr val="bg1"/>
+                    </a:solidFill>
+                  </a:rPr>
+                  <a:t> </a:t>
+                </a:r>
+                <a:r>
+                  <a:rPr lang="en-US" dirty="0" err="1">
+                    <a:solidFill>
+                      <a:schemeClr val="bg1"/>
+                    </a:solidFill>
+                  </a:rPr>
+                  <a:t>zwischen</a:t>
+                </a:r>
+                <a:r>
+                  <a:rPr lang="en-US" dirty="0">
+                    <a:solidFill>
+                      <a:schemeClr val="bg1"/>
+                    </a:solidFill>
+                  </a:rPr>
+                  <a:t> </a:t>
+                </a:r>
+                <a:r>
+                  <a:rPr lang="en-US" dirty="0" err="1">
+                    <a:solidFill>
+                      <a:schemeClr val="bg1"/>
+                    </a:solidFill>
+                  </a:rPr>
+                  <a:t>zwei</a:t>
+                </a:r>
+                <a:r>
+                  <a:rPr lang="en-US" dirty="0">
+                    <a:solidFill>
+                      <a:schemeClr val="bg1"/>
+                    </a:solidFill>
+                  </a:rPr>
+                  <a:t> </a:t>
+                </a:r>
+                <a:r>
+                  <a:rPr lang="en-US" dirty="0" err="1">
+                    <a:solidFill>
+                      <a:schemeClr val="bg1"/>
+                    </a:solidFill>
+                  </a:rPr>
+                  <a:t>Punkten</a:t>
+                </a:r>
+                <a:r>
+                  <a:rPr lang="en-US" dirty="0">
+                    <a:solidFill>
+                      <a:schemeClr val="bg1"/>
+                    </a:solidFill>
+                  </a:rPr>
+                  <a:t> </a:t>
+                </a:r>
+                <a:r>
+                  <a:rPr lang="en-US" dirty="0" err="1">
+                    <a:solidFill>
+                      <a:schemeClr val="bg1"/>
+                    </a:solidFill>
+                  </a:rPr>
+                  <a:t>entspricht</a:t>
+                </a:r>
+                <a:r>
+                  <a:rPr lang="en-US" dirty="0">
+                    <a:solidFill>
+                      <a:schemeClr val="bg1"/>
+                    </a:solidFill>
+                  </a:rPr>
+                  <a:t> </a:t>
+                </a:r>
+                <a:r>
+                  <a:rPr lang="en-US" dirty="0" err="1">
+                    <a:solidFill>
+                      <a:schemeClr val="bg1"/>
+                    </a:solidFill>
+                  </a:rPr>
+                  <a:t>nicht</a:t>
+                </a:r>
+                <a:r>
+                  <a:rPr lang="en-US" dirty="0">
+                    <a:solidFill>
+                      <a:schemeClr val="bg1"/>
+                    </a:solidFill>
+                  </a:rPr>
+                  <a:t> der </a:t>
+                </a:r>
+                <a:r>
+                  <a:rPr lang="en-US" dirty="0" err="1">
+                    <a:solidFill>
+                      <a:schemeClr val="bg1"/>
+                    </a:solidFill>
+                  </a:rPr>
+                  <a:t>direkten</a:t>
+                </a:r>
+                <a:r>
+                  <a:rPr lang="en-US" dirty="0">
+                    <a:solidFill>
+                      <a:schemeClr val="bg1"/>
+                    </a:solidFill>
+                  </a:rPr>
+                  <a:t> Linie, </a:t>
+                </a:r>
+                <a:r>
+                  <a:rPr lang="en-US" dirty="0" err="1">
+                    <a:solidFill>
+                      <a:schemeClr val="bg1"/>
+                    </a:solidFill>
+                  </a:rPr>
+                  <a:t>sondern</a:t>
+                </a:r>
+                <a:r>
+                  <a:rPr lang="en-US" dirty="0">
+                    <a:solidFill>
+                      <a:schemeClr val="bg1"/>
+                    </a:solidFill>
+                  </a:rPr>
+                  <a:t> dem </a:t>
+                </a:r>
+                <a:r>
+                  <a:rPr lang="en-US" dirty="0" err="1">
+                    <a:solidFill>
+                      <a:schemeClr val="bg1"/>
+                    </a:solidFill>
+                  </a:rPr>
+                  <a:t>Abstand</a:t>
+                </a:r>
+                <a:r>
+                  <a:rPr lang="en-US" dirty="0">
+                    <a:solidFill>
+                      <a:schemeClr val="bg1"/>
+                    </a:solidFill>
+                  </a:rPr>
+                  <a:t> </a:t>
+                </a:r>
+                <a:r>
+                  <a:rPr lang="en-US" dirty="0" err="1">
+                    <a:solidFill>
+                      <a:schemeClr val="bg1"/>
+                    </a:solidFill>
+                  </a:rPr>
+                  <a:t>entlang</a:t>
+                </a:r>
+                <a:r>
+                  <a:rPr lang="en-US" dirty="0">
+                    <a:solidFill>
+                      <a:schemeClr val="bg1"/>
+                    </a:solidFill>
+                  </a:rPr>
+                  <a:t> der </a:t>
+                </a:r>
+                <a:r>
+                  <a:rPr lang="en-US" dirty="0" err="1">
+                    <a:solidFill>
+                      <a:schemeClr val="bg1"/>
+                    </a:solidFill>
+                  </a:rPr>
+                  <a:t>Koordinatenachsen</a:t>
+                </a:r>
+                <a:endParaRPr lang="en-US" dirty="0">
+                  <a:solidFill>
+                    <a:schemeClr val="bg1"/>
+                  </a:solidFill>
+                </a:endParaRPr>
+              </a:p>
+              <a:p>
+                <a:endParaRPr lang="en-US" dirty="0">
+                  <a:solidFill>
+                    <a:schemeClr val="bg1"/>
+                  </a:solidFill>
+                </a:endParaRPr>
+              </a:p>
+              <a:p>
+                <a:pPr/>
+                <a14:m>
+                  <m:oMathPara xmlns:m="http://schemas.openxmlformats.org/officeDocument/2006/math">
+                    <m:oMathParaPr>
+                      <m:jc m:val="left"/>
+                    </m:oMathParaPr>
+                    <m:oMath xmlns:m="http://schemas.openxmlformats.org/officeDocument/2006/math">
+                      <m:r>
+                        <a:rPr lang="en-US" b="0" i="0" smtClean="0">
+                          <a:solidFill>
+                            <a:schemeClr val="bg1"/>
+                          </a:solidFill>
+                          <a:latin typeface="Cambria Math" panose="02040503050406030204" pitchFamily="18" charset="0"/>
+                        </a:rPr>
+                        <m:t>  </m:t>
+                      </m:r>
+                      <m:r>
+                        <m:rPr>
+                          <m:sty m:val="p"/>
+                        </m:rPr>
+                        <a:rPr lang="en-US" b="0" i="0" smtClean="0">
+                          <a:solidFill>
+                            <a:schemeClr val="bg1"/>
+                          </a:solidFill>
+                          <a:latin typeface="Cambria Math" panose="02040503050406030204" pitchFamily="18" charset="0"/>
+                        </a:rPr>
+                        <m:t>Δ</m:t>
+                      </m:r>
+                      <m:r>
+                        <a:rPr lang="en-US" b="0" i="1" smtClean="0">
+                          <a:solidFill>
+                            <a:schemeClr val="bg1"/>
+                          </a:solidFill>
+                          <a:latin typeface="Cambria Math" panose="02040503050406030204" pitchFamily="18" charset="0"/>
+                        </a:rPr>
+                        <m:t>𝑧</m:t>
+                      </m:r>
+                      <m:r>
+                        <a:rPr lang="en-US" b="0" i="1" smtClean="0">
+                          <a:solidFill>
+                            <a:schemeClr val="bg1"/>
+                          </a:solidFill>
+                          <a:latin typeface="Cambria Math" panose="02040503050406030204" pitchFamily="18" charset="0"/>
+                        </a:rPr>
+                        <m:t>=2</m:t>
+                      </m:r>
+                    </m:oMath>
+                  </m:oMathPara>
+                </a14:m>
+                <a:endParaRPr lang="en-US" dirty="0">
+                  <a:solidFill>
+                    <a:schemeClr val="bg1"/>
+                  </a:solidFill>
+                </a:endParaRPr>
+              </a:p>
+              <a:p>
+                <a:pPr/>
+                <a:r>
+                  <a:rPr lang="en-US" b="0" dirty="0">
+                    <a:solidFill>
+                      <a:schemeClr val="bg1"/>
+                    </a:solidFill>
+                  </a:rPr>
+                  <a:t>c</a:t>
+                </a:r>
+                <a14:m>
+                  <m:oMath xmlns:m="http://schemas.openxmlformats.org/officeDocument/2006/math">
+                    <m:r>
+                      <m:rPr>
+                        <m:sty m:val="p"/>
+                      </m:rPr>
+                      <a:rPr lang="en-US" b="0" i="0" smtClean="0">
+                        <a:solidFill>
+                          <a:schemeClr val="bg1"/>
+                        </a:solidFill>
+                        <a:latin typeface="Cambria Math" panose="02040503050406030204" pitchFamily="18" charset="0"/>
+                      </a:rPr>
+                      <m:t>Δ</m:t>
+                    </m:r>
+                    <m:r>
+                      <a:rPr lang="en-US" b="0" i="1" smtClean="0">
+                        <a:solidFill>
+                          <a:schemeClr val="bg1"/>
+                        </a:solidFill>
+                        <a:latin typeface="Cambria Math" panose="02040503050406030204" pitchFamily="18" charset="0"/>
+                      </a:rPr>
+                      <m:t>𝑡</m:t>
+                    </m:r>
+                    <m:r>
+                      <a:rPr lang="en-US" b="0" i="1" smtClean="0">
+                        <a:solidFill>
+                          <a:schemeClr val="bg1"/>
+                        </a:solidFill>
+                        <a:latin typeface="Cambria Math" panose="02040503050406030204" pitchFamily="18" charset="0"/>
+                      </a:rPr>
+                      <m:t>=1</m:t>
+                    </m:r>
+                  </m:oMath>
+                </a14:m>
+                <a:endParaRPr lang="en-US" dirty="0">
+                  <a:solidFill>
+                    <a:schemeClr val="bg1"/>
+                  </a:solidFill>
+                </a:endParaRPr>
+              </a:p>
+            </p:txBody>
+          </p:sp>
+        </mc:Choice>
+        <mc:Fallback>
+          <p:sp>
+            <p:nvSpPr>
+              <p:cNvPr id="5" name="TextBox 4">
+                <a:extLst>
+                  <a:ext uri="{FF2B5EF4-FFF2-40B4-BE49-F238E27FC236}">
+                    <a16:creationId xmlns:a16="http://schemas.microsoft.com/office/drawing/2014/main" id="{15CCCCA1-C522-ED31-7590-3FC773EEAF07}"/>
+                  </a:ext>
+                </a:extLst>
+              </p:cNvPr>
+              <p:cNvSpPr txBox="1">
+                <a:spLocks noRot="1" noChangeAspect="1" noMove="1" noResize="1" noEditPoints="1" noAdjustHandles="1" noChangeArrowheads="1" noChangeShapeType="1" noTextEdit="1"/>
+              </p:cNvSpPr>
+              <p:nvPr/>
+            </p:nvSpPr>
+            <p:spPr>
+              <a:xfrm>
+                <a:off x="8547652" y="153348"/>
+                <a:ext cx="3475855" cy="4524315"/>
+              </a:xfrm>
+              <a:prstGeom prst="rect">
+                <a:avLst/>
+              </a:prstGeom>
+              <a:blipFill>
+                <a:blip r:embed="rId2"/>
+                <a:stretch>
+                  <a:fillRect l="-1404" t="-674" r="-1579" b="-1213"/>
+                </a:stretch>
+              </a:blipFill>
+            </p:spPr>
+            <p:txBody>
+              <a:bodyPr/>
+              <a:lstStyle/>
+              <a:p>
+                <a:r>
+                  <a:rPr lang="en-CH">
+                    <a:noFill/>
+                  </a:rPr>
+                  <a:t> </a:t>
+                </a:r>
+              </a:p>
+            </p:txBody>
+          </p:sp>
+        </mc:Fallback>
+      </mc:AlternateContent>
+      <p:pic>
+        <p:nvPicPr>
+          <p:cNvPr id="4" name="Content Placeholder 3">
+            <a:extLst>
+              <a:ext uri="{FF2B5EF4-FFF2-40B4-BE49-F238E27FC236}">
+                <a16:creationId xmlns:a16="http://schemas.microsoft.com/office/drawing/2014/main" id="{BC1CF25B-4FDE-8199-8F07-6D5258AD803D}"/>
+              </a:ext>
+            </a:extLst>
+          </p:cNvPr>
+          <p:cNvPicPr>
+            <a:picLocks noGrp="1" noChangeAspect="1"/>
+          </p:cNvPicPr>
+          <p:nvPr>
+            <p:ph idx="1"/>
+          </p:nvPr>
+        </p:nvPicPr>
+        <p:blipFill>
+          <a:blip r:link="rId3"/>
+          <a:srcRect/>
+          <a:stretch>
+            <a:fillRect/>
+          </a:stretch>
+        </p:blipFill>
+        <p:spPr>
+          <a:xfrm>
+            <a:off x="439948" y="-422692"/>
+            <a:ext cx="7556740" cy="7556740"/>
+          </a:xfrm>
+        </p:spPr>
+      </p:pic>
+    </p:spTree>
+    <p:extLst>
+      <p:ext uri="{BB962C8B-B14F-4D97-AF65-F5344CB8AC3E}">
+        <p14:creationId xmlns:p14="http://schemas.microsoft.com/office/powerpoint/2010/main" val="3638297193"/>
+      </p:ext>
+    </p:extLst>
+  </p:cSld>
+  <p:clrMapOvr>
+    <a:masterClrMapping/>
+  </p:clrMapOvr>
+</p:sld>
+</file>
+
+<file path=ppt/slides/slide12.xml><?xml version="1.0" encoding="utf-8"?>
+<p:sld xmlns:a="http://schemas.openxmlformats.org/drawingml/2006/main" xmlns:r="http://schemas.openxmlformats.org/officeDocument/2006/relationships" xmlns:p="http://schemas.openxmlformats.org/presentationml/2006/main">
+  <p:cSld>
+    <p:spTree>
+      <p:nvGrpSpPr>
+        <p:cNvPr id="1" name="">
+          <a:extLst>
+            <a:ext uri="{FF2B5EF4-FFF2-40B4-BE49-F238E27FC236}">
               <a16:creationId xmlns:a16="http://schemas.microsoft.com/office/drawing/2014/main" id="{78433A00-2C99-2075-FCE1-683B869DA7A7}"/>
             </a:ext>
           </a:extLst>
@@ -6073,8 +7455,8 @@
           </a:p>
         </p:txBody>
       </p:sp>
-      <mc:AlternateContent xmlns:mc="http://schemas.openxmlformats.org/markup-compatibility/2006" xmlns:a14="http://schemas.microsoft.com/office/drawing/2010/main">
-        <mc:Choice Requires="a14">
+      <mc:AlternateContent xmlns:mc="http://schemas.openxmlformats.org/markup-compatibility/2006">
+        <mc:Choice xmlns:a14="http://schemas.microsoft.com/office/drawing/2010/main" Requires="a14">
           <p:sp>
             <p:nvSpPr>
               <p:cNvPr id="8" name="Content Placeholder 7">
@@ -6093,7 +7475,9 @@
             </p:nvSpPr>
             <p:spPr/>
             <p:txBody>
-              <a:bodyPr anchor="t"/>
+              <a:bodyPr anchor="t">
+                <a:normAutofit fontScale="92500" lnSpcReduction="20000"/>
+              </a:bodyPr>
               <a:lstStyle/>
               <a:p>
                 <a:r>
@@ -6746,10 +8130,68 @@
                 </a14:m>
                 <a:endParaRPr lang="en-US" b="0" dirty="0"/>
               </a:p>
+              <a:p>
+                <a:endParaRPr lang="en-US" dirty="0"/>
+              </a:p>
+              <a:p>
+                <a:r>
+                  <a:rPr lang="en-US" b="0" dirty="0"/>
+                  <a:t>Zur </a:t>
+                </a:r>
+                <a:r>
+                  <a:rPr lang="en-US" b="0" dirty="0" err="1"/>
+                  <a:t>einfachen</a:t>
+                </a:r>
+                <a:r>
+                  <a:rPr lang="en-US" b="0" dirty="0"/>
+                  <a:t> </a:t>
+                </a:r>
+                <a:r>
+                  <a:rPr lang="en-US" b="0" dirty="0" err="1"/>
+                  <a:t>Rechnung</a:t>
+                </a:r>
+                <a:r>
+                  <a:rPr lang="en-US" b="0" dirty="0"/>
+                  <a:t>: </a:t>
+                </a:r>
+                <a14:m>
+                  <m:oMath xmlns:m="http://schemas.openxmlformats.org/officeDocument/2006/math">
+                    <m:r>
+                      <a:rPr lang="en-US" b="0" i="1" smtClean="0">
+                        <a:latin typeface="Cambria Math" panose="02040503050406030204" pitchFamily="18" charset="0"/>
+                      </a:rPr>
+                      <m:t>𝑡</m:t>
+                    </m:r>
+                  </m:oMath>
+                </a14:m>
+                <a:r>
+                  <a:rPr lang="en-US" b="0" dirty="0"/>
+                  <a:t> in Jahren und </a:t>
+                </a:r>
+                <a14:m>
+                  <m:oMath xmlns:m="http://schemas.openxmlformats.org/officeDocument/2006/math">
+                    <m:r>
+                      <a:rPr lang="en-US" b="0" i="1" smtClean="0">
+                        <a:latin typeface="Cambria Math" panose="02040503050406030204" pitchFamily="18" charset="0"/>
+                      </a:rPr>
+                      <m:t>𝑧</m:t>
+                    </m:r>
+                  </m:oMath>
+                </a14:m>
+                <a:r>
+                  <a:rPr lang="en-US" b="0" dirty="0"/>
+                  <a:t> in </a:t>
+                </a:r>
+                <a:r>
+                  <a:rPr lang="en-US" b="0" dirty="0" err="1"/>
+                  <a:t>Lichtjahren</a:t>
+                </a:r>
+                <a:endParaRPr lang="en-US" b="0" dirty="0"/>
+              </a:p>
             </p:txBody>
           </p:sp>
         </mc:Choice>
-        <mc:Fallback xmlns="">
+        <mc:Fallback>
           <p:sp>
             <p:nvSpPr>
               <p:cNvPr id="8" name="Content Placeholder 7">
@@ -6770,7 +8212,7 @@
               <a:blipFill>
                 <a:blip r:embed="rId2"/>
                 <a:stretch>
-                  <a:fillRect l="-449" t="-839"/>
+                  <a:fillRect l="-337" t="-1846" r="-562"/>
                 </a:stretch>
               </a:blipFill>
             </p:spPr>
@@ -7035,123 +8477,220 @@
           </a:xfrm>
         </p:spPr>
       </p:pic>
-      <p:sp>
-        <p:nvSpPr>
-          <p:cNvPr id="2" name="TextBox 1">
-            <a:extLst>
-              <a:ext uri="{FF2B5EF4-FFF2-40B4-BE49-F238E27FC236}">
-                <a16:creationId xmlns:a16="http://schemas.microsoft.com/office/drawing/2014/main" id="{63F2C111-F291-2C52-453C-26534E9C5350}"/>
-              </a:ext>
-            </a:extLst>
-          </p:cNvPr>
-          <p:cNvSpPr txBox="1"/>
-          <p:nvPr/>
-        </p:nvSpPr>
-        <p:spPr>
-          <a:xfrm>
-            <a:off x="8547652" y="153348"/>
-            <a:ext cx="3475855" cy="923330"/>
-          </a:xfrm>
-          <a:prstGeom prst="rect">
-            <a:avLst/>
-          </a:prstGeom>
-          <a:noFill/>
-        </p:spPr>
-        <p:txBody>
-          <a:bodyPr wrap="square" rtlCol="0">
-            <a:spAutoFit/>
-          </a:bodyPr>
-          <a:lstStyle/>
-          <a:p>
-            <a:r>
-              <a:rPr lang="en-US" dirty="0">
-                <a:solidFill>
-                  <a:schemeClr val="bg1"/>
-                </a:solidFill>
-              </a:rPr>
-              <a:t>Ein </a:t>
-            </a:r>
-            <a:r>
-              <a:rPr lang="en-US" dirty="0" err="1">
-                <a:solidFill>
-                  <a:schemeClr val="bg1"/>
-                </a:solidFill>
-              </a:rPr>
-              <a:t>Ereignis</a:t>
-            </a:r>
-            <a:r>
-              <a:rPr lang="en-US" dirty="0">
-                <a:solidFill>
-                  <a:schemeClr val="bg1"/>
-                </a:solidFill>
-              </a:rPr>
-              <a:t> </a:t>
-            </a:r>
-            <a:r>
-              <a:rPr lang="en-US" dirty="0" err="1">
-                <a:solidFill>
-                  <a:schemeClr val="bg1"/>
-                </a:solidFill>
-              </a:rPr>
-              <a:t>mit</a:t>
-            </a:r>
-            <a:r>
-              <a:rPr lang="en-US" dirty="0">
-                <a:solidFill>
-                  <a:schemeClr val="bg1"/>
-                </a:solidFill>
-              </a:rPr>
-              <a:t> Ort und </a:t>
-            </a:r>
-            <a:r>
-              <a:rPr lang="en-US" dirty="0" err="1">
-                <a:solidFill>
-                  <a:schemeClr val="bg1"/>
-                </a:solidFill>
-              </a:rPr>
-              <a:t>Zeitpunkt</a:t>
-            </a:r>
-            <a:endParaRPr lang="en-US" dirty="0">
-              <a:solidFill>
-                <a:schemeClr val="bg1"/>
-              </a:solidFill>
-            </a:endParaRPr>
-          </a:p>
-          <a:p>
-            <a:r>
-              <a:rPr lang="en-US" dirty="0">
-                <a:solidFill>
-                  <a:schemeClr val="bg1"/>
-                </a:solidFill>
-              </a:rPr>
-              <a:t>z 	= 1</a:t>
-            </a:r>
-          </a:p>
-          <a:p>
-            <a:r>
-              <a:rPr lang="en-US" dirty="0" err="1">
-                <a:solidFill>
-                  <a:schemeClr val="bg1"/>
-                </a:solidFill>
-              </a:rPr>
-              <a:t>ct</a:t>
-            </a:r>
-            <a:r>
-              <a:rPr lang="en-US" dirty="0">
-                <a:solidFill>
-                  <a:schemeClr val="bg1"/>
-                </a:solidFill>
-              </a:rPr>
-              <a:t>	= 2</a:t>
-            </a:r>
-            <a:endParaRPr lang="en-CH" dirty="0">
-              <a:solidFill>
-                <a:schemeClr val="bg1"/>
-              </a:solidFill>
-            </a:endParaRPr>
-          </a:p>
-        </p:txBody>
-      </p:sp>
+      <mc:AlternateContent xmlns:mc="http://schemas.openxmlformats.org/markup-compatibility/2006">
+        <mc:Choice xmlns:a14="http://schemas.microsoft.com/office/drawing/2010/main" Requires="a14">
+          <p:sp>
+            <p:nvSpPr>
+              <p:cNvPr id="3" name="TextBox 2">
+                <a:extLst>
+                  <a:ext uri="{FF2B5EF4-FFF2-40B4-BE49-F238E27FC236}">
+                    <a16:creationId xmlns:a16="http://schemas.microsoft.com/office/drawing/2014/main" id="{2ED3D236-64B7-DD72-3607-2D46387E8454}"/>
+                  </a:ext>
+                </a:extLst>
+              </p:cNvPr>
+              <p:cNvSpPr txBox="1"/>
+              <p:nvPr/>
+            </p:nvSpPr>
+            <p:spPr>
+              <a:xfrm>
+                <a:off x="8547652" y="153348"/>
+                <a:ext cx="3475855" cy="923330"/>
+              </a:xfrm>
+              <a:prstGeom prst="rect">
+                <a:avLst/>
+              </a:prstGeom>
+              <a:noFill/>
+            </p:spPr>
+            <p:txBody>
+              <a:bodyPr wrap="square" rtlCol="0">
+                <a:spAutoFit/>
+              </a:bodyPr>
+              <a:lstStyle/>
+              <a:p>
+                <a:r>
+                  <a:rPr lang="en-US" dirty="0">
+                    <a:solidFill>
+                      <a:schemeClr val="bg1"/>
+                    </a:solidFill>
+                  </a:rPr>
+                  <a:t>Ein </a:t>
+                </a:r>
+                <a:r>
+                  <a:rPr lang="en-US" dirty="0" err="1">
+                    <a:solidFill>
+                      <a:schemeClr val="bg1"/>
+                    </a:solidFill>
+                  </a:rPr>
+                  <a:t>Ereignis</a:t>
+                </a:r>
+                <a:r>
+                  <a:rPr lang="en-US" dirty="0">
+                    <a:solidFill>
+                      <a:schemeClr val="bg1"/>
+                    </a:solidFill>
+                  </a:rPr>
+                  <a:t> </a:t>
+                </a:r>
+                <a:r>
+                  <a:rPr lang="en-US" dirty="0" err="1">
+                    <a:solidFill>
+                      <a:schemeClr val="bg1"/>
+                    </a:solidFill>
+                  </a:rPr>
+                  <a:t>mit</a:t>
+                </a:r>
+                <a:r>
+                  <a:rPr lang="en-US" dirty="0">
+                    <a:solidFill>
+                      <a:schemeClr val="bg1"/>
+                    </a:solidFill>
+                  </a:rPr>
+                  <a:t> Ort und </a:t>
+                </a:r>
+                <a:r>
+                  <a:rPr lang="en-US" dirty="0" err="1">
+                    <a:solidFill>
+                      <a:schemeClr val="bg1"/>
+                    </a:solidFill>
+                  </a:rPr>
+                  <a:t>Zeitpunkt</a:t>
+                </a:r>
+                <a:r>
+                  <a:rPr lang="en-US" dirty="0">
+                    <a:solidFill>
+                      <a:schemeClr val="bg1"/>
+                    </a:solidFill>
+                  </a:rPr>
+                  <a:t>:</a:t>
+                </a:r>
+              </a:p>
+              <a:p>
+                <a:pPr/>
+                <a14:m>
+                  <m:oMathPara xmlns:m="http://schemas.openxmlformats.org/officeDocument/2006/math">
+                    <m:oMathParaPr>
+                      <m:jc m:val="left"/>
+                    </m:oMathParaPr>
+                    <m:oMath xmlns:m="http://schemas.openxmlformats.org/officeDocument/2006/math">
+                      <m:r>
+                        <a:rPr lang="en-US" b="0" i="1" smtClean="0">
+                          <a:solidFill>
+                            <a:schemeClr val="bg1"/>
+                          </a:solidFill>
+                          <a:latin typeface="Cambria Math" panose="02040503050406030204" pitchFamily="18" charset="0"/>
+                        </a:rPr>
+                        <m:t> </m:t>
+                      </m:r>
+                      <m:r>
+                        <a:rPr lang="en-US" b="0" i="1" smtClean="0">
+                          <a:solidFill>
+                            <a:schemeClr val="bg1"/>
+                          </a:solidFill>
+                          <a:latin typeface="Cambria Math" panose="02040503050406030204" pitchFamily="18" charset="0"/>
+                        </a:rPr>
+                        <m:t>𝑧</m:t>
+                      </m:r>
+                      <m:r>
+                        <a:rPr lang="en-US" b="0" i="1" smtClean="0">
+                          <a:solidFill>
+                            <a:schemeClr val="bg1"/>
+                          </a:solidFill>
+                          <a:latin typeface="Cambria Math" panose="02040503050406030204" pitchFamily="18" charset="0"/>
+                        </a:rPr>
+                        <m:t>=1</m:t>
+                      </m:r>
+                    </m:oMath>
+                  </m:oMathPara>
+                </a14:m>
+                <a:endParaRPr lang="en-US" dirty="0">
+                  <a:solidFill>
+                    <a:schemeClr val="bg1"/>
+                  </a:solidFill>
+                </a:endParaRPr>
+              </a:p>
+              <a:p>
+                <a:pPr/>
+                <a14:m>
+                  <m:oMathPara xmlns:m="http://schemas.openxmlformats.org/officeDocument/2006/math">
+                    <m:oMathParaPr>
+                      <m:jc m:val="left"/>
+                    </m:oMathParaPr>
+                    <m:oMath xmlns:m="http://schemas.openxmlformats.org/officeDocument/2006/math">
+                      <m:r>
+                        <a:rPr lang="en-US" b="0" i="1" smtClean="0">
+                          <a:solidFill>
+                            <a:schemeClr val="bg1"/>
+                          </a:solidFill>
+                          <a:latin typeface="Cambria Math" panose="02040503050406030204" pitchFamily="18" charset="0"/>
+                        </a:rPr>
+                        <m:t>𝑐𝑡</m:t>
+                      </m:r>
+                      <m:r>
+                        <a:rPr lang="en-US" b="0" i="1" smtClean="0">
+                          <a:solidFill>
+                            <a:schemeClr val="bg1"/>
+                          </a:solidFill>
+                          <a:latin typeface="Cambria Math" panose="02040503050406030204" pitchFamily="18" charset="0"/>
+                        </a:rPr>
+                        <m:t>=2</m:t>
+                      </m:r>
+                    </m:oMath>
+                  </m:oMathPara>
+                </a14:m>
+                <a:endParaRPr lang="en-US" dirty="0">
+                  <a:solidFill>
+                    <a:schemeClr val="bg1"/>
+                  </a:solidFill>
+                </a:endParaRPr>
+              </a:p>
+            </p:txBody>
+          </p:sp>
+        </mc:Choice>
+        <mc:Fallback>
+          <p:sp>
+            <p:nvSpPr>
+              <p:cNvPr id="3" name="TextBox 2">
+                <a:extLst>
+                  <a:ext uri="{FF2B5EF4-FFF2-40B4-BE49-F238E27FC236}">
+                    <a16:creationId xmlns:a16="http://schemas.microsoft.com/office/drawing/2014/main" id="{2ED3D236-64B7-DD72-3607-2D46387E8454}"/>
+                  </a:ext>
+                </a:extLst>
+              </p:cNvPr>
+              <p:cNvSpPr txBox="1">
+                <a:spLocks noRot="1" noChangeAspect="1" noMove="1" noResize="1" noEditPoints="1" noAdjustHandles="1" noChangeArrowheads="1" noChangeShapeType="1" noTextEdit="1"/>
+              </p:cNvSpPr>
+              <p:nvPr/>
+            </p:nvSpPr>
+            <p:spPr>
+              <a:xfrm>
+                <a:off x="8547652" y="153348"/>
+                <a:ext cx="3475855" cy="923330"/>
+              </a:xfrm>
+              <a:prstGeom prst="rect">
+                <a:avLst/>
+              </a:prstGeom>
+              <a:blipFill>
+                <a:blip r:embed="rId3"/>
+                <a:stretch>
+                  <a:fillRect l="-1404" t="-3289" r="-1579"/>
+                </a:stretch>
+              </a:blipFill>
+            </p:spPr>
+            <p:txBody>
+              <a:bodyPr/>
+              <a:lstStyle/>
+              <a:p>
+                <a:r>
+                  <a:rPr lang="en-CH">
+                    <a:noFill/>
+                  </a:rPr>
+                  <a:t> </a:t>
+                </a:r>
+              </a:p>
+            </p:txBody>
+          </p:sp>
+        </mc:Fallback>
+      </mc:AlternateContent>
     </p:spTree>
     <p:extLst>
       <p:ext uri="{BB962C8B-B14F-4D97-AF65-F5344CB8AC3E}">
@@ -7218,236 +8757,338 @@
           </a:xfrm>
         </p:spPr>
       </p:pic>
-      <p:sp>
-        <p:nvSpPr>
-          <p:cNvPr id="3" name="TextBox 2">
-            <a:extLst>
-              <a:ext uri="{FF2B5EF4-FFF2-40B4-BE49-F238E27FC236}">
-                <a16:creationId xmlns:a16="http://schemas.microsoft.com/office/drawing/2014/main" id="{CDD10BD1-7356-F130-A708-E691778DE73F}"/>
-              </a:ext>
-            </a:extLst>
-          </p:cNvPr>
-          <p:cNvSpPr txBox="1"/>
-          <p:nvPr/>
-        </p:nvSpPr>
-        <p:spPr>
-          <a:xfrm>
-            <a:off x="8547652" y="153348"/>
-            <a:ext cx="3475855" cy="1754326"/>
-          </a:xfrm>
-          <a:prstGeom prst="rect">
-            <a:avLst/>
-          </a:prstGeom>
-          <a:noFill/>
-        </p:spPr>
-        <p:txBody>
-          <a:bodyPr wrap="square" rtlCol="0">
-            <a:spAutoFit/>
-          </a:bodyPr>
-          <a:lstStyle/>
-          <a:p>
-            <a:r>
-              <a:rPr lang="en-US" dirty="0">
-                <a:solidFill>
-                  <a:schemeClr val="bg1"/>
-                </a:solidFill>
-              </a:rPr>
-              <a:t>Ein </a:t>
-            </a:r>
-            <a:r>
-              <a:rPr lang="en-US" dirty="0" err="1">
-                <a:solidFill>
-                  <a:schemeClr val="bg1"/>
-                </a:solidFill>
-              </a:rPr>
-              <a:t>Ereignis</a:t>
-            </a:r>
-            <a:r>
-              <a:rPr lang="en-US" dirty="0">
-                <a:solidFill>
-                  <a:schemeClr val="bg1"/>
-                </a:solidFill>
-              </a:rPr>
-              <a:t> </a:t>
-            </a:r>
-            <a:r>
-              <a:rPr lang="en-US" dirty="0" err="1">
-                <a:solidFill>
-                  <a:schemeClr val="bg1"/>
-                </a:solidFill>
-              </a:rPr>
-              <a:t>mit</a:t>
-            </a:r>
-            <a:r>
-              <a:rPr lang="en-US" dirty="0">
-                <a:solidFill>
-                  <a:schemeClr val="bg1"/>
-                </a:solidFill>
-              </a:rPr>
-              <a:t> Ort und </a:t>
-            </a:r>
-            <a:r>
-              <a:rPr lang="en-US" dirty="0" err="1">
-                <a:solidFill>
-                  <a:schemeClr val="bg1"/>
-                </a:solidFill>
-              </a:rPr>
-              <a:t>Zeitpunkt</a:t>
-            </a:r>
-            <a:endParaRPr lang="en-US" dirty="0">
-              <a:solidFill>
-                <a:schemeClr val="bg1"/>
-              </a:solidFill>
-            </a:endParaRPr>
-          </a:p>
-          <a:p>
-            <a:r>
-              <a:rPr lang="en-US" dirty="0">
-                <a:solidFill>
-                  <a:schemeClr val="bg1"/>
-                </a:solidFill>
-              </a:rPr>
-              <a:t>z 	= 1</a:t>
-            </a:r>
-          </a:p>
-          <a:p>
-            <a:r>
-              <a:rPr lang="en-US" dirty="0" err="1">
-                <a:solidFill>
-                  <a:schemeClr val="bg1"/>
-                </a:solidFill>
-              </a:rPr>
-              <a:t>ct</a:t>
-            </a:r>
-            <a:r>
-              <a:rPr lang="en-US" dirty="0">
-                <a:solidFill>
-                  <a:schemeClr val="bg1"/>
-                </a:solidFill>
-              </a:rPr>
-              <a:t>	= 2</a:t>
-            </a:r>
-          </a:p>
-          <a:p>
-            <a:endParaRPr lang="en-US" dirty="0">
-              <a:solidFill>
-                <a:schemeClr val="bg1"/>
-              </a:solidFill>
-            </a:endParaRPr>
-          </a:p>
-          <a:p>
-            <a:r>
-              <a:rPr lang="en-US" dirty="0" err="1">
-                <a:solidFill>
-                  <a:schemeClr val="bg1"/>
-                </a:solidFill>
-              </a:rPr>
-              <a:t>Verbindung</a:t>
-            </a:r>
-            <a:r>
-              <a:rPr lang="en-US" dirty="0">
-                <a:solidFill>
-                  <a:schemeClr val="bg1"/>
-                </a:solidFill>
-              </a:rPr>
-              <a:t> </a:t>
-            </a:r>
-            <a:r>
-              <a:rPr lang="en-US" dirty="0" err="1">
-                <a:solidFill>
-                  <a:schemeClr val="bg1"/>
-                </a:solidFill>
-              </a:rPr>
-              <a:t>zu</a:t>
-            </a:r>
-            <a:r>
-              <a:rPr lang="en-US" dirty="0">
-                <a:solidFill>
-                  <a:schemeClr val="bg1"/>
-                </a:solidFill>
-              </a:rPr>
-              <a:t> den </a:t>
-            </a:r>
-            <a:r>
-              <a:rPr lang="en-US" dirty="0" err="1">
-                <a:solidFill>
-                  <a:schemeClr val="bg1"/>
-                </a:solidFill>
-              </a:rPr>
-              <a:t>Koordinaten</a:t>
-            </a:r>
-            <a:r>
-              <a:rPr lang="en-US" dirty="0">
-                <a:solidFill>
-                  <a:schemeClr val="bg1"/>
-                </a:solidFill>
-              </a:rPr>
-              <a:t>- </a:t>
-            </a:r>
-            <a:r>
-              <a:rPr lang="en-US" dirty="0" err="1">
-                <a:solidFill>
-                  <a:schemeClr val="bg1"/>
-                </a:solidFill>
-              </a:rPr>
-              <a:t>achsen</a:t>
-            </a:r>
-            <a:r>
-              <a:rPr lang="en-US" dirty="0">
-                <a:solidFill>
-                  <a:schemeClr val="bg1"/>
-                </a:solidFill>
-              </a:rPr>
-              <a:t> </a:t>
-            </a:r>
-            <a:r>
-              <a:rPr lang="en-US" dirty="0" err="1">
-                <a:solidFill>
-                  <a:schemeClr val="bg1"/>
-                </a:solidFill>
-              </a:rPr>
-              <a:t>zum</a:t>
-            </a:r>
-            <a:r>
-              <a:rPr lang="en-US" dirty="0">
-                <a:solidFill>
-                  <a:schemeClr val="bg1"/>
-                </a:solidFill>
-              </a:rPr>
-              <a:t> </a:t>
-            </a:r>
-            <a:r>
-              <a:rPr lang="en-US" dirty="0" err="1">
-                <a:solidFill>
-                  <a:schemeClr val="bg1"/>
-                </a:solidFill>
-              </a:rPr>
-              <a:t>Ablesen</a:t>
-            </a:r>
-            <a:r>
-              <a:rPr lang="en-US" dirty="0">
-                <a:solidFill>
-                  <a:schemeClr val="bg1"/>
-                </a:solidFill>
-              </a:rPr>
-              <a:t> der </a:t>
-            </a:r>
-            <a:r>
-              <a:rPr lang="en-US" dirty="0" err="1">
-                <a:solidFill>
-                  <a:schemeClr val="bg1"/>
-                </a:solidFill>
-              </a:rPr>
-              <a:t>Werte</a:t>
-            </a:r>
-            <a:endParaRPr lang="en-CH" dirty="0">
-              <a:solidFill>
-                <a:schemeClr val="bg1"/>
-              </a:solidFill>
-            </a:endParaRPr>
-          </a:p>
-        </p:txBody>
-      </p:sp>
+      <mc:AlternateContent xmlns:mc="http://schemas.openxmlformats.org/markup-compatibility/2006">
+        <mc:Choice xmlns:a14="http://schemas.microsoft.com/office/drawing/2010/main" Requires="a14">
+          <p:sp>
+            <p:nvSpPr>
+              <p:cNvPr id="2" name="TextBox 1">
+                <a:extLst>
+                  <a:ext uri="{FF2B5EF4-FFF2-40B4-BE49-F238E27FC236}">
+                    <a16:creationId xmlns:a16="http://schemas.microsoft.com/office/drawing/2014/main" id="{8B96C1A5-E49C-72C7-BF36-EF57C88D10F0}"/>
+                  </a:ext>
+                </a:extLst>
+              </p:cNvPr>
+              <p:cNvSpPr txBox="1"/>
+              <p:nvPr/>
+            </p:nvSpPr>
+            <p:spPr>
+              <a:xfrm>
+                <a:off x="8547652" y="153348"/>
+                <a:ext cx="3475855" cy="1754326"/>
+              </a:xfrm>
+              <a:prstGeom prst="rect">
+                <a:avLst/>
+              </a:prstGeom>
+              <a:noFill/>
+            </p:spPr>
+            <p:txBody>
+              <a:bodyPr wrap="square" rtlCol="0">
+                <a:spAutoFit/>
+              </a:bodyPr>
+              <a:lstStyle/>
+              <a:p>
+                <a:r>
+                  <a:rPr lang="en-US" dirty="0">
+                    <a:solidFill>
+                      <a:schemeClr val="bg1"/>
+                    </a:solidFill>
+                  </a:rPr>
+                  <a:t>Ein </a:t>
+                </a:r>
+                <a:r>
+                  <a:rPr lang="en-US" dirty="0" err="1">
+                    <a:solidFill>
+                      <a:schemeClr val="bg1"/>
+                    </a:solidFill>
+                  </a:rPr>
+                  <a:t>Ereignis</a:t>
+                </a:r>
+                <a:r>
+                  <a:rPr lang="en-US" dirty="0">
+                    <a:solidFill>
+                      <a:schemeClr val="bg1"/>
+                    </a:solidFill>
+                  </a:rPr>
+                  <a:t> </a:t>
+                </a:r>
+                <a:r>
+                  <a:rPr lang="en-US" dirty="0" err="1">
+                    <a:solidFill>
+                      <a:schemeClr val="bg1"/>
+                    </a:solidFill>
+                  </a:rPr>
+                  <a:t>mit</a:t>
+                </a:r>
+                <a:r>
+                  <a:rPr lang="en-US" dirty="0">
+                    <a:solidFill>
+                      <a:schemeClr val="bg1"/>
+                    </a:solidFill>
+                  </a:rPr>
+                  <a:t> Ort und </a:t>
+                </a:r>
+                <a:r>
+                  <a:rPr lang="en-US" dirty="0" err="1">
+                    <a:solidFill>
+                      <a:schemeClr val="bg1"/>
+                    </a:solidFill>
+                  </a:rPr>
+                  <a:t>Zeitpunkt</a:t>
+                </a:r>
+                <a:r>
+                  <a:rPr lang="en-US" dirty="0">
+                    <a:solidFill>
+                      <a:schemeClr val="bg1"/>
+                    </a:solidFill>
+                  </a:rPr>
+                  <a:t>:</a:t>
+                </a:r>
+              </a:p>
+              <a:p>
+                <a:pPr/>
+                <a14:m>
+                  <m:oMathPara xmlns:m="http://schemas.openxmlformats.org/officeDocument/2006/math">
+                    <m:oMathParaPr>
+                      <m:jc m:val="left"/>
+                    </m:oMathParaPr>
+                    <m:oMath xmlns:m="http://schemas.openxmlformats.org/officeDocument/2006/math">
+                      <m:r>
+                        <a:rPr lang="en-US" b="0" i="1" smtClean="0">
+                          <a:solidFill>
+                            <a:schemeClr val="bg1"/>
+                          </a:solidFill>
+                          <a:latin typeface="Cambria Math" panose="02040503050406030204" pitchFamily="18" charset="0"/>
+                        </a:rPr>
+                        <m:t> </m:t>
+                      </m:r>
+                      <m:r>
+                        <a:rPr lang="en-US" b="0" i="1" smtClean="0">
+                          <a:solidFill>
+                            <a:schemeClr val="bg1"/>
+                          </a:solidFill>
+                          <a:latin typeface="Cambria Math" panose="02040503050406030204" pitchFamily="18" charset="0"/>
+                        </a:rPr>
+                        <m:t>𝑧</m:t>
+                      </m:r>
+                      <m:r>
+                        <a:rPr lang="en-US" b="0" i="1" smtClean="0">
+                          <a:solidFill>
+                            <a:schemeClr val="bg1"/>
+                          </a:solidFill>
+                          <a:latin typeface="Cambria Math" panose="02040503050406030204" pitchFamily="18" charset="0"/>
+                        </a:rPr>
+                        <m:t>=1</m:t>
+                      </m:r>
+                    </m:oMath>
+                  </m:oMathPara>
+                </a14:m>
+                <a:endParaRPr lang="en-US" dirty="0">
+                  <a:solidFill>
+                    <a:schemeClr val="bg1"/>
+                  </a:solidFill>
+                </a:endParaRPr>
+              </a:p>
+              <a:p>
+                <a:pPr/>
+                <a14:m>
+                  <m:oMathPara xmlns:m="http://schemas.openxmlformats.org/officeDocument/2006/math">
+                    <m:oMathParaPr>
+                      <m:jc m:val="left"/>
+                    </m:oMathParaPr>
+                    <m:oMath xmlns:m="http://schemas.openxmlformats.org/officeDocument/2006/math">
+                      <m:r>
+                        <a:rPr lang="en-US" b="0" i="1" smtClean="0">
+                          <a:solidFill>
+                            <a:schemeClr val="bg1"/>
+                          </a:solidFill>
+                          <a:latin typeface="Cambria Math" panose="02040503050406030204" pitchFamily="18" charset="0"/>
+                        </a:rPr>
+                        <m:t>𝑐𝑡</m:t>
+                      </m:r>
+                      <m:r>
+                        <a:rPr lang="en-US" b="0" i="1" smtClean="0">
+                          <a:solidFill>
+                            <a:schemeClr val="bg1"/>
+                          </a:solidFill>
+                          <a:latin typeface="Cambria Math" panose="02040503050406030204" pitchFamily="18" charset="0"/>
+                        </a:rPr>
+                        <m:t>=2</m:t>
+                      </m:r>
+                    </m:oMath>
+                  </m:oMathPara>
+                </a14:m>
+                <a:endParaRPr lang="en-US" dirty="0">
+                  <a:solidFill>
+                    <a:schemeClr val="bg1"/>
+                  </a:solidFill>
+                </a:endParaRPr>
+              </a:p>
+              <a:p>
+                <a:endParaRPr lang="en-US" dirty="0">
+                  <a:solidFill>
+                    <a:schemeClr val="bg1"/>
+                  </a:solidFill>
+                </a:endParaRPr>
+              </a:p>
+              <a:p>
+                <a:r>
+                  <a:rPr lang="en-US" dirty="0" err="1">
+                    <a:solidFill>
+                      <a:schemeClr val="bg1"/>
+                    </a:solidFill>
+                  </a:rPr>
+                  <a:t>Verbindung</a:t>
+                </a:r>
+                <a:r>
+                  <a:rPr lang="en-US" dirty="0">
+                    <a:solidFill>
+                      <a:schemeClr val="bg1"/>
+                    </a:solidFill>
+                  </a:rPr>
+                  <a:t> </a:t>
+                </a:r>
+                <a:r>
+                  <a:rPr lang="en-US" dirty="0" err="1">
+                    <a:solidFill>
+                      <a:schemeClr val="bg1"/>
+                    </a:solidFill>
+                  </a:rPr>
+                  <a:t>zu</a:t>
+                </a:r>
+                <a:r>
+                  <a:rPr lang="en-US" dirty="0">
+                    <a:solidFill>
+                      <a:schemeClr val="bg1"/>
+                    </a:solidFill>
+                  </a:rPr>
+                  <a:t> den </a:t>
+                </a:r>
+                <a:r>
+                  <a:rPr lang="en-US" dirty="0" err="1">
+                    <a:solidFill>
+                      <a:schemeClr val="bg1"/>
+                    </a:solidFill>
+                  </a:rPr>
+                  <a:t>Koordinaten</a:t>
+                </a:r>
+                <a:r>
+                  <a:rPr lang="en-US" dirty="0">
+                    <a:solidFill>
+                      <a:schemeClr val="bg1"/>
+                    </a:solidFill>
+                  </a:rPr>
+                  <a:t>- </a:t>
+                </a:r>
+                <a:r>
+                  <a:rPr lang="en-US" dirty="0" err="1">
+                    <a:solidFill>
+                      <a:schemeClr val="bg1"/>
+                    </a:solidFill>
+                  </a:rPr>
+                  <a:t>achsen</a:t>
+                </a:r>
+                <a:r>
+                  <a:rPr lang="en-US" dirty="0">
+                    <a:solidFill>
+                      <a:schemeClr val="bg1"/>
+                    </a:solidFill>
+                  </a:rPr>
+                  <a:t> </a:t>
+                </a:r>
+                <a:r>
+                  <a:rPr lang="en-US" dirty="0" err="1">
+                    <a:solidFill>
+                      <a:schemeClr val="bg1"/>
+                    </a:solidFill>
+                  </a:rPr>
+                  <a:t>zum</a:t>
+                </a:r>
+                <a:r>
+                  <a:rPr lang="en-US" dirty="0">
+                    <a:solidFill>
+                      <a:schemeClr val="bg1"/>
+                    </a:solidFill>
+                  </a:rPr>
+                  <a:t> </a:t>
+                </a:r>
+                <a:r>
+                  <a:rPr lang="en-US" dirty="0" err="1">
+                    <a:solidFill>
+                      <a:schemeClr val="bg1"/>
+                    </a:solidFill>
+                  </a:rPr>
+                  <a:t>Ablesen</a:t>
+                </a:r>
+                <a:r>
+                  <a:rPr lang="en-US" dirty="0">
+                    <a:solidFill>
+                      <a:schemeClr val="bg1"/>
+                    </a:solidFill>
+                  </a:rPr>
+                  <a:t> der </a:t>
+                </a:r>
+                <a:r>
+                  <a:rPr lang="en-US" dirty="0" err="1">
+                    <a:solidFill>
+                      <a:schemeClr val="bg1"/>
+                    </a:solidFill>
+                  </a:rPr>
+                  <a:t>Werte</a:t>
+                </a:r>
+                <a:endParaRPr lang="en-US" dirty="0">
+                  <a:solidFill>
+                    <a:schemeClr val="bg1"/>
+                  </a:solidFill>
+                </a:endParaRPr>
+              </a:p>
+            </p:txBody>
+          </p:sp>
+        </mc:Choice>
+        <mc:Fallback>
+          <p:sp>
+            <p:nvSpPr>
+              <p:cNvPr id="2" name="TextBox 1">
+                <a:extLst>
+                  <a:ext uri="{FF2B5EF4-FFF2-40B4-BE49-F238E27FC236}">
+                    <a16:creationId xmlns:a16="http://schemas.microsoft.com/office/drawing/2014/main" id="{8B96C1A5-E49C-72C7-BF36-EF57C88D10F0}"/>
+                  </a:ext>
+                </a:extLst>
+              </p:cNvPr>
+              <p:cNvSpPr txBox="1">
+                <a:spLocks noRot="1" noChangeAspect="1" noMove="1" noResize="1" noEditPoints="1" noAdjustHandles="1" noChangeArrowheads="1" noChangeShapeType="1" noTextEdit="1"/>
+              </p:cNvSpPr>
+              <p:nvPr/>
+            </p:nvSpPr>
+            <p:spPr>
+              <a:xfrm>
+                <a:off x="8547652" y="153348"/>
+                <a:ext cx="3475855" cy="1754326"/>
+              </a:xfrm>
+              <a:prstGeom prst="rect">
+                <a:avLst/>
+              </a:prstGeom>
+              <a:blipFill>
+                <a:blip r:embed="rId3"/>
+                <a:stretch>
+                  <a:fillRect l="-1404" t="-1736" r="-1579" b="-4514"/>
+                </a:stretch>
+              </a:blipFill>
+            </p:spPr>
+            <p:txBody>
+              <a:bodyPr/>
+              <a:lstStyle/>
+              <a:p>
+                <a:r>
+                  <a:rPr lang="en-CH">
+                    <a:noFill/>
+                  </a:rPr>
+                  <a:t> </a:t>
+                </a:r>
+              </a:p>
+            </p:txBody>
+          </p:sp>
+        </mc:Fallback>
+      </mc:AlternateContent>
     </p:spTree>
     <p:extLst>
       <p:ext uri="{BB962C8B-B14F-4D97-AF65-F5344CB8AC3E}">
@@ -7514,415 +9155,400 @@
           </a:xfrm>
         </p:spPr>
       </p:pic>
-      <p:sp>
-        <p:nvSpPr>
-          <p:cNvPr id="3" name="TextBox 2">
-            <a:extLst>
-              <a:ext uri="{FF2B5EF4-FFF2-40B4-BE49-F238E27FC236}">
-                <a16:creationId xmlns:a16="http://schemas.microsoft.com/office/drawing/2014/main" id="{538B05DF-B9E2-7032-6C64-AF015E305838}"/>
-              </a:ext>
-            </a:extLst>
-          </p:cNvPr>
-          <p:cNvSpPr txBox="1"/>
-          <p:nvPr/>
-        </p:nvSpPr>
-        <p:spPr>
-          <a:xfrm>
-            <a:off x="8547652" y="153348"/>
-            <a:ext cx="3475855" cy="923330"/>
-          </a:xfrm>
-          <a:prstGeom prst="rect">
-            <a:avLst/>
-          </a:prstGeom>
-          <a:noFill/>
-        </p:spPr>
-        <p:txBody>
-          <a:bodyPr wrap="square" rtlCol="0">
-            <a:spAutoFit/>
-          </a:bodyPr>
-          <a:lstStyle/>
-          <a:p>
-            <a:r>
-              <a:rPr lang="en-US" dirty="0">
-                <a:solidFill>
-                  <a:schemeClr val="bg1"/>
-                </a:solidFill>
-              </a:rPr>
-              <a:t>Ein </a:t>
-            </a:r>
-            <a:r>
-              <a:rPr lang="en-US" dirty="0" err="1">
-                <a:solidFill>
-                  <a:schemeClr val="bg1"/>
-                </a:solidFill>
-              </a:rPr>
-              <a:t>Ereignis</a:t>
-            </a:r>
-            <a:r>
-              <a:rPr lang="en-US" dirty="0">
-                <a:solidFill>
-                  <a:schemeClr val="bg1"/>
-                </a:solidFill>
-              </a:rPr>
-              <a:t> </a:t>
-            </a:r>
-            <a:r>
-              <a:rPr lang="en-US" dirty="0" err="1">
-                <a:solidFill>
-                  <a:schemeClr val="bg1"/>
-                </a:solidFill>
-              </a:rPr>
-              <a:t>mit</a:t>
-            </a:r>
-            <a:r>
-              <a:rPr lang="en-US" dirty="0">
-                <a:solidFill>
-                  <a:schemeClr val="bg1"/>
-                </a:solidFill>
-              </a:rPr>
-              <a:t> Ort und </a:t>
-            </a:r>
-            <a:r>
-              <a:rPr lang="en-US" dirty="0" err="1">
-                <a:solidFill>
-                  <a:schemeClr val="bg1"/>
-                </a:solidFill>
-              </a:rPr>
-              <a:t>Zeitpunkt</a:t>
-            </a:r>
-            <a:endParaRPr lang="en-US" dirty="0">
-              <a:solidFill>
-                <a:schemeClr val="bg1"/>
-              </a:solidFill>
-            </a:endParaRPr>
-          </a:p>
-          <a:p>
-            <a:r>
-              <a:rPr lang="en-US" dirty="0">
-                <a:solidFill>
-                  <a:schemeClr val="bg1"/>
-                </a:solidFill>
-              </a:rPr>
-              <a:t>z 	= 1</a:t>
-            </a:r>
-          </a:p>
-          <a:p>
-            <a:r>
-              <a:rPr lang="en-US" dirty="0" err="1">
-                <a:solidFill>
-                  <a:schemeClr val="bg1"/>
-                </a:solidFill>
-              </a:rPr>
-              <a:t>ct</a:t>
-            </a:r>
-            <a:r>
-              <a:rPr lang="en-US" dirty="0">
-                <a:solidFill>
-                  <a:schemeClr val="bg1"/>
-                </a:solidFill>
-              </a:rPr>
-              <a:t>	= 2</a:t>
-            </a:r>
-            <a:endParaRPr lang="en-CH" dirty="0">
-              <a:solidFill>
-                <a:schemeClr val="bg1"/>
-              </a:solidFill>
-            </a:endParaRPr>
-          </a:p>
-        </p:txBody>
-      </p:sp>
-      <p:sp>
-        <p:nvSpPr>
-          <p:cNvPr id="5" name="TextBox 4">
-            <a:extLst>
-              <a:ext uri="{FF2B5EF4-FFF2-40B4-BE49-F238E27FC236}">
-                <a16:creationId xmlns:a16="http://schemas.microsoft.com/office/drawing/2014/main" id="{2E0203C9-3BCB-351B-5F39-37B652961F47}"/>
-              </a:ext>
-            </a:extLst>
-          </p:cNvPr>
-          <p:cNvSpPr txBox="1"/>
-          <p:nvPr/>
-        </p:nvSpPr>
-        <p:spPr>
-          <a:xfrm>
-            <a:off x="8547652" y="153348"/>
-            <a:ext cx="3475855" cy="2585323"/>
-          </a:xfrm>
-          <a:prstGeom prst="rect">
-            <a:avLst/>
-          </a:prstGeom>
-          <a:noFill/>
-        </p:spPr>
-        <p:txBody>
-          <a:bodyPr wrap="square" rtlCol="0">
-            <a:spAutoFit/>
-          </a:bodyPr>
-          <a:lstStyle/>
-          <a:p>
-            <a:r>
-              <a:rPr lang="en-US" dirty="0">
-                <a:solidFill>
-                  <a:schemeClr val="bg1"/>
-                </a:solidFill>
-              </a:rPr>
-              <a:t>Ein </a:t>
-            </a:r>
-            <a:r>
-              <a:rPr lang="en-US" dirty="0" err="1">
-                <a:solidFill>
-                  <a:schemeClr val="bg1"/>
-                </a:solidFill>
-              </a:rPr>
-              <a:t>Ereignis</a:t>
-            </a:r>
-            <a:r>
-              <a:rPr lang="en-US" dirty="0">
-                <a:solidFill>
-                  <a:schemeClr val="bg1"/>
-                </a:solidFill>
-              </a:rPr>
-              <a:t> </a:t>
-            </a:r>
-            <a:r>
-              <a:rPr lang="en-US" dirty="0" err="1">
-                <a:solidFill>
-                  <a:schemeClr val="bg1"/>
-                </a:solidFill>
-              </a:rPr>
-              <a:t>mit</a:t>
-            </a:r>
-            <a:r>
-              <a:rPr lang="en-US" dirty="0">
-                <a:solidFill>
-                  <a:schemeClr val="bg1"/>
-                </a:solidFill>
-              </a:rPr>
-              <a:t> Ort und </a:t>
-            </a:r>
-            <a:r>
-              <a:rPr lang="en-US" dirty="0" err="1">
-                <a:solidFill>
-                  <a:schemeClr val="bg1"/>
-                </a:solidFill>
-              </a:rPr>
-              <a:t>Zeitpunkt</a:t>
-            </a:r>
-            <a:endParaRPr lang="en-US" dirty="0">
-              <a:solidFill>
-                <a:schemeClr val="bg1"/>
-              </a:solidFill>
-            </a:endParaRPr>
-          </a:p>
-          <a:p>
-            <a:r>
-              <a:rPr lang="en-US" dirty="0">
-                <a:solidFill>
-                  <a:schemeClr val="bg1"/>
-                </a:solidFill>
-              </a:rPr>
-              <a:t>z 	= 1</a:t>
-            </a:r>
-          </a:p>
-          <a:p>
-            <a:r>
-              <a:rPr lang="en-US" dirty="0" err="1">
-                <a:solidFill>
-                  <a:schemeClr val="bg1"/>
-                </a:solidFill>
-              </a:rPr>
-              <a:t>ct</a:t>
-            </a:r>
-            <a:r>
-              <a:rPr lang="en-US" dirty="0">
-                <a:solidFill>
-                  <a:schemeClr val="bg1"/>
-                </a:solidFill>
-              </a:rPr>
-              <a:t>	= 2</a:t>
-            </a:r>
-          </a:p>
-          <a:p>
-            <a:endParaRPr lang="en-US" dirty="0">
-              <a:solidFill>
-                <a:schemeClr val="bg1"/>
-              </a:solidFill>
-            </a:endParaRPr>
-          </a:p>
-          <a:p>
-            <a:r>
-              <a:rPr lang="en-US" dirty="0" err="1">
-                <a:solidFill>
-                  <a:schemeClr val="bg1"/>
-                </a:solidFill>
-              </a:rPr>
-              <a:t>Verbindung</a:t>
-            </a:r>
-            <a:r>
-              <a:rPr lang="en-US" dirty="0">
-                <a:solidFill>
-                  <a:schemeClr val="bg1"/>
-                </a:solidFill>
-              </a:rPr>
-              <a:t> </a:t>
-            </a:r>
-            <a:r>
-              <a:rPr lang="en-US" dirty="0" err="1">
-                <a:solidFill>
-                  <a:schemeClr val="bg1"/>
-                </a:solidFill>
-              </a:rPr>
-              <a:t>zu</a:t>
-            </a:r>
-            <a:r>
-              <a:rPr lang="en-US" dirty="0">
-                <a:solidFill>
-                  <a:schemeClr val="bg1"/>
-                </a:solidFill>
-              </a:rPr>
-              <a:t> den </a:t>
-            </a:r>
-            <a:r>
-              <a:rPr lang="en-US" dirty="0" err="1">
-                <a:solidFill>
-                  <a:schemeClr val="bg1"/>
-                </a:solidFill>
-              </a:rPr>
-              <a:t>Koordinaten</a:t>
-            </a:r>
-            <a:r>
-              <a:rPr lang="en-US" dirty="0">
-                <a:solidFill>
-                  <a:schemeClr val="bg1"/>
-                </a:solidFill>
-              </a:rPr>
-              <a:t>- </a:t>
-            </a:r>
-            <a:r>
-              <a:rPr lang="en-US" dirty="0" err="1">
-                <a:solidFill>
-                  <a:schemeClr val="bg1"/>
-                </a:solidFill>
-              </a:rPr>
-              <a:t>achsen</a:t>
-            </a:r>
-            <a:r>
-              <a:rPr lang="en-US" dirty="0">
-                <a:solidFill>
-                  <a:schemeClr val="bg1"/>
-                </a:solidFill>
-              </a:rPr>
-              <a:t> </a:t>
-            </a:r>
-            <a:r>
-              <a:rPr lang="en-US" dirty="0" err="1">
-                <a:solidFill>
-                  <a:schemeClr val="bg1"/>
-                </a:solidFill>
-              </a:rPr>
-              <a:t>zum</a:t>
-            </a:r>
-            <a:r>
-              <a:rPr lang="en-US" dirty="0">
-                <a:solidFill>
-                  <a:schemeClr val="bg1"/>
-                </a:solidFill>
-              </a:rPr>
-              <a:t> </a:t>
-            </a:r>
-            <a:r>
-              <a:rPr lang="en-US" dirty="0" err="1">
-                <a:solidFill>
-                  <a:schemeClr val="bg1"/>
-                </a:solidFill>
-              </a:rPr>
-              <a:t>Ablesen</a:t>
-            </a:r>
-            <a:r>
-              <a:rPr lang="en-US" dirty="0">
-                <a:solidFill>
-                  <a:schemeClr val="bg1"/>
-                </a:solidFill>
-              </a:rPr>
-              <a:t> der </a:t>
-            </a:r>
-            <a:r>
-              <a:rPr lang="en-US" dirty="0" err="1">
-                <a:solidFill>
-                  <a:schemeClr val="bg1"/>
-                </a:solidFill>
-              </a:rPr>
-              <a:t>Werte</a:t>
-            </a:r>
-            <a:endParaRPr lang="en-US" dirty="0">
-              <a:solidFill>
-                <a:schemeClr val="bg1"/>
-              </a:solidFill>
-            </a:endParaRPr>
-          </a:p>
-          <a:p>
-            <a:endParaRPr lang="en-US" dirty="0">
-              <a:solidFill>
-                <a:schemeClr val="bg1"/>
-              </a:solidFill>
-            </a:endParaRPr>
-          </a:p>
-          <a:p>
-            <a:r>
-              <a:rPr lang="en-US" dirty="0" err="1">
-                <a:solidFill>
-                  <a:schemeClr val="bg1"/>
-                </a:solidFill>
-              </a:rPr>
-              <a:t>Messung</a:t>
-            </a:r>
-            <a:r>
-              <a:rPr lang="en-US" dirty="0">
-                <a:solidFill>
-                  <a:schemeClr val="bg1"/>
-                </a:solidFill>
-              </a:rPr>
-              <a:t> der </a:t>
-            </a:r>
-            <a:r>
-              <a:rPr lang="en-US" dirty="0" err="1">
-                <a:solidFill>
-                  <a:schemeClr val="bg1"/>
-                </a:solidFill>
-              </a:rPr>
-              <a:t>Entfernung</a:t>
-            </a:r>
-            <a:r>
-              <a:rPr lang="en-US" dirty="0">
-                <a:solidFill>
-                  <a:schemeClr val="bg1"/>
-                </a:solidFill>
-              </a:rPr>
-              <a:t> </a:t>
-            </a:r>
-            <a:r>
-              <a:rPr lang="en-US" dirty="0" err="1">
-                <a:solidFill>
-                  <a:schemeClr val="bg1"/>
-                </a:solidFill>
-              </a:rPr>
-              <a:t>zum</a:t>
-            </a:r>
-            <a:r>
-              <a:rPr lang="en-US" dirty="0">
-                <a:solidFill>
-                  <a:schemeClr val="bg1"/>
-                </a:solidFill>
-              </a:rPr>
-              <a:t> Ursprung</a:t>
-            </a:r>
-            <a:endParaRPr lang="en-CH" dirty="0">
-              <a:solidFill>
-                <a:schemeClr val="bg1"/>
-              </a:solidFill>
-            </a:endParaRPr>
-          </a:p>
-        </p:txBody>
-      </p:sp>
+      <mc:AlternateContent xmlns:mc="http://schemas.openxmlformats.org/markup-compatibility/2006">
+        <mc:Choice xmlns:a14="http://schemas.microsoft.com/office/drawing/2010/main" Requires="a14">
+          <p:sp>
+            <p:nvSpPr>
+              <p:cNvPr id="2" name="TextBox 1">
+                <a:extLst>
+                  <a:ext uri="{FF2B5EF4-FFF2-40B4-BE49-F238E27FC236}">
+                    <a16:creationId xmlns:a16="http://schemas.microsoft.com/office/drawing/2014/main" id="{FF09DD58-4549-B721-780E-3376F8012A63}"/>
+                  </a:ext>
+                </a:extLst>
+              </p:cNvPr>
+              <p:cNvSpPr txBox="1"/>
+              <p:nvPr/>
+            </p:nvSpPr>
+            <p:spPr>
+              <a:xfrm>
+                <a:off x="8547652" y="153348"/>
+                <a:ext cx="3475855" cy="2585323"/>
+              </a:xfrm>
+              <a:prstGeom prst="rect">
+                <a:avLst/>
+              </a:prstGeom>
+              <a:noFill/>
+            </p:spPr>
+            <p:txBody>
+              <a:bodyPr wrap="square" rtlCol="0">
+                <a:spAutoFit/>
+              </a:bodyPr>
+              <a:lstStyle/>
+              <a:p>
+                <a:r>
+                  <a:rPr lang="en-US" dirty="0">
+                    <a:solidFill>
+                      <a:schemeClr val="bg1"/>
+                    </a:solidFill>
+                  </a:rPr>
+                  <a:t>Ein </a:t>
+                </a:r>
+                <a:r>
+                  <a:rPr lang="en-US" dirty="0" err="1">
+                    <a:solidFill>
+                      <a:schemeClr val="bg1"/>
+                    </a:solidFill>
+                  </a:rPr>
+                  <a:t>Ereignis</a:t>
+                </a:r>
+                <a:r>
+                  <a:rPr lang="en-US" dirty="0">
+                    <a:solidFill>
+                      <a:schemeClr val="bg1"/>
+                    </a:solidFill>
+                  </a:rPr>
+                  <a:t> </a:t>
+                </a:r>
+                <a:r>
+                  <a:rPr lang="en-US" dirty="0" err="1">
+                    <a:solidFill>
+                      <a:schemeClr val="bg1"/>
+                    </a:solidFill>
+                  </a:rPr>
+                  <a:t>mit</a:t>
+                </a:r>
+                <a:r>
+                  <a:rPr lang="en-US" dirty="0">
+                    <a:solidFill>
+                      <a:schemeClr val="bg1"/>
+                    </a:solidFill>
+                  </a:rPr>
+                  <a:t> Ort und </a:t>
+                </a:r>
+                <a:r>
+                  <a:rPr lang="en-US" dirty="0" err="1">
+                    <a:solidFill>
+                      <a:schemeClr val="bg1"/>
+                    </a:solidFill>
+                  </a:rPr>
+                  <a:t>Zeitpunkt</a:t>
+                </a:r>
+                <a:r>
+                  <a:rPr lang="en-US" dirty="0">
+                    <a:solidFill>
+                      <a:schemeClr val="bg1"/>
+                    </a:solidFill>
+                  </a:rPr>
+                  <a:t>:</a:t>
+                </a:r>
+              </a:p>
+              <a:p>
+                <a:pPr/>
+                <a14:m>
+                  <m:oMathPara xmlns:m="http://schemas.openxmlformats.org/officeDocument/2006/math">
+                    <m:oMathParaPr>
+                      <m:jc m:val="left"/>
+                    </m:oMathParaPr>
+                    <m:oMath xmlns:m="http://schemas.openxmlformats.org/officeDocument/2006/math">
+                      <m:r>
+                        <a:rPr lang="en-US" b="0" i="1" smtClean="0">
+                          <a:solidFill>
+                            <a:schemeClr val="bg1"/>
+                          </a:solidFill>
+                          <a:latin typeface="Cambria Math" panose="02040503050406030204" pitchFamily="18" charset="0"/>
+                        </a:rPr>
+                        <m:t> </m:t>
+                      </m:r>
+                      <m:r>
+                        <a:rPr lang="en-US" b="0" i="1" smtClean="0">
+                          <a:solidFill>
+                            <a:schemeClr val="bg1"/>
+                          </a:solidFill>
+                          <a:latin typeface="Cambria Math" panose="02040503050406030204" pitchFamily="18" charset="0"/>
+                        </a:rPr>
+                        <m:t>𝑧</m:t>
+                      </m:r>
+                      <m:r>
+                        <a:rPr lang="en-US" b="0" i="1" smtClean="0">
+                          <a:solidFill>
+                            <a:schemeClr val="bg1"/>
+                          </a:solidFill>
+                          <a:latin typeface="Cambria Math" panose="02040503050406030204" pitchFamily="18" charset="0"/>
+                        </a:rPr>
+                        <m:t>=1</m:t>
+                      </m:r>
+                    </m:oMath>
+                  </m:oMathPara>
+                </a14:m>
+                <a:endParaRPr lang="en-US" dirty="0">
+                  <a:solidFill>
+                    <a:schemeClr val="bg1"/>
+                  </a:solidFill>
+                </a:endParaRPr>
+              </a:p>
+              <a:p>
+                <a:pPr/>
+                <a14:m>
+                  <m:oMathPara xmlns:m="http://schemas.openxmlformats.org/officeDocument/2006/math">
+                    <m:oMathParaPr>
+                      <m:jc m:val="left"/>
+                    </m:oMathParaPr>
+                    <m:oMath xmlns:m="http://schemas.openxmlformats.org/officeDocument/2006/math">
+                      <m:r>
+                        <a:rPr lang="en-US" b="0" i="1" smtClean="0">
+                          <a:solidFill>
+                            <a:schemeClr val="bg1"/>
+                          </a:solidFill>
+                          <a:latin typeface="Cambria Math" panose="02040503050406030204" pitchFamily="18" charset="0"/>
+                        </a:rPr>
+                        <m:t>𝑐𝑡</m:t>
+                      </m:r>
+                      <m:r>
+                        <a:rPr lang="en-US" b="0" i="1" smtClean="0">
+                          <a:solidFill>
+                            <a:schemeClr val="bg1"/>
+                          </a:solidFill>
+                          <a:latin typeface="Cambria Math" panose="02040503050406030204" pitchFamily="18" charset="0"/>
+                        </a:rPr>
+                        <m:t>=2</m:t>
+                      </m:r>
+                    </m:oMath>
+                  </m:oMathPara>
+                </a14:m>
+                <a:endParaRPr lang="en-US" dirty="0">
+                  <a:solidFill>
+                    <a:schemeClr val="bg1"/>
+                  </a:solidFill>
+                </a:endParaRPr>
+              </a:p>
+              <a:p>
+                <a:endParaRPr lang="en-US" dirty="0">
+                  <a:solidFill>
+                    <a:schemeClr val="bg1"/>
+                  </a:solidFill>
+                </a:endParaRPr>
+              </a:p>
+              <a:p>
+                <a:r>
+                  <a:rPr lang="en-US" dirty="0" err="1">
+                    <a:solidFill>
+                      <a:schemeClr val="bg1"/>
+                    </a:solidFill>
+                  </a:rPr>
+                  <a:t>Verbindung</a:t>
+                </a:r>
+                <a:r>
+                  <a:rPr lang="en-US" dirty="0">
+                    <a:solidFill>
+                      <a:schemeClr val="bg1"/>
+                    </a:solidFill>
+                  </a:rPr>
+                  <a:t> </a:t>
+                </a:r>
+                <a:r>
+                  <a:rPr lang="en-US" dirty="0" err="1">
+                    <a:solidFill>
+                      <a:schemeClr val="bg1"/>
+                    </a:solidFill>
+                  </a:rPr>
+                  <a:t>zu</a:t>
+                </a:r>
+                <a:r>
+                  <a:rPr lang="en-US" dirty="0">
+                    <a:solidFill>
+                      <a:schemeClr val="bg1"/>
+                    </a:solidFill>
+                  </a:rPr>
+                  <a:t> den </a:t>
+                </a:r>
+                <a:r>
+                  <a:rPr lang="en-US" dirty="0" err="1">
+                    <a:solidFill>
+                      <a:schemeClr val="bg1"/>
+                    </a:solidFill>
+                  </a:rPr>
+                  <a:t>Koordinaten</a:t>
+                </a:r>
+                <a:r>
+                  <a:rPr lang="en-US" dirty="0">
+                    <a:solidFill>
+                      <a:schemeClr val="bg1"/>
+                    </a:solidFill>
+                  </a:rPr>
+                  <a:t>- </a:t>
+                </a:r>
+                <a:r>
+                  <a:rPr lang="en-US" dirty="0" err="1">
+                    <a:solidFill>
+                      <a:schemeClr val="bg1"/>
+                    </a:solidFill>
+                  </a:rPr>
+                  <a:t>achsen</a:t>
+                </a:r>
+                <a:r>
+                  <a:rPr lang="en-US" dirty="0">
+                    <a:solidFill>
+                      <a:schemeClr val="bg1"/>
+                    </a:solidFill>
+                  </a:rPr>
+                  <a:t> </a:t>
+                </a:r>
+                <a:r>
+                  <a:rPr lang="en-US" dirty="0" err="1">
+                    <a:solidFill>
+                      <a:schemeClr val="bg1"/>
+                    </a:solidFill>
+                  </a:rPr>
+                  <a:t>zum</a:t>
+                </a:r>
+                <a:r>
+                  <a:rPr lang="en-US" dirty="0">
+                    <a:solidFill>
+                      <a:schemeClr val="bg1"/>
+                    </a:solidFill>
+                  </a:rPr>
+                  <a:t> </a:t>
+                </a:r>
+                <a:r>
+                  <a:rPr lang="en-US" dirty="0" err="1">
+                    <a:solidFill>
+                      <a:schemeClr val="bg1"/>
+                    </a:solidFill>
+                  </a:rPr>
+                  <a:t>Ablesen</a:t>
+                </a:r>
+                <a:r>
+                  <a:rPr lang="en-US" dirty="0">
+                    <a:solidFill>
+                      <a:schemeClr val="bg1"/>
+                    </a:solidFill>
+                  </a:rPr>
+                  <a:t> der </a:t>
+                </a:r>
+                <a:r>
+                  <a:rPr lang="en-US" dirty="0" err="1">
+                    <a:solidFill>
+                      <a:schemeClr val="bg1"/>
+                    </a:solidFill>
+                  </a:rPr>
+                  <a:t>Werte</a:t>
+                </a:r>
+                <a:endParaRPr lang="en-US" dirty="0">
+                  <a:solidFill>
+                    <a:schemeClr val="bg1"/>
+                  </a:solidFill>
+                </a:endParaRPr>
+              </a:p>
+              <a:p>
+                <a:endParaRPr lang="en-US" dirty="0">
+                  <a:solidFill>
+                    <a:schemeClr val="bg1"/>
+                  </a:solidFill>
+                </a:endParaRPr>
+              </a:p>
+              <a:p>
+                <a:r>
+                  <a:rPr lang="en-US" dirty="0" err="1">
+                    <a:solidFill>
+                      <a:schemeClr val="bg1"/>
+                    </a:solidFill>
+                  </a:rPr>
+                  <a:t>Messung</a:t>
+                </a:r>
+                <a:r>
+                  <a:rPr lang="en-US" dirty="0">
+                    <a:solidFill>
+                      <a:schemeClr val="bg1"/>
+                    </a:solidFill>
+                  </a:rPr>
+                  <a:t> der </a:t>
+                </a:r>
+                <a:r>
+                  <a:rPr lang="en-US" dirty="0" err="1">
+                    <a:solidFill>
+                      <a:schemeClr val="bg1"/>
+                    </a:solidFill>
+                  </a:rPr>
+                  <a:t>Entfernung</a:t>
+                </a:r>
+                <a:r>
+                  <a:rPr lang="en-US" dirty="0">
+                    <a:solidFill>
+                      <a:schemeClr val="bg1"/>
+                    </a:solidFill>
+                  </a:rPr>
+                  <a:t> </a:t>
+                </a:r>
+                <a:r>
+                  <a:rPr lang="en-US" dirty="0" err="1">
+                    <a:solidFill>
+                      <a:schemeClr val="bg1"/>
+                    </a:solidFill>
+                  </a:rPr>
+                  <a:t>zum</a:t>
+                </a:r>
+                <a:r>
+                  <a:rPr lang="en-US" dirty="0">
+                    <a:solidFill>
+                      <a:schemeClr val="bg1"/>
+                    </a:solidFill>
+                  </a:rPr>
+                  <a:t> Ursprung</a:t>
+                </a:r>
+                <a:endParaRPr lang="en-CH" dirty="0">
+                  <a:solidFill>
+                    <a:schemeClr val="bg1"/>
+                  </a:solidFill>
+                </a:endParaRPr>
+              </a:p>
+            </p:txBody>
+          </p:sp>
+        </mc:Choice>
+        <mc:Fallback>
+          <p:sp>
+            <p:nvSpPr>
+              <p:cNvPr id="2" name="TextBox 1">
+                <a:extLst>
+                  <a:ext uri="{FF2B5EF4-FFF2-40B4-BE49-F238E27FC236}">
+                    <a16:creationId xmlns:a16="http://schemas.microsoft.com/office/drawing/2014/main" id="{FF09DD58-4549-B721-780E-3376F8012A63}"/>
+                  </a:ext>
+                </a:extLst>
+              </p:cNvPr>
+              <p:cNvSpPr txBox="1">
+                <a:spLocks noRot="1" noChangeAspect="1" noMove="1" noResize="1" noEditPoints="1" noAdjustHandles="1" noChangeArrowheads="1" noChangeShapeType="1" noTextEdit="1"/>
+              </p:cNvSpPr>
+              <p:nvPr/>
+            </p:nvSpPr>
+            <p:spPr>
+              <a:xfrm>
+                <a:off x="8547652" y="153348"/>
+                <a:ext cx="3475855" cy="2585323"/>
+              </a:xfrm>
+              <a:prstGeom prst="rect">
+                <a:avLst/>
+              </a:prstGeom>
+              <a:blipFill>
+                <a:blip r:embed="rId3"/>
+                <a:stretch>
+                  <a:fillRect l="-1404" t="-1179" r="-1579" b="-2830"/>
+                </a:stretch>
+              </a:blipFill>
+            </p:spPr>
+            <p:txBody>
+              <a:bodyPr/>
+              <a:lstStyle/>
+              <a:p>
+                <a:r>
+                  <a:rPr lang="en-CH">
+                    <a:noFill/>
+                  </a:rPr>
+                  <a:t> </a:t>
+                </a:r>
+              </a:p>
+            </p:txBody>
+          </p:sp>
+        </mc:Fallback>
+      </mc:AlternateContent>
     </p:spTree>
     <p:extLst>
       <p:ext uri="{BB962C8B-B14F-4D97-AF65-F5344CB8AC3E}">
@@ -7989,354 +9615,380 @@
           </a:xfrm>
         </p:spPr>
       </p:pic>
-      <p:sp>
-        <p:nvSpPr>
-          <p:cNvPr id="3" name="TextBox 2">
-            <a:extLst>
-              <a:ext uri="{FF2B5EF4-FFF2-40B4-BE49-F238E27FC236}">
-                <a16:creationId xmlns:a16="http://schemas.microsoft.com/office/drawing/2014/main" id="{DA64A5E4-3E56-FFEF-4FEF-09E10D0C516D}"/>
-              </a:ext>
-            </a:extLst>
-          </p:cNvPr>
-          <p:cNvSpPr txBox="1"/>
-          <p:nvPr/>
-        </p:nvSpPr>
-        <p:spPr>
-          <a:xfrm>
-            <a:off x="8547652" y="153348"/>
-            <a:ext cx="3475855" cy="923330"/>
-          </a:xfrm>
-          <a:prstGeom prst="rect">
-            <a:avLst/>
-          </a:prstGeom>
-          <a:noFill/>
-        </p:spPr>
-        <p:txBody>
-          <a:bodyPr wrap="square" rtlCol="0">
-            <a:spAutoFit/>
-          </a:bodyPr>
-          <a:lstStyle/>
-          <a:p>
-            <a:r>
-              <a:rPr lang="en-US" dirty="0">
-                <a:solidFill>
-                  <a:schemeClr val="bg1"/>
-                </a:solidFill>
-              </a:rPr>
-              <a:t>Ein </a:t>
-            </a:r>
-            <a:r>
-              <a:rPr lang="en-US" dirty="0" err="1">
-                <a:solidFill>
-                  <a:schemeClr val="bg1"/>
-                </a:solidFill>
-              </a:rPr>
-              <a:t>Ereignis</a:t>
-            </a:r>
-            <a:r>
-              <a:rPr lang="en-US" dirty="0">
-                <a:solidFill>
-                  <a:schemeClr val="bg1"/>
-                </a:solidFill>
-              </a:rPr>
-              <a:t> </a:t>
-            </a:r>
-            <a:r>
-              <a:rPr lang="en-US" dirty="0" err="1">
-                <a:solidFill>
-                  <a:schemeClr val="bg1"/>
-                </a:solidFill>
-              </a:rPr>
-              <a:t>mit</a:t>
-            </a:r>
-            <a:r>
-              <a:rPr lang="en-US" dirty="0">
-                <a:solidFill>
-                  <a:schemeClr val="bg1"/>
-                </a:solidFill>
-              </a:rPr>
-              <a:t> Ort und </a:t>
-            </a:r>
-            <a:r>
-              <a:rPr lang="en-US" dirty="0" err="1">
-                <a:solidFill>
-                  <a:schemeClr val="bg1"/>
-                </a:solidFill>
-              </a:rPr>
-              <a:t>Zeitpunkt</a:t>
-            </a:r>
-            <a:endParaRPr lang="en-US" dirty="0">
-              <a:solidFill>
-                <a:schemeClr val="bg1"/>
-              </a:solidFill>
-            </a:endParaRPr>
-          </a:p>
-          <a:p>
-            <a:r>
-              <a:rPr lang="en-US" dirty="0">
-                <a:solidFill>
-                  <a:schemeClr val="bg1"/>
-                </a:solidFill>
-              </a:rPr>
-              <a:t>z 	= 1</a:t>
-            </a:r>
-          </a:p>
-          <a:p>
-            <a:r>
-              <a:rPr lang="en-US" dirty="0" err="1">
-                <a:solidFill>
-                  <a:schemeClr val="bg1"/>
-                </a:solidFill>
-              </a:rPr>
-              <a:t>ct</a:t>
-            </a:r>
-            <a:r>
-              <a:rPr lang="en-US" dirty="0">
-                <a:solidFill>
-                  <a:schemeClr val="bg1"/>
-                </a:solidFill>
-              </a:rPr>
-              <a:t>	= 2</a:t>
-            </a:r>
-            <a:endParaRPr lang="en-CH" dirty="0">
-              <a:solidFill>
-                <a:schemeClr val="bg1"/>
-              </a:solidFill>
-            </a:endParaRPr>
-          </a:p>
-        </p:txBody>
-      </p:sp>
-      <p:sp>
-        <p:nvSpPr>
-          <p:cNvPr id="5" name="TextBox 4">
-            <a:extLst>
-              <a:ext uri="{FF2B5EF4-FFF2-40B4-BE49-F238E27FC236}">
-                <a16:creationId xmlns:a16="http://schemas.microsoft.com/office/drawing/2014/main" id="{0DF893C6-E993-9B27-59F6-74AFEB9BA0FD}"/>
-              </a:ext>
-            </a:extLst>
-          </p:cNvPr>
-          <p:cNvSpPr txBox="1"/>
-          <p:nvPr/>
-        </p:nvSpPr>
-        <p:spPr>
-          <a:xfrm>
-            <a:off x="8547652" y="153348"/>
-            <a:ext cx="3475855" cy="2585323"/>
-          </a:xfrm>
-          <a:prstGeom prst="rect">
-            <a:avLst/>
-          </a:prstGeom>
-          <a:noFill/>
-        </p:spPr>
-        <p:txBody>
-          <a:bodyPr wrap="square" rtlCol="0">
-            <a:spAutoFit/>
-          </a:bodyPr>
-          <a:lstStyle/>
-          <a:p>
-            <a:r>
-              <a:rPr lang="en-US" dirty="0">
-                <a:solidFill>
-                  <a:schemeClr val="bg1"/>
-                </a:solidFill>
-              </a:rPr>
-              <a:t>Ein </a:t>
-            </a:r>
-            <a:r>
-              <a:rPr lang="en-US" dirty="0" err="1">
-                <a:solidFill>
-                  <a:schemeClr val="bg1"/>
-                </a:solidFill>
-              </a:rPr>
-              <a:t>Ereignis</a:t>
-            </a:r>
-            <a:r>
-              <a:rPr lang="en-US" dirty="0">
-                <a:solidFill>
-                  <a:schemeClr val="bg1"/>
-                </a:solidFill>
-              </a:rPr>
-              <a:t> </a:t>
-            </a:r>
-            <a:r>
-              <a:rPr lang="en-US" dirty="0" err="1">
-                <a:solidFill>
-                  <a:schemeClr val="bg1"/>
-                </a:solidFill>
-              </a:rPr>
-              <a:t>mit</a:t>
-            </a:r>
-            <a:r>
-              <a:rPr lang="en-US" dirty="0">
-                <a:solidFill>
-                  <a:schemeClr val="bg1"/>
-                </a:solidFill>
-              </a:rPr>
-              <a:t> Ort und </a:t>
-            </a:r>
-            <a:r>
-              <a:rPr lang="en-US" dirty="0" err="1">
-                <a:solidFill>
-                  <a:schemeClr val="bg1"/>
-                </a:solidFill>
-              </a:rPr>
-              <a:t>Zeitpunkt</a:t>
-            </a:r>
-            <a:r>
-              <a:rPr lang="en-US" dirty="0">
-                <a:solidFill>
-                  <a:schemeClr val="bg1"/>
-                </a:solidFill>
-              </a:rPr>
-              <a:t>:</a:t>
-            </a:r>
-          </a:p>
-          <a:p>
-            <a:r>
-              <a:rPr lang="en-US" dirty="0">
-                <a:solidFill>
-                  <a:schemeClr val="bg1"/>
-                </a:solidFill>
-              </a:rPr>
-              <a:t>z 	= 1</a:t>
-            </a:r>
-          </a:p>
-          <a:p>
-            <a:r>
-              <a:rPr lang="en-US" dirty="0" err="1">
-                <a:solidFill>
-                  <a:schemeClr val="bg1"/>
-                </a:solidFill>
-              </a:rPr>
-              <a:t>ct</a:t>
-            </a:r>
-            <a:r>
-              <a:rPr lang="en-US" dirty="0">
-                <a:solidFill>
-                  <a:schemeClr val="bg1"/>
-                </a:solidFill>
-              </a:rPr>
-              <a:t>	= 2</a:t>
-            </a:r>
-          </a:p>
-          <a:p>
-            <a:endParaRPr lang="en-US" dirty="0">
-              <a:solidFill>
-                <a:schemeClr val="bg1"/>
-              </a:solidFill>
-            </a:endParaRPr>
-          </a:p>
-          <a:p>
-            <a:r>
-              <a:rPr lang="en-US" dirty="0">
-                <a:solidFill>
-                  <a:schemeClr val="bg1"/>
-                </a:solidFill>
-              </a:rPr>
-              <a:t>Ein </a:t>
-            </a:r>
-            <a:r>
-              <a:rPr lang="en-US" dirty="0" err="1">
-                <a:solidFill>
-                  <a:schemeClr val="bg1"/>
-                </a:solidFill>
-              </a:rPr>
-              <a:t>zeites</a:t>
-            </a:r>
-            <a:r>
-              <a:rPr lang="en-US" dirty="0">
-                <a:solidFill>
-                  <a:schemeClr val="bg1"/>
-                </a:solidFill>
-              </a:rPr>
-              <a:t> </a:t>
-            </a:r>
-            <a:r>
-              <a:rPr lang="en-US" dirty="0" err="1">
-                <a:solidFill>
-                  <a:schemeClr val="bg1"/>
-                </a:solidFill>
-              </a:rPr>
-              <a:t>Ereignis</a:t>
-            </a:r>
-            <a:r>
-              <a:rPr lang="en-US" dirty="0">
-                <a:solidFill>
-                  <a:schemeClr val="bg1"/>
-                </a:solidFill>
-              </a:rPr>
-              <a:t> </a:t>
-            </a:r>
-            <a:r>
-              <a:rPr lang="en-US" dirty="0" err="1">
-                <a:solidFill>
-                  <a:schemeClr val="bg1"/>
-                </a:solidFill>
-              </a:rPr>
-              <a:t>mit</a:t>
-            </a:r>
-            <a:r>
-              <a:rPr lang="en-US" dirty="0">
-                <a:solidFill>
-                  <a:schemeClr val="bg1"/>
-                </a:solidFill>
-              </a:rPr>
-              <a:t> Ort und </a:t>
-            </a:r>
-            <a:r>
-              <a:rPr lang="en-US" dirty="0" err="1">
-                <a:solidFill>
-                  <a:schemeClr val="bg1"/>
-                </a:solidFill>
-              </a:rPr>
-              <a:t>Zeitpunkt</a:t>
-            </a:r>
-            <a:r>
-              <a:rPr lang="en-US" dirty="0">
-                <a:solidFill>
-                  <a:schemeClr val="bg1"/>
-                </a:solidFill>
-              </a:rPr>
-              <a:t>:</a:t>
-            </a:r>
-          </a:p>
-          <a:p>
-            <a:r>
-              <a:rPr lang="en-US" dirty="0">
-                <a:solidFill>
-                  <a:schemeClr val="bg1"/>
-                </a:solidFill>
-              </a:rPr>
-              <a:t>z 	= 3</a:t>
-            </a:r>
-          </a:p>
-          <a:p>
-            <a:r>
-              <a:rPr lang="en-US" dirty="0" err="1">
-                <a:solidFill>
-                  <a:schemeClr val="bg1"/>
-                </a:solidFill>
-              </a:rPr>
-              <a:t>ct</a:t>
-            </a:r>
-            <a:r>
-              <a:rPr lang="en-US" dirty="0">
-                <a:solidFill>
-                  <a:schemeClr val="bg1"/>
-                </a:solidFill>
-              </a:rPr>
-              <a:t>	= 1</a:t>
-            </a:r>
-          </a:p>
-          <a:p>
-            <a:endParaRPr lang="en-CH" dirty="0">
-              <a:solidFill>
-                <a:schemeClr val="bg1"/>
-              </a:solidFill>
-            </a:endParaRPr>
-          </a:p>
-        </p:txBody>
-      </p:sp>
+      <mc:AlternateContent xmlns:mc="http://schemas.openxmlformats.org/markup-compatibility/2006">
+        <mc:Choice xmlns:a14="http://schemas.microsoft.com/office/drawing/2010/main" Requires="a14">
+          <p:sp>
+            <p:nvSpPr>
+              <p:cNvPr id="2" name="TextBox 1">
+                <a:extLst>
+                  <a:ext uri="{FF2B5EF4-FFF2-40B4-BE49-F238E27FC236}">
+                    <a16:creationId xmlns:a16="http://schemas.microsoft.com/office/drawing/2014/main" id="{5FED4D48-83D0-818A-2834-82022D5597FD}"/>
+                  </a:ext>
+                </a:extLst>
+              </p:cNvPr>
+              <p:cNvSpPr txBox="1"/>
+              <p:nvPr/>
+            </p:nvSpPr>
+            <p:spPr>
+              <a:xfrm>
+                <a:off x="8547652" y="153348"/>
+                <a:ext cx="3475855" cy="2308324"/>
+              </a:xfrm>
+              <a:prstGeom prst="rect">
+                <a:avLst/>
+              </a:prstGeom>
+              <a:noFill/>
+            </p:spPr>
+            <p:txBody>
+              <a:bodyPr wrap="square" rtlCol="0">
+                <a:spAutoFit/>
+              </a:bodyPr>
+              <a:lstStyle/>
+              <a:p>
+                <a:r>
+                  <a:rPr lang="en-US" dirty="0">
+                    <a:solidFill>
+                      <a:schemeClr val="bg1"/>
+                    </a:solidFill>
+                  </a:rPr>
+                  <a:t>Ein </a:t>
+                </a:r>
+                <a:r>
+                  <a:rPr lang="en-US" dirty="0" err="1">
+                    <a:solidFill>
+                      <a:schemeClr val="bg1"/>
+                    </a:solidFill>
+                  </a:rPr>
+                  <a:t>Ereignis</a:t>
+                </a:r>
+                <a:r>
+                  <a:rPr lang="en-US" dirty="0">
+                    <a:solidFill>
+                      <a:schemeClr val="bg1"/>
+                    </a:solidFill>
+                  </a:rPr>
+                  <a:t> </a:t>
+                </a:r>
+                <a:r>
+                  <a:rPr lang="en-US" dirty="0" err="1">
+                    <a:solidFill>
+                      <a:schemeClr val="bg1"/>
+                    </a:solidFill>
+                  </a:rPr>
+                  <a:t>mit</a:t>
+                </a:r>
+                <a:r>
+                  <a:rPr lang="en-US" dirty="0">
+                    <a:solidFill>
+                      <a:schemeClr val="bg1"/>
+                    </a:solidFill>
+                  </a:rPr>
+                  <a:t> Ort und </a:t>
+                </a:r>
+                <a:r>
+                  <a:rPr lang="en-US" dirty="0" err="1">
+                    <a:solidFill>
+                      <a:schemeClr val="bg1"/>
+                    </a:solidFill>
+                  </a:rPr>
+                  <a:t>Zeitpunkt</a:t>
+                </a:r>
+                <a:r>
+                  <a:rPr lang="en-US" dirty="0">
+                    <a:solidFill>
+                      <a:schemeClr val="bg1"/>
+                    </a:solidFill>
+                  </a:rPr>
+                  <a:t>:</a:t>
+                </a:r>
+              </a:p>
+              <a:p>
+                <a:pPr/>
+                <a14:m>
+                  <m:oMathPara xmlns:m="http://schemas.openxmlformats.org/officeDocument/2006/math">
+                    <m:oMathParaPr>
+                      <m:jc m:val="left"/>
+                    </m:oMathParaPr>
+                    <m:oMath xmlns:m="http://schemas.openxmlformats.org/officeDocument/2006/math">
+                      <m:r>
+                        <a:rPr lang="en-US" b="0" i="1" smtClean="0">
+                          <a:solidFill>
+                            <a:schemeClr val="bg1"/>
+                          </a:solidFill>
+                          <a:latin typeface="Cambria Math" panose="02040503050406030204" pitchFamily="18" charset="0"/>
+                        </a:rPr>
+                        <m:t> </m:t>
+                      </m:r>
+                      <m:r>
+                        <a:rPr lang="en-US" b="0" i="1" smtClean="0">
+                          <a:solidFill>
+                            <a:schemeClr val="bg1"/>
+                          </a:solidFill>
+                          <a:latin typeface="Cambria Math" panose="02040503050406030204" pitchFamily="18" charset="0"/>
+                        </a:rPr>
+                        <m:t>𝑧</m:t>
+                      </m:r>
+                      <m:r>
+                        <a:rPr lang="en-US" b="0" i="1" smtClean="0">
+                          <a:solidFill>
+                            <a:schemeClr val="bg1"/>
+                          </a:solidFill>
+                          <a:latin typeface="Cambria Math" panose="02040503050406030204" pitchFamily="18" charset="0"/>
+                        </a:rPr>
+                        <m:t>=1</m:t>
+                      </m:r>
+                    </m:oMath>
+                  </m:oMathPara>
+                </a14:m>
+                <a:endParaRPr lang="en-US" dirty="0">
+                  <a:solidFill>
+                    <a:schemeClr val="bg1"/>
+                  </a:solidFill>
+                </a:endParaRPr>
+              </a:p>
+              <a:p>
+                <a:pPr/>
+                <a14:m>
+                  <m:oMathPara xmlns:m="http://schemas.openxmlformats.org/officeDocument/2006/math">
+                    <m:oMathParaPr>
+                      <m:jc m:val="left"/>
+                    </m:oMathParaPr>
+                    <m:oMath xmlns:m="http://schemas.openxmlformats.org/officeDocument/2006/math">
+                      <m:r>
+                        <a:rPr lang="en-US" b="0" i="1" smtClean="0">
+                          <a:solidFill>
+                            <a:schemeClr val="bg1"/>
+                          </a:solidFill>
+                          <a:latin typeface="Cambria Math" panose="02040503050406030204" pitchFamily="18" charset="0"/>
+                        </a:rPr>
+                        <m:t>𝑐𝑡</m:t>
+                      </m:r>
+                      <m:r>
+                        <a:rPr lang="en-US" b="0" i="1" smtClean="0">
+                          <a:solidFill>
+                            <a:schemeClr val="bg1"/>
+                          </a:solidFill>
+                          <a:latin typeface="Cambria Math" panose="02040503050406030204" pitchFamily="18" charset="0"/>
+                        </a:rPr>
+                        <m:t>=2</m:t>
+                      </m:r>
+                    </m:oMath>
+                  </m:oMathPara>
+                </a14:m>
+                <a:endParaRPr lang="en-US" dirty="0">
+                  <a:solidFill>
+                    <a:schemeClr val="bg1"/>
+                  </a:solidFill>
+                </a:endParaRPr>
+              </a:p>
+              <a:p>
+                <a:endParaRPr lang="en-US" dirty="0">
+                  <a:solidFill>
+                    <a:schemeClr val="bg1"/>
+                  </a:solidFill>
+                </a:endParaRPr>
+              </a:p>
+              <a:p>
+                <a:r>
+                  <a:rPr lang="en-US" dirty="0">
+                    <a:solidFill>
+                      <a:schemeClr val="bg1"/>
+                    </a:solidFill>
+                  </a:rPr>
+                  <a:t>Ein </a:t>
+                </a:r>
+                <a:r>
+                  <a:rPr lang="en-US" dirty="0" err="1">
+                    <a:solidFill>
+                      <a:schemeClr val="bg1"/>
+                    </a:solidFill>
+                  </a:rPr>
+                  <a:t>zweites</a:t>
+                </a:r>
+                <a:r>
+                  <a:rPr lang="en-US" dirty="0">
+                    <a:solidFill>
+                      <a:schemeClr val="bg1"/>
+                    </a:solidFill>
+                  </a:rPr>
+                  <a:t> </a:t>
+                </a:r>
+                <a:r>
+                  <a:rPr lang="en-US" dirty="0" err="1">
+                    <a:solidFill>
+                      <a:schemeClr val="bg1"/>
+                    </a:solidFill>
+                  </a:rPr>
+                  <a:t>Ereignis</a:t>
+                </a:r>
+                <a:r>
+                  <a:rPr lang="en-US" dirty="0">
+                    <a:solidFill>
+                      <a:schemeClr val="bg1"/>
+                    </a:solidFill>
+                  </a:rPr>
+                  <a:t> </a:t>
+                </a:r>
+                <a:r>
+                  <a:rPr lang="en-US" dirty="0" err="1">
+                    <a:solidFill>
+                      <a:schemeClr val="bg1"/>
+                    </a:solidFill>
+                  </a:rPr>
+                  <a:t>mit</a:t>
+                </a:r>
+                <a:r>
+                  <a:rPr lang="en-US" dirty="0">
+                    <a:solidFill>
+                      <a:schemeClr val="bg1"/>
+                    </a:solidFill>
+                  </a:rPr>
+                  <a:t> Ort und </a:t>
+                </a:r>
+                <a:r>
+                  <a:rPr lang="en-US" dirty="0" err="1">
+                    <a:solidFill>
+                      <a:schemeClr val="bg1"/>
+                    </a:solidFill>
+                  </a:rPr>
+                  <a:t>Zeitpunkt</a:t>
+                </a:r>
+                <a:r>
+                  <a:rPr lang="en-US" dirty="0">
+                    <a:solidFill>
+                      <a:schemeClr val="bg1"/>
+                    </a:solidFill>
+                  </a:rPr>
+                  <a:t>:</a:t>
+                </a:r>
+              </a:p>
+              <a:p>
+                <a:pPr/>
+                <a14:m>
+                  <m:oMathPara xmlns:m="http://schemas.openxmlformats.org/officeDocument/2006/math">
+                    <m:oMathParaPr>
+                      <m:jc m:val="left"/>
+                    </m:oMathParaPr>
+                    <m:oMath xmlns:m="http://schemas.openxmlformats.org/officeDocument/2006/math">
+                      <m:r>
+                        <a:rPr lang="en-US" b="0" i="1" smtClean="0">
+                          <a:solidFill>
+                            <a:schemeClr val="bg1"/>
+                          </a:solidFill>
+                          <a:latin typeface="Cambria Math" panose="02040503050406030204" pitchFamily="18" charset="0"/>
+                        </a:rPr>
+                        <m:t>  </m:t>
+                      </m:r>
+                      <m:r>
+                        <a:rPr lang="en-US" b="0" i="1" smtClean="0">
+                          <a:solidFill>
+                            <a:schemeClr val="bg1"/>
+                          </a:solidFill>
+                          <a:latin typeface="Cambria Math" panose="02040503050406030204" pitchFamily="18" charset="0"/>
+                        </a:rPr>
+                        <m:t>𝑧</m:t>
+                      </m:r>
+                      <m:r>
+                        <a:rPr lang="en-US" b="0" i="1" smtClean="0">
+                          <a:solidFill>
+                            <a:schemeClr val="bg1"/>
+                          </a:solidFill>
+                          <a:latin typeface="Cambria Math" panose="02040503050406030204" pitchFamily="18" charset="0"/>
+                        </a:rPr>
+                        <m:t>=3</m:t>
+                      </m:r>
+                    </m:oMath>
+                  </m:oMathPara>
+                </a14:m>
+                <a:endParaRPr lang="en-US" dirty="0">
+                  <a:solidFill>
+                    <a:schemeClr val="bg1"/>
+                  </a:solidFill>
+                </a:endParaRPr>
+              </a:p>
+              <a:p>
+                <a:pPr/>
+                <a14:m>
+                  <m:oMathPara xmlns:m="http://schemas.openxmlformats.org/officeDocument/2006/math">
+                    <m:oMathParaPr>
+                      <m:jc m:val="left"/>
+                    </m:oMathParaPr>
+                    <m:oMath xmlns:m="http://schemas.openxmlformats.org/officeDocument/2006/math">
+                      <m:r>
+                        <a:rPr lang="en-US" b="0" i="1" smtClean="0">
+                          <a:solidFill>
+                            <a:schemeClr val="bg1"/>
+                          </a:solidFill>
+                          <a:latin typeface="Cambria Math" panose="02040503050406030204" pitchFamily="18" charset="0"/>
+                        </a:rPr>
+                        <m:t>𝑐𝑡</m:t>
+                      </m:r>
+                      <m:r>
+                        <a:rPr lang="en-US" b="0" i="1" smtClean="0">
+                          <a:solidFill>
+                            <a:schemeClr val="bg1"/>
+                          </a:solidFill>
+                          <a:latin typeface="Cambria Math" panose="02040503050406030204" pitchFamily="18" charset="0"/>
+                        </a:rPr>
+                        <m:t>=1</m:t>
+                      </m:r>
+                    </m:oMath>
+                  </m:oMathPara>
+                </a14:m>
+                <a:endParaRPr lang="en-US" dirty="0">
+                  <a:solidFill>
+                    <a:schemeClr val="bg1"/>
+                  </a:solidFill>
+                </a:endParaRPr>
+              </a:p>
+            </p:txBody>
+          </p:sp>
+        </mc:Choice>
+        <mc:Fallback>
+          <p:sp>
+            <p:nvSpPr>
+              <p:cNvPr id="2" name="TextBox 1">
+                <a:extLst>
+                  <a:ext uri="{FF2B5EF4-FFF2-40B4-BE49-F238E27FC236}">
+                    <a16:creationId xmlns:a16="http://schemas.microsoft.com/office/drawing/2014/main" id="{5FED4D48-83D0-818A-2834-82022D5597FD}"/>
+                  </a:ext>
+                </a:extLst>
+              </p:cNvPr>
+              <p:cNvSpPr txBox="1">
+                <a:spLocks noRot="1" noChangeAspect="1" noMove="1" noResize="1" noEditPoints="1" noAdjustHandles="1" noChangeArrowheads="1" noChangeShapeType="1" noTextEdit="1"/>
+              </p:cNvSpPr>
+              <p:nvPr/>
+            </p:nvSpPr>
+            <p:spPr>
+              <a:xfrm>
+                <a:off x="8547652" y="153348"/>
+                <a:ext cx="3475855" cy="2308324"/>
+              </a:xfrm>
+              <a:prstGeom prst="rect">
+                <a:avLst/>
+              </a:prstGeom>
+              <a:blipFill>
+                <a:blip r:embed="rId3"/>
+                <a:stretch>
+                  <a:fillRect l="-1404" t="-1319" r="-1579"/>
+                </a:stretch>
+              </a:blipFill>
+            </p:spPr>
+            <p:txBody>
+              <a:bodyPr/>
+              <a:lstStyle/>
+              <a:p>
+                <a:r>
+                  <a:rPr lang="en-CH">
+                    <a:noFill/>
+                  </a:rPr>
+                  <a:t> </a:t>
+                </a:r>
+              </a:p>
+            </p:txBody>
+          </p:sp>
+        </mc:Fallback>
+      </mc:AlternateContent>
     </p:spTree>
     <p:extLst>
       <p:ext uri="{BB962C8B-B14F-4D97-AF65-F5344CB8AC3E}">
@@ -8403,465 +10055,498 @@
           </a:xfrm>
         </p:spPr>
       </p:pic>
-      <p:sp>
-        <p:nvSpPr>
-          <p:cNvPr id="3" name="TextBox 2">
-            <a:extLst>
-              <a:ext uri="{FF2B5EF4-FFF2-40B4-BE49-F238E27FC236}">
-                <a16:creationId xmlns:a16="http://schemas.microsoft.com/office/drawing/2014/main" id="{60BBDFDF-8EA0-E515-BA06-79879A661101}"/>
-              </a:ext>
-            </a:extLst>
-          </p:cNvPr>
-          <p:cNvSpPr txBox="1"/>
-          <p:nvPr/>
-        </p:nvSpPr>
-        <p:spPr>
-          <a:xfrm>
-            <a:off x="8547652" y="153348"/>
-            <a:ext cx="3475855" cy="923330"/>
-          </a:xfrm>
-          <a:prstGeom prst="rect">
-            <a:avLst/>
-          </a:prstGeom>
-          <a:noFill/>
-        </p:spPr>
-        <p:txBody>
-          <a:bodyPr wrap="square" rtlCol="0">
-            <a:spAutoFit/>
-          </a:bodyPr>
-          <a:lstStyle/>
-          <a:p>
-            <a:r>
-              <a:rPr lang="en-US" dirty="0">
-                <a:solidFill>
-                  <a:schemeClr val="bg1"/>
-                </a:solidFill>
-              </a:rPr>
-              <a:t>Ein </a:t>
-            </a:r>
-            <a:r>
-              <a:rPr lang="en-US" dirty="0" err="1">
-                <a:solidFill>
-                  <a:schemeClr val="bg1"/>
-                </a:solidFill>
-              </a:rPr>
-              <a:t>Ereignis</a:t>
-            </a:r>
-            <a:r>
-              <a:rPr lang="en-US" dirty="0">
-                <a:solidFill>
-                  <a:schemeClr val="bg1"/>
-                </a:solidFill>
-              </a:rPr>
-              <a:t> </a:t>
-            </a:r>
-            <a:r>
-              <a:rPr lang="en-US" dirty="0" err="1">
-                <a:solidFill>
-                  <a:schemeClr val="bg1"/>
-                </a:solidFill>
-              </a:rPr>
-              <a:t>mit</a:t>
-            </a:r>
-            <a:r>
-              <a:rPr lang="en-US" dirty="0">
-                <a:solidFill>
-                  <a:schemeClr val="bg1"/>
-                </a:solidFill>
-              </a:rPr>
-              <a:t> Ort und </a:t>
-            </a:r>
-            <a:r>
-              <a:rPr lang="en-US" dirty="0" err="1">
-                <a:solidFill>
-                  <a:schemeClr val="bg1"/>
-                </a:solidFill>
-              </a:rPr>
-              <a:t>Zeitpunkt</a:t>
-            </a:r>
-            <a:endParaRPr lang="en-US" dirty="0">
-              <a:solidFill>
-                <a:schemeClr val="bg1"/>
-              </a:solidFill>
-            </a:endParaRPr>
-          </a:p>
-          <a:p>
-            <a:r>
-              <a:rPr lang="en-US" dirty="0">
-                <a:solidFill>
-                  <a:schemeClr val="bg1"/>
-                </a:solidFill>
-              </a:rPr>
-              <a:t>z 	= 1</a:t>
-            </a:r>
-          </a:p>
-          <a:p>
-            <a:r>
-              <a:rPr lang="en-US" dirty="0" err="1">
-                <a:solidFill>
-                  <a:schemeClr val="bg1"/>
-                </a:solidFill>
-              </a:rPr>
-              <a:t>ct</a:t>
-            </a:r>
-            <a:r>
-              <a:rPr lang="en-US" dirty="0">
-                <a:solidFill>
-                  <a:schemeClr val="bg1"/>
-                </a:solidFill>
-              </a:rPr>
-              <a:t>	= 2</a:t>
-            </a:r>
-            <a:endParaRPr lang="en-CH" dirty="0">
-              <a:solidFill>
-                <a:schemeClr val="bg1"/>
-              </a:solidFill>
-            </a:endParaRPr>
-          </a:p>
-        </p:txBody>
-      </p:sp>
-      <p:sp>
-        <p:nvSpPr>
-          <p:cNvPr id="5" name="TextBox 4">
-            <a:extLst>
-              <a:ext uri="{FF2B5EF4-FFF2-40B4-BE49-F238E27FC236}">
-                <a16:creationId xmlns:a16="http://schemas.microsoft.com/office/drawing/2014/main" id="{91696F9E-BD1F-EEF1-24B0-D42DA7A29D7A}"/>
-              </a:ext>
-            </a:extLst>
-          </p:cNvPr>
-          <p:cNvSpPr txBox="1"/>
-          <p:nvPr/>
-        </p:nvSpPr>
-        <p:spPr>
-          <a:xfrm>
-            <a:off x="8547652" y="153348"/>
-            <a:ext cx="3475855" cy="3139321"/>
-          </a:xfrm>
-          <a:prstGeom prst="rect">
-            <a:avLst/>
-          </a:prstGeom>
-          <a:noFill/>
-        </p:spPr>
-        <p:txBody>
-          <a:bodyPr wrap="square" rtlCol="0">
-            <a:spAutoFit/>
-          </a:bodyPr>
-          <a:lstStyle/>
-          <a:p>
-            <a:r>
-              <a:rPr lang="en-US" dirty="0">
-                <a:solidFill>
-                  <a:schemeClr val="bg1"/>
-                </a:solidFill>
-              </a:rPr>
-              <a:t>Ein </a:t>
-            </a:r>
-            <a:r>
-              <a:rPr lang="en-US" dirty="0" err="1">
-                <a:solidFill>
-                  <a:schemeClr val="bg1"/>
-                </a:solidFill>
-              </a:rPr>
-              <a:t>Ereignis</a:t>
-            </a:r>
-            <a:r>
-              <a:rPr lang="en-US" dirty="0">
-                <a:solidFill>
-                  <a:schemeClr val="bg1"/>
-                </a:solidFill>
-              </a:rPr>
-              <a:t> </a:t>
-            </a:r>
-            <a:r>
-              <a:rPr lang="en-US" dirty="0" err="1">
-                <a:solidFill>
-                  <a:schemeClr val="bg1"/>
-                </a:solidFill>
-              </a:rPr>
-              <a:t>mit</a:t>
-            </a:r>
-            <a:r>
-              <a:rPr lang="en-US" dirty="0">
-                <a:solidFill>
-                  <a:schemeClr val="bg1"/>
-                </a:solidFill>
-              </a:rPr>
-              <a:t> Ort und </a:t>
-            </a:r>
-            <a:r>
-              <a:rPr lang="en-US" dirty="0" err="1">
-                <a:solidFill>
-                  <a:schemeClr val="bg1"/>
-                </a:solidFill>
-              </a:rPr>
-              <a:t>Zeitpunkt</a:t>
-            </a:r>
-            <a:r>
-              <a:rPr lang="en-US" dirty="0">
-                <a:solidFill>
-                  <a:schemeClr val="bg1"/>
-                </a:solidFill>
-              </a:rPr>
-              <a:t>:</a:t>
-            </a:r>
-          </a:p>
-          <a:p>
-            <a:r>
-              <a:rPr lang="en-US" dirty="0">
-                <a:solidFill>
-                  <a:schemeClr val="bg1"/>
-                </a:solidFill>
-              </a:rPr>
-              <a:t>z 	= 1</a:t>
-            </a:r>
-          </a:p>
-          <a:p>
-            <a:r>
-              <a:rPr lang="en-US" dirty="0" err="1">
-                <a:solidFill>
-                  <a:schemeClr val="bg1"/>
-                </a:solidFill>
-              </a:rPr>
-              <a:t>ct</a:t>
-            </a:r>
-            <a:r>
-              <a:rPr lang="en-US" dirty="0">
-                <a:solidFill>
-                  <a:schemeClr val="bg1"/>
-                </a:solidFill>
-              </a:rPr>
-              <a:t>	= 2</a:t>
-            </a:r>
-          </a:p>
-          <a:p>
-            <a:endParaRPr lang="en-US" dirty="0">
-              <a:solidFill>
-                <a:schemeClr val="bg1"/>
-              </a:solidFill>
-            </a:endParaRPr>
-          </a:p>
-          <a:p>
-            <a:r>
-              <a:rPr lang="en-US" dirty="0">
-                <a:solidFill>
-                  <a:schemeClr val="bg1"/>
-                </a:solidFill>
-              </a:rPr>
-              <a:t>Ein </a:t>
-            </a:r>
-            <a:r>
-              <a:rPr lang="en-US" dirty="0" err="1">
-                <a:solidFill>
-                  <a:schemeClr val="bg1"/>
-                </a:solidFill>
-              </a:rPr>
-              <a:t>zeites</a:t>
-            </a:r>
-            <a:r>
-              <a:rPr lang="en-US" dirty="0">
-                <a:solidFill>
-                  <a:schemeClr val="bg1"/>
-                </a:solidFill>
-              </a:rPr>
-              <a:t> </a:t>
-            </a:r>
-            <a:r>
-              <a:rPr lang="en-US" dirty="0" err="1">
-                <a:solidFill>
-                  <a:schemeClr val="bg1"/>
-                </a:solidFill>
-              </a:rPr>
-              <a:t>Ereignis</a:t>
-            </a:r>
-            <a:r>
-              <a:rPr lang="en-US" dirty="0">
-                <a:solidFill>
-                  <a:schemeClr val="bg1"/>
-                </a:solidFill>
-              </a:rPr>
-              <a:t> </a:t>
-            </a:r>
-            <a:r>
-              <a:rPr lang="en-US" dirty="0" err="1">
-                <a:solidFill>
-                  <a:schemeClr val="bg1"/>
-                </a:solidFill>
-              </a:rPr>
-              <a:t>mit</a:t>
-            </a:r>
-            <a:r>
-              <a:rPr lang="en-US" dirty="0">
-                <a:solidFill>
-                  <a:schemeClr val="bg1"/>
-                </a:solidFill>
-              </a:rPr>
-              <a:t> Ort und </a:t>
-            </a:r>
-            <a:r>
-              <a:rPr lang="en-US" dirty="0" err="1">
-                <a:solidFill>
-                  <a:schemeClr val="bg1"/>
-                </a:solidFill>
-              </a:rPr>
-              <a:t>Zeitpunkt</a:t>
-            </a:r>
-            <a:r>
-              <a:rPr lang="en-US" dirty="0">
-                <a:solidFill>
-                  <a:schemeClr val="bg1"/>
-                </a:solidFill>
-              </a:rPr>
-              <a:t>:</a:t>
-            </a:r>
-          </a:p>
-          <a:p>
-            <a:r>
-              <a:rPr lang="en-US" dirty="0">
-                <a:solidFill>
-                  <a:schemeClr val="bg1"/>
-                </a:solidFill>
-              </a:rPr>
-              <a:t>z 	= 3</a:t>
-            </a:r>
-          </a:p>
-          <a:p>
-            <a:r>
-              <a:rPr lang="en-US" dirty="0" err="1">
-                <a:solidFill>
-                  <a:schemeClr val="bg1"/>
-                </a:solidFill>
-              </a:rPr>
-              <a:t>ct</a:t>
-            </a:r>
-            <a:r>
-              <a:rPr lang="en-US" dirty="0">
-                <a:solidFill>
-                  <a:schemeClr val="bg1"/>
-                </a:solidFill>
-              </a:rPr>
-              <a:t>	= 1</a:t>
-            </a:r>
-          </a:p>
-          <a:p>
-            <a:endParaRPr lang="en-US" dirty="0">
-              <a:solidFill>
-                <a:schemeClr val="bg1"/>
-              </a:solidFill>
-            </a:endParaRPr>
-          </a:p>
-          <a:p>
-            <a:r>
-              <a:rPr lang="en-US" dirty="0" err="1">
-                <a:solidFill>
-                  <a:schemeClr val="bg1"/>
-                </a:solidFill>
-              </a:rPr>
-              <a:t>Verbindung</a:t>
-            </a:r>
-            <a:r>
-              <a:rPr lang="en-US" dirty="0">
-                <a:solidFill>
-                  <a:schemeClr val="bg1"/>
-                </a:solidFill>
-              </a:rPr>
-              <a:t> </a:t>
-            </a:r>
-            <a:r>
-              <a:rPr lang="en-US" dirty="0" err="1">
-                <a:solidFill>
-                  <a:schemeClr val="bg1"/>
-                </a:solidFill>
-              </a:rPr>
-              <a:t>zu</a:t>
-            </a:r>
-            <a:r>
-              <a:rPr lang="en-US" dirty="0">
-                <a:solidFill>
-                  <a:schemeClr val="bg1"/>
-                </a:solidFill>
-              </a:rPr>
-              <a:t> den </a:t>
-            </a:r>
-            <a:r>
-              <a:rPr lang="en-US" dirty="0" err="1">
-                <a:solidFill>
-                  <a:schemeClr val="bg1"/>
-                </a:solidFill>
-              </a:rPr>
-              <a:t>Koordinaten</a:t>
-            </a:r>
-            <a:r>
-              <a:rPr lang="en-US" dirty="0">
-                <a:solidFill>
-                  <a:schemeClr val="bg1"/>
-                </a:solidFill>
-              </a:rPr>
-              <a:t>- </a:t>
-            </a:r>
-            <a:r>
-              <a:rPr lang="en-US" dirty="0" err="1">
-                <a:solidFill>
-                  <a:schemeClr val="bg1"/>
-                </a:solidFill>
-              </a:rPr>
-              <a:t>achsen</a:t>
-            </a:r>
-            <a:r>
-              <a:rPr lang="en-US" dirty="0">
-                <a:solidFill>
-                  <a:schemeClr val="bg1"/>
-                </a:solidFill>
-              </a:rPr>
-              <a:t> </a:t>
-            </a:r>
-            <a:r>
-              <a:rPr lang="en-US" dirty="0" err="1">
-                <a:solidFill>
-                  <a:schemeClr val="bg1"/>
-                </a:solidFill>
-              </a:rPr>
-              <a:t>zum</a:t>
-            </a:r>
-            <a:r>
-              <a:rPr lang="en-US" dirty="0">
-                <a:solidFill>
-                  <a:schemeClr val="bg1"/>
-                </a:solidFill>
-              </a:rPr>
-              <a:t> </a:t>
-            </a:r>
-            <a:r>
-              <a:rPr lang="en-US" dirty="0" err="1">
-                <a:solidFill>
-                  <a:schemeClr val="bg1"/>
-                </a:solidFill>
-              </a:rPr>
-              <a:t>Ablesen</a:t>
-            </a:r>
-            <a:r>
-              <a:rPr lang="en-US" dirty="0">
-                <a:solidFill>
-                  <a:schemeClr val="bg1"/>
-                </a:solidFill>
-              </a:rPr>
-              <a:t> der </a:t>
-            </a:r>
-            <a:r>
-              <a:rPr lang="en-US" dirty="0" err="1">
-                <a:solidFill>
-                  <a:schemeClr val="bg1"/>
-                </a:solidFill>
-              </a:rPr>
-              <a:t>Werte</a:t>
-            </a:r>
-            <a:endParaRPr lang="en-CH" dirty="0">
-              <a:solidFill>
-                <a:schemeClr val="bg1"/>
-              </a:solidFill>
-            </a:endParaRPr>
-          </a:p>
-        </p:txBody>
-      </p:sp>
+      <mc:AlternateContent xmlns:mc="http://schemas.openxmlformats.org/markup-compatibility/2006">
+        <mc:Choice xmlns:a14="http://schemas.microsoft.com/office/drawing/2010/main" Requires="a14">
+          <p:sp>
+            <p:nvSpPr>
+              <p:cNvPr id="2" name="TextBox 1">
+                <a:extLst>
+                  <a:ext uri="{FF2B5EF4-FFF2-40B4-BE49-F238E27FC236}">
+                    <a16:creationId xmlns:a16="http://schemas.microsoft.com/office/drawing/2014/main" id="{215530AD-852A-3E96-F08B-0447C1A92344}"/>
+                  </a:ext>
+                </a:extLst>
+              </p:cNvPr>
+              <p:cNvSpPr txBox="1"/>
+              <p:nvPr/>
+            </p:nvSpPr>
+            <p:spPr>
+              <a:xfrm>
+                <a:off x="8547652" y="153348"/>
+                <a:ext cx="3475855" cy="3139321"/>
+              </a:xfrm>
+              <a:prstGeom prst="rect">
+                <a:avLst/>
+              </a:prstGeom>
+              <a:noFill/>
+            </p:spPr>
+            <p:txBody>
+              <a:bodyPr wrap="square" rtlCol="0">
+                <a:spAutoFit/>
+              </a:bodyPr>
+              <a:lstStyle/>
+              <a:p>
+                <a:r>
+                  <a:rPr lang="en-US" dirty="0">
+                    <a:solidFill>
+                      <a:schemeClr val="bg1"/>
+                    </a:solidFill>
+                  </a:rPr>
+                  <a:t>Ein </a:t>
+                </a:r>
+                <a:r>
+                  <a:rPr lang="en-US" dirty="0" err="1">
+                    <a:solidFill>
+                      <a:schemeClr val="bg1"/>
+                    </a:solidFill>
+                  </a:rPr>
+                  <a:t>Ereignis</a:t>
+                </a:r>
+                <a:r>
+                  <a:rPr lang="en-US" dirty="0">
+                    <a:solidFill>
+                      <a:schemeClr val="bg1"/>
+                    </a:solidFill>
+                  </a:rPr>
+                  <a:t> </a:t>
+                </a:r>
+                <a:r>
+                  <a:rPr lang="en-US" dirty="0" err="1">
+                    <a:solidFill>
+                      <a:schemeClr val="bg1"/>
+                    </a:solidFill>
+                  </a:rPr>
+                  <a:t>mit</a:t>
+                </a:r>
+                <a:r>
+                  <a:rPr lang="en-US" dirty="0">
+                    <a:solidFill>
+                      <a:schemeClr val="bg1"/>
+                    </a:solidFill>
+                  </a:rPr>
+                  <a:t> Ort und </a:t>
+                </a:r>
+                <a:r>
+                  <a:rPr lang="en-US" dirty="0" err="1">
+                    <a:solidFill>
+                      <a:schemeClr val="bg1"/>
+                    </a:solidFill>
+                  </a:rPr>
+                  <a:t>Zeitpunkt</a:t>
+                </a:r>
+                <a:r>
+                  <a:rPr lang="en-US" dirty="0">
+                    <a:solidFill>
+                      <a:schemeClr val="bg1"/>
+                    </a:solidFill>
+                  </a:rPr>
+                  <a:t>:</a:t>
+                </a:r>
+              </a:p>
+              <a:p>
+                <a:pPr/>
+                <a14:m>
+                  <m:oMathPara xmlns:m="http://schemas.openxmlformats.org/officeDocument/2006/math">
+                    <m:oMathParaPr>
+                      <m:jc m:val="left"/>
+                    </m:oMathParaPr>
+                    <m:oMath xmlns:m="http://schemas.openxmlformats.org/officeDocument/2006/math">
+                      <m:r>
+                        <a:rPr lang="en-US" b="0" i="1" smtClean="0">
+                          <a:solidFill>
+                            <a:schemeClr val="bg1"/>
+                          </a:solidFill>
+                          <a:latin typeface="Cambria Math" panose="02040503050406030204" pitchFamily="18" charset="0"/>
+                        </a:rPr>
+                        <m:t> </m:t>
+                      </m:r>
+                      <m:r>
+                        <a:rPr lang="en-US" b="0" i="1" smtClean="0">
+                          <a:solidFill>
+                            <a:schemeClr val="bg1"/>
+                          </a:solidFill>
+                          <a:latin typeface="Cambria Math" panose="02040503050406030204" pitchFamily="18" charset="0"/>
+                        </a:rPr>
+                        <m:t>𝑧</m:t>
+                      </m:r>
+                      <m:r>
+                        <a:rPr lang="en-US" b="0" i="1" smtClean="0">
+                          <a:solidFill>
+                            <a:schemeClr val="bg1"/>
+                          </a:solidFill>
+                          <a:latin typeface="Cambria Math" panose="02040503050406030204" pitchFamily="18" charset="0"/>
+                        </a:rPr>
+                        <m:t>=1</m:t>
+                      </m:r>
+                    </m:oMath>
+                  </m:oMathPara>
+                </a14:m>
+                <a:endParaRPr lang="en-US" dirty="0">
+                  <a:solidFill>
+                    <a:schemeClr val="bg1"/>
+                  </a:solidFill>
+                </a:endParaRPr>
+              </a:p>
+              <a:p>
+                <a:pPr/>
+                <a14:m>
+                  <m:oMathPara xmlns:m="http://schemas.openxmlformats.org/officeDocument/2006/math">
+                    <m:oMathParaPr>
+                      <m:jc m:val="left"/>
+                    </m:oMathParaPr>
+                    <m:oMath xmlns:m="http://schemas.openxmlformats.org/officeDocument/2006/math">
+                      <m:r>
+                        <a:rPr lang="en-US" b="0" i="1" smtClean="0">
+                          <a:solidFill>
+                            <a:schemeClr val="bg1"/>
+                          </a:solidFill>
+                          <a:latin typeface="Cambria Math" panose="02040503050406030204" pitchFamily="18" charset="0"/>
+                        </a:rPr>
+                        <m:t>𝑐𝑡</m:t>
+                      </m:r>
+                      <m:r>
+                        <a:rPr lang="en-US" b="0" i="1" smtClean="0">
+                          <a:solidFill>
+                            <a:schemeClr val="bg1"/>
+                          </a:solidFill>
+                          <a:latin typeface="Cambria Math" panose="02040503050406030204" pitchFamily="18" charset="0"/>
+                        </a:rPr>
+                        <m:t>=2</m:t>
+                      </m:r>
+                    </m:oMath>
+                  </m:oMathPara>
+                </a14:m>
+                <a:endParaRPr lang="en-US" dirty="0">
+                  <a:solidFill>
+                    <a:schemeClr val="bg1"/>
+                  </a:solidFill>
+                </a:endParaRPr>
+              </a:p>
+              <a:p>
+                <a:endParaRPr lang="en-US" dirty="0">
+                  <a:solidFill>
+                    <a:schemeClr val="bg1"/>
+                  </a:solidFill>
+                </a:endParaRPr>
+              </a:p>
+              <a:p>
+                <a:r>
+                  <a:rPr lang="en-US" dirty="0">
+                    <a:solidFill>
+                      <a:schemeClr val="bg1"/>
+                    </a:solidFill>
+                  </a:rPr>
+                  <a:t>Ein </a:t>
+                </a:r>
+                <a:r>
+                  <a:rPr lang="en-US" dirty="0" err="1">
+                    <a:solidFill>
+                      <a:schemeClr val="bg1"/>
+                    </a:solidFill>
+                  </a:rPr>
+                  <a:t>zweites</a:t>
+                </a:r>
+                <a:r>
+                  <a:rPr lang="en-US" dirty="0">
+                    <a:solidFill>
+                      <a:schemeClr val="bg1"/>
+                    </a:solidFill>
+                  </a:rPr>
+                  <a:t> </a:t>
+                </a:r>
+                <a:r>
+                  <a:rPr lang="en-US" dirty="0" err="1">
+                    <a:solidFill>
+                      <a:schemeClr val="bg1"/>
+                    </a:solidFill>
+                  </a:rPr>
+                  <a:t>Ereignis</a:t>
+                </a:r>
+                <a:r>
+                  <a:rPr lang="en-US" dirty="0">
+                    <a:solidFill>
+                      <a:schemeClr val="bg1"/>
+                    </a:solidFill>
+                  </a:rPr>
+                  <a:t> </a:t>
+                </a:r>
+                <a:r>
+                  <a:rPr lang="en-US" dirty="0" err="1">
+                    <a:solidFill>
+                      <a:schemeClr val="bg1"/>
+                    </a:solidFill>
+                  </a:rPr>
+                  <a:t>mit</a:t>
+                </a:r>
+                <a:r>
+                  <a:rPr lang="en-US" dirty="0">
+                    <a:solidFill>
+                      <a:schemeClr val="bg1"/>
+                    </a:solidFill>
+                  </a:rPr>
+                  <a:t> Ort und </a:t>
+                </a:r>
+                <a:r>
+                  <a:rPr lang="en-US" dirty="0" err="1">
+                    <a:solidFill>
+                      <a:schemeClr val="bg1"/>
+                    </a:solidFill>
+                  </a:rPr>
+                  <a:t>Zeitpunkt</a:t>
+                </a:r>
+                <a:r>
+                  <a:rPr lang="en-US" dirty="0">
+                    <a:solidFill>
+                      <a:schemeClr val="bg1"/>
+                    </a:solidFill>
+                  </a:rPr>
+                  <a:t>:</a:t>
+                </a:r>
+              </a:p>
+              <a:p>
+                <a:pPr/>
+                <a14:m>
+                  <m:oMathPara xmlns:m="http://schemas.openxmlformats.org/officeDocument/2006/math">
+                    <m:oMathParaPr>
+                      <m:jc m:val="left"/>
+                    </m:oMathParaPr>
+                    <m:oMath xmlns:m="http://schemas.openxmlformats.org/officeDocument/2006/math">
+                      <m:r>
+                        <a:rPr lang="en-US" b="0" i="1" smtClean="0">
+                          <a:solidFill>
+                            <a:schemeClr val="bg1"/>
+                          </a:solidFill>
+                          <a:latin typeface="Cambria Math" panose="02040503050406030204" pitchFamily="18" charset="0"/>
+                        </a:rPr>
+                        <m:t>  </m:t>
+                      </m:r>
+                      <m:r>
+                        <a:rPr lang="en-US" b="0" i="1" smtClean="0">
+                          <a:solidFill>
+                            <a:schemeClr val="bg1"/>
+                          </a:solidFill>
+                          <a:latin typeface="Cambria Math" panose="02040503050406030204" pitchFamily="18" charset="0"/>
+                        </a:rPr>
+                        <m:t>𝑧</m:t>
+                      </m:r>
+                      <m:r>
+                        <a:rPr lang="en-US" b="0" i="1" smtClean="0">
+                          <a:solidFill>
+                            <a:schemeClr val="bg1"/>
+                          </a:solidFill>
+                          <a:latin typeface="Cambria Math" panose="02040503050406030204" pitchFamily="18" charset="0"/>
+                        </a:rPr>
+                        <m:t>=3</m:t>
+                      </m:r>
+                    </m:oMath>
+                  </m:oMathPara>
+                </a14:m>
+                <a:endParaRPr lang="en-US" dirty="0">
+                  <a:solidFill>
+                    <a:schemeClr val="bg1"/>
+                  </a:solidFill>
+                </a:endParaRPr>
+              </a:p>
+              <a:p>
+                <a:pPr/>
+                <a14:m>
+                  <m:oMathPara xmlns:m="http://schemas.openxmlformats.org/officeDocument/2006/math">
+                    <m:oMathParaPr>
+                      <m:jc m:val="left"/>
+                    </m:oMathParaPr>
+                    <m:oMath xmlns:m="http://schemas.openxmlformats.org/officeDocument/2006/math">
+                      <m:r>
+                        <a:rPr lang="en-US" b="0" i="1" smtClean="0">
+                          <a:solidFill>
+                            <a:schemeClr val="bg1"/>
+                          </a:solidFill>
+                          <a:latin typeface="Cambria Math" panose="02040503050406030204" pitchFamily="18" charset="0"/>
+                        </a:rPr>
+                        <m:t>𝑐𝑡</m:t>
+                      </m:r>
+                      <m:r>
+                        <a:rPr lang="en-US" b="0" i="1" smtClean="0">
+                          <a:solidFill>
+                            <a:schemeClr val="bg1"/>
+                          </a:solidFill>
+                          <a:latin typeface="Cambria Math" panose="02040503050406030204" pitchFamily="18" charset="0"/>
+                        </a:rPr>
+                        <m:t>=1</m:t>
+                      </m:r>
+                    </m:oMath>
+                  </m:oMathPara>
+                </a14:m>
+                <a:endParaRPr lang="en-US" dirty="0">
+                  <a:solidFill>
+                    <a:schemeClr val="bg1"/>
+                  </a:solidFill>
+                </a:endParaRPr>
+              </a:p>
+              <a:p>
+                <a:endParaRPr lang="en-US" dirty="0">
+                  <a:solidFill>
+                    <a:schemeClr val="bg1"/>
+                  </a:solidFill>
+                </a:endParaRPr>
+              </a:p>
+              <a:p>
+                <a:r>
+                  <a:rPr lang="en-US" dirty="0" err="1">
+                    <a:solidFill>
+                      <a:schemeClr val="bg1"/>
+                    </a:solidFill>
+                  </a:rPr>
+                  <a:t>Verbindung</a:t>
+                </a:r>
+                <a:r>
+                  <a:rPr lang="en-US" dirty="0">
+                    <a:solidFill>
+                      <a:schemeClr val="bg1"/>
+                    </a:solidFill>
+                  </a:rPr>
+                  <a:t> </a:t>
+                </a:r>
+                <a:r>
+                  <a:rPr lang="en-US" dirty="0" err="1">
+                    <a:solidFill>
+                      <a:schemeClr val="bg1"/>
+                    </a:solidFill>
+                  </a:rPr>
+                  <a:t>zu</a:t>
+                </a:r>
+                <a:r>
+                  <a:rPr lang="en-US" dirty="0">
+                    <a:solidFill>
+                      <a:schemeClr val="bg1"/>
+                    </a:solidFill>
+                  </a:rPr>
+                  <a:t> den </a:t>
+                </a:r>
+                <a:r>
+                  <a:rPr lang="en-US" dirty="0" err="1">
+                    <a:solidFill>
+                      <a:schemeClr val="bg1"/>
+                    </a:solidFill>
+                  </a:rPr>
+                  <a:t>Koordinaten</a:t>
+                </a:r>
+                <a:r>
+                  <a:rPr lang="en-US" dirty="0">
+                    <a:solidFill>
+                      <a:schemeClr val="bg1"/>
+                    </a:solidFill>
+                  </a:rPr>
+                  <a:t>- </a:t>
+                </a:r>
+                <a:r>
+                  <a:rPr lang="en-US" dirty="0" err="1">
+                    <a:solidFill>
+                      <a:schemeClr val="bg1"/>
+                    </a:solidFill>
+                  </a:rPr>
+                  <a:t>achsen</a:t>
+                </a:r>
+                <a:r>
+                  <a:rPr lang="en-US" dirty="0">
+                    <a:solidFill>
+                      <a:schemeClr val="bg1"/>
+                    </a:solidFill>
+                  </a:rPr>
+                  <a:t> </a:t>
+                </a:r>
+                <a:r>
+                  <a:rPr lang="en-US" dirty="0" err="1">
+                    <a:solidFill>
+                      <a:schemeClr val="bg1"/>
+                    </a:solidFill>
+                  </a:rPr>
+                  <a:t>zum</a:t>
+                </a:r>
+                <a:r>
+                  <a:rPr lang="en-US" dirty="0">
+                    <a:solidFill>
+                      <a:schemeClr val="bg1"/>
+                    </a:solidFill>
+                  </a:rPr>
+                  <a:t> </a:t>
+                </a:r>
+                <a:r>
+                  <a:rPr lang="en-US" dirty="0" err="1">
+                    <a:solidFill>
+                      <a:schemeClr val="bg1"/>
+                    </a:solidFill>
+                  </a:rPr>
+                  <a:t>Ablesen</a:t>
+                </a:r>
+                <a:r>
+                  <a:rPr lang="en-US" dirty="0">
+                    <a:solidFill>
+                      <a:schemeClr val="bg1"/>
+                    </a:solidFill>
+                  </a:rPr>
+                  <a:t> der </a:t>
+                </a:r>
+                <a:r>
+                  <a:rPr lang="en-US" dirty="0" err="1">
+                    <a:solidFill>
+                      <a:schemeClr val="bg1"/>
+                    </a:solidFill>
+                  </a:rPr>
+                  <a:t>Werte</a:t>
+                </a:r>
+                <a:endParaRPr lang="en-US" dirty="0">
+                  <a:solidFill>
+                    <a:schemeClr val="bg1"/>
+                  </a:solidFill>
+                </a:endParaRPr>
+              </a:p>
+            </p:txBody>
+          </p:sp>
+        </mc:Choice>
+        <mc:Fallback>
+          <p:sp>
+            <p:nvSpPr>
+              <p:cNvPr id="2" name="TextBox 1">
+                <a:extLst>
+                  <a:ext uri="{FF2B5EF4-FFF2-40B4-BE49-F238E27FC236}">
+                    <a16:creationId xmlns:a16="http://schemas.microsoft.com/office/drawing/2014/main" id="{215530AD-852A-3E96-F08B-0447C1A92344}"/>
+                  </a:ext>
+                </a:extLst>
+              </p:cNvPr>
+              <p:cNvSpPr txBox="1">
+                <a:spLocks noRot="1" noChangeAspect="1" noMove="1" noResize="1" noEditPoints="1" noAdjustHandles="1" noChangeArrowheads="1" noChangeShapeType="1" noTextEdit="1"/>
+              </p:cNvSpPr>
+              <p:nvPr/>
+            </p:nvSpPr>
+            <p:spPr>
+              <a:xfrm>
+                <a:off x="8547652" y="153348"/>
+                <a:ext cx="3475855" cy="3139321"/>
+              </a:xfrm>
+              <a:prstGeom prst="rect">
+                <a:avLst/>
+              </a:prstGeom>
+              <a:blipFill>
+                <a:blip r:embed="rId3"/>
+                <a:stretch>
+                  <a:fillRect l="-1404" t="-971" r="-1579" b="-2136"/>
+                </a:stretch>
+              </a:blipFill>
+            </p:spPr>
+            <p:txBody>
+              <a:bodyPr/>
+              <a:lstStyle/>
+              <a:p>
+                <a:r>
+                  <a:rPr lang="en-CH">
+                    <a:noFill/>
+                  </a:rPr>
+                  <a:t> </a:t>
+                </a:r>
+              </a:p>
+            </p:txBody>
+          </p:sp>
+        </mc:Fallback>
+      </mc:AlternateContent>
     </p:spTree>
     <p:extLst>
       <p:ext uri="{BB962C8B-B14F-4D97-AF65-F5344CB8AC3E}">
@@ -8915,7 +10600,7 @@
           </p:nvPr>
         </p:nvPicPr>
         <p:blipFill>
-          <a:blip r:link="rId2"/>
+          <a:blip r:link="rId3"/>
           <a:srcRect/>
           <a:stretch>
             <a:fillRect/>
@@ -8928,527 +10613,560 @@
           </a:xfrm>
         </p:spPr>
       </p:pic>
-      <p:sp>
-        <p:nvSpPr>
-          <p:cNvPr id="3" name="TextBox 2">
-            <a:extLst>
-              <a:ext uri="{FF2B5EF4-FFF2-40B4-BE49-F238E27FC236}">
-                <a16:creationId xmlns:a16="http://schemas.microsoft.com/office/drawing/2014/main" id="{F0DEF13E-F33D-36AB-DCD8-BD2386B2638E}"/>
-              </a:ext>
-            </a:extLst>
-          </p:cNvPr>
-          <p:cNvSpPr txBox="1"/>
-          <p:nvPr/>
-        </p:nvSpPr>
-        <p:spPr>
-          <a:xfrm>
-            <a:off x="8547652" y="153348"/>
-            <a:ext cx="3475855" cy="923330"/>
-          </a:xfrm>
-          <a:prstGeom prst="rect">
-            <a:avLst/>
-          </a:prstGeom>
-          <a:noFill/>
-        </p:spPr>
-        <p:txBody>
-          <a:bodyPr wrap="square" rtlCol="0">
-            <a:spAutoFit/>
-          </a:bodyPr>
-          <a:lstStyle/>
-          <a:p>
-            <a:r>
-              <a:rPr lang="en-US" dirty="0">
-                <a:solidFill>
-                  <a:schemeClr val="bg1"/>
-                </a:solidFill>
-              </a:rPr>
-              <a:t>Ein </a:t>
-            </a:r>
-            <a:r>
-              <a:rPr lang="en-US" dirty="0" err="1">
-                <a:solidFill>
-                  <a:schemeClr val="bg1"/>
-                </a:solidFill>
-              </a:rPr>
-              <a:t>Ereignis</a:t>
-            </a:r>
-            <a:r>
-              <a:rPr lang="en-US" dirty="0">
-                <a:solidFill>
-                  <a:schemeClr val="bg1"/>
-                </a:solidFill>
-              </a:rPr>
-              <a:t> </a:t>
-            </a:r>
-            <a:r>
-              <a:rPr lang="en-US" dirty="0" err="1">
-                <a:solidFill>
-                  <a:schemeClr val="bg1"/>
-                </a:solidFill>
-              </a:rPr>
-              <a:t>mit</a:t>
-            </a:r>
-            <a:r>
-              <a:rPr lang="en-US" dirty="0">
-                <a:solidFill>
-                  <a:schemeClr val="bg1"/>
-                </a:solidFill>
-              </a:rPr>
-              <a:t> Ort und </a:t>
-            </a:r>
-            <a:r>
-              <a:rPr lang="en-US" dirty="0" err="1">
-                <a:solidFill>
-                  <a:schemeClr val="bg1"/>
-                </a:solidFill>
-              </a:rPr>
-              <a:t>Zeitpunkt</a:t>
-            </a:r>
-            <a:endParaRPr lang="en-US" dirty="0">
-              <a:solidFill>
-                <a:schemeClr val="bg1"/>
-              </a:solidFill>
-            </a:endParaRPr>
-          </a:p>
-          <a:p>
-            <a:r>
-              <a:rPr lang="en-US" dirty="0">
-                <a:solidFill>
-                  <a:schemeClr val="bg1"/>
-                </a:solidFill>
-              </a:rPr>
-              <a:t>z 	= 1</a:t>
-            </a:r>
-          </a:p>
-          <a:p>
-            <a:r>
-              <a:rPr lang="en-US" dirty="0" err="1">
-                <a:solidFill>
-                  <a:schemeClr val="bg1"/>
-                </a:solidFill>
-              </a:rPr>
-              <a:t>ct</a:t>
-            </a:r>
-            <a:r>
-              <a:rPr lang="en-US" dirty="0">
-                <a:solidFill>
-                  <a:schemeClr val="bg1"/>
-                </a:solidFill>
-              </a:rPr>
-              <a:t>	= 2</a:t>
-            </a:r>
-            <a:endParaRPr lang="en-CH" dirty="0">
-              <a:solidFill>
-                <a:schemeClr val="bg1"/>
-              </a:solidFill>
-            </a:endParaRPr>
-          </a:p>
-        </p:txBody>
-      </p:sp>
-      <p:sp>
-        <p:nvSpPr>
-          <p:cNvPr id="5" name="TextBox 4">
-            <a:extLst>
-              <a:ext uri="{FF2B5EF4-FFF2-40B4-BE49-F238E27FC236}">
-                <a16:creationId xmlns:a16="http://schemas.microsoft.com/office/drawing/2014/main" id="{4186A8A3-4DB8-397A-4F80-5F9DEE0504B7}"/>
-              </a:ext>
-            </a:extLst>
-          </p:cNvPr>
-          <p:cNvSpPr txBox="1"/>
-          <p:nvPr/>
-        </p:nvSpPr>
-        <p:spPr>
-          <a:xfrm>
-            <a:off x="8547652" y="153348"/>
-            <a:ext cx="3475855" cy="3970318"/>
-          </a:xfrm>
-          <a:prstGeom prst="rect">
-            <a:avLst/>
-          </a:prstGeom>
-          <a:noFill/>
-        </p:spPr>
-        <p:txBody>
-          <a:bodyPr wrap="square" rtlCol="0">
-            <a:spAutoFit/>
-          </a:bodyPr>
-          <a:lstStyle/>
-          <a:p>
-            <a:r>
-              <a:rPr lang="en-US" dirty="0">
-                <a:solidFill>
-                  <a:schemeClr val="bg1"/>
-                </a:solidFill>
-              </a:rPr>
-              <a:t>Ein </a:t>
-            </a:r>
-            <a:r>
-              <a:rPr lang="en-US" dirty="0" err="1">
-                <a:solidFill>
-                  <a:schemeClr val="bg1"/>
-                </a:solidFill>
-              </a:rPr>
-              <a:t>Ereignis</a:t>
-            </a:r>
-            <a:r>
-              <a:rPr lang="en-US" dirty="0">
-                <a:solidFill>
-                  <a:schemeClr val="bg1"/>
-                </a:solidFill>
-              </a:rPr>
-              <a:t> </a:t>
-            </a:r>
-            <a:r>
-              <a:rPr lang="en-US" dirty="0" err="1">
-                <a:solidFill>
-                  <a:schemeClr val="bg1"/>
-                </a:solidFill>
-              </a:rPr>
-              <a:t>mit</a:t>
-            </a:r>
-            <a:r>
-              <a:rPr lang="en-US" dirty="0">
-                <a:solidFill>
-                  <a:schemeClr val="bg1"/>
-                </a:solidFill>
-              </a:rPr>
-              <a:t> Ort und </a:t>
-            </a:r>
-            <a:r>
-              <a:rPr lang="en-US" dirty="0" err="1">
-                <a:solidFill>
-                  <a:schemeClr val="bg1"/>
-                </a:solidFill>
-              </a:rPr>
-              <a:t>Zeitpunkt</a:t>
-            </a:r>
-            <a:r>
-              <a:rPr lang="en-US" dirty="0">
-                <a:solidFill>
-                  <a:schemeClr val="bg1"/>
-                </a:solidFill>
-              </a:rPr>
-              <a:t>:</a:t>
-            </a:r>
-          </a:p>
-          <a:p>
-            <a:r>
-              <a:rPr lang="en-US" dirty="0">
-                <a:solidFill>
-                  <a:schemeClr val="bg1"/>
-                </a:solidFill>
-              </a:rPr>
-              <a:t>z 	= 1</a:t>
-            </a:r>
-          </a:p>
-          <a:p>
-            <a:r>
-              <a:rPr lang="en-US" dirty="0" err="1">
-                <a:solidFill>
-                  <a:schemeClr val="bg1"/>
-                </a:solidFill>
-              </a:rPr>
-              <a:t>ct</a:t>
-            </a:r>
-            <a:r>
-              <a:rPr lang="en-US" dirty="0">
-                <a:solidFill>
-                  <a:schemeClr val="bg1"/>
-                </a:solidFill>
-              </a:rPr>
-              <a:t>	= 2</a:t>
-            </a:r>
-          </a:p>
-          <a:p>
-            <a:endParaRPr lang="en-US" dirty="0">
-              <a:solidFill>
-                <a:schemeClr val="bg1"/>
-              </a:solidFill>
-            </a:endParaRPr>
-          </a:p>
-          <a:p>
-            <a:r>
-              <a:rPr lang="en-US" dirty="0">
-                <a:solidFill>
-                  <a:schemeClr val="bg1"/>
-                </a:solidFill>
-              </a:rPr>
-              <a:t>Ein </a:t>
-            </a:r>
-            <a:r>
-              <a:rPr lang="en-US" dirty="0" err="1">
-                <a:solidFill>
-                  <a:schemeClr val="bg1"/>
-                </a:solidFill>
-              </a:rPr>
-              <a:t>zeites</a:t>
-            </a:r>
-            <a:r>
-              <a:rPr lang="en-US" dirty="0">
-                <a:solidFill>
-                  <a:schemeClr val="bg1"/>
-                </a:solidFill>
-              </a:rPr>
-              <a:t> </a:t>
-            </a:r>
-            <a:r>
-              <a:rPr lang="en-US" dirty="0" err="1">
-                <a:solidFill>
-                  <a:schemeClr val="bg1"/>
-                </a:solidFill>
-              </a:rPr>
-              <a:t>Ereignis</a:t>
-            </a:r>
-            <a:r>
-              <a:rPr lang="en-US" dirty="0">
-                <a:solidFill>
-                  <a:schemeClr val="bg1"/>
-                </a:solidFill>
-              </a:rPr>
-              <a:t> </a:t>
-            </a:r>
-            <a:r>
-              <a:rPr lang="en-US" dirty="0" err="1">
-                <a:solidFill>
-                  <a:schemeClr val="bg1"/>
-                </a:solidFill>
-              </a:rPr>
-              <a:t>mit</a:t>
-            </a:r>
-            <a:r>
-              <a:rPr lang="en-US" dirty="0">
-                <a:solidFill>
-                  <a:schemeClr val="bg1"/>
-                </a:solidFill>
-              </a:rPr>
-              <a:t> Ort und </a:t>
-            </a:r>
-            <a:r>
-              <a:rPr lang="en-US" dirty="0" err="1">
-                <a:solidFill>
-                  <a:schemeClr val="bg1"/>
-                </a:solidFill>
-              </a:rPr>
-              <a:t>Zeitpunkt</a:t>
-            </a:r>
-            <a:r>
-              <a:rPr lang="en-US" dirty="0">
-                <a:solidFill>
-                  <a:schemeClr val="bg1"/>
-                </a:solidFill>
-              </a:rPr>
-              <a:t>:</a:t>
-            </a:r>
-          </a:p>
-          <a:p>
-            <a:r>
-              <a:rPr lang="en-US" dirty="0">
-                <a:solidFill>
-                  <a:schemeClr val="bg1"/>
-                </a:solidFill>
-              </a:rPr>
-              <a:t>z 	= 3</a:t>
-            </a:r>
-          </a:p>
-          <a:p>
-            <a:r>
-              <a:rPr lang="en-US" dirty="0" err="1">
-                <a:solidFill>
-                  <a:schemeClr val="bg1"/>
-                </a:solidFill>
-              </a:rPr>
-              <a:t>ct</a:t>
-            </a:r>
-            <a:r>
-              <a:rPr lang="en-US" dirty="0">
-                <a:solidFill>
-                  <a:schemeClr val="bg1"/>
-                </a:solidFill>
-              </a:rPr>
-              <a:t>	= 1</a:t>
-            </a:r>
-          </a:p>
-          <a:p>
-            <a:endParaRPr lang="en-US" dirty="0">
-              <a:solidFill>
-                <a:schemeClr val="bg1"/>
-              </a:solidFill>
-            </a:endParaRPr>
-          </a:p>
-          <a:p>
-            <a:r>
-              <a:rPr lang="en-US" dirty="0" err="1">
-                <a:solidFill>
-                  <a:schemeClr val="bg1"/>
-                </a:solidFill>
-              </a:rPr>
-              <a:t>Verbindung</a:t>
-            </a:r>
-            <a:r>
-              <a:rPr lang="en-US" dirty="0">
-                <a:solidFill>
-                  <a:schemeClr val="bg1"/>
-                </a:solidFill>
-              </a:rPr>
-              <a:t> </a:t>
-            </a:r>
-            <a:r>
-              <a:rPr lang="en-US" dirty="0" err="1">
-                <a:solidFill>
-                  <a:schemeClr val="bg1"/>
-                </a:solidFill>
-              </a:rPr>
-              <a:t>zu</a:t>
-            </a:r>
-            <a:r>
-              <a:rPr lang="en-US" dirty="0">
-                <a:solidFill>
-                  <a:schemeClr val="bg1"/>
-                </a:solidFill>
-              </a:rPr>
-              <a:t> den </a:t>
-            </a:r>
-            <a:r>
-              <a:rPr lang="en-US" dirty="0" err="1">
-                <a:solidFill>
-                  <a:schemeClr val="bg1"/>
-                </a:solidFill>
-              </a:rPr>
-              <a:t>Koordinaten</a:t>
-            </a:r>
-            <a:r>
-              <a:rPr lang="en-US" dirty="0">
-                <a:solidFill>
-                  <a:schemeClr val="bg1"/>
-                </a:solidFill>
-              </a:rPr>
-              <a:t>- </a:t>
-            </a:r>
-            <a:r>
-              <a:rPr lang="en-US" dirty="0" err="1">
-                <a:solidFill>
-                  <a:schemeClr val="bg1"/>
-                </a:solidFill>
-              </a:rPr>
-              <a:t>achsen</a:t>
-            </a:r>
-            <a:r>
-              <a:rPr lang="en-US" dirty="0">
-                <a:solidFill>
-                  <a:schemeClr val="bg1"/>
-                </a:solidFill>
-              </a:rPr>
-              <a:t> </a:t>
-            </a:r>
-            <a:r>
-              <a:rPr lang="en-US" dirty="0" err="1">
-                <a:solidFill>
-                  <a:schemeClr val="bg1"/>
-                </a:solidFill>
-              </a:rPr>
-              <a:t>zum</a:t>
-            </a:r>
-            <a:r>
-              <a:rPr lang="en-US" dirty="0">
-                <a:solidFill>
-                  <a:schemeClr val="bg1"/>
-                </a:solidFill>
-              </a:rPr>
-              <a:t> </a:t>
-            </a:r>
-            <a:r>
-              <a:rPr lang="en-US" dirty="0" err="1">
-                <a:solidFill>
-                  <a:schemeClr val="bg1"/>
-                </a:solidFill>
-              </a:rPr>
-              <a:t>Ablesen</a:t>
-            </a:r>
-            <a:r>
-              <a:rPr lang="en-US" dirty="0">
-                <a:solidFill>
-                  <a:schemeClr val="bg1"/>
-                </a:solidFill>
-              </a:rPr>
-              <a:t> der </a:t>
-            </a:r>
-            <a:r>
-              <a:rPr lang="en-US" dirty="0" err="1">
-                <a:solidFill>
-                  <a:schemeClr val="bg1"/>
-                </a:solidFill>
-              </a:rPr>
-              <a:t>Werte</a:t>
-            </a:r>
-            <a:endParaRPr lang="en-US" dirty="0">
-              <a:solidFill>
-                <a:schemeClr val="bg1"/>
-              </a:solidFill>
-            </a:endParaRPr>
-          </a:p>
-          <a:p>
-            <a:endParaRPr lang="en-US" dirty="0">
-              <a:solidFill>
-                <a:schemeClr val="bg1"/>
-              </a:solidFill>
-            </a:endParaRPr>
-          </a:p>
-          <a:p>
-            <a:r>
-              <a:rPr lang="en-US" dirty="0" err="1">
-                <a:solidFill>
-                  <a:schemeClr val="bg1"/>
-                </a:solidFill>
-              </a:rPr>
-              <a:t>Messung</a:t>
-            </a:r>
-            <a:r>
-              <a:rPr lang="en-US" dirty="0">
-                <a:solidFill>
-                  <a:schemeClr val="bg1"/>
-                </a:solidFill>
-              </a:rPr>
-              <a:t> der </a:t>
-            </a:r>
-            <a:r>
-              <a:rPr lang="en-US" dirty="0" err="1">
-                <a:solidFill>
-                  <a:schemeClr val="bg1"/>
-                </a:solidFill>
-              </a:rPr>
-              <a:t>Entfernung</a:t>
-            </a:r>
-            <a:r>
-              <a:rPr lang="en-US" dirty="0">
-                <a:solidFill>
-                  <a:schemeClr val="bg1"/>
-                </a:solidFill>
-              </a:rPr>
-              <a:t> </a:t>
-            </a:r>
-            <a:r>
-              <a:rPr lang="en-US" dirty="0" err="1">
-                <a:solidFill>
-                  <a:schemeClr val="bg1"/>
-                </a:solidFill>
-              </a:rPr>
-              <a:t>zum</a:t>
-            </a:r>
-            <a:r>
-              <a:rPr lang="en-US" dirty="0">
-                <a:solidFill>
-                  <a:schemeClr val="bg1"/>
-                </a:solidFill>
-              </a:rPr>
-              <a:t> Ursprung</a:t>
-            </a:r>
-            <a:endParaRPr lang="en-CH" dirty="0">
-              <a:solidFill>
-                <a:schemeClr val="bg1"/>
-              </a:solidFill>
-            </a:endParaRPr>
-          </a:p>
-        </p:txBody>
-      </p:sp>
+      <mc:AlternateContent xmlns:mc="http://schemas.openxmlformats.org/markup-compatibility/2006">
+        <mc:Choice xmlns:a14="http://schemas.microsoft.com/office/drawing/2010/main" Requires="a14">
+          <p:sp>
+            <p:nvSpPr>
+              <p:cNvPr id="6" name="TextBox 5">
+                <a:extLst>
+                  <a:ext uri="{FF2B5EF4-FFF2-40B4-BE49-F238E27FC236}">
+                    <a16:creationId xmlns:a16="http://schemas.microsoft.com/office/drawing/2014/main" id="{34CB2127-D4B9-C919-AEA8-8CC161F4B1C2}"/>
+                  </a:ext>
+                </a:extLst>
+              </p:cNvPr>
+              <p:cNvSpPr txBox="1"/>
+              <p:nvPr/>
+            </p:nvSpPr>
+            <p:spPr>
+              <a:xfrm>
+                <a:off x="8547652" y="153348"/>
+                <a:ext cx="3475855" cy="3970318"/>
+              </a:xfrm>
+              <a:prstGeom prst="rect">
+                <a:avLst/>
+              </a:prstGeom>
+              <a:noFill/>
+            </p:spPr>
+            <p:txBody>
+              <a:bodyPr wrap="square" rtlCol="0">
+                <a:spAutoFit/>
+              </a:bodyPr>
+              <a:lstStyle/>
+              <a:p>
+                <a:r>
+                  <a:rPr lang="en-US" dirty="0">
+                    <a:solidFill>
+                      <a:schemeClr val="bg1"/>
+                    </a:solidFill>
+                  </a:rPr>
+                  <a:t>Ein </a:t>
+                </a:r>
+                <a:r>
+                  <a:rPr lang="en-US" dirty="0" err="1">
+                    <a:solidFill>
+                      <a:schemeClr val="bg1"/>
+                    </a:solidFill>
+                  </a:rPr>
+                  <a:t>Ereignis</a:t>
+                </a:r>
+                <a:r>
+                  <a:rPr lang="en-US" dirty="0">
+                    <a:solidFill>
+                      <a:schemeClr val="bg1"/>
+                    </a:solidFill>
+                  </a:rPr>
+                  <a:t> </a:t>
+                </a:r>
+                <a:r>
+                  <a:rPr lang="en-US" dirty="0" err="1">
+                    <a:solidFill>
+                      <a:schemeClr val="bg1"/>
+                    </a:solidFill>
+                  </a:rPr>
+                  <a:t>mit</a:t>
+                </a:r>
+                <a:r>
+                  <a:rPr lang="en-US" dirty="0">
+                    <a:solidFill>
+                      <a:schemeClr val="bg1"/>
+                    </a:solidFill>
+                  </a:rPr>
+                  <a:t> Ort und </a:t>
+                </a:r>
+                <a:r>
+                  <a:rPr lang="en-US" dirty="0" err="1">
+                    <a:solidFill>
+                      <a:schemeClr val="bg1"/>
+                    </a:solidFill>
+                  </a:rPr>
+                  <a:t>Zeitpunkt</a:t>
+                </a:r>
+                <a:r>
+                  <a:rPr lang="en-US" dirty="0">
+                    <a:solidFill>
+                      <a:schemeClr val="bg1"/>
+                    </a:solidFill>
+                  </a:rPr>
+                  <a:t>:</a:t>
+                </a:r>
+              </a:p>
+              <a:p>
+                <a:pPr/>
+                <a14:m>
+                  <m:oMathPara xmlns:m="http://schemas.openxmlformats.org/officeDocument/2006/math">
+                    <m:oMathParaPr>
+                      <m:jc m:val="left"/>
+                    </m:oMathParaPr>
+                    <m:oMath xmlns:m="http://schemas.openxmlformats.org/officeDocument/2006/math">
+                      <m:r>
+                        <a:rPr lang="en-US" b="0" i="1" smtClean="0">
+                          <a:solidFill>
+                            <a:schemeClr val="bg1"/>
+                          </a:solidFill>
+                          <a:latin typeface="Cambria Math" panose="02040503050406030204" pitchFamily="18" charset="0"/>
+                        </a:rPr>
+                        <m:t> </m:t>
+                      </m:r>
+                      <m:r>
+                        <a:rPr lang="en-US" b="0" i="1" smtClean="0">
+                          <a:solidFill>
+                            <a:schemeClr val="bg1"/>
+                          </a:solidFill>
+                          <a:latin typeface="Cambria Math" panose="02040503050406030204" pitchFamily="18" charset="0"/>
+                        </a:rPr>
+                        <m:t>𝑧</m:t>
+                      </m:r>
+                      <m:r>
+                        <a:rPr lang="en-US" b="0" i="1" smtClean="0">
+                          <a:solidFill>
+                            <a:schemeClr val="bg1"/>
+                          </a:solidFill>
+                          <a:latin typeface="Cambria Math" panose="02040503050406030204" pitchFamily="18" charset="0"/>
+                        </a:rPr>
+                        <m:t>=1</m:t>
+                      </m:r>
+                    </m:oMath>
+                  </m:oMathPara>
+                </a14:m>
+                <a:endParaRPr lang="en-US" dirty="0">
+                  <a:solidFill>
+                    <a:schemeClr val="bg1"/>
+                  </a:solidFill>
+                </a:endParaRPr>
+              </a:p>
+              <a:p>
+                <a:pPr/>
+                <a14:m>
+                  <m:oMathPara xmlns:m="http://schemas.openxmlformats.org/officeDocument/2006/math">
+                    <m:oMathParaPr>
+                      <m:jc m:val="left"/>
+                    </m:oMathParaPr>
+                    <m:oMath xmlns:m="http://schemas.openxmlformats.org/officeDocument/2006/math">
+                      <m:r>
+                        <a:rPr lang="en-US" b="0" i="1" smtClean="0">
+                          <a:solidFill>
+                            <a:schemeClr val="bg1"/>
+                          </a:solidFill>
+                          <a:latin typeface="Cambria Math" panose="02040503050406030204" pitchFamily="18" charset="0"/>
+                        </a:rPr>
+                        <m:t>𝑐𝑡</m:t>
+                      </m:r>
+                      <m:r>
+                        <a:rPr lang="en-US" b="0" i="1" smtClean="0">
+                          <a:solidFill>
+                            <a:schemeClr val="bg1"/>
+                          </a:solidFill>
+                          <a:latin typeface="Cambria Math" panose="02040503050406030204" pitchFamily="18" charset="0"/>
+                        </a:rPr>
+                        <m:t>=2</m:t>
+                      </m:r>
+                    </m:oMath>
+                  </m:oMathPara>
+                </a14:m>
+                <a:endParaRPr lang="en-US" dirty="0">
+                  <a:solidFill>
+                    <a:schemeClr val="bg1"/>
+                  </a:solidFill>
+                </a:endParaRPr>
+              </a:p>
+              <a:p>
+                <a:endParaRPr lang="en-US" dirty="0">
+                  <a:solidFill>
+                    <a:schemeClr val="bg1"/>
+                  </a:solidFill>
+                </a:endParaRPr>
+              </a:p>
+              <a:p>
+                <a:r>
+                  <a:rPr lang="en-US" dirty="0">
+                    <a:solidFill>
+                      <a:schemeClr val="bg1"/>
+                    </a:solidFill>
+                  </a:rPr>
+                  <a:t>Ein </a:t>
+                </a:r>
+                <a:r>
+                  <a:rPr lang="en-US" dirty="0" err="1">
+                    <a:solidFill>
+                      <a:schemeClr val="bg1"/>
+                    </a:solidFill>
+                  </a:rPr>
+                  <a:t>zweites</a:t>
+                </a:r>
+                <a:r>
+                  <a:rPr lang="en-US" dirty="0">
+                    <a:solidFill>
+                      <a:schemeClr val="bg1"/>
+                    </a:solidFill>
+                  </a:rPr>
+                  <a:t> </a:t>
+                </a:r>
+                <a:r>
+                  <a:rPr lang="en-US" dirty="0" err="1">
+                    <a:solidFill>
+                      <a:schemeClr val="bg1"/>
+                    </a:solidFill>
+                  </a:rPr>
+                  <a:t>Ereignis</a:t>
+                </a:r>
+                <a:r>
+                  <a:rPr lang="en-US" dirty="0">
+                    <a:solidFill>
+                      <a:schemeClr val="bg1"/>
+                    </a:solidFill>
+                  </a:rPr>
+                  <a:t> </a:t>
+                </a:r>
+                <a:r>
+                  <a:rPr lang="en-US" dirty="0" err="1">
+                    <a:solidFill>
+                      <a:schemeClr val="bg1"/>
+                    </a:solidFill>
+                  </a:rPr>
+                  <a:t>mit</a:t>
+                </a:r>
+                <a:r>
+                  <a:rPr lang="en-US" dirty="0">
+                    <a:solidFill>
+                      <a:schemeClr val="bg1"/>
+                    </a:solidFill>
+                  </a:rPr>
+                  <a:t> Ort und </a:t>
+                </a:r>
+                <a:r>
+                  <a:rPr lang="en-US" dirty="0" err="1">
+                    <a:solidFill>
+                      <a:schemeClr val="bg1"/>
+                    </a:solidFill>
+                  </a:rPr>
+                  <a:t>Zeitpunkt</a:t>
+                </a:r>
+                <a:r>
+                  <a:rPr lang="en-US" dirty="0">
+                    <a:solidFill>
+                      <a:schemeClr val="bg1"/>
+                    </a:solidFill>
+                  </a:rPr>
+                  <a:t>:</a:t>
+                </a:r>
+              </a:p>
+              <a:p>
+                <a:pPr/>
+                <a14:m>
+                  <m:oMathPara xmlns:m="http://schemas.openxmlformats.org/officeDocument/2006/math">
+                    <m:oMathParaPr>
+                      <m:jc m:val="left"/>
+                    </m:oMathParaPr>
+                    <m:oMath xmlns:m="http://schemas.openxmlformats.org/officeDocument/2006/math">
+                      <m:r>
+                        <a:rPr lang="en-US" b="0" i="1" smtClean="0">
+                          <a:solidFill>
+                            <a:schemeClr val="bg1"/>
+                          </a:solidFill>
+                          <a:latin typeface="Cambria Math" panose="02040503050406030204" pitchFamily="18" charset="0"/>
+                        </a:rPr>
+                        <m:t>  </m:t>
+                      </m:r>
+                      <m:r>
+                        <a:rPr lang="en-US" b="0" i="1" smtClean="0">
+                          <a:solidFill>
+                            <a:schemeClr val="bg1"/>
+                          </a:solidFill>
+                          <a:latin typeface="Cambria Math" panose="02040503050406030204" pitchFamily="18" charset="0"/>
+                        </a:rPr>
+                        <m:t>𝑧</m:t>
+                      </m:r>
+                      <m:r>
+                        <a:rPr lang="en-US" b="0" i="1" smtClean="0">
+                          <a:solidFill>
+                            <a:schemeClr val="bg1"/>
+                          </a:solidFill>
+                          <a:latin typeface="Cambria Math" panose="02040503050406030204" pitchFamily="18" charset="0"/>
+                        </a:rPr>
+                        <m:t>=3</m:t>
+                      </m:r>
+                    </m:oMath>
+                  </m:oMathPara>
+                </a14:m>
+                <a:endParaRPr lang="en-US" dirty="0">
+                  <a:solidFill>
+                    <a:schemeClr val="bg1"/>
+                  </a:solidFill>
+                </a:endParaRPr>
+              </a:p>
+              <a:p>
+                <a:pPr/>
+                <a14:m>
+                  <m:oMathPara xmlns:m="http://schemas.openxmlformats.org/officeDocument/2006/math">
+                    <m:oMathParaPr>
+                      <m:jc m:val="left"/>
+                    </m:oMathParaPr>
+                    <m:oMath xmlns:m="http://schemas.openxmlformats.org/officeDocument/2006/math">
+                      <m:r>
+                        <a:rPr lang="en-US" b="0" i="1" smtClean="0">
+                          <a:solidFill>
+                            <a:schemeClr val="bg1"/>
+                          </a:solidFill>
+                          <a:latin typeface="Cambria Math" panose="02040503050406030204" pitchFamily="18" charset="0"/>
+                        </a:rPr>
+                        <m:t>𝑐𝑡</m:t>
+                      </m:r>
+                      <m:r>
+                        <a:rPr lang="en-US" b="0" i="1" smtClean="0">
+                          <a:solidFill>
+                            <a:schemeClr val="bg1"/>
+                          </a:solidFill>
+                          <a:latin typeface="Cambria Math" panose="02040503050406030204" pitchFamily="18" charset="0"/>
+                        </a:rPr>
+                        <m:t>=1</m:t>
+                      </m:r>
+                    </m:oMath>
+                  </m:oMathPara>
+                </a14:m>
+                <a:endParaRPr lang="en-US" dirty="0">
+                  <a:solidFill>
+                    <a:schemeClr val="bg1"/>
+                  </a:solidFill>
+                </a:endParaRPr>
+              </a:p>
+              <a:p>
+                <a:endParaRPr lang="en-US" dirty="0">
+                  <a:solidFill>
+                    <a:schemeClr val="bg1"/>
+                  </a:solidFill>
+                </a:endParaRPr>
+              </a:p>
+              <a:p>
+                <a:r>
+                  <a:rPr lang="en-US" dirty="0" err="1">
+                    <a:solidFill>
+                      <a:schemeClr val="bg1"/>
+                    </a:solidFill>
+                  </a:rPr>
+                  <a:t>Verbindung</a:t>
+                </a:r>
+                <a:r>
+                  <a:rPr lang="en-US" dirty="0">
+                    <a:solidFill>
+                      <a:schemeClr val="bg1"/>
+                    </a:solidFill>
+                  </a:rPr>
+                  <a:t> </a:t>
+                </a:r>
+                <a:r>
+                  <a:rPr lang="en-US" dirty="0" err="1">
+                    <a:solidFill>
+                      <a:schemeClr val="bg1"/>
+                    </a:solidFill>
+                  </a:rPr>
+                  <a:t>zu</a:t>
+                </a:r>
+                <a:r>
+                  <a:rPr lang="en-US" dirty="0">
+                    <a:solidFill>
+                      <a:schemeClr val="bg1"/>
+                    </a:solidFill>
+                  </a:rPr>
+                  <a:t> den </a:t>
+                </a:r>
+                <a:r>
+                  <a:rPr lang="en-US" dirty="0" err="1">
+                    <a:solidFill>
+                      <a:schemeClr val="bg1"/>
+                    </a:solidFill>
+                  </a:rPr>
+                  <a:t>Koordinaten</a:t>
+                </a:r>
+                <a:r>
+                  <a:rPr lang="en-US" dirty="0">
+                    <a:solidFill>
+                      <a:schemeClr val="bg1"/>
+                    </a:solidFill>
+                  </a:rPr>
+                  <a:t>- </a:t>
+                </a:r>
+                <a:r>
+                  <a:rPr lang="en-US" dirty="0" err="1">
+                    <a:solidFill>
+                      <a:schemeClr val="bg1"/>
+                    </a:solidFill>
+                  </a:rPr>
+                  <a:t>achsen</a:t>
+                </a:r>
+                <a:r>
+                  <a:rPr lang="en-US" dirty="0">
+                    <a:solidFill>
+                      <a:schemeClr val="bg1"/>
+                    </a:solidFill>
+                  </a:rPr>
+                  <a:t> </a:t>
+                </a:r>
+                <a:r>
+                  <a:rPr lang="en-US" dirty="0" err="1">
+                    <a:solidFill>
+                      <a:schemeClr val="bg1"/>
+                    </a:solidFill>
+                  </a:rPr>
+                  <a:t>zum</a:t>
+                </a:r>
+                <a:r>
+                  <a:rPr lang="en-US" dirty="0">
+                    <a:solidFill>
+                      <a:schemeClr val="bg1"/>
+                    </a:solidFill>
+                  </a:rPr>
+                  <a:t> </a:t>
+                </a:r>
+                <a:r>
+                  <a:rPr lang="en-US" dirty="0" err="1">
+                    <a:solidFill>
+                      <a:schemeClr val="bg1"/>
+                    </a:solidFill>
+                  </a:rPr>
+                  <a:t>Ablesen</a:t>
+                </a:r>
+                <a:r>
+                  <a:rPr lang="en-US" dirty="0">
+                    <a:solidFill>
+                      <a:schemeClr val="bg1"/>
+                    </a:solidFill>
+                  </a:rPr>
+                  <a:t> der </a:t>
+                </a:r>
+                <a:r>
+                  <a:rPr lang="en-US" dirty="0" err="1">
+                    <a:solidFill>
+                      <a:schemeClr val="bg1"/>
+                    </a:solidFill>
+                  </a:rPr>
+                  <a:t>Werte</a:t>
+                </a:r>
+                <a:endParaRPr lang="en-US" dirty="0">
+                  <a:solidFill>
+                    <a:schemeClr val="bg1"/>
+                  </a:solidFill>
+                </a:endParaRPr>
+              </a:p>
+              <a:p>
+                <a:endParaRPr lang="en-US" dirty="0">
+                  <a:solidFill>
+                    <a:schemeClr val="bg1"/>
+                  </a:solidFill>
+                </a:endParaRPr>
+              </a:p>
+              <a:p>
+                <a:r>
+                  <a:rPr lang="en-US" dirty="0" err="1">
+                    <a:solidFill>
+                      <a:schemeClr val="bg1"/>
+                    </a:solidFill>
+                  </a:rPr>
+                  <a:t>Messung</a:t>
+                </a:r>
+                <a:r>
+                  <a:rPr lang="en-US" dirty="0">
+                    <a:solidFill>
+                      <a:schemeClr val="bg1"/>
+                    </a:solidFill>
+                  </a:rPr>
+                  <a:t> der </a:t>
+                </a:r>
+                <a:r>
+                  <a:rPr lang="en-US" dirty="0" err="1">
+                    <a:solidFill>
+                      <a:schemeClr val="bg1"/>
+                    </a:solidFill>
+                  </a:rPr>
+                  <a:t>Entfernung</a:t>
+                </a:r>
+                <a:r>
+                  <a:rPr lang="en-US" dirty="0">
+                    <a:solidFill>
+                      <a:schemeClr val="bg1"/>
+                    </a:solidFill>
+                  </a:rPr>
+                  <a:t> </a:t>
+                </a:r>
+                <a:r>
+                  <a:rPr lang="en-US" dirty="0" err="1">
+                    <a:solidFill>
+                      <a:schemeClr val="bg1"/>
+                    </a:solidFill>
+                  </a:rPr>
+                  <a:t>zum</a:t>
+                </a:r>
+                <a:r>
+                  <a:rPr lang="en-US" dirty="0">
+                    <a:solidFill>
+                      <a:schemeClr val="bg1"/>
+                    </a:solidFill>
+                  </a:rPr>
+                  <a:t> Ursprung</a:t>
+                </a:r>
+                <a:endParaRPr lang="en-CH" dirty="0">
+                  <a:solidFill>
+                    <a:schemeClr val="bg1"/>
+                  </a:solidFill>
+                </a:endParaRPr>
+              </a:p>
+            </p:txBody>
+          </p:sp>
+        </mc:Choice>
+        <mc:Fallback>
+          <p:sp>
+            <p:nvSpPr>
+              <p:cNvPr id="6" name="TextBox 5">
+                <a:extLst>
+                  <a:ext uri="{FF2B5EF4-FFF2-40B4-BE49-F238E27FC236}">
+                    <a16:creationId xmlns:a16="http://schemas.microsoft.com/office/drawing/2014/main" id="{34CB2127-D4B9-C919-AEA8-8CC161F4B1C2}"/>
+                  </a:ext>
+                </a:extLst>
+              </p:cNvPr>
+              <p:cNvSpPr txBox="1">
+                <a:spLocks noRot="1" noChangeAspect="1" noMove="1" noResize="1" noEditPoints="1" noAdjustHandles="1" noChangeArrowheads="1" noChangeShapeType="1" noTextEdit="1"/>
+              </p:cNvSpPr>
+              <p:nvPr/>
+            </p:nvSpPr>
+            <p:spPr>
+              <a:xfrm>
+                <a:off x="8547652" y="153348"/>
+                <a:ext cx="3475855" cy="3970318"/>
+              </a:xfrm>
+              <a:prstGeom prst="rect">
+                <a:avLst/>
+              </a:prstGeom>
+              <a:blipFill>
+                <a:blip r:embed="rId4"/>
+                <a:stretch>
+                  <a:fillRect l="-1404" t="-768" r="-1579" b="-1536"/>
+                </a:stretch>
+              </a:blipFill>
+            </p:spPr>
+            <p:txBody>
+              <a:bodyPr/>
+              <a:lstStyle/>
+              <a:p>
+                <a:r>
+                  <a:rPr lang="en-CH">
+                    <a:noFill/>
+                  </a:rPr>
+                  <a:t> </a:t>
+                </a:r>
+              </a:p>
+            </p:txBody>
+          </p:sp>
+        </mc:Fallback>
+      </mc:AlternateContent>
     </p:spTree>
     <p:extLst>
       <p:ext uri="{BB962C8B-B14F-4D97-AF65-F5344CB8AC3E}">

--- a/slides/minkowski.pptx
+++ b/slides/minkowski.pptx
@@ -6,7 +6,7 @@
     <p:sldMasterId id="2147483798" r:id="rId2"/>
   </p:sldMasterIdLst>
   <p:notesMasterIdLst>
-    <p:notesMasterId r:id="rId15"/>
+    <p:notesMasterId r:id="rId18"/>
   </p:notesMasterIdLst>
   <p:sldIdLst>
     <p:sldId id="256" r:id="rId3"/>
@@ -21,6 +21,9 @@
     <p:sldId id="266" r:id="rId12"/>
     <p:sldId id="267" r:id="rId13"/>
     <p:sldId id="259" r:id="rId14"/>
+    <p:sldId id="270" r:id="rId15"/>
+    <p:sldId id="268" r:id="rId16"/>
+    <p:sldId id="269" r:id="rId17"/>
   </p:sldIdLst>
   <p:sldSz cx="12192000" cy="6858000"/>
   <p:notesSz cx="6858000" cy="9144000"/>
@@ -6088,8 +6091,8 @@
           </a:xfrm>
         </p:spPr>
       </p:pic>
-      <mc:AlternateContent xmlns:mc="http://schemas.openxmlformats.org/markup-compatibility/2006">
-        <mc:Choice xmlns:a14="http://schemas.microsoft.com/office/drawing/2010/main" Requires="a14">
+      <mc:AlternateContent xmlns:mc="http://schemas.openxmlformats.org/markup-compatibility/2006" xmlns:a14="http://schemas.microsoft.com/office/drawing/2010/main">
+        <mc:Choice Requires="a14">
           <p:sp>
             <p:nvSpPr>
               <p:cNvPr id="2" name="TextBox 1">
@@ -6538,7 +6541,7 @@
             </p:txBody>
           </p:sp>
         </mc:Choice>
-        <mc:Fallback>
+        <mc:Fallback xmlns="">
           <p:sp>
             <p:nvSpPr>
               <p:cNvPr id="2" name="TextBox 1">
@@ -6619,8 +6622,8 @@
           <a:chExt cx="0" cy="0"/>
         </a:xfrm>
       </p:grpSpPr>
-      <mc:AlternateContent xmlns:mc="http://schemas.openxmlformats.org/markup-compatibility/2006">
-        <mc:Choice xmlns:a14="http://schemas.microsoft.com/office/drawing/2010/main" Requires="a14">
+      <mc:AlternateContent xmlns:mc="http://schemas.openxmlformats.org/markup-compatibility/2006" xmlns:a14="http://schemas.microsoft.com/office/drawing/2010/main">
+        <mc:Choice Requires="a14">
           <p:sp>
             <p:nvSpPr>
               <p:cNvPr id="5" name="TextBox 4">
@@ -7191,7 +7194,6 @@
                 </a:endParaRPr>
               </a:p>
               <a:p>
-                <a:pPr/>
                 <a:r>
                   <a:rPr lang="en-US" b="0" dirty="0">
                     <a:solidFill>
@@ -7243,7 +7245,7 @@
             </p:txBody>
           </p:sp>
         </mc:Choice>
-        <mc:Fallback>
+        <mc:Fallback xmlns="">
           <p:sp>
             <p:nvSpPr>
               <p:cNvPr id="5" name="TextBox 4">
@@ -7384,10 +7386,2700 @@
           </a:xfrm>
         </p:spPr>
       </p:pic>
+      <mc:AlternateContent xmlns:mc="http://schemas.openxmlformats.org/markup-compatibility/2006">
+        <mc:Choice xmlns:a14="http://schemas.microsoft.com/office/drawing/2010/main" Requires="a14">
+          <p:sp>
+            <p:nvSpPr>
+              <p:cNvPr id="2" name="TextBox 1">
+                <a:extLst>
+                  <a:ext uri="{FF2B5EF4-FFF2-40B4-BE49-F238E27FC236}">
+                    <a16:creationId xmlns:a16="http://schemas.microsoft.com/office/drawing/2014/main" id="{94B87BA9-FAF2-990C-39C3-DA932358E7F1}"/>
+                  </a:ext>
+                </a:extLst>
+              </p:cNvPr>
+              <p:cNvSpPr txBox="1"/>
+              <p:nvPr/>
+            </p:nvSpPr>
+            <p:spPr>
+              <a:xfrm>
+                <a:off x="8547652" y="153348"/>
+                <a:ext cx="3475855" cy="1200329"/>
+              </a:xfrm>
+              <a:prstGeom prst="rect">
+                <a:avLst/>
+              </a:prstGeom>
+              <a:noFill/>
+            </p:spPr>
+            <p:txBody>
+              <a:bodyPr wrap="square" rtlCol="0">
+                <a:spAutoFit/>
+              </a:bodyPr>
+              <a:lstStyle/>
+              <a:p>
+                <a:r>
+                  <a:rPr lang="en-US" dirty="0">
+                    <a:solidFill>
+                      <a:schemeClr val="bg1"/>
+                    </a:solidFill>
+                  </a:rPr>
+                  <a:t>Bei Licht gilt </a:t>
+                </a:r>
+                <a14:m>
+                  <m:oMath xmlns:m="http://schemas.openxmlformats.org/officeDocument/2006/math">
+                    <m:r>
+                      <m:rPr>
+                        <m:sty m:val="p"/>
+                      </m:rPr>
+                      <a:rPr lang="en-US" b="0" i="0" smtClean="0">
+                        <a:solidFill>
+                          <a:schemeClr val="bg1"/>
+                        </a:solidFill>
+                        <a:latin typeface="Cambria Math" panose="02040503050406030204" pitchFamily="18" charset="0"/>
+                      </a:rPr>
+                      <m:t>Δ</m:t>
+                    </m:r>
+                    <m:r>
+                      <a:rPr lang="en-US" b="0" i="1" smtClean="0">
+                        <a:solidFill>
+                          <a:schemeClr val="bg1"/>
+                        </a:solidFill>
+                        <a:latin typeface="Cambria Math" panose="02040503050406030204" pitchFamily="18" charset="0"/>
+                      </a:rPr>
+                      <m:t>𝑧</m:t>
+                    </m:r>
+                    <m:r>
+                      <a:rPr lang="en-US" b="0" i="1" smtClean="0">
+                        <a:solidFill>
+                          <a:schemeClr val="bg1"/>
+                        </a:solidFill>
+                        <a:latin typeface="Cambria Math" panose="02040503050406030204" pitchFamily="18" charset="0"/>
+                      </a:rPr>
+                      <m:t>=</m:t>
+                    </m:r>
+                    <m:r>
+                      <m:rPr>
+                        <m:nor/>
+                      </m:rPr>
+                      <a:rPr lang="en-US" dirty="0">
+                        <a:solidFill>
+                          <a:schemeClr val="bg1"/>
+                        </a:solidFill>
+                      </a:rPr>
+                      <m:t>c</m:t>
+                    </m:r>
+                    <m:r>
+                      <m:rPr>
+                        <m:sty m:val="p"/>
+                      </m:rPr>
+                      <a:rPr lang="en-US">
+                        <a:solidFill>
+                          <a:schemeClr val="bg1"/>
+                        </a:solidFill>
+                        <a:latin typeface="Cambria Math" panose="02040503050406030204" pitchFamily="18" charset="0"/>
+                      </a:rPr>
+                      <m:t>Δ</m:t>
+                    </m:r>
+                    <m:r>
+                      <a:rPr lang="en-US" i="1">
+                        <a:solidFill>
+                          <a:schemeClr val="bg1"/>
+                        </a:solidFill>
+                        <a:latin typeface="Cambria Math" panose="02040503050406030204" pitchFamily="18" charset="0"/>
+                      </a:rPr>
+                      <m:t>𝑡</m:t>
+                    </m:r>
+                  </m:oMath>
+                </a14:m>
+                <a:endParaRPr lang="en-US" dirty="0">
+                  <a:solidFill>
+                    <a:schemeClr val="bg1"/>
+                  </a:solidFill>
+                </a:endParaRPr>
+              </a:p>
+              <a:p>
+                <a:endParaRPr lang="en-US" dirty="0">
+                  <a:solidFill>
+                    <a:schemeClr val="bg1"/>
+                  </a:solidFill>
+                </a:endParaRPr>
+              </a:p>
+              <a:p>
+                <a:r>
+                  <a:rPr lang="en-US" dirty="0" err="1">
+                    <a:solidFill>
+                      <a:schemeClr val="bg1"/>
+                    </a:solidFill>
+                  </a:rPr>
+                  <a:t>Dadurch</a:t>
+                </a:r>
+                <a:r>
+                  <a:rPr lang="en-US" dirty="0">
+                    <a:solidFill>
+                      <a:schemeClr val="bg1"/>
+                    </a:solidFill>
+                  </a:rPr>
+                  <a:t> </a:t>
+                </a:r>
+                <a:r>
+                  <a:rPr lang="en-US" dirty="0" err="1">
+                    <a:solidFill>
+                      <a:schemeClr val="bg1"/>
+                    </a:solidFill>
+                  </a:rPr>
+                  <a:t>entstehen</a:t>
+                </a:r>
+                <a:r>
+                  <a:rPr lang="en-US" dirty="0">
+                    <a:solidFill>
+                      <a:schemeClr val="bg1"/>
+                    </a:solidFill>
+                  </a:rPr>
+                  <a:t> </a:t>
+                </a:r>
+                <a:r>
+                  <a:rPr lang="en-US" dirty="0" err="1">
+                    <a:solidFill>
+                      <a:schemeClr val="bg1"/>
+                    </a:solidFill>
+                  </a:rPr>
+                  <a:t>Diagonalen</a:t>
+                </a:r>
+                <a:r>
+                  <a:rPr lang="en-US" dirty="0">
+                    <a:solidFill>
+                      <a:schemeClr val="bg1"/>
+                    </a:solidFill>
+                  </a:rPr>
+                  <a:t> </a:t>
+                </a:r>
+                <a:r>
+                  <a:rPr lang="en-US" dirty="0" err="1">
+                    <a:solidFill>
+                      <a:schemeClr val="bg1"/>
+                    </a:solidFill>
+                  </a:rPr>
+                  <a:t>im</a:t>
+                </a:r>
+                <a:r>
+                  <a:rPr lang="en-US" dirty="0">
+                    <a:solidFill>
+                      <a:schemeClr val="bg1"/>
+                    </a:solidFill>
+                  </a:rPr>
+                  <a:t> Minkowski-</a:t>
+                </a:r>
+                <a:r>
+                  <a:rPr lang="en-US" dirty="0" err="1">
+                    <a:solidFill>
+                      <a:schemeClr val="bg1"/>
+                    </a:solidFill>
+                  </a:rPr>
+                  <a:t>Diagramm</a:t>
+                </a:r>
+                <a:endParaRPr lang="en-US" dirty="0">
+                  <a:solidFill>
+                    <a:schemeClr val="bg1"/>
+                  </a:solidFill>
+                </a:endParaRPr>
+              </a:p>
+            </p:txBody>
+          </p:sp>
+        </mc:Choice>
+        <mc:Fallback>
+          <p:sp>
+            <p:nvSpPr>
+              <p:cNvPr id="2" name="TextBox 1">
+                <a:extLst>
+                  <a:ext uri="{FF2B5EF4-FFF2-40B4-BE49-F238E27FC236}">
+                    <a16:creationId xmlns:a16="http://schemas.microsoft.com/office/drawing/2014/main" id="{94B87BA9-FAF2-990C-39C3-DA932358E7F1}"/>
+                  </a:ext>
+                </a:extLst>
+              </p:cNvPr>
+              <p:cNvSpPr txBox="1">
+                <a:spLocks noRot="1" noChangeAspect="1" noMove="1" noResize="1" noEditPoints="1" noAdjustHandles="1" noChangeArrowheads="1" noChangeShapeType="1" noTextEdit="1"/>
+              </p:cNvSpPr>
+              <p:nvPr/>
+            </p:nvSpPr>
+            <p:spPr>
+              <a:xfrm>
+                <a:off x="8547652" y="153348"/>
+                <a:ext cx="3475855" cy="1200329"/>
+              </a:xfrm>
+              <a:prstGeom prst="rect">
+                <a:avLst/>
+              </a:prstGeom>
+              <a:blipFill>
+                <a:blip r:embed="rId3"/>
+                <a:stretch>
+                  <a:fillRect l="-1404" t="-2538" b="-7107"/>
+                </a:stretch>
+              </a:blipFill>
+            </p:spPr>
+            <p:txBody>
+              <a:bodyPr/>
+              <a:lstStyle/>
+              <a:p>
+                <a:r>
+                  <a:rPr lang="en-CH">
+                    <a:noFill/>
+                  </a:rPr>
+                  <a:t> </a:t>
+                </a:r>
+              </a:p>
+            </p:txBody>
+          </p:sp>
+        </mc:Fallback>
+      </mc:AlternateContent>
     </p:spTree>
     <p:extLst>
       <p:ext uri="{BB962C8B-B14F-4D97-AF65-F5344CB8AC3E}">
         <p14:creationId xmlns:p14="http://schemas.microsoft.com/office/powerpoint/2010/main" val="4206889277"/>
+      </p:ext>
+    </p:extLst>
+  </p:cSld>
+  <p:clrMapOvr>
+    <a:masterClrMapping/>
+  </p:clrMapOvr>
+</p:sld>
+</file>
+
+<file path=ppt/slides/slide13.xml><?xml version="1.0" encoding="utf-8"?>
+<p:sld xmlns:a="http://schemas.openxmlformats.org/drawingml/2006/main" xmlns:r="http://schemas.openxmlformats.org/officeDocument/2006/relationships" xmlns:p="http://schemas.openxmlformats.org/presentationml/2006/main">
+  <p:cSld>
+    <p:spTree>
+      <p:nvGrpSpPr>
+        <p:cNvPr id="1" name="">
+          <a:extLst>
+            <a:ext uri="{FF2B5EF4-FFF2-40B4-BE49-F238E27FC236}">
+              <a16:creationId xmlns:a16="http://schemas.microsoft.com/office/drawing/2014/main" id="{C0AF8EDC-C61C-B4DE-F823-5F8AB0BEFD82}"/>
+            </a:ext>
+          </a:extLst>
+        </p:cNvPr>
+        <p:cNvGrpSpPr/>
+        <p:nvPr/>
+      </p:nvGrpSpPr>
+      <p:grpSpPr>
+        <a:xfrm>
+          <a:off x="0" y="0"/>
+          <a:ext cx="0" cy="0"/>
+          <a:chOff x="0" y="0"/>
+          <a:chExt cx="0" cy="0"/>
+        </a:xfrm>
+      </p:grpSpPr>
+      <p:pic>
+        <p:nvPicPr>
+          <p:cNvPr id="4" name="Content Placeholder 3">
+            <a:extLst>
+              <a:ext uri="{FF2B5EF4-FFF2-40B4-BE49-F238E27FC236}">
+                <a16:creationId xmlns:a16="http://schemas.microsoft.com/office/drawing/2014/main" id="{50E54EA0-3A4A-39F2-4AF6-663D0C2648C9}"/>
+              </a:ext>
+            </a:extLst>
+          </p:cNvPr>
+          <p:cNvPicPr>
+            <a:picLocks noGrp="1" noChangeAspect="1"/>
+          </p:cNvPicPr>
+          <p:nvPr>
+            <p:ph idx="1"/>
+          </p:nvPr>
+        </p:nvPicPr>
+        <p:blipFill>
+          <a:blip r:link="rId2"/>
+          <a:srcRect/>
+          <a:stretch>
+            <a:fillRect/>
+          </a:stretch>
+        </p:blipFill>
+        <p:spPr>
+          <a:xfrm>
+            <a:off x="439948" y="-422692"/>
+            <a:ext cx="7556740" cy="7556740"/>
+          </a:xfrm>
+        </p:spPr>
+      </p:pic>
+      <mc:AlternateContent xmlns:mc="http://schemas.openxmlformats.org/markup-compatibility/2006">
+        <mc:Choice xmlns:a14="http://schemas.microsoft.com/office/drawing/2010/main" Requires="a14">
+          <p:sp>
+            <p:nvSpPr>
+              <p:cNvPr id="2" name="TextBox 1">
+                <a:extLst>
+                  <a:ext uri="{FF2B5EF4-FFF2-40B4-BE49-F238E27FC236}">
+                    <a16:creationId xmlns:a16="http://schemas.microsoft.com/office/drawing/2014/main" id="{CD40440C-0188-F5D7-BA2B-6C65310FA518}"/>
+                  </a:ext>
+                </a:extLst>
+              </p:cNvPr>
+              <p:cNvSpPr txBox="1"/>
+              <p:nvPr/>
+            </p:nvSpPr>
+            <p:spPr>
+              <a:xfrm>
+                <a:off x="8547652" y="153348"/>
+                <a:ext cx="3475855" cy="2308324"/>
+              </a:xfrm>
+              <a:prstGeom prst="rect">
+                <a:avLst/>
+              </a:prstGeom>
+              <a:noFill/>
+            </p:spPr>
+            <p:txBody>
+              <a:bodyPr wrap="square" rtlCol="0">
+                <a:spAutoFit/>
+              </a:bodyPr>
+              <a:lstStyle/>
+              <a:p>
+                <a:r>
+                  <a:rPr lang="en-US" dirty="0">
+                    <a:solidFill>
+                      <a:schemeClr val="bg1"/>
+                    </a:solidFill>
+                  </a:rPr>
+                  <a:t>Bei Licht gilt </a:t>
+                </a:r>
+                <a14:m>
+                  <m:oMath xmlns:m="http://schemas.openxmlformats.org/officeDocument/2006/math">
+                    <m:r>
+                      <m:rPr>
+                        <m:sty m:val="p"/>
+                      </m:rPr>
+                      <a:rPr lang="en-US" b="0" i="0" smtClean="0">
+                        <a:solidFill>
+                          <a:schemeClr val="bg1"/>
+                        </a:solidFill>
+                        <a:latin typeface="Cambria Math" panose="02040503050406030204" pitchFamily="18" charset="0"/>
+                      </a:rPr>
+                      <m:t>Δ</m:t>
+                    </m:r>
+                    <m:r>
+                      <a:rPr lang="en-US" b="0" i="1" smtClean="0">
+                        <a:solidFill>
+                          <a:schemeClr val="bg1"/>
+                        </a:solidFill>
+                        <a:latin typeface="Cambria Math" panose="02040503050406030204" pitchFamily="18" charset="0"/>
+                      </a:rPr>
+                      <m:t>𝑧</m:t>
+                    </m:r>
+                    <m:r>
+                      <a:rPr lang="en-US" b="0" i="1" smtClean="0">
+                        <a:solidFill>
+                          <a:schemeClr val="bg1"/>
+                        </a:solidFill>
+                        <a:latin typeface="Cambria Math" panose="02040503050406030204" pitchFamily="18" charset="0"/>
+                      </a:rPr>
+                      <m:t>=</m:t>
+                    </m:r>
+                    <m:r>
+                      <m:rPr>
+                        <m:nor/>
+                      </m:rPr>
+                      <a:rPr lang="en-US" dirty="0">
+                        <a:solidFill>
+                          <a:schemeClr val="bg1"/>
+                        </a:solidFill>
+                      </a:rPr>
+                      <m:t>c</m:t>
+                    </m:r>
+                    <m:r>
+                      <m:rPr>
+                        <m:sty m:val="p"/>
+                      </m:rPr>
+                      <a:rPr lang="en-US">
+                        <a:solidFill>
+                          <a:schemeClr val="bg1"/>
+                        </a:solidFill>
+                        <a:latin typeface="Cambria Math" panose="02040503050406030204" pitchFamily="18" charset="0"/>
+                      </a:rPr>
+                      <m:t>Δ</m:t>
+                    </m:r>
+                    <m:r>
+                      <a:rPr lang="en-US" i="1">
+                        <a:solidFill>
+                          <a:schemeClr val="bg1"/>
+                        </a:solidFill>
+                        <a:latin typeface="Cambria Math" panose="02040503050406030204" pitchFamily="18" charset="0"/>
+                      </a:rPr>
+                      <m:t>𝑡</m:t>
+                    </m:r>
+                  </m:oMath>
+                </a14:m>
+                <a:endParaRPr lang="en-US" dirty="0">
+                  <a:solidFill>
+                    <a:schemeClr val="bg1"/>
+                  </a:solidFill>
+                </a:endParaRPr>
+              </a:p>
+              <a:p>
+                <a:endParaRPr lang="en-US" dirty="0">
+                  <a:solidFill>
+                    <a:schemeClr val="bg1"/>
+                  </a:solidFill>
+                </a:endParaRPr>
+              </a:p>
+              <a:p>
+                <a:r>
+                  <a:rPr lang="en-US" dirty="0" err="1">
+                    <a:solidFill>
+                      <a:schemeClr val="bg1"/>
+                    </a:solidFill>
+                  </a:rPr>
+                  <a:t>Dadurch</a:t>
+                </a:r>
+                <a:r>
+                  <a:rPr lang="en-US" dirty="0">
+                    <a:solidFill>
+                      <a:schemeClr val="bg1"/>
+                    </a:solidFill>
+                  </a:rPr>
+                  <a:t> </a:t>
+                </a:r>
+                <a:r>
+                  <a:rPr lang="en-US" dirty="0" err="1">
+                    <a:solidFill>
+                      <a:schemeClr val="bg1"/>
+                    </a:solidFill>
+                  </a:rPr>
+                  <a:t>entstehen</a:t>
+                </a:r>
+                <a:r>
+                  <a:rPr lang="en-US" dirty="0">
+                    <a:solidFill>
+                      <a:schemeClr val="bg1"/>
+                    </a:solidFill>
+                  </a:rPr>
+                  <a:t> </a:t>
+                </a:r>
+                <a:r>
+                  <a:rPr lang="en-US" dirty="0" err="1">
+                    <a:solidFill>
+                      <a:schemeClr val="bg1"/>
+                    </a:solidFill>
+                  </a:rPr>
+                  <a:t>Diagonalen</a:t>
+                </a:r>
+                <a:r>
+                  <a:rPr lang="en-US" dirty="0">
+                    <a:solidFill>
+                      <a:schemeClr val="bg1"/>
+                    </a:solidFill>
+                  </a:rPr>
+                  <a:t> </a:t>
+                </a:r>
+                <a:r>
+                  <a:rPr lang="en-US" dirty="0" err="1">
+                    <a:solidFill>
+                      <a:schemeClr val="bg1"/>
+                    </a:solidFill>
+                  </a:rPr>
+                  <a:t>im</a:t>
+                </a:r>
+                <a:r>
+                  <a:rPr lang="en-US" dirty="0">
+                    <a:solidFill>
+                      <a:schemeClr val="bg1"/>
+                    </a:solidFill>
+                  </a:rPr>
+                  <a:t> Minkowski-</a:t>
+                </a:r>
+                <a:r>
+                  <a:rPr lang="en-US" dirty="0" err="1">
+                    <a:solidFill>
+                      <a:schemeClr val="bg1"/>
+                    </a:solidFill>
+                  </a:rPr>
+                  <a:t>Diagramm</a:t>
+                </a:r>
+                <a:endParaRPr lang="en-US" dirty="0">
+                  <a:solidFill>
+                    <a:schemeClr val="bg1"/>
+                  </a:solidFill>
+                </a:endParaRPr>
+              </a:p>
+              <a:p>
+                <a:endParaRPr lang="en-US" dirty="0">
+                  <a:solidFill>
+                    <a:schemeClr val="bg1"/>
+                  </a:solidFill>
+                </a:endParaRPr>
+              </a:p>
+              <a:p>
+                <a:r>
+                  <a:rPr lang="en-US" dirty="0">
+                    <a:solidFill>
+                      <a:schemeClr val="bg1"/>
+                    </a:solidFill>
+                  </a:rPr>
+                  <a:t>Wir </a:t>
+                </a:r>
+                <a:r>
+                  <a:rPr lang="en-US" dirty="0" err="1">
+                    <a:solidFill>
+                      <a:schemeClr val="bg1"/>
+                    </a:solidFill>
+                  </a:rPr>
+                  <a:t>können</a:t>
+                </a:r>
+                <a:r>
+                  <a:rPr lang="en-US" dirty="0">
+                    <a:solidFill>
+                      <a:schemeClr val="bg1"/>
+                    </a:solidFill>
+                  </a:rPr>
+                  <a:t> in </a:t>
+                </a:r>
+                <a:r>
+                  <a:rPr lang="en-US" dirty="0" err="1">
+                    <a:solidFill>
+                      <a:schemeClr val="bg1"/>
+                    </a:solidFill>
+                  </a:rPr>
+                  <a:t>zeitartige</a:t>
+                </a:r>
+                <a:r>
+                  <a:rPr lang="en-US" dirty="0">
+                    <a:solidFill>
+                      <a:schemeClr val="bg1"/>
+                    </a:solidFill>
+                  </a:rPr>
+                  <a:t> und </a:t>
+                </a:r>
+                <a:r>
+                  <a:rPr lang="en-US" dirty="0" err="1">
+                    <a:solidFill>
+                      <a:schemeClr val="bg1"/>
+                    </a:solidFill>
+                  </a:rPr>
+                  <a:t>raumsartige</a:t>
+                </a:r>
+                <a:r>
+                  <a:rPr lang="en-US" dirty="0">
+                    <a:solidFill>
+                      <a:schemeClr val="bg1"/>
+                    </a:solidFill>
+                  </a:rPr>
+                  <a:t> </a:t>
+                </a:r>
+                <a:r>
+                  <a:rPr lang="en-US" dirty="0" err="1">
+                    <a:solidFill>
+                      <a:schemeClr val="bg1"/>
+                    </a:solidFill>
+                  </a:rPr>
+                  <a:t>Vektoren</a:t>
+                </a:r>
+                <a:r>
+                  <a:rPr lang="en-US" dirty="0">
+                    <a:solidFill>
+                      <a:schemeClr val="bg1"/>
+                    </a:solidFill>
+                  </a:rPr>
+                  <a:t> </a:t>
+                </a:r>
+                <a:r>
+                  <a:rPr lang="en-US" dirty="0" err="1">
+                    <a:solidFill>
+                      <a:schemeClr val="bg1"/>
+                    </a:solidFill>
+                  </a:rPr>
+                  <a:t>unterteilen</a:t>
+                </a:r>
+                <a:r>
+                  <a:rPr lang="en-US" dirty="0">
+                    <a:solidFill>
+                      <a:schemeClr val="bg1"/>
+                    </a:solidFill>
+                  </a:rPr>
+                  <a:t>.</a:t>
+                </a:r>
+              </a:p>
+              <a:p>
+                <a:endParaRPr lang="en-US" dirty="0">
+                  <a:solidFill>
+                    <a:schemeClr val="bg1"/>
+                  </a:solidFill>
+                </a:endParaRPr>
+              </a:p>
+            </p:txBody>
+          </p:sp>
+        </mc:Choice>
+        <mc:Fallback>
+          <p:sp>
+            <p:nvSpPr>
+              <p:cNvPr id="2" name="TextBox 1">
+                <a:extLst>
+                  <a:ext uri="{FF2B5EF4-FFF2-40B4-BE49-F238E27FC236}">
+                    <a16:creationId xmlns:a16="http://schemas.microsoft.com/office/drawing/2014/main" id="{CD40440C-0188-F5D7-BA2B-6C65310FA518}"/>
+                  </a:ext>
+                </a:extLst>
+              </p:cNvPr>
+              <p:cNvSpPr txBox="1">
+                <a:spLocks noRot="1" noChangeAspect="1" noMove="1" noResize="1" noEditPoints="1" noAdjustHandles="1" noChangeArrowheads="1" noChangeShapeType="1" noTextEdit="1"/>
+              </p:cNvSpPr>
+              <p:nvPr/>
+            </p:nvSpPr>
+            <p:spPr>
+              <a:xfrm>
+                <a:off x="8547652" y="153348"/>
+                <a:ext cx="3475855" cy="2308324"/>
+              </a:xfrm>
+              <a:prstGeom prst="rect">
+                <a:avLst/>
+              </a:prstGeom>
+              <a:blipFill>
+                <a:blip r:embed="rId3"/>
+                <a:stretch>
+                  <a:fillRect l="-1404" t="-1319"/>
+                </a:stretch>
+              </a:blipFill>
+            </p:spPr>
+            <p:txBody>
+              <a:bodyPr/>
+              <a:lstStyle/>
+              <a:p>
+                <a:r>
+                  <a:rPr lang="en-CH">
+                    <a:noFill/>
+                  </a:rPr>
+                  <a:t> </a:t>
+                </a:r>
+              </a:p>
+            </p:txBody>
+          </p:sp>
+        </mc:Fallback>
+      </mc:AlternateContent>
+    </p:spTree>
+    <p:extLst>
+      <p:ext uri="{BB962C8B-B14F-4D97-AF65-F5344CB8AC3E}">
+        <p14:creationId xmlns:p14="http://schemas.microsoft.com/office/powerpoint/2010/main" val="2789995781"/>
+      </p:ext>
+    </p:extLst>
+  </p:cSld>
+  <p:clrMapOvr>
+    <a:masterClrMapping/>
+  </p:clrMapOvr>
+</p:sld>
+</file>
+
+<file path=ppt/slides/slide14.xml><?xml version="1.0" encoding="utf-8"?>
+<p:sld xmlns:a="http://schemas.openxmlformats.org/drawingml/2006/main" xmlns:r="http://schemas.openxmlformats.org/officeDocument/2006/relationships" xmlns:p="http://schemas.openxmlformats.org/presentationml/2006/main">
+  <p:cSld>
+    <p:spTree>
+      <p:nvGrpSpPr>
+        <p:cNvPr id="1" name="">
+          <a:extLst>
+            <a:ext uri="{FF2B5EF4-FFF2-40B4-BE49-F238E27FC236}">
+              <a16:creationId xmlns:a16="http://schemas.microsoft.com/office/drawing/2014/main" id="{305C2737-508E-1DFE-098B-3EEDD4765276}"/>
+            </a:ext>
+          </a:extLst>
+        </p:cNvPr>
+        <p:cNvGrpSpPr/>
+        <p:nvPr/>
+      </p:nvGrpSpPr>
+      <p:grpSpPr>
+        <a:xfrm>
+          <a:off x="0" y="0"/>
+          <a:ext cx="0" cy="0"/>
+          <a:chOff x="0" y="0"/>
+          <a:chExt cx="0" cy="0"/>
+        </a:xfrm>
+      </p:grpSpPr>
+      <p:pic>
+        <p:nvPicPr>
+          <p:cNvPr id="4" name="Content Placeholder 3">
+            <a:extLst>
+              <a:ext uri="{FF2B5EF4-FFF2-40B4-BE49-F238E27FC236}">
+                <a16:creationId xmlns:a16="http://schemas.microsoft.com/office/drawing/2014/main" id="{886035E4-E344-612B-BB59-387DDF10D9AB}"/>
+              </a:ext>
+            </a:extLst>
+          </p:cNvPr>
+          <p:cNvPicPr>
+            <a:picLocks noGrp="1" noChangeAspect="1"/>
+          </p:cNvPicPr>
+          <p:nvPr>
+            <p:ph idx="1"/>
+          </p:nvPr>
+        </p:nvPicPr>
+        <p:blipFill>
+          <a:blip r:link="rId2"/>
+          <a:srcRect/>
+          <a:stretch>
+            <a:fillRect/>
+          </a:stretch>
+        </p:blipFill>
+        <p:spPr>
+          <a:xfrm>
+            <a:off x="439948" y="-422692"/>
+            <a:ext cx="7556740" cy="7556740"/>
+          </a:xfrm>
+        </p:spPr>
+      </p:pic>
+      <mc:AlternateContent xmlns:mc="http://schemas.openxmlformats.org/markup-compatibility/2006">
+        <mc:Choice xmlns:a14="http://schemas.microsoft.com/office/drawing/2010/main" Requires="a14">
+          <p:sp>
+            <p:nvSpPr>
+              <p:cNvPr id="2" name="TextBox 1">
+                <a:extLst>
+                  <a:ext uri="{FF2B5EF4-FFF2-40B4-BE49-F238E27FC236}">
+                    <a16:creationId xmlns:a16="http://schemas.microsoft.com/office/drawing/2014/main" id="{FF0478EB-DE3B-0BA7-447C-A94ADD0B44AF}"/>
+                  </a:ext>
+                </a:extLst>
+              </p:cNvPr>
+              <p:cNvSpPr txBox="1"/>
+              <p:nvPr/>
+            </p:nvSpPr>
+            <p:spPr>
+              <a:xfrm>
+                <a:off x="8547652" y="153348"/>
+                <a:ext cx="3475855" cy="3970318"/>
+              </a:xfrm>
+              <a:prstGeom prst="rect">
+                <a:avLst/>
+              </a:prstGeom>
+              <a:noFill/>
+            </p:spPr>
+            <p:txBody>
+              <a:bodyPr wrap="square" rtlCol="0">
+                <a:spAutoFit/>
+              </a:bodyPr>
+              <a:lstStyle/>
+              <a:p>
+                <a:r>
+                  <a:rPr lang="en-US" dirty="0">
+                    <a:solidFill>
+                      <a:schemeClr val="bg1"/>
+                    </a:solidFill>
+                  </a:rPr>
+                  <a:t>Bei Licht gilt </a:t>
+                </a:r>
+                <a14:m>
+                  <m:oMath xmlns:m="http://schemas.openxmlformats.org/officeDocument/2006/math">
+                    <m:r>
+                      <m:rPr>
+                        <m:sty m:val="p"/>
+                      </m:rPr>
+                      <a:rPr lang="en-US" b="0" i="0" smtClean="0">
+                        <a:solidFill>
+                          <a:schemeClr val="bg1"/>
+                        </a:solidFill>
+                        <a:latin typeface="Cambria Math" panose="02040503050406030204" pitchFamily="18" charset="0"/>
+                      </a:rPr>
+                      <m:t>Δ</m:t>
+                    </m:r>
+                    <m:r>
+                      <a:rPr lang="en-US" b="0" i="1" smtClean="0">
+                        <a:solidFill>
+                          <a:schemeClr val="bg1"/>
+                        </a:solidFill>
+                        <a:latin typeface="Cambria Math" panose="02040503050406030204" pitchFamily="18" charset="0"/>
+                      </a:rPr>
+                      <m:t>𝑧</m:t>
+                    </m:r>
+                    <m:r>
+                      <a:rPr lang="en-US" b="0" i="1" smtClean="0">
+                        <a:solidFill>
+                          <a:schemeClr val="bg1"/>
+                        </a:solidFill>
+                        <a:latin typeface="Cambria Math" panose="02040503050406030204" pitchFamily="18" charset="0"/>
+                      </a:rPr>
+                      <m:t>=</m:t>
+                    </m:r>
+                    <m:r>
+                      <m:rPr>
+                        <m:nor/>
+                      </m:rPr>
+                      <a:rPr lang="en-US" dirty="0">
+                        <a:solidFill>
+                          <a:schemeClr val="bg1"/>
+                        </a:solidFill>
+                      </a:rPr>
+                      <m:t>c</m:t>
+                    </m:r>
+                    <m:r>
+                      <m:rPr>
+                        <m:sty m:val="p"/>
+                      </m:rPr>
+                      <a:rPr lang="en-US">
+                        <a:solidFill>
+                          <a:schemeClr val="bg1"/>
+                        </a:solidFill>
+                        <a:latin typeface="Cambria Math" panose="02040503050406030204" pitchFamily="18" charset="0"/>
+                      </a:rPr>
+                      <m:t>Δ</m:t>
+                    </m:r>
+                    <m:r>
+                      <a:rPr lang="en-US" i="1">
+                        <a:solidFill>
+                          <a:schemeClr val="bg1"/>
+                        </a:solidFill>
+                        <a:latin typeface="Cambria Math" panose="02040503050406030204" pitchFamily="18" charset="0"/>
+                      </a:rPr>
+                      <m:t>𝑡</m:t>
+                    </m:r>
+                  </m:oMath>
+                </a14:m>
+                <a:endParaRPr lang="en-US" dirty="0">
+                  <a:solidFill>
+                    <a:schemeClr val="bg1"/>
+                  </a:solidFill>
+                </a:endParaRPr>
+              </a:p>
+              <a:p>
+                <a:endParaRPr lang="en-US" dirty="0">
+                  <a:solidFill>
+                    <a:schemeClr val="bg1"/>
+                  </a:solidFill>
+                </a:endParaRPr>
+              </a:p>
+              <a:p>
+                <a:r>
+                  <a:rPr lang="en-US" dirty="0" err="1">
+                    <a:solidFill>
+                      <a:schemeClr val="bg1"/>
+                    </a:solidFill>
+                  </a:rPr>
+                  <a:t>Dadurch</a:t>
+                </a:r>
+                <a:r>
+                  <a:rPr lang="en-US" dirty="0">
+                    <a:solidFill>
+                      <a:schemeClr val="bg1"/>
+                    </a:solidFill>
+                  </a:rPr>
+                  <a:t> </a:t>
+                </a:r>
+                <a:r>
+                  <a:rPr lang="en-US" dirty="0" err="1">
+                    <a:solidFill>
+                      <a:schemeClr val="bg1"/>
+                    </a:solidFill>
+                  </a:rPr>
+                  <a:t>entstehen</a:t>
+                </a:r>
+                <a:r>
+                  <a:rPr lang="en-US" dirty="0">
+                    <a:solidFill>
+                      <a:schemeClr val="bg1"/>
+                    </a:solidFill>
+                  </a:rPr>
+                  <a:t> </a:t>
+                </a:r>
+                <a:r>
+                  <a:rPr lang="en-US" dirty="0" err="1">
+                    <a:solidFill>
+                      <a:schemeClr val="bg1"/>
+                    </a:solidFill>
+                  </a:rPr>
+                  <a:t>Diagonalen</a:t>
+                </a:r>
+                <a:r>
+                  <a:rPr lang="en-US" dirty="0">
+                    <a:solidFill>
+                      <a:schemeClr val="bg1"/>
+                    </a:solidFill>
+                  </a:rPr>
+                  <a:t> </a:t>
+                </a:r>
+                <a:r>
+                  <a:rPr lang="en-US" dirty="0" err="1">
+                    <a:solidFill>
+                      <a:schemeClr val="bg1"/>
+                    </a:solidFill>
+                  </a:rPr>
+                  <a:t>im</a:t>
+                </a:r>
+                <a:r>
+                  <a:rPr lang="en-US" dirty="0">
+                    <a:solidFill>
+                      <a:schemeClr val="bg1"/>
+                    </a:solidFill>
+                  </a:rPr>
+                  <a:t> Minkowski-</a:t>
+                </a:r>
+                <a:r>
+                  <a:rPr lang="en-US" dirty="0" err="1">
+                    <a:solidFill>
+                      <a:schemeClr val="bg1"/>
+                    </a:solidFill>
+                  </a:rPr>
+                  <a:t>Diagramm</a:t>
+                </a:r>
+                <a:endParaRPr lang="en-US" dirty="0">
+                  <a:solidFill>
+                    <a:schemeClr val="bg1"/>
+                  </a:solidFill>
+                </a:endParaRPr>
+              </a:p>
+              <a:p>
+                <a:endParaRPr lang="en-US" dirty="0">
+                  <a:solidFill>
+                    <a:schemeClr val="bg1"/>
+                  </a:solidFill>
+                </a:endParaRPr>
+              </a:p>
+              <a:p>
+                <a:r>
+                  <a:rPr lang="en-US" dirty="0">
+                    <a:solidFill>
+                      <a:schemeClr val="bg1"/>
+                    </a:solidFill>
+                  </a:rPr>
+                  <a:t>Wir </a:t>
+                </a:r>
+                <a:r>
+                  <a:rPr lang="en-US" dirty="0" err="1">
+                    <a:solidFill>
+                      <a:schemeClr val="bg1"/>
+                    </a:solidFill>
+                  </a:rPr>
+                  <a:t>können</a:t>
+                </a:r>
+                <a:r>
+                  <a:rPr lang="en-US" dirty="0">
+                    <a:solidFill>
+                      <a:schemeClr val="bg1"/>
+                    </a:solidFill>
+                  </a:rPr>
+                  <a:t> in </a:t>
+                </a:r>
+                <a:r>
+                  <a:rPr lang="en-US" dirty="0" err="1">
+                    <a:solidFill>
+                      <a:schemeClr val="bg1"/>
+                    </a:solidFill>
+                  </a:rPr>
+                  <a:t>zeitartige</a:t>
+                </a:r>
+                <a:r>
+                  <a:rPr lang="en-US" dirty="0">
+                    <a:solidFill>
+                      <a:schemeClr val="bg1"/>
+                    </a:solidFill>
+                  </a:rPr>
+                  <a:t> und </a:t>
+                </a:r>
+                <a:r>
+                  <a:rPr lang="en-US" dirty="0" err="1">
+                    <a:solidFill>
+                      <a:schemeClr val="bg1"/>
+                    </a:solidFill>
+                  </a:rPr>
+                  <a:t>raumsartige</a:t>
+                </a:r>
+                <a:r>
+                  <a:rPr lang="en-US" dirty="0">
+                    <a:solidFill>
+                      <a:schemeClr val="bg1"/>
+                    </a:solidFill>
+                  </a:rPr>
+                  <a:t> </a:t>
+                </a:r>
+                <a:r>
+                  <a:rPr lang="en-US" dirty="0" err="1">
+                    <a:solidFill>
+                      <a:schemeClr val="bg1"/>
+                    </a:solidFill>
+                  </a:rPr>
+                  <a:t>Vektoren</a:t>
+                </a:r>
+                <a:r>
+                  <a:rPr lang="en-US" dirty="0">
+                    <a:solidFill>
+                      <a:schemeClr val="bg1"/>
+                    </a:solidFill>
+                  </a:rPr>
+                  <a:t> </a:t>
+                </a:r>
+                <a:r>
+                  <a:rPr lang="en-US" dirty="0" err="1">
+                    <a:solidFill>
+                      <a:schemeClr val="bg1"/>
+                    </a:solidFill>
+                  </a:rPr>
+                  <a:t>unterteilen</a:t>
+                </a:r>
+                <a:r>
+                  <a:rPr lang="en-US" dirty="0">
+                    <a:solidFill>
+                      <a:schemeClr val="bg1"/>
+                    </a:solidFill>
+                  </a:rPr>
+                  <a:t>.</a:t>
+                </a:r>
+              </a:p>
+              <a:p>
+                <a:endParaRPr lang="en-US" dirty="0">
+                  <a:solidFill>
+                    <a:schemeClr val="bg1"/>
+                  </a:solidFill>
+                </a:endParaRPr>
+              </a:p>
+              <a:p>
+                <a:r>
+                  <a:rPr lang="en-US" dirty="0">
+                    <a:solidFill>
+                      <a:schemeClr val="bg1"/>
+                    </a:solidFill>
+                  </a:rPr>
+                  <a:t>Falls </a:t>
+                </a:r>
+                <a14:m>
+                  <m:oMath xmlns:m="http://schemas.openxmlformats.org/officeDocument/2006/math">
+                    <m:r>
+                      <m:rPr>
+                        <m:sty m:val="p"/>
+                      </m:rPr>
+                      <a:rPr lang="en-US" b="0" i="0" smtClean="0">
+                        <a:solidFill>
+                          <a:schemeClr val="bg1"/>
+                        </a:solidFill>
+                        <a:latin typeface="Cambria Math" panose="02040503050406030204" pitchFamily="18" charset="0"/>
+                      </a:rPr>
+                      <m:t>c</m:t>
+                    </m:r>
+                    <m:r>
+                      <a:rPr lang="en-US" b="0" i="1" smtClean="0">
+                        <a:solidFill>
+                          <a:schemeClr val="bg1"/>
+                        </a:solidFill>
+                        <a:latin typeface="Cambria Math" panose="02040503050406030204" pitchFamily="18" charset="0"/>
+                      </a:rPr>
+                      <m:t> </m:t>
+                    </m:r>
+                    <m:d>
+                      <m:dPr>
+                        <m:begChr m:val="|"/>
+                        <m:endChr m:val="|"/>
+                        <m:ctrlPr>
+                          <a:rPr lang="en-US" b="0" i="1" smtClean="0">
+                            <a:solidFill>
+                              <a:schemeClr val="bg1"/>
+                            </a:solidFill>
+                            <a:latin typeface="Cambria Math" panose="02040503050406030204" pitchFamily="18" charset="0"/>
+                          </a:rPr>
+                        </m:ctrlPr>
+                      </m:dPr>
+                      <m:e>
+                        <m:r>
+                          <m:rPr>
+                            <m:sty m:val="p"/>
+                          </m:rPr>
+                          <a:rPr lang="en-US" b="0" i="0" smtClean="0">
+                            <a:solidFill>
+                              <a:schemeClr val="bg1"/>
+                            </a:solidFill>
+                            <a:latin typeface="Cambria Math" panose="02040503050406030204" pitchFamily="18" charset="0"/>
+                          </a:rPr>
+                          <m:t>Δ</m:t>
+                        </m:r>
+                        <m:r>
+                          <a:rPr lang="en-US" b="0" i="1" smtClean="0">
+                            <a:solidFill>
+                              <a:schemeClr val="bg1"/>
+                            </a:solidFill>
+                            <a:latin typeface="Cambria Math" panose="02040503050406030204" pitchFamily="18" charset="0"/>
+                          </a:rPr>
+                          <m:t>𝑡</m:t>
+                        </m:r>
+                      </m:e>
+                    </m:d>
+                    <m:r>
+                      <a:rPr lang="en-US" b="0" i="1" smtClean="0">
+                        <a:solidFill>
+                          <a:schemeClr val="bg1"/>
+                        </a:solidFill>
+                        <a:latin typeface="Cambria Math" panose="02040503050406030204" pitchFamily="18" charset="0"/>
+                      </a:rPr>
+                      <m:t>&gt;|</m:t>
+                    </m:r>
+                    <m:r>
+                      <m:rPr>
+                        <m:sty m:val="p"/>
+                      </m:rPr>
+                      <a:rPr lang="en-US" b="0" i="0" smtClean="0">
+                        <a:solidFill>
+                          <a:schemeClr val="bg1"/>
+                        </a:solidFill>
+                        <a:latin typeface="Cambria Math" panose="02040503050406030204" pitchFamily="18" charset="0"/>
+                      </a:rPr>
+                      <m:t>Δ</m:t>
+                    </m:r>
+                    <m:r>
+                      <a:rPr lang="en-US" b="0" i="1" smtClean="0">
+                        <a:solidFill>
+                          <a:schemeClr val="bg1"/>
+                        </a:solidFill>
+                        <a:latin typeface="Cambria Math" panose="02040503050406030204" pitchFamily="18" charset="0"/>
+                      </a:rPr>
+                      <m:t>𝑧</m:t>
+                    </m:r>
+                    <m:r>
+                      <a:rPr lang="en-US" b="0" i="1" smtClean="0">
+                        <a:solidFill>
+                          <a:schemeClr val="bg1"/>
+                        </a:solidFill>
+                        <a:latin typeface="Cambria Math" panose="02040503050406030204" pitchFamily="18" charset="0"/>
+                      </a:rPr>
+                      <m:t>|</m:t>
+                    </m:r>
+                  </m:oMath>
+                </a14:m>
+                <a:r>
+                  <a:rPr lang="en-US" dirty="0">
+                    <a:solidFill>
+                      <a:schemeClr val="bg1"/>
+                    </a:solidFill>
+                  </a:rPr>
+                  <a:t> so </a:t>
+                </a:r>
+                <a:r>
+                  <a:rPr lang="en-US" dirty="0" err="1">
+                    <a:solidFill>
+                      <a:schemeClr val="bg1"/>
+                    </a:solidFill>
+                  </a:rPr>
+                  <a:t>ist</a:t>
+                </a:r>
+                <a:r>
+                  <a:rPr lang="en-US" dirty="0">
+                    <a:solidFill>
+                      <a:schemeClr val="bg1"/>
+                    </a:solidFill>
+                  </a:rPr>
+                  <a:t> es </a:t>
+                </a:r>
+                <a:r>
+                  <a:rPr lang="en-US" dirty="0" err="1">
+                    <a:solidFill>
+                      <a:schemeClr val="bg1"/>
+                    </a:solidFill>
+                  </a:rPr>
+                  <a:t>ein</a:t>
+                </a:r>
+                <a:endParaRPr lang="en-US" dirty="0">
+                  <a:solidFill>
+                    <a:schemeClr val="bg1"/>
+                  </a:solidFill>
+                </a:endParaRPr>
+              </a:p>
+              <a:p>
+                <a:r>
+                  <a:rPr lang="en-US" dirty="0" err="1">
+                    <a:solidFill>
+                      <a:schemeClr val="bg1"/>
+                    </a:solidFill>
+                  </a:rPr>
+                  <a:t>zeitartiger</a:t>
+                </a:r>
+                <a:r>
+                  <a:rPr lang="en-US" dirty="0">
+                    <a:solidFill>
+                      <a:schemeClr val="bg1"/>
+                    </a:solidFill>
+                  </a:rPr>
+                  <a:t> Vektor </a:t>
+                </a:r>
+                <a14:m>
+                  <m:oMath xmlns:m="http://schemas.openxmlformats.org/officeDocument/2006/math">
+                    <m:d>
+                      <m:dPr>
+                        <m:ctrlPr>
+                          <a:rPr lang="en-US" b="0" i="1" smtClean="0">
+                            <a:solidFill>
+                              <a:schemeClr val="bg1"/>
+                            </a:solidFill>
+                            <a:latin typeface="Cambria Math" panose="02040503050406030204" pitchFamily="18" charset="0"/>
+                          </a:rPr>
+                        </m:ctrlPr>
+                      </m:dPr>
+                      <m:e>
+                        <m:r>
+                          <m:rPr>
+                            <m:sty m:val="p"/>
+                          </m:rPr>
+                          <a:rPr lang="en-US">
+                            <a:solidFill>
+                              <a:schemeClr val="bg1"/>
+                            </a:solidFill>
+                            <a:latin typeface="Cambria Math" panose="02040503050406030204" pitchFamily="18" charset="0"/>
+                          </a:rPr>
+                          <m:t>Δ</m:t>
+                        </m:r>
+                        <m:sSup>
+                          <m:sSupPr>
+                            <m:ctrlPr>
+                              <a:rPr lang="en-US" i="1">
+                                <a:solidFill>
+                                  <a:schemeClr val="bg1"/>
+                                </a:solidFill>
+                                <a:latin typeface="Cambria Math" panose="02040503050406030204" pitchFamily="18" charset="0"/>
+                              </a:rPr>
+                            </m:ctrlPr>
+                          </m:sSupPr>
+                          <m:e>
+                            <m:r>
+                              <a:rPr lang="en-US" i="1">
+                                <a:solidFill>
+                                  <a:schemeClr val="bg1"/>
+                                </a:solidFill>
+                                <a:latin typeface="Cambria Math" panose="02040503050406030204" pitchFamily="18" charset="0"/>
+                              </a:rPr>
+                              <m:t>𝑠</m:t>
+                            </m:r>
+                          </m:e>
+                          <m:sup>
+                            <m:r>
+                              <a:rPr lang="en-US" i="1">
+                                <a:solidFill>
+                                  <a:schemeClr val="bg1"/>
+                                </a:solidFill>
+                                <a:latin typeface="Cambria Math" panose="02040503050406030204" pitchFamily="18" charset="0"/>
+                              </a:rPr>
+                              <m:t>2</m:t>
+                            </m:r>
+                          </m:sup>
+                        </m:sSup>
+                        <m:r>
+                          <a:rPr lang="en-US" i="1">
+                            <a:solidFill>
+                              <a:schemeClr val="bg1"/>
+                            </a:solidFill>
+                            <a:latin typeface="Cambria Math" panose="02040503050406030204" pitchFamily="18" charset="0"/>
+                          </a:rPr>
+                          <m:t>&gt;0</m:t>
+                        </m:r>
+                      </m:e>
+                    </m:d>
+                  </m:oMath>
+                </a14:m>
+                <a:endParaRPr lang="en-US" dirty="0">
+                  <a:solidFill>
+                    <a:schemeClr val="bg1"/>
+                  </a:solidFill>
+                </a:endParaRPr>
+              </a:p>
+              <a:p>
+                <a:endParaRPr lang="en-US" dirty="0">
+                  <a:solidFill>
+                    <a:schemeClr val="bg1"/>
+                  </a:solidFill>
+                </a:endParaRPr>
+              </a:p>
+              <a:p>
+                <a:r>
+                  <a:rPr lang="en-US" dirty="0" err="1">
+                    <a:solidFill>
+                      <a:schemeClr val="bg1"/>
+                    </a:solidFill>
+                  </a:rPr>
+                  <a:t>Diese</a:t>
+                </a:r>
+                <a:r>
+                  <a:rPr lang="en-US" dirty="0">
+                    <a:solidFill>
+                      <a:schemeClr val="bg1"/>
+                    </a:solidFill>
+                  </a:rPr>
+                  <a:t> </a:t>
+                </a:r>
+                <a:r>
+                  <a:rPr lang="en-US" dirty="0" err="1">
+                    <a:solidFill>
+                      <a:schemeClr val="bg1"/>
+                    </a:solidFill>
+                  </a:rPr>
+                  <a:t>liegen</a:t>
+                </a:r>
+                <a:r>
+                  <a:rPr lang="en-US" dirty="0">
+                    <a:solidFill>
+                      <a:schemeClr val="bg1"/>
+                    </a:solidFill>
+                  </a:rPr>
+                  <a:t> in der Zukunft </a:t>
+                </a:r>
+                <a:r>
+                  <a:rPr lang="en-US" dirty="0" err="1">
+                    <a:solidFill>
+                      <a:schemeClr val="bg1"/>
+                    </a:solidFill>
+                  </a:rPr>
+                  <a:t>oder</a:t>
+                </a:r>
+                <a:r>
+                  <a:rPr lang="en-US" dirty="0">
+                    <a:solidFill>
+                      <a:schemeClr val="bg1"/>
+                    </a:solidFill>
+                  </a:rPr>
+                  <a:t> der </a:t>
+                </a:r>
+                <a:r>
+                  <a:rPr lang="en-US" dirty="0" err="1">
+                    <a:solidFill>
+                      <a:schemeClr val="bg1"/>
+                    </a:solidFill>
+                  </a:rPr>
+                  <a:t>Vergangenheit</a:t>
+                </a:r>
+                <a:r>
+                  <a:rPr lang="en-US" dirty="0">
+                    <a:solidFill>
+                      <a:schemeClr val="bg1"/>
+                    </a:solidFill>
+                  </a:rPr>
+                  <a:t> und </a:t>
+                </a:r>
+                <a:r>
+                  <a:rPr lang="en-US" dirty="0" err="1">
+                    <a:solidFill>
+                      <a:schemeClr val="bg1"/>
+                    </a:solidFill>
+                  </a:rPr>
+                  <a:t>können</a:t>
+                </a:r>
+                <a:r>
+                  <a:rPr lang="en-US" dirty="0">
+                    <a:solidFill>
+                      <a:schemeClr val="bg1"/>
+                    </a:solidFill>
+                  </a:rPr>
+                  <a:t> </a:t>
+                </a:r>
+                <a:r>
+                  <a:rPr lang="en-US" dirty="0" err="1">
+                    <a:solidFill>
+                      <a:schemeClr val="bg1"/>
+                    </a:solidFill>
+                  </a:rPr>
+                  <a:t>beeinflusst</a:t>
+                </a:r>
+                <a:r>
+                  <a:rPr lang="en-US" dirty="0">
+                    <a:solidFill>
+                      <a:schemeClr val="bg1"/>
+                    </a:solidFill>
+                  </a:rPr>
+                  <a:t> </a:t>
+                </a:r>
+                <a:r>
+                  <a:rPr lang="en-US" dirty="0" err="1">
+                    <a:solidFill>
+                      <a:schemeClr val="bg1"/>
+                    </a:solidFill>
+                  </a:rPr>
+                  <a:t>werden</a:t>
+                </a:r>
+                <a:endParaRPr lang="en-US" dirty="0">
+                  <a:solidFill>
+                    <a:schemeClr val="bg1"/>
+                  </a:solidFill>
+                </a:endParaRPr>
+              </a:p>
+            </p:txBody>
+          </p:sp>
+        </mc:Choice>
+        <mc:Fallback>
+          <p:sp>
+            <p:nvSpPr>
+              <p:cNvPr id="2" name="TextBox 1">
+                <a:extLst>
+                  <a:ext uri="{FF2B5EF4-FFF2-40B4-BE49-F238E27FC236}">
+                    <a16:creationId xmlns:a16="http://schemas.microsoft.com/office/drawing/2014/main" id="{FF0478EB-DE3B-0BA7-447C-A94ADD0B44AF}"/>
+                  </a:ext>
+                </a:extLst>
+              </p:cNvPr>
+              <p:cNvSpPr txBox="1">
+                <a:spLocks noRot="1" noChangeAspect="1" noMove="1" noResize="1" noEditPoints="1" noAdjustHandles="1" noChangeArrowheads="1" noChangeShapeType="1" noTextEdit="1"/>
+              </p:cNvSpPr>
+              <p:nvPr/>
+            </p:nvSpPr>
+            <p:spPr>
+              <a:xfrm>
+                <a:off x="8547652" y="153348"/>
+                <a:ext cx="3475855" cy="3970318"/>
+              </a:xfrm>
+              <a:prstGeom prst="rect">
+                <a:avLst/>
+              </a:prstGeom>
+              <a:blipFill>
+                <a:blip r:embed="rId3"/>
+                <a:stretch>
+                  <a:fillRect l="-1404" t="-768" b="-1536"/>
+                </a:stretch>
+              </a:blipFill>
+            </p:spPr>
+            <p:txBody>
+              <a:bodyPr/>
+              <a:lstStyle/>
+              <a:p>
+                <a:r>
+                  <a:rPr lang="en-CH">
+                    <a:noFill/>
+                  </a:rPr>
+                  <a:t> </a:t>
+                </a:r>
+              </a:p>
+            </p:txBody>
+          </p:sp>
+        </mc:Fallback>
+      </mc:AlternateContent>
+    </p:spTree>
+    <p:extLst>
+      <p:ext uri="{BB962C8B-B14F-4D97-AF65-F5344CB8AC3E}">
+        <p14:creationId xmlns:p14="http://schemas.microsoft.com/office/powerpoint/2010/main" val="2731311529"/>
+      </p:ext>
+    </p:extLst>
+  </p:cSld>
+  <p:clrMapOvr>
+    <a:masterClrMapping/>
+  </p:clrMapOvr>
+</p:sld>
+</file>
+
+<file path=ppt/slides/slide15.xml><?xml version="1.0" encoding="utf-8"?>
+<p:sld xmlns:a="http://schemas.openxmlformats.org/drawingml/2006/main" xmlns:r="http://schemas.openxmlformats.org/officeDocument/2006/relationships" xmlns:p="http://schemas.openxmlformats.org/presentationml/2006/main">
+  <p:cSld>
+    <p:spTree>
+      <p:nvGrpSpPr>
+        <p:cNvPr id="1" name="">
+          <a:extLst>
+            <a:ext uri="{FF2B5EF4-FFF2-40B4-BE49-F238E27FC236}">
+              <a16:creationId xmlns:a16="http://schemas.microsoft.com/office/drawing/2014/main" id="{5608AEE6-5D23-2B62-BDD5-AB1A3B1E4CF1}"/>
+            </a:ext>
+          </a:extLst>
+        </p:cNvPr>
+        <p:cNvGrpSpPr/>
+        <p:nvPr/>
+      </p:nvGrpSpPr>
+      <p:grpSpPr>
+        <a:xfrm>
+          <a:off x="0" y="0"/>
+          <a:ext cx="0" cy="0"/>
+          <a:chOff x="0" y="0"/>
+          <a:chExt cx="0" cy="0"/>
+        </a:xfrm>
+      </p:grpSpPr>
+      <p:pic>
+        <p:nvPicPr>
+          <p:cNvPr id="4" name="Content Placeholder 3">
+            <a:extLst>
+              <a:ext uri="{FF2B5EF4-FFF2-40B4-BE49-F238E27FC236}">
+                <a16:creationId xmlns:a16="http://schemas.microsoft.com/office/drawing/2014/main" id="{47CBB087-56D6-CFD6-C696-B79B53B935CE}"/>
+              </a:ext>
+            </a:extLst>
+          </p:cNvPr>
+          <p:cNvPicPr>
+            <a:picLocks noGrp="1" noChangeAspect="1"/>
+          </p:cNvPicPr>
+          <p:nvPr>
+            <p:ph idx="1"/>
+          </p:nvPr>
+        </p:nvPicPr>
+        <p:blipFill>
+          <a:blip r:link="rId2"/>
+          <a:srcRect/>
+          <a:stretch>
+            <a:fillRect/>
+          </a:stretch>
+        </p:blipFill>
+        <p:spPr>
+          <a:xfrm>
+            <a:off x="439948" y="-422692"/>
+            <a:ext cx="7556740" cy="7556740"/>
+          </a:xfrm>
+        </p:spPr>
+      </p:pic>
+      <mc:AlternateContent xmlns:mc="http://schemas.openxmlformats.org/markup-compatibility/2006">
+        <mc:Choice xmlns:a14="http://schemas.microsoft.com/office/drawing/2010/main" Requires="a14">
+          <p:sp>
+            <p:nvSpPr>
+              <p:cNvPr id="2" name="TextBox 1">
+                <a:extLst>
+                  <a:ext uri="{FF2B5EF4-FFF2-40B4-BE49-F238E27FC236}">
+                    <a16:creationId xmlns:a16="http://schemas.microsoft.com/office/drawing/2014/main" id="{F0EA46D7-D23D-2740-10E1-B7751F23036B}"/>
+                  </a:ext>
+                </a:extLst>
+              </p:cNvPr>
+              <p:cNvSpPr txBox="1"/>
+              <p:nvPr/>
+            </p:nvSpPr>
+            <p:spPr>
+              <a:xfrm>
+                <a:off x="8547652" y="153348"/>
+                <a:ext cx="3475855" cy="6186309"/>
+              </a:xfrm>
+              <a:prstGeom prst="rect">
+                <a:avLst/>
+              </a:prstGeom>
+              <a:noFill/>
+            </p:spPr>
+            <p:txBody>
+              <a:bodyPr wrap="square" rtlCol="0">
+                <a:spAutoFit/>
+              </a:bodyPr>
+              <a:lstStyle/>
+              <a:p>
+                <a:r>
+                  <a:rPr lang="en-US" dirty="0">
+                    <a:solidFill>
+                      <a:schemeClr val="bg1"/>
+                    </a:solidFill>
+                  </a:rPr>
+                  <a:t>Bei Licht gilt </a:t>
+                </a:r>
+                <a14:m>
+                  <m:oMath xmlns:m="http://schemas.openxmlformats.org/officeDocument/2006/math">
+                    <m:r>
+                      <m:rPr>
+                        <m:sty m:val="p"/>
+                      </m:rPr>
+                      <a:rPr lang="en-US" b="0" i="0" smtClean="0">
+                        <a:solidFill>
+                          <a:schemeClr val="bg1"/>
+                        </a:solidFill>
+                        <a:latin typeface="Cambria Math" panose="02040503050406030204" pitchFamily="18" charset="0"/>
+                      </a:rPr>
+                      <m:t>Δ</m:t>
+                    </m:r>
+                    <m:r>
+                      <a:rPr lang="en-US" b="0" i="1" smtClean="0">
+                        <a:solidFill>
+                          <a:schemeClr val="bg1"/>
+                        </a:solidFill>
+                        <a:latin typeface="Cambria Math" panose="02040503050406030204" pitchFamily="18" charset="0"/>
+                      </a:rPr>
+                      <m:t>𝑧</m:t>
+                    </m:r>
+                    <m:r>
+                      <a:rPr lang="en-US" b="0" i="1" smtClean="0">
+                        <a:solidFill>
+                          <a:schemeClr val="bg1"/>
+                        </a:solidFill>
+                        <a:latin typeface="Cambria Math" panose="02040503050406030204" pitchFamily="18" charset="0"/>
+                      </a:rPr>
+                      <m:t>=</m:t>
+                    </m:r>
+                    <m:r>
+                      <m:rPr>
+                        <m:nor/>
+                      </m:rPr>
+                      <a:rPr lang="en-US" dirty="0">
+                        <a:solidFill>
+                          <a:schemeClr val="bg1"/>
+                        </a:solidFill>
+                      </a:rPr>
+                      <m:t>c</m:t>
+                    </m:r>
+                    <m:r>
+                      <m:rPr>
+                        <m:sty m:val="p"/>
+                      </m:rPr>
+                      <a:rPr lang="en-US">
+                        <a:solidFill>
+                          <a:schemeClr val="bg1"/>
+                        </a:solidFill>
+                        <a:latin typeface="Cambria Math" panose="02040503050406030204" pitchFamily="18" charset="0"/>
+                      </a:rPr>
+                      <m:t>Δ</m:t>
+                    </m:r>
+                    <m:r>
+                      <a:rPr lang="en-US" i="1">
+                        <a:solidFill>
+                          <a:schemeClr val="bg1"/>
+                        </a:solidFill>
+                        <a:latin typeface="Cambria Math" panose="02040503050406030204" pitchFamily="18" charset="0"/>
+                      </a:rPr>
+                      <m:t>𝑡</m:t>
+                    </m:r>
+                  </m:oMath>
+                </a14:m>
+                <a:endParaRPr lang="en-US" dirty="0">
+                  <a:solidFill>
+                    <a:schemeClr val="bg1"/>
+                  </a:solidFill>
+                </a:endParaRPr>
+              </a:p>
+              <a:p>
+                <a:endParaRPr lang="en-US" dirty="0">
+                  <a:solidFill>
+                    <a:schemeClr val="bg1"/>
+                  </a:solidFill>
+                </a:endParaRPr>
+              </a:p>
+              <a:p>
+                <a:r>
+                  <a:rPr lang="en-US" dirty="0" err="1">
+                    <a:solidFill>
+                      <a:schemeClr val="bg1"/>
+                    </a:solidFill>
+                  </a:rPr>
+                  <a:t>Dadurch</a:t>
+                </a:r>
+                <a:r>
+                  <a:rPr lang="en-US" dirty="0">
+                    <a:solidFill>
+                      <a:schemeClr val="bg1"/>
+                    </a:solidFill>
+                  </a:rPr>
+                  <a:t> </a:t>
+                </a:r>
+                <a:r>
+                  <a:rPr lang="en-US" dirty="0" err="1">
+                    <a:solidFill>
+                      <a:schemeClr val="bg1"/>
+                    </a:solidFill>
+                  </a:rPr>
+                  <a:t>entstehen</a:t>
+                </a:r>
+                <a:r>
+                  <a:rPr lang="en-US" dirty="0">
+                    <a:solidFill>
+                      <a:schemeClr val="bg1"/>
+                    </a:solidFill>
+                  </a:rPr>
+                  <a:t> </a:t>
+                </a:r>
+                <a:r>
+                  <a:rPr lang="en-US" dirty="0" err="1">
+                    <a:solidFill>
+                      <a:schemeClr val="bg1"/>
+                    </a:solidFill>
+                  </a:rPr>
+                  <a:t>Diagonalen</a:t>
+                </a:r>
+                <a:r>
+                  <a:rPr lang="en-US" dirty="0">
+                    <a:solidFill>
+                      <a:schemeClr val="bg1"/>
+                    </a:solidFill>
+                  </a:rPr>
+                  <a:t> </a:t>
+                </a:r>
+                <a:r>
+                  <a:rPr lang="en-US" dirty="0" err="1">
+                    <a:solidFill>
+                      <a:schemeClr val="bg1"/>
+                    </a:solidFill>
+                  </a:rPr>
+                  <a:t>im</a:t>
+                </a:r>
+                <a:r>
+                  <a:rPr lang="en-US" dirty="0">
+                    <a:solidFill>
+                      <a:schemeClr val="bg1"/>
+                    </a:solidFill>
+                  </a:rPr>
+                  <a:t> Minkowski-</a:t>
+                </a:r>
+                <a:r>
+                  <a:rPr lang="en-US" dirty="0" err="1">
+                    <a:solidFill>
+                      <a:schemeClr val="bg1"/>
+                    </a:solidFill>
+                  </a:rPr>
+                  <a:t>Diagramm</a:t>
+                </a:r>
+                <a:endParaRPr lang="en-US" dirty="0">
+                  <a:solidFill>
+                    <a:schemeClr val="bg1"/>
+                  </a:solidFill>
+                </a:endParaRPr>
+              </a:p>
+              <a:p>
+                <a:endParaRPr lang="en-US" dirty="0">
+                  <a:solidFill>
+                    <a:schemeClr val="bg1"/>
+                  </a:solidFill>
+                </a:endParaRPr>
+              </a:p>
+              <a:p>
+                <a:r>
+                  <a:rPr lang="en-US" dirty="0">
+                    <a:solidFill>
+                      <a:schemeClr val="bg1"/>
+                    </a:solidFill>
+                  </a:rPr>
+                  <a:t>Wir </a:t>
+                </a:r>
+                <a:r>
+                  <a:rPr lang="en-US" dirty="0" err="1">
+                    <a:solidFill>
+                      <a:schemeClr val="bg1"/>
+                    </a:solidFill>
+                  </a:rPr>
+                  <a:t>können</a:t>
+                </a:r>
+                <a:r>
+                  <a:rPr lang="en-US" dirty="0">
+                    <a:solidFill>
+                      <a:schemeClr val="bg1"/>
+                    </a:solidFill>
+                  </a:rPr>
+                  <a:t> in </a:t>
+                </a:r>
+                <a:r>
+                  <a:rPr lang="en-US" dirty="0" err="1">
+                    <a:solidFill>
+                      <a:schemeClr val="bg1"/>
+                    </a:solidFill>
+                  </a:rPr>
+                  <a:t>zeitartige</a:t>
+                </a:r>
+                <a:r>
+                  <a:rPr lang="en-US" dirty="0">
+                    <a:solidFill>
+                      <a:schemeClr val="bg1"/>
+                    </a:solidFill>
+                  </a:rPr>
+                  <a:t> und </a:t>
+                </a:r>
+                <a:r>
+                  <a:rPr lang="en-US" dirty="0" err="1">
+                    <a:solidFill>
+                      <a:schemeClr val="bg1"/>
+                    </a:solidFill>
+                  </a:rPr>
+                  <a:t>raumsartige</a:t>
+                </a:r>
+                <a:r>
+                  <a:rPr lang="en-US" dirty="0">
+                    <a:solidFill>
+                      <a:schemeClr val="bg1"/>
+                    </a:solidFill>
+                  </a:rPr>
+                  <a:t> </a:t>
+                </a:r>
+                <a:r>
+                  <a:rPr lang="en-US" dirty="0" err="1">
+                    <a:solidFill>
+                      <a:schemeClr val="bg1"/>
+                    </a:solidFill>
+                  </a:rPr>
+                  <a:t>Vektoren</a:t>
+                </a:r>
+                <a:r>
+                  <a:rPr lang="en-US" dirty="0">
+                    <a:solidFill>
+                      <a:schemeClr val="bg1"/>
+                    </a:solidFill>
+                  </a:rPr>
+                  <a:t> </a:t>
+                </a:r>
+                <a:r>
+                  <a:rPr lang="en-US" dirty="0" err="1">
+                    <a:solidFill>
+                      <a:schemeClr val="bg1"/>
+                    </a:solidFill>
+                  </a:rPr>
+                  <a:t>unterteilen</a:t>
+                </a:r>
+                <a:r>
+                  <a:rPr lang="en-US" dirty="0">
+                    <a:solidFill>
+                      <a:schemeClr val="bg1"/>
+                    </a:solidFill>
+                  </a:rPr>
+                  <a:t>.</a:t>
+                </a:r>
+              </a:p>
+              <a:p>
+                <a:endParaRPr lang="en-US" dirty="0">
+                  <a:solidFill>
+                    <a:schemeClr val="bg1"/>
+                  </a:solidFill>
+                </a:endParaRPr>
+              </a:p>
+              <a:p>
+                <a:r>
+                  <a:rPr lang="en-US" dirty="0">
+                    <a:solidFill>
+                      <a:schemeClr val="bg1"/>
+                    </a:solidFill>
+                  </a:rPr>
+                  <a:t>Falls </a:t>
+                </a:r>
+                <a14:m>
+                  <m:oMath xmlns:m="http://schemas.openxmlformats.org/officeDocument/2006/math">
+                    <m:r>
+                      <m:rPr>
+                        <m:sty m:val="p"/>
+                      </m:rPr>
+                      <a:rPr lang="en-US" b="0" i="0" smtClean="0">
+                        <a:solidFill>
+                          <a:schemeClr val="bg1"/>
+                        </a:solidFill>
+                        <a:latin typeface="Cambria Math" panose="02040503050406030204" pitchFamily="18" charset="0"/>
+                      </a:rPr>
+                      <m:t>c</m:t>
+                    </m:r>
+                    <m:r>
+                      <a:rPr lang="en-US" b="0" i="1" smtClean="0">
+                        <a:solidFill>
+                          <a:schemeClr val="bg1"/>
+                        </a:solidFill>
+                        <a:latin typeface="Cambria Math" panose="02040503050406030204" pitchFamily="18" charset="0"/>
+                      </a:rPr>
+                      <m:t> </m:t>
+                    </m:r>
+                    <m:d>
+                      <m:dPr>
+                        <m:begChr m:val="|"/>
+                        <m:endChr m:val="|"/>
+                        <m:ctrlPr>
+                          <a:rPr lang="en-US" b="0" i="1" smtClean="0">
+                            <a:solidFill>
+                              <a:schemeClr val="bg1"/>
+                            </a:solidFill>
+                            <a:latin typeface="Cambria Math" panose="02040503050406030204" pitchFamily="18" charset="0"/>
+                          </a:rPr>
+                        </m:ctrlPr>
+                      </m:dPr>
+                      <m:e>
+                        <m:r>
+                          <m:rPr>
+                            <m:sty m:val="p"/>
+                          </m:rPr>
+                          <a:rPr lang="en-US" b="0" i="0" smtClean="0">
+                            <a:solidFill>
+                              <a:schemeClr val="bg1"/>
+                            </a:solidFill>
+                            <a:latin typeface="Cambria Math" panose="02040503050406030204" pitchFamily="18" charset="0"/>
+                          </a:rPr>
+                          <m:t>Δ</m:t>
+                        </m:r>
+                        <m:r>
+                          <a:rPr lang="en-US" b="0" i="1" smtClean="0">
+                            <a:solidFill>
+                              <a:schemeClr val="bg1"/>
+                            </a:solidFill>
+                            <a:latin typeface="Cambria Math" panose="02040503050406030204" pitchFamily="18" charset="0"/>
+                          </a:rPr>
+                          <m:t>𝑡</m:t>
+                        </m:r>
+                      </m:e>
+                    </m:d>
+                    <m:r>
+                      <a:rPr lang="en-US" b="0" i="1" smtClean="0">
+                        <a:solidFill>
+                          <a:schemeClr val="bg1"/>
+                        </a:solidFill>
+                        <a:latin typeface="Cambria Math" panose="02040503050406030204" pitchFamily="18" charset="0"/>
+                      </a:rPr>
+                      <m:t>&gt;|</m:t>
+                    </m:r>
+                    <m:r>
+                      <m:rPr>
+                        <m:sty m:val="p"/>
+                      </m:rPr>
+                      <a:rPr lang="en-US" b="0" i="0" smtClean="0">
+                        <a:solidFill>
+                          <a:schemeClr val="bg1"/>
+                        </a:solidFill>
+                        <a:latin typeface="Cambria Math" panose="02040503050406030204" pitchFamily="18" charset="0"/>
+                      </a:rPr>
+                      <m:t>Δ</m:t>
+                    </m:r>
+                    <m:r>
+                      <a:rPr lang="en-US" b="0" i="1" smtClean="0">
+                        <a:solidFill>
+                          <a:schemeClr val="bg1"/>
+                        </a:solidFill>
+                        <a:latin typeface="Cambria Math" panose="02040503050406030204" pitchFamily="18" charset="0"/>
+                      </a:rPr>
+                      <m:t>𝑧</m:t>
+                    </m:r>
+                    <m:r>
+                      <a:rPr lang="en-US" b="0" i="1" smtClean="0">
+                        <a:solidFill>
+                          <a:schemeClr val="bg1"/>
+                        </a:solidFill>
+                        <a:latin typeface="Cambria Math" panose="02040503050406030204" pitchFamily="18" charset="0"/>
+                      </a:rPr>
+                      <m:t>|</m:t>
+                    </m:r>
+                  </m:oMath>
+                </a14:m>
+                <a:r>
+                  <a:rPr lang="en-US" dirty="0">
+                    <a:solidFill>
+                      <a:schemeClr val="bg1"/>
+                    </a:solidFill>
+                  </a:rPr>
+                  <a:t> so </a:t>
+                </a:r>
+                <a:r>
+                  <a:rPr lang="en-US" dirty="0" err="1">
+                    <a:solidFill>
+                      <a:schemeClr val="bg1"/>
+                    </a:solidFill>
+                  </a:rPr>
+                  <a:t>ist</a:t>
+                </a:r>
+                <a:r>
+                  <a:rPr lang="en-US" dirty="0">
+                    <a:solidFill>
+                      <a:schemeClr val="bg1"/>
+                    </a:solidFill>
+                  </a:rPr>
+                  <a:t> es </a:t>
+                </a:r>
+                <a:r>
+                  <a:rPr lang="en-US" dirty="0" err="1">
+                    <a:solidFill>
+                      <a:schemeClr val="bg1"/>
+                    </a:solidFill>
+                  </a:rPr>
+                  <a:t>ein</a:t>
+                </a:r>
+                <a:endParaRPr lang="en-US" dirty="0">
+                  <a:solidFill>
+                    <a:schemeClr val="bg1"/>
+                  </a:solidFill>
+                </a:endParaRPr>
+              </a:p>
+              <a:p>
+                <a:r>
+                  <a:rPr lang="en-US" dirty="0" err="1">
+                    <a:solidFill>
+                      <a:schemeClr val="bg1"/>
+                    </a:solidFill>
+                  </a:rPr>
+                  <a:t>zeitartiger</a:t>
+                </a:r>
+                <a:r>
+                  <a:rPr lang="en-US" dirty="0">
+                    <a:solidFill>
+                      <a:schemeClr val="bg1"/>
+                    </a:solidFill>
+                  </a:rPr>
+                  <a:t> Vektor </a:t>
+                </a:r>
+                <a14:m>
+                  <m:oMath xmlns:m="http://schemas.openxmlformats.org/officeDocument/2006/math">
+                    <m:d>
+                      <m:dPr>
+                        <m:ctrlPr>
+                          <a:rPr lang="en-US" b="0" i="1" smtClean="0">
+                            <a:solidFill>
+                              <a:schemeClr val="bg1"/>
+                            </a:solidFill>
+                            <a:latin typeface="Cambria Math" panose="02040503050406030204" pitchFamily="18" charset="0"/>
+                          </a:rPr>
+                        </m:ctrlPr>
+                      </m:dPr>
+                      <m:e>
+                        <m:r>
+                          <m:rPr>
+                            <m:sty m:val="p"/>
+                          </m:rPr>
+                          <a:rPr lang="en-US">
+                            <a:solidFill>
+                              <a:schemeClr val="bg1"/>
+                            </a:solidFill>
+                            <a:latin typeface="Cambria Math" panose="02040503050406030204" pitchFamily="18" charset="0"/>
+                          </a:rPr>
+                          <m:t>Δ</m:t>
+                        </m:r>
+                        <m:sSup>
+                          <m:sSupPr>
+                            <m:ctrlPr>
+                              <a:rPr lang="en-US" i="1">
+                                <a:solidFill>
+                                  <a:schemeClr val="bg1"/>
+                                </a:solidFill>
+                                <a:latin typeface="Cambria Math" panose="02040503050406030204" pitchFamily="18" charset="0"/>
+                              </a:rPr>
+                            </m:ctrlPr>
+                          </m:sSupPr>
+                          <m:e>
+                            <m:r>
+                              <a:rPr lang="en-US" i="1">
+                                <a:solidFill>
+                                  <a:schemeClr val="bg1"/>
+                                </a:solidFill>
+                                <a:latin typeface="Cambria Math" panose="02040503050406030204" pitchFamily="18" charset="0"/>
+                              </a:rPr>
+                              <m:t>𝑠</m:t>
+                            </m:r>
+                          </m:e>
+                          <m:sup>
+                            <m:r>
+                              <a:rPr lang="en-US" i="1">
+                                <a:solidFill>
+                                  <a:schemeClr val="bg1"/>
+                                </a:solidFill>
+                                <a:latin typeface="Cambria Math" panose="02040503050406030204" pitchFamily="18" charset="0"/>
+                              </a:rPr>
+                              <m:t>2</m:t>
+                            </m:r>
+                          </m:sup>
+                        </m:sSup>
+                        <m:r>
+                          <a:rPr lang="en-US" i="1">
+                            <a:solidFill>
+                              <a:schemeClr val="bg1"/>
+                            </a:solidFill>
+                            <a:latin typeface="Cambria Math" panose="02040503050406030204" pitchFamily="18" charset="0"/>
+                          </a:rPr>
+                          <m:t>&gt;0</m:t>
+                        </m:r>
+                      </m:e>
+                    </m:d>
+                  </m:oMath>
+                </a14:m>
+                <a:endParaRPr lang="en-US" dirty="0">
+                  <a:solidFill>
+                    <a:schemeClr val="bg1"/>
+                  </a:solidFill>
+                </a:endParaRPr>
+              </a:p>
+              <a:p>
+                <a:endParaRPr lang="en-US" dirty="0">
+                  <a:solidFill>
+                    <a:schemeClr val="bg1"/>
+                  </a:solidFill>
+                </a:endParaRPr>
+              </a:p>
+              <a:p>
+                <a:r>
+                  <a:rPr lang="en-US" dirty="0" err="1">
+                    <a:solidFill>
+                      <a:schemeClr val="bg1"/>
+                    </a:solidFill>
+                  </a:rPr>
+                  <a:t>Diese</a:t>
+                </a:r>
+                <a:r>
+                  <a:rPr lang="en-US" dirty="0">
+                    <a:solidFill>
+                      <a:schemeClr val="bg1"/>
+                    </a:solidFill>
+                  </a:rPr>
+                  <a:t> </a:t>
+                </a:r>
+                <a:r>
+                  <a:rPr lang="en-US" dirty="0" err="1">
+                    <a:solidFill>
+                      <a:schemeClr val="bg1"/>
+                    </a:solidFill>
+                  </a:rPr>
+                  <a:t>liegen</a:t>
+                </a:r>
+                <a:r>
+                  <a:rPr lang="en-US" dirty="0">
+                    <a:solidFill>
+                      <a:schemeClr val="bg1"/>
+                    </a:solidFill>
+                  </a:rPr>
+                  <a:t> in der Zukunft </a:t>
+                </a:r>
+                <a:r>
+                  <a:rPr lang="en-US" dirty="0" err="1">
+                    <a:solidFill>
+                      <a:schemeClr val="bg1"/>
+                    </a:solidFill>
+                  </a:rPr>
+                  <a:t>oder</a:t>
+                </a:r>
+                <a:r>
+                  <a:rPr lang="en-US" dirty="0">
+                    <a:solidFill>
+                      <a:schemeClr val="bg1"/>
+                    </a:solidFill>
+                  </a:rPr>
+                  <a:t> der </a:t>
+                </a:r>
+                <a:r>
+                  <a:rPr lang="en-US" dirty="0" err="1">
+                    <a:solidFill>
+                      <a:schemeClr val="bg1"/>
+                    </a:solidFill>
+                  </a:rPr>
+                  <a:t>Vergangenheit</a:t>
+                </a:r>
+                <a:r>
+                  <a:rPr lang="en-US" dirty="0">
+                    <a:solidFill>
+                      <a:schemeClr val="bg1"/>
+                    </a:solidFill>
+                  </a:rPr>
+                  <a:t> und </a:t>
+                </a:r>
+                <a:r>
+                  <a:rPr lang="en-US" dirty="0" err="1">
+                    <a:solidFill>
+                      <a:schemeClr val="bg1"/>
+                    </a:solidFill>
+                  </a:rPr>
+                  <a:t>können</a:t>
+                </a:r>
+                <a:r>
+                  <a:rPr lang="en-US" dirty="0">
+                    <a:solidFill>
+                      <a:schemeClr val="bg1"/>
+                    </a:solidFill>
+                  </a:rPr>
+                  <a:t> </a:t>
+                </a:r>
+                <a:r>
+                  <a:rPr lang="en-US" dirty="0" err="1">
+                    <a:solidFill>
+                      <a:schemeClr val="bg1"/>
+                    </a:solidFill>
+                  </a:rPr>
+                  <a:t>beeinflusst</a:t>
+                </a:r>
+                <a:r>
+                  <a:rPr lang="en-US" dirty="0">
+                    <a:solidFill>
+                      <a:schemeClr val="bg1"/>
+                    </a:solidFill>
+                  </a:rPr>
+                  <a:t> </a:t>
+                </a:r>
+                <a:r>
+                  <a:rPr lang="en-US" dirty="0" err="1">
+                    <a:solidFill>
+                      <a:schemeClr val="bg1"/>
+                    </a:solidFill>
+                  </a:rPr>
+                  <a:t>werden</a:t>
+                </a:r>
+                <a:r>
+                  <a:rPr lang="en-US" dirty="0">
+                    <a:solidFill>
+                      <a:schemeClr val="bg1"/>
+                    </a:solidFill>
+                  </a:rPr>
+                  <a:t>.</a:t>
+                </a:r>
+              </a:p>
+              <a:p>
+                <a:endParaRPr lang="en-US" dirty="0">
+                  <a:solidFill>
+                    <a:schemeClr val="bg1"/>
+                  </a:solidFill>
+                </a:endParaRPr>
+              </a:p>
+              <a:p>
+                <a:r>
+                  <a:rPr lang="en-US" dirty="0">
+                    <a:solidFill>
+                      <a:schemeClr val="bg1"/>
+                    </a:solidFill>
+                  </a:rPr>
+                  <a:t>Falls </a:t>
+                </a:r>
+                <a14:m>
+                  <m:oMath xmlns:m="http://schemas.openxmlformats.org/officeDocument/2006/math">
+                    <m:r>
+                      <m:rPr>
+                        <m:sty m:val="p"/>
+                      </m:rPr>
+                      <a:rPr lang="en-US" b="0" i="0" smtClean="0">
+                        <a:solidFill>
+                          <a:schemeClr val="bg1"/>
+                        </a:solidFill>
+                        <a:latin typeface="Cambria Math" panose="02040503050406030204" pitchFamily="18" charset="0"/>
+                      </a:rPr>
+                      <m:t>c</m:t>
+                    </m:r>
+                    <m:r>
+                      <a:rPr lang="en-US" b="0" i="1" smtClean="0">
+                        <a:solidFill>
+                          <a:schemeClr val="bg1"/>
+                        </a:solidFill>
+                        <a:latin typeface="Cambria Math" panose="02040503050406030204" pitchFamily="18" charset="0"/>
+                      </a:rPr>
+                      <m:t> </m:t>
+                    </m:r>
+                    <m:d>
+                      <m:dPr>
+                        <m:begChr m:val="|"/>
+                        <m:endChr m:val="|"/>
+                        <m:ctrlPr>
+                          <a:rPr lang="en-US" b="0" i="1" smtClean="0">
+                            <a:solidFill>
+                              <a:schemeClr val="bg1"/>
+                            </a:solidFill>
+                            <a:latin typeface="Cambria Math" panose="02040503050406030204" pitchFamily="18" charset="0"/>
+                          </a:rPr>
+                        </m:ctrlPr>
+                      </m:dPr>
+                      <m:e>
+                        <m:r>
+                          <m:rPr>
+                            <m:sty m:val="p"/>
+                          </m:rPr>
+                          <a:rPr lang="en-US" b="0" i="0" smtClean="0">
+                            <a:solidFill>
+                              <a:schemeClr val="bg1"/>
+                            </a:solidFill>
+                            <a:latin typeface="Cambria Math" panose="02040503050406030204" pitchFamily="18" charset="0"/>
+                          </a:rPr>
+                          <m:t>Δ</m:t>
+                        </m:r>
+                        <m:r>
+                          <a:rPr lang="en-US" b="0" i="1" smtClean="0">
+                            <a:solidFill>
+                              <a:schemeClr val="bg1"/>
+                            </a:solidFill>
+                            <a:latin typeface="Cambria Math" panose="02040503050406030204" pitchFamily="18" charset="0"/>
+                          </a:rPr>
+                          <m:t>𝑡</m:t>
+                        </m:r>
+                      </m:e>
+                    </m:d>
+                    <m:r>
+                      <a:rPr lang="en-US" b="0" i="1" smtClean="0">
+                        <a:solidFill>
+                          <a:schemeClr val="bg1"/>
+                        </a:solidFill>
+                        <a:latin typeface="Cambria Math" panose="02040503050406030204" pitchFamily="18" charset="0"/>
+                      </a:rPr>
+                      <m:t>&lt;</m:t>
+                    </m:r>
+                    <m:r>
+                      <a:rPr lang="en-US" b="0" i="1" smtClean="0">
+                        <a:solidFill>
+                          <a:schemeClr val="bg1"/>
+                        </a:solidFill>
+                        <a:latin typeface="Cambria Math" panose="02040503050406030204" pitchFamily="18" charset="0"/>
+                      </a:rPr>
+                      <m:t>|</m:t>
+                    </m:r>
+                    <m:r>
+                      <m:rPr>
+                        <m:sty m:val="p"/>
+                      </m:rPr>
+                      <a:rPr lang="en-US" b="0" i="0" smtClean="0">
+                        <a:solidFill>
+                          <a:schemeClr val="bg1"/>
+                        </a:solidFill>
+                        <a:latin typeface="Cambria Math" panose="02040503050406030204" pitchFamily="18" charset="0"/>
+                      </a:rPr>
+                      <m:t>Δ</m:t>
+                    </m:r>
+                    <m:r>
+                      <a:rPr lang="en-US" b="0" i="1" smtClean="0">
+                        <a:solidFill>
+                          <a:schemeClr val="bg1"/>
+                        </a:solidFill>
+                        <a:latin typeface="Cambria Math" panose="02040503050406030204" pitchFamily="18" charset="0"/>
+                      </a:rPr>
+                      <m:t>𝑧</m:t>
+                    </m:r>
+                    <m:r>
+                      <a:rPr lang="en-US" b="0" i="1" smtClean="0">
+                        <a:solidFill>
+                          <a:schemeClr val="bg1"/>
+                        </a:solidFill>
+                        <a:latin typeface="Cambria Math" panose="02040503050406030204" pitchFamily="18" charset="0"/>
+                      </a:rPr>
+                      <m:t>|</m:t>
+                    </m:r>
+                  </m:oMath>
+                </a14:m>
+                <a:r>
+                  <a:rPr lang="en-US" dirty="0">
+                    <a:solidFill>
+                      <a:schemeClr val="bg1"/>
+                    </a:solidFill>
+                  </a:rPr>
+                  <a:t> so </a:t>
+                </a:r>
+                <a:r>
+                  <a:rPr lang="en-US" dirty="0" err="1">
+                    <a:solidFill>
+                      <a:schemeClr val="bg1"/>
+                    </a:solidFill>
+                  </a:rPr>
+                  <a:t>ist</a:t>
+                </a:r>
+                <a:r>
+                  <a:rPr lang="en-US" dirty="0">
+                    <a:solidFill>
+                      <a:schemeClr val="bg1"/>
+                    </a:solidFill>
+                  </a:rPr>
+                  <a:t> es </a:t>
+                </a:r>
+                <a:r>
+                  <a:rPr lang="en-US" dirty="0" err="1">
+                    <a:solidFill>
+                      <a:schemeClr val="bg1"/>
+                    </a:solidFill>
+                  </a:rPr>
+                  <a:t>ein</a:t>
+                </a:r>
+                <a:endParaRPr lang="en-US" dirty="0">
+                  <a:solidFill>
+                    <a:schemeClr val="bg1"/>
+                  </a:solidFill>
+                </a:endParaRPr>
+              </a:p>
+              <a:p>
+                <a:r>
+                  <a:rPr lang="en-US" dirty="0" err="1">
+                    <a:solidFill>
+                      <a:schemeClr val="bg1"/>
+                    </a:solidFill>
+                  </a:rPr>
+                  <a:t>raumartiger</a:t>
+                </a:r>
+                <a:r>
+                  <a:rPr lang="en-US" dirty="0">
+                    <a:solidFill>
+                      <a:schemeClr val="bg1"/>
+                    </a:solidFill>
+                  </a:rPr>
+                  <a:t> Vektor </a:t>
+                </a:r>
+                <a14:m>
+                  <m:oMath xmlns:m="http://schemas.openxmlformats.org/officeDocument/2006/math">
+                    <m:d>
+                      <m:dPr>
+                        <m:ctrlPr>
+                          <a:rPr lang="en-US" b="0" i="1" smtClean="0">
+                            <a:solidFill>
+                              <a:schemeClr val="bg1"/>
+                            </a:solidFill>
+                            <a:latin typeface="Cambria Math" panose="02040503050406030204" pitchFamily="18" charset="0"/>
+                          </a:rPr>
+                        </m:ctrlPr>
+                      </m:dPr>
+                      <m:e>
+                        <m:r>
+                          <m:rPr>
+                            <m:sty m:val="p"/>
+                          </m:rPr>
+                          <a:rPr lang="en-US">
+                            <a:solidFill>
+                              <a:schemeClr val="bg1"/>
+                            </a:solidFill>
+                            <a:latin typeface="Cambria Math" panose="02040503050406030204" pitchFamily="18" charset="0"/>
+                          </a:rPr>
+                          <m:t>Δ</m:t>
+                        </m:r>
+                        <m:sSup>
+                          <m:sSupPr>
+                            <m:ctrlPr>
+                              <a:rPr lang="en-US" i="1">
+                                <a:solidFill>
+                                  <a:schemeClr val="bg1"/>
+                                </a:solidFill>
+                                <a:latin typeface="Cambria Math" panose="02040503050406030204" pitchFamily="18" charset="0"/>
+                              </a:rPr>
+                            </m:ctrlPr>
+                          </m:sSupPr>
+                          <m:e>
+                            <m:r>
+                              <a:rPr lang="en-US" i="1">
+                                <a:solidFill>
+                                  <a:schemeClr val="bg1"/>
+                                </a:solidFill>
+                                <a:latin typeface="Cambria Math" panose="02040503050406030204" pitchFamily="18" charset="0"/>
+                              </a:rPr>
+                              <m:t>𝑠</m:t>
+                            </m:r>
+                          </m:e>
+                          <m:sup>
+                            <m:r>
+                              <a:rPr lang="en-US" i="1">
+                                <a:solidFill>
+                                  <a:schemeClr val="bg1"/>
+                                </a:solidFill>
+                                <a:latin typeface="Cambria Math" panose="02040503050406030204" pitchFamily="18" charset="0"/>
+                              </a:rPr>
+                              <m:t>2</m:t>
+                            </m:r>
+                          </m:sup>
+                        </m:sSup>
+                        <m:r>
+                          <a:rPr lang="en-US" b="0" i="1" smtClean="0">
+                            <a:solidFill>
+                              <a:schemeClr val="bg1"/>
+                            </a:solidFill>
+                            <a:latin typeface="Cambria Math" panose="02040503050406030204" pitchFamily="18" charset="0"/>
+                          </a:rPr>
+                          <m:t>&lt;</m:t>
+                        </m:r>
+                        <m:r>
+                          <a:rPr lang="en-US" i="1">
+                            <a:solidFill>
+                              <a:schemeClr val="bg1"/>
+                            </a:solidFill>
+                            <a:latin typeface="Cambria Math" panose="02040503050406030204" pitchFamily="18" charset="0"/>
+                          </a:rPr>
+                          <m:t>0</m:t>
+                        </m:r>
+                      </m:e>
+                    </m:d>
+                  </m:oMath>
+                </a14:m>
+                <a:endParaRPr lang="en-US" dirty="0">
+                  <a:solidFill>
+                    <a:schemeClr val="bg1"/>
+                  </a:solidFill>
+                </a:endParaRPr>
+              </a:p>
+              <a:p>
+                <a:endParaRPr lang="en-US" dirty="0">
+                  <a:solidFill>
+                    <a:schemeClr val="bg1"/>
+                  </a:solidFill>
+                </a:endParaRPr>
+              </a:p>
+              <a:p>
+                <a:r>
+                  <a:rPr lang="en-US" dirty="0" err="1">
+                    <a:solidFill>
+                      <a:schemeClr val="bg1"/>
+                    </a:solidFill>
+                  </a:rPr>
+                  <a:t>Diese</a:t>
+                </a:r>
+                <a:r>
+                  <a:rPr lang="en-US" dirty="0">
+                    <a:solidFill>
+                      <a:schemeClr val="bg1"/>
+                    </a:solidFill>
+                  </a:rPr>
+                  <a:t> </a:t>
+                </a:r>
+                <a:r>
+                  <a:rPr lang="en-US" dirty="0" err="1">
+                    <a:solidFill>
+                      <a:schemeClr val="bg1"/>
+                    </a:solidFill>
+                  </a:rPr>
+                  <a:t>Ereignisse</a:t>
+                </a:r>
+                <a:r>
+                  <a:rPr lang="en-US" dirty="0">
+                    <a:solidFill>
+                      <a:schemeClr val="bg1"/>
+                    </a:solidFill>
+                  </a:rPr>
+                  <a:t> </a:t>
+                </a:r>
+                <a:r>
+                  <a:rPr lang="en-US" dirty="0" err="1">
+                    <a:solidFill>
+                      <a:schemeClr val="bg1"/>
+                    </a:solidFill>
+                  </a:rPr>
+                  <a:t>können</a:t>
+                </a:r>
+                <a:r>
+                  <a:rPr lang="en-US" dirty="0">
+                    <a:solidFill>
+                      <a:schemeClr val="bg1"/>
+                    </a:solidFill>
+                  </a:rPr>
+                  <a:t> </a:t>
+                </a:r>
+                <a:r>
+                  <a:rPr lang="en-US" dirty="0" err="1">
+                    <a:solidFill>
+                      <a:schemeClr val="bg1"/>
+                    </a:solidFill>
+                  </a:rPr>
+                  <a:t>keinen</a:t>
+                </a:r>
+                <a:r>
+                  <a:rPr lang="en-US" dirty="0">
+                    <a:solidFill>
+                      <a:schemeClr val="bg1"/>
+                    </a:solidFill>
+                  </a:rPr>
+                  <a:t> </a:t>
+                </a:r>
+                <a:r>
+                  <a:rPr lang="en-US" dirty="0" err="1">
+                    <a:solidFill>
+                      <a:schemeClr val="bg1"/>
+                    </a:solidFill>
+                  </a:rPr>
+                  <a:t>Einfluss</a:t>
+                </a:r>
+                <a:r>
+                  <a:rPr lang="en-US" dirty="0">
+                    <a:solidFill>
+                      <a:schemeClr val="bg1"/>
+                    </a:solidFill>
+                  </a:rPr>
+                  <a:t> auf </a:t>
+                </a:r>
+                <a:r>
+                  <a:rPr lang="en-US" dirty="0" err="1">
+                    <a:solidFill>
+                      <a:schemeClr val="bg1"/>
+                    </a:solidFill>
+                  </a:rPr>
+                  <a:t>uns</a:t>
+                </a:r>
+                <a:r>
+                  <a:rPr lang="en-US" dirty="0">
+                    <a:solidFill>
+                      <a:schemeClr val="bg1"/>
+                    </a:solidFill>
+                  </a:rPr>
+                  <a:t> </a:t>
+                </a:r>
+                <a:r>
+                  <a:rPr lang="en-US" dirty="0" err="1">
+                    <a:solidFill>
+                      <a:schemeClr val="bg1"/>
+                    </a:solidFill>
+                  </a:rPr>
+                  <a:t>haben</a:t>
+                </a:r>
+                <a:r>
+                  <a:rPr lang="en-US" dirty="0">
+                    <a:solidFill>
+                      <a:schemeClr val="bg1"/>
+                    </a:solidFill>
+                  </a:rPr>
+                  <a:t> und </a:t>
+                </a:r>
+                <a:r>
+                  <a:rPr lang="en-US" dirty="0" err="1">
+                    <a:solidFill>
+                      <a:schemeClr val="bg1"/>
+                    </a:solidFill>
+                  </a:rPr>
+                  <a:t>wir</a:t>
+                </a:r>
+                <a:r>
+                  <a:rPr lang="en-US" dirty="0">
+                    <a:solidFill>
+                      <a:schemeClr val="bg1"/>
+                    </a:solidFill>
+                  </a:rPr>
+                  <a:t> </a:t>
+                </a:r>
+                <a:r>
+                  <a:rPr lang="en-US" dirty="0" err="1">
+                    <a:solidFill>
+                      <a:schemeClr val="bg1"/>
+                    </a:solidFill>
+                  </a:rPr>
+                  <a:t>keinen</a:t>
+                </a:r>
+                <a:r>
+                  <a:rPr lang="en-US" dirty="0">
+                    <a:solidFill>
+                      <a:schemeClr val="bg1"/>
+                    </a:solidFill>
+                  </a:rPr>
+                  <a:t> </a:t>
+                </a:r>
+                <a:r>
+                  <a:rPr lang="en-US" dirty="0" err="1">
+                    <a:solidFill>
+                      <a:schemeClr val="bg1"/>
+                    </a:solidFill>
+                  </a:rPr>
+                  <a:t>Einfluss</a:t>
+                </a:r>
+                <a:r>
+                  <a:rPr lang="en-US" dirty="0">
+                    <a:solidFill>
+                      <a:schemeClr val="bg1"/>
+                    </a:solidFill>
+                  </a:rPr>
+                  <a:t> auf </a:t>
+                </a:r>
+                <a:r>
+                  <a:rPr lang="en-US" dirty="0" err="1">
+                    <a:solidFill>
+                      <a:schemeClr val="bg1"/>
+                    </a:solidFill>
+                  </a:rPr>
+                  <a:t>diese</a:t>
+                </a:r>
+                <a:r>
+                  <a:rPr lang="en-US" dirty="0">
+                    <a:solidFill>
+                      <a:schemeClr val="bg1"/>
+                    </a:solidFill>
+                  </a:rPr>
+                  <a:t> </a:t>
+                </a:r>
+                <a:r>
+                  <a:rPr lang="en-US" dirty="0" err="1">
+                    <a:solidFill>
+                      <a:schemeClr val="bg1"/>
+                    </a:solidFill>
+                  </a:rPr>
+                  <a:t>Ereignisse</a:t>
+                </a:r>
+                <a:r>
+                  <a:rPr lang="en-US" dirty="0">
+                    <a:solidFill>
+                      <a:schemeClr val="bg1"/>
+                    </a:solidFill>
+                  </a:rPr>
+                  <a:t>.</a:t>
+                </a:r>
+              </a:p>
+              <a:p>
+                <a:endParaRPr lang="en-US" dirty="0">
+                  <a:solidFill>
+                    <a:schemeClr val="bg1"/>
+                  </a:solidFill>
+                </a:endParaRPr>
+              </a:p>
+            </p:txBody>
+          </p:sp>
+        </mc:Choice>
+        <mc:Fallback>
+          <p:sp>
+            <p:nvSpPr>
+              <p:cNvPr id="2" name="TextBox 1">
+                <a:extLst>
+                  <a:ext uri="{FF2B5EF4-FFF2-40B4-BE49-F238E27FC236}">
+                    <a16:creationId xmlns:a16="http://schemas.microsoft.com/office/drawing/2014/main" id="{F0EA46D7-D23D-2740-10E1-B7751F23036B}"/>
+                  </a:ext>
+                </a:extLst>
+              </p:cNvPr>
+              <p:cNvSpPr txBox="1">
+                <a:spLocks noRot="1" noChangeAspect="1" noMove="1" noResize="1" noEditPoints="1" noAdjustHandles="1" noChangeArrowheads="1" noChangeShapeType="1" noTextEdit="1"/>
+              </p:cNvSpPr>
+              <p:nvPr/>
+            </p:nvSpPr>
+            <p:spPr>
+              <a:xfrm>
+                <a:off x="8547652" y="153348"/>
+                <a:ext cx="3475855" cy="6186309"/>
+              </a:xfrm>
+              <a:prstGeom prst="rect">
+                <a:avLst/>
+              </a:prstGeom>
+              <a:blipFill>
+                <a:blip r:embed="rId3"/>
+                <a:stretch>
+                  <a:fillRect l="-1404" t="-493" r="-175"/>
+                </a:stretch>
+              </a:blipFill>
+            </p:spPr>
+            <p:txBody>
+              <a:bodyPr/>
+              <a:lstStyle/>
+              <a:p>
+                <a:r>
+                  <a:rPr lang="en-CH">
+                    <a:noFill/>
+                  </a:rPr>
+                  <a:t> </a:t>
+                </a:r>
+              </a:p>
+            </p:txBody>
+          </p:sp>
+        </mc:Fallback>
+      </mc:AlternateContent>
+    </p:spTree>
+    <p:extLst>
+      <p:ext uri="{BB962C8B-B14F-4D97-AF65-F5344CB8AC3E}">
+        <p14:creationId xmlns:p14="http://schemas.microsoft.com/office/powerpoint/2010/main" val="2201207689"/>
       </p:ext>
     </p:extLst>
   </p:cSld>
@@ -7455,8 +10147,8 @@
           </a:p>
         </p:txBody>
       </p:sp>
-      <mc:AlternateContent xmlns:mc="http://schemas.openxmlformats.org/markup-compatibility/2006">
-        <mc:Choice xmlns:a14="http://schemas.microsoft.com/office/drawing/2010/main" Requires="a14">
+      <mc:AlternateContent xmlns:mc="http://schemas.openxmlformats.org/markup-compatibility/2006" xmlns:a14="http://schemas.microsoft.com/office/drawing/2010/main">
+        <mc:Choice Requires="a14">
           <p:sp>
             <p:nvSpPr>
               <p:cNvPr id="8" name="Content Placeholder 7">
@@ -8191,7 +10883,7 @@
             </p:txBody>
           </p:sp>
         </mc:Choice>
-        <mc:Fallback>
+        <mc:Fallback xmlns="">
           <p:sp>
             <p:nvSpPr>
               <p:cNvPr id="8" name="Content Placeholder 7">
@@ -8477,8 +11169,8 @@
           </a:xfrm>
         </p:spPr>
       </p:pic>
-      <mc:AlternateContent xmlns:mc="http://schemas.openxmlformats.org/markup-compatibility/2006">
-        <mc:Choice xmlns:a14="http://schemas.microsoft.com/office/drawing/2010/main" Requires="a14">
+      <mc:AlternateContent xmlns:mc="http://schemas.openxmlformats.org/markup-compatibility/2006" xmlns:a14="http://schemas.microsoft.com/office/drawing/2010/main">
+        <mc:Choice Requires="a14">
           <p:sp>
             <p:nvSpPr>
               <p:cNvPr id="3" name="TextBox 2">
@@ -8646,7 +11338,7 @@
             </p:txBody>
           </p:sp>
         </mc:Choice>
-        <mc:Fallback>
+        <mc:Fallback xmlns="">
           <p:sp>
             <p:nvSpPr>
               <p:cNvPr id="3" name="TextBox 2">
@@ -8757,8 +11449,8 @@
           </a:xfrm>
         </p:spPr>
       </p:pic>
-      <mc:AlternateContent xmlns:mc="http://schemas.openxmlformats.org/markup-compatibility/2006">
-        <mc:Choice xmlns:a14="http://schemas.microsoft.com/office/drawing/2010/main" Requires="a14">
+      <mc:AlternateContent xmlns:mc="http://schemas.openxmlformats.org/markup-compatibility/2006" xmlns:a14="http://schemas.microsoft.com/office/drawing/2010/main">
+        <mc:Choice Requires="a14">
           <p:sp>
             <p:nvSpPr>
               <p:cNvPr id="2" name="TextBox 1">
@@ -9044,7 +11736,7 @@
             </p:txBody>
           </p:sp>
         </mc:Choice>
-        <mc:Fallback>
+        <mc:Fallback xmlns="">
           <p:sp>
             <p:nvSpPr>
               <p:cNvPr id="2" name="TextBox 1">
@@ -9155,8 +11847,8 @@
           </a:xfrm>
         </p:spPr>
       </p:pic>
-      <mc:AlternateContent xmlns:mc="http://schemas.openxmlformats.org/markup-compatibility/2006">
-        <mc:Choice xmlns:a14="http://schemas.microsoft.com/office/drawing/2010/main" Requires="a14">
+      <mc:AlternateContent xmlns:mc="http://schemas.openxmlformats.org/markup-compatibility/2006" xmlns:a14="http://schemas.microsoft.com/office/drawing/2010/main">
+        <mc:Choice Requires="a14">
           <p:sp>
             <p:nvSpPr>
               <p:cNvPr id="2" name="TextBox 1">
@@ -9504,7 +12196,7 @@
             </p:txBody>
           </p:sp>
         </mc:Choice>
-        <mc:Fallback>
+        <mc:Fallback xmlns="">
           <p:sp>
             <p:nvSpPr>
               <p:cNvPr id="2" name="TextBox 1">
@@ -9615,8 +12307,8 @@
           </a:xfrm>
         </p:spPr>
       </p:pic>
-      <mc:AlternateContent xmlns:mc="http://schemas.openxmlformats.org/markup-compatibility/2006">
-        <mc:Choice xmlns:a14="http://schemas.microsoft.com/office/drawing/2010/main" Requires="a14">
+      <mc:AlternateContent xmlns:mc="http://schemas.openxmlformats.org/markup-compatibility/2006" xmlns:a14="http://schemas.microsoft.com/office/drawing/2010/main">
+        <mc:Choice Requires="a14">
           <p:sp>
             <p:nvSpPr>
               <p:cNvPr id="2" name="TextBox 1">
@@ -9944,7 +12636,7 @@
             </p:txBody>
           </p:sp>
         </mc:Choice>
-        <mc:Fallback>
+        <mc:Fallback xmlns="">
           <p:sp>
             <p:nvSpPr>
               <p:cNvPr id="2" name="TextBox 1">
@@ -10055,8 +12747,8 @@
           </a:xfrm>
         </p:spPr>
       </p:pic>
-      <mc:AlternateContent xmlns:mc="http://schemas.openxmlformats.org/markup-compatibility/2006">
-        <mc:Choice xmlns:a14="http://schemas.microsoft.com/office/drawing/2010/main" Requires="a14">
+      <mc:AlternateContent xmlns:mc="http://schemas.openxmlformats.org/markup-compatibility/2006" xmlns:a14="http://schemas.microsoft.com/office/drawing/2010/main">
+        <mc:Choice Requires="a14">
           <p:sp>
             <p:nvSpPr>
               <p:cNvPr id="2" name="TextBox 1">
@@ -10502,7 +13194,7 @@
             </p:txBody>
           </p:sp>
         </mc:Choice>
-        <mc:Fallback>
+        <mc:Fallback xmlns="">
           <p:sp>
             <p:nvSpPr>
               <p:cNvPr id="2" name="TextBox 1">
@@ -10613,8 +13305,8 @@
           </a:xfrm>
         </p:spPr>
       </p:pic>
-      <mc:AlternateContent xmlns:mc="http://schemas.openxmlformats.org/markup-compatibility/2006">
-        <mc:Choice xmlns:a14="http://schemas.microsoft.com/office/drawing/2010/main" Requires="a14">
+      <mc:AlternateContent xmlns:mc="http://schemas.openxmlformats.org/markup-compatibility/2006" xmlns:a14="http://schemas.microsoft.com/office/drawing/2010/main">
+        <mc:Choice Requires="a14">
           <p:sp>
             <p:nvSpPr>
               <p:cNvPr id="6" name="TextBox 5">
@@ -11122,7 +13814,7 @@
             </p:txBody>
           </p:sp>
         </mc:Choice>
-        <mc:Fallback>
+        <mc:Fallback xmlns="">
           <p:sp>
             <p:nvSpPr>
               <p:cNvPr id="6" name="TextBox 5">

--- a/slides/minkowski.pptx
+++ b/slides/minkowski.pptx
@@ -7386,8 +7386,8 @@
           </a:xfrm>
         </p:spPr>
       </p:pic>
-      <mc:AlternateContent xmlns:mc="http://schemas.openxmlformats.org/markup-compatibility/2006">
-        <mc:Choice xmlns:a14="http://schemas.microsoft.com/office/drawing/2010/main" Requires="a14">
+      <mc:AlternateContent xmlns:mc="http://schemas.openxmlformats.org/markup-compatibility/2006" xmlns:a14="http://schemas.microsoft.com/office/drawing/2010/main">
+        <mc:Choice Requires="a14">
           <p:sp>
             <p:nvSpPr>
               <p:cNvPr id="2" name="TextBox 1">
@@ -7585,7 +7585,7 @@
             </p:txBody>
           </p:sp>
         </mc:Choice>
-        <mc:Fallback>
+        <mc:Fallback xmlns="">
           <p:sp>
             <p:nvSpPr>
               <p:cNvPr id="2" name="TextBox 1">
@@ -7696,8 +7696,8 @@
           </a:xfrm>
         </p:spPr>
       </p:pic>
-      <mc:AlternateContent xmlns:mc="http://schemas.openxmlformats.org/markup-compatibility/2006">
-        <mc:Choice xmlns:a14="http://schemas.microsoft.com/office/drawing/2010/main" Requires="a14">
+      <mc:AlternateContent xmlns:mc="http://schemas.openxmlformats.org/markup-compatibility/2006" xmlns:a14="http://schemas.microsoft.com/office/drawing/2010/main">
+        <mc:Choice Requires="a14">
           <p:sp>
             <p:nvSpPr>
               <p:cNvPr id="2" name="TextBox 1">
@@ -7999,7 +7999,7 @@
             </p:txBody>
           </p:sp>
         </mc:Choice>
-        <mc:Fallback>
+        <mc:Fallback xmlns="">
           <p:sp>
             <p:nvSpPr>
               <p:cNvPr id="2" name="TextBox 1">
@@ -8110,8 +8110,8 @@
           </a:xfrm>
         </p:spPr>
       </p:pic>
-      <mc:AlternateContent xmlns:mc="http://schemas.openxmlformats.org/markup-compatibility/2006">
-        <mc:Choice xmlns:a14="http://schemas.microsoft.com/office/drawing/2010/main" Requires="a14">
+      <mc:AlternateContent xmlns:mc="http://schemas.openxmlformats.org/markup-compatibility/2006" xmlns:a14="http://schemas.microsoft.com/office/drawing/2010/main">
+        <mc:Choice Requires="a14">
           <p:sp>
             <p:nvSpPr>
               <p:cNvPr id="2" name="TextBox 1">
@@ -8775,7 +8775,7 @@
             </p:txBody>
           </p:sp>
         </mc:Choice>
-        <mc:Fallback>
+        <mc:Fallback xmlns="">
           <p:sp>
             <p:nvSpPr>
               <p:cNvPr id="2" name="TextBox 1">
@@ -8886,8 +8886,8 @@
           </a:xfrm>
         </p:spPr>
       </p:pic>
-      <mc:AlternateContent xmlns:mc="http://schemas.openxmlformats.org/markup-compatibility/2006">
-        <mc:Choice xmlns:a14="http://schemas.microsoft.com/office/drawing/2010/main" Requires="a14">
+      <mc:AlternateContent xmlns:mc="http://schemas.openxmlformats.org/markup-compatibility/2006" xmlns:a14="http://schemas.microsoft.com/office/drawing/2010/main">
+        <mc:Choice Requires="a14">
           <p:sp>
             <p:nvSpPr>
               <p:cNvPr id="2" name="TextBox 1">
@@ -9634,16 +9634,7 @@
                         </a:solidFill>
                         <a:latin typeface="Cambria Math" panose="02040503050406030204" pitchFamily="18" charset="0"/>
                       </a:rPr>
-                      <m:t>&lt;</m:t>
-                    </m:r>
-                    <m:r>
-                      <a:rPr lang="en-US" b="0" i="1" smtClean="0">
-                        <a:solidFill>
-                          <a:schemeClr val="bg1"/>
-                        </a:solidFill>
-                        <a:latin typeface="Cambria Math" panose="02040503050406030204" pitchFamily="18" charset="0"/>
-                      </a:rPr>
-                      <m:t>|</m:t>
+                      <m:t>&lt;|</m:t>
                     </m:r>
                     <m:r>
                       <m:rPr>
@@ -10031,7 +10022,7 @@
             </p:txBody>
           </p:sp>
         </mc:Choice>
-        <mc:Fallback>
+        <mc:Fallback xmlns="">
           <p:sp>
             <p:nvSpPr>
               <p:cNvPr id="2" name="TextBox 1">

--- a/slides/minkowski.pptx
+++ b/slides/minkowski.pptx
@@ -6,7 +6,7 @@
     <p:sldMasterId id="2147483798" r:id="rId2"/>
   </p:sldMasterIdLst>
   <p:notesMasterIdLst>
-    <p:notesMasterId r:id="rId18"/>
+    <p:notesMasterId r:id="rId29"/>
   </p:notesMasterIdLst>
   <p:sldIdLst>
     <p:sldId id="256" r:id="rId3"/>
@@ -24,6 +24,17 @@
     <p:sldId id="270" r:id="rId15"/>
     <p:sldId id="268" r:id="rId16"/>
     <p:sldId id="269" r:id="rId17"/>
+    <p:sldId id="271" r:id="rId18"/>
+    <p:sldId id="272" r:id="rId19"/>
+    <p:sldId id="273" r:id="rId20"/>
+    <p:sldId id="274" r:id="rId21"/>
+    <p:sldId id="275" r:id="rId22"/>
+    <p:sldId id="276" r:id="rId23"/>
+    <p:sldId id="277" r:id="rId24"/>
+    <p:sldId id="278" r:id="rId25"/>
+    <p:sldId id="279" r:id="rId26"/>
+    <p:sldId id="280" r:id="rId27"/>
+    <p:sldId id="281" r:id="rId28"/>
   </p:sldIdLst>
   <p:sldSz cx="12192000" cy="6858000"/>
   <p:notesSz cx="6858000" cy="9144000"/>
@@ -212,7 +223,7 @@
           <a:p>
             <a:fld id="{FE946714-66A9-4331-9687-D7DE69600F8C}" type="datetimeFigureOut">
               <a:rPr lang="de-DE" smtClean="0"/>
-              <a:t>21.03.2025</a:t>
+              <a:t>24.03.2025</a:t>
             </a:fld>
             <a:endParaRPr lang="de-DE"/>
           </a:p>
@@ -895,7 +906,7 @@
           <a:p>
             <a:fld id="{BC81DDBC-4466-4E4D-8348-9E61A07BBB23}" type="datetime2">
               <a:rPr lang="en-CA" smtClean="0"/>
-              <a:t>Friday, March 21, 2025</a:t>
+              <a:t>Monday, March 24, 2025</a:t>
             </a:fld>
             <a:endParaRPr lang="de-DE"/>
           </a:p>
@@ -1304,7 +1315,7 @@
           <a:p>
             <a:fld id="{4A011472-C2FB-4557-976A-45B9E45E41B8}" type="datetime2">
               <a:rPr lang="en-CA" smtClean="0"/>
-              <a:t>Friday, March 21, 2025</a:t>
+              <a:t>Monday, March 24, 2025</a:t>
             </a:fld>
             <a:endParaRPr lang="de-DE"/>
           </a:p>
@@ -1592,7 +1603,7 @@
           <a:p>
             <a:fld id="{0AB1A5E8-2D2A-4061-8930-BA891F6E5824}" type="datetime2">
               <a:rPr lang="en-CA" smtClean="0"/>
-              <a:t>Friday, March 21, 2025</a:t>
+              <a:t>Monday, March 24, 2025</a:t>
             </a:fld>
             <a:endParaRPr lang="de-DE"/>
           </a:p>
@@ -1821,7 +1832,7 @@
           <a:p>
             <a:fld id="{5FB79B12-0087-499C-8708-C48C1D5EFD8A}" type="datetime2">
               <a:rPr lang="en-CA" smtClean="0"/>
-              <a:t>Friday, March 21, 2025</a:t>
+              <a:t>Monday, March 24, 2025</a:t>
             </a:fld>
             <a:endParaRPr lang="de-DE"/>
           </a:p>
@@ -2055,7 +2066,7 @@
           <a:p>
             <a:fld id="{1F664A41-A95B-4B58-B281-ED13D91A7603}" type="datetime2">
               <a:rPr lang="en-CA" smtClean="0"/>
-              <a:t>Friday, March 21, 2025</a:t>
+              <a:t>Monday, March 24, 2025</a:t>
             </a:fld>
             <a:endParaRPr lang="de-DE"/>
           </a:p>
@@ -2217,7 +2228,7 @@
           <a:p>
             <a:fld id="{12F3EEEF-9270-448B-8799-2AA9B50D0F5B}" type="datetime2">
               <a:rPr lang="en-CA" smtClean="0"/>
-              <a:t>Friday, March 21, 2025</a:t>
+              <a:t>Monday, March 24, 2025</a:t>
             </a:fld>
             <a:endParaRPr lang="de-DE" dirty="0"/>
           </a:p>
@@ -2489,7 +2500,7 @@
           <a:p>
             <a:fld id="{19A37E33-DCA0-4C7F-A116-3D7ECA99B758}" type="datetime2">
               <a:rPr lang="en-CA" smtClean="0"/>
-              <a:t>Friday, March 21, 2025</a:t>
+              <a:t>Monday, March 24, 2025</a:t>
             </a:fld>
             <a:endParaRPr lang="de-DE"/>
           </a:p>
@@ -2795,7 +2806,7 @@
           <a:p>
             <a:fld id="{5B55F0DF-0DE4-46A6-89EE-D85721A78BFF}" type="datetime2">
               <a:rPr lang="en-CA" smtClean="0"/>
-              <a:t>Friday, March 21, 2025</a:t>
+              <a:t>Monday, March 24, 2025</a:t>
             </a:fld>
             <a:endParaRPr lang="de-DE"/>
           </a:p>
@@ -3096,7 +3107,7 @@
           <a:p>
             <a:fld id="{E996B742-5549-4C1E-A4A7-964958457E23}" type="datetime2">
               <a:rPr lang="en-CA" smtClean="0"/>
-              <a:t>Friday, March 21, 2025</a:t>
+              <a:t>Monday, March 24, 2025</a:t>
             </a:fld>
             <a:endParaRPr lang="de-DE"/>
           </a:p>
@@ -3263,7 +3274,7 @@
           <a:p>
             <a:fld id="{E6E52A30-8CC1-4184-BF4D-47E2B21E4EAF}" type="datetime2">
               <a:rPr lang="en-CA" smtClean="0"/>
-              <a:t>Friday, March 21, 2025</a:t>
+              <a:t>Monday, March 24, 2025</a:t>
             </a:fld>
             <a:endParaRPr lang="de-DE"/>
           </a:p>
@@ -3423,7 +3434,7 @@
           <a:p>
             <a:fld id="{32A64B94-830A-44DB-B256-EB4AB7B8943B}" type="datetime2">
               <a:rPr lang="en-CA" smtClean="0"/>
-              <a:t>Friday, March 21, 2025</a:t>
+              <a:t>Monday, March 24, 2025</a:t>
             </a:fld>
             <a:endParaRPr lang="de-DE"/>
           </a:p>
@@ -3844,7 +3855,7 @@
           <a:p>
             <a:fld id="{4BA684CD-BF8B-4444-AC4B-E9077F770D42}" type="datetime2">
               <a:rPr lang="en-CA" smtClean="0"/>
-              <a:t>Friday, March 21, 2025</a:t>
+              <a:t>Monday, March 24, 2025</a:t>
             </a:fld>
             <a:endParaRPr lang="de-DE"/>
           </a:p>
@@ -3938,7 +3949,7 @@
           <a:p>
             <a:fld id="{B72ED8E9-D70F-45C4-8048-A836134AE31C}" type="datetime2">
               <a:rPr lang="en-CA" smtClean="0"/>
-              <a:t>Friday, March 21, 2025</a:t>
+              <a:t>Monday, March 24, 2025</a:t>
             </a:fld>
             <a:endParaRPr lang="de-DE"/>
           </a:p>
@@ -4099,7 +4110,7 @@
           <a:p>
             <a:fld id="{E2FEC878-C261-4EEC-84F8-2911246240CC}" type="datetime2">
               <a:rPr lang="en-CA" smtClean="0"/>
-              <a:t>Friday, March 21, 2025</a:t>
+              <a:t>Monday, March 24, 2025</a:t>
             </a:fld>
             <a:endParaRPr lang="de-DE"/>
           </a:p>
@@ -5174,7 +5185,7 @@
           <a:p>
             <a:fld id="{5B784850-771A-44E0-8EA9-A966A4C42E11}" type="datetime2">
               <a:rPr lang="en-CA" smtClean="0"/>
-              <a:t>Friday, March 21, 2025</a:t>
+              <a:t>Monday, March 24, 2025</a:t>
             </a:fld>
             <a:endParaRPr lang="de-DE" dirty="0"/>
           </a:p>
@@ -10080,6 +10091,1826 @@
 </p:sld>
 </file>
 
+<file path=ppt/slides/slide16.xml><?xml version="1.0" encoding="utf-8"?>
+<p:sld xmlns:a="http://schemas.openxmlformats.org/drawingml/2006/main" xmlns:r="http://schemas.openxmlformats.org/officeDocument/2006/relationships" xmlns:p="http://schemas.openxmlformats.org/presentationml/2006/main">
+  <p:cSld>
+    <p:spTree>
+      <p:nvGrpSpPr>
+        <p:cNvPr id="1" name="">
+          <a:extLst>
+            <a:ext uri="{FF2B5EF4-FFF2-40B4-BE49-F238E27FC236}">
+              <a16:creationId xmlns:a16="http://schemas.microsoft.com/office/drawing/2014/main" id="{4C9CBFD6-9694-588C-21B7-ECE742729630}"/>
+            </a:ext>
+          </a:extLst>
+        </p:cNvPr>
+        <p:cNvGrpSpPr/>
+        <p:nvPr/>
+      </p:nvGrpSpPr>
+      <p:grpSpPr>
+        <a:xfrm>
+          <a:off x="0" y="0"/>
+          <a:ext cx="0" cy="0"/>
+          <a:chOff x="0" y="0"/>
+          <a:chExt cx="0" cy="0"/>
+        </a:xfrm>
+      </p:grpSpPr>
+      <p:pic>
+        <p:nvPicPr>
+          <p:cNvPr id="4" name="Content Placeholder 3">
+            <a:extLst>
+              <a:ext uri="{FF2B5EF4-FFF2-40B4-BE49-F238E27FC236}">
+                <a16:creationId xmlns:a16="http://schemas.microsoft.com/office/drawing/2014/main" id="{71D0E0AD-93D6-7110-C251-7F0C65033807}"/>
+              </a:ext>
+            </a:extLst>
+          </p:cNvPr>
+          <p:cNvPicPr>
+            <a:picLocks noGrp="1" noChangeAspect="1"/>
+          </p:cNvPicPr>
+          <p:nvPr>
+            <p:ph idx="1"/>
+          </p:nvPr>
+        </p:nvPicPr>
+        <p:blipFill>
+          <a:blip r:link="rId2"/>
+          <a:srcRect/>
+          <a:stretch>
+            <a:fillRect/>
+          </a:stretch>
+        </p:blipFill>
+        <p:spPr>
+          <a:xfrm>
+            <a:off x="439948" y="-422692"/>
+            <a:ext cx="7556740" cy="7556740"/>
+          </a:xfrm>
+        </p:spPr>
+      </p:pic>
+      <p:sp>
+        <p:nvSpPr>
+          <p:cNvPr id="2" name="TextBox 1">
+            <a:extLst>
+              <a:ext uri="{FF2B5EF4-FFF2-40B4-BE49-F238E27FC236}">
+                <a16:creationId xmlns:a16="http://schemas.microsoft.com/office/drawing/2014/main" id="{3407A521-EB86-E319-40C8-7647DE0747E2}"/>
+              </a:ext>
+            </a:extLst>
+          </p:cNvPr>
+          <p:cNvSpPr txBox="1"/>
+          <p:nvPr/>
+        </p:nvSpPr>
+        <p:spPr>
+          <a:xfrm>
+            <a:off x="8547652" y="153348"/>
+            <a:ext cx="3475855" cy="1477328"/>
+          </a:xfrm>
+          <a:prstGeom prst="rect">
+            <a:avLst/>
+          </a:prstGeom>
+          <a:noFill/>
+        </p:spPr>
+        <p:txBody>
+          <a:bodyPr wrap="square" rtlCol="0">
+            <a:spAutoFit/>
+          </a:bodyPr>
+          <a:lstStyle/>
+          <a:p>
+            <a:r>
+              <a:rPr lang="en-US" dirty="0" err="1">
+                <a:solidFill>
+                  <a:schemeClr val="bg1"/>
+                </a:solidFill>
+              </a:rPr>
+              <a:t>Zurück</a:t>
+            </a:r>
+            <a:r>
+              <a:rPr lang="en-US" dirty="0">
+                <a:solidFill>
+                  <a:schemeClr val="bg1"/>
+                </a:solidFill>
+              </a:rPr>
+              <a:t> </a:t>
+            </a:r>
+            <a:r>
+              <a:rPr lang="en-US" dirty="0" err="1">
+                <a:solidFill>
+                  <a:schemeClr val="bg1"/>
+                </a:solidFill>
+              </a:rPr>
+              <a:t>zum</a:t>
+            </a:r>
+            <a:r>
+              <a:rPr lang="en-US" dirty="0">
+                <a:solidFill>
+                  <a:schemeClr val="bg1"/>
+                </a:solidFill>
+              </a:rPr>
+              <a:t> </a:t>
+            </a:r>
+            <a:r>
+              <a:rPr lang="en-US" dirty="0" err="1">
+                <a:solidFill>
+                  <a:schemeClr val="bg1"/>
+                </a:solidFill>
+              </a:rPr>
+              <a:t>Beispiel</a:t>
+            </a:r>
+            <a:r>
+              <a:rPr lang="en-US" dirty="0">
+                <a:solidFill>
+                  <a:schemeClr val="bg1"/>
+                </a:solidFill>
+              </a:rPr>
+              <a:t> </a:t>
+            </a:r>
+            <a:r>
+              <a:rPr lang="en-US" dirty="0" err="1">
+                <a:solidFill>
+                  <a:schemeClr val="bg1"/>
+                </a:solidFill>
+              </a:rPr>
+              <a:t>zweier</a:t>
+            </a:r>
+            <a:r>
+              <a:rPr lang="en-US" dirty="0">
+                <a:solidFill>
+                  <a:schemeClr val="bg1"/>
+                </a:solidFill>
+              </a:rPr>
+              <a:t> </a:t>
+            </a:r>
+            <a:r>
+              <a:rPr lang="en-US" dirty="0" err="1">
+                <a:solidFill>
+                  <a:schemeClr val="bg1"/>
+                </a:solidFill>
+              </a:rPr>
+              <a:t>Ereignisse</a:t>
+            </a:r>
+            <a:endParaRPr lang="en-US" dirty="0">
+              <a:solidFill>
+                <a:schemeClr val="bg1"/>
+              </a:solidFill>
+            </a:endParaRPr>
+          </a:p>
+          <a:p>
+            <a:endParaRPr lang="en-US" dirty="0">
+              <a:solidFill>
+                <a:schemeClr val="bg1"/>
+              </a:solidFill>
+            </a:endParaRPr>
+          </a:p>
+          <a:p>
+            <a:endParaRPr lang="en-US" dirty="0">
+              <a:solidFill>
+                <a:schemeClr val="bg1"/>
+              </a:solidFill>
+            </a:endParaRPr>
+          </a:p>
+          <a:p>
+            <a:endParaRPr lang="en-US" dirty="0">
+              <a:solidFill>
+                <a:schemeClr val="bg1"/>
+              </a:solidFill>
+            </a:endParaRPr>
+          </a:p>
+        </p:txBody>
+      </p:sp>
+    </p:spTree>
+    <p:extLst>
+      <p:ext uri="{BB962C8B-B14F-4D97-AF65-F5344CB8AC3E}">
+        <p14:creationId xmlns:p14="http://schemas.microsoft.com/office/powerpoint/2010/main" val="3465103290"/>
+      </p:ext>
+    </p:extLst>
+  </p:cSld>
+  <p:clrMapOvr>
+    <a:masterClrMapping/>
+  </p:clrMapOvr>
+</p:sld>
+</file>
+
+<file path=ppt/slides/slide17.xml><?xml version="1.0" encoding="utf-8"?>
+<p:sld xmlns:a="http://schemas.openxmlformats.org/drawingml/2006/main" xmlns:r="http://schemas.openxmlformats.org/officeDocument/2006/relationships" xmlns:p="http://schemas.openxmlformats.org/presentationml/2006/main">
+  <p:cSld>
+    <p:spTree>
+      <p:nvGrpSpPr>
+        <p:cNvPr id="1" name="">
+          <a:extLst>
+            <a:ext uri="{FF2B5EF4-FFF2-40B4-BE49-F238E27FC236}">
+              <a16:creationId xmlns:a16="http://schemas.microsoft.com/office/drawing/2014/main" id="{6A19C875-AF88-E720-4212-1118F01BCC83}"/>
+            </a:ext>
+          </a:extLst>
+        </p:cNvPr>
+        <p:cNvGrpSpPr/>
+        <p:nvPr/>
+      </p:nvGrpSpPr>
+      <p:grpSpPr>
+        <a:xfrm>
+          <a:off x="0" y="0"/>
+          <a:ext cx="0" cy="0"/>
+          <a:chOff x="0" y="0"/>
+          <a:chExt cx="0" cy="0"/>
+        </a:xfrm>
+      </p:grpSpPr>
+      <p:pic>
+        <p:nvPicPr>
+          <p:cNvPr id="4" name="Content Placeholder 3">
+            <a:extLst>
+              <a:ext uri="{FF2B5EF4-FFF2-40B4-BE49-F238E27FC236}">
+                <a16:creationId xmlns:a16="http://schemas.microsoft.com/office/drawing/2014/main" id="{7F231833-F984-E977-9593-EB45C57E56F0}"/>
+              </a:ext>
+            </a:extLst>
+          </p:cNvPr>
+          <p:cNvPicPr>
+            <a:picLocks noGrp="1" noChangeAspect="1"/>
+          </p:cNvPicPr>
+          <p:nvPr>
+            <p:ph idx="1"/>
+          </p:nvPr>
+        </p:nvPicPr>
+        <p:blipFill>
+          <a:blip r:link="rId2"/>
+          <a:srcRect/>
+          <a:stretch>
+            <a:fillRect/>
+          </a:stretch>
+        </p:blipFill>
+        <p:spPr>
+          <a:xfrm>
+            <a:off x="439948" y="-422692"/>
+            <a:ext cx="7556740" cy="7556740"/>
+          </a:xfrm>
+        </p:spPr>
+      </p:pic>
+      <p:sp>
+        <p:nvSpPr>
+          <p:cNvPr id="2" name="TextBox 1">
+            <a:extLst>
+              <a:ext uri="{FF2B5EF4-FFF2-40B4-BE49-F238E27FC236}">
+                <a16:creationId xmlns:a16="http://schemas.microsoft.com/office/drawing/2014/main" id="{B788B923-010D-0597-855D-B81411820426}"/>
+              </a:ext>
+            </a:extLst>
+          </p:cNvPr>
+          <p:cNvSpPr txBox="1"/>
+          <p:nvPr/>
+        </p:nvSpPr>
+        <p:spPr>
+          <a:xfrm>
+            <a:off x="8547652" y="153348"/>
+            <a:ext cx="3475855" cy="2308324"/>
+          </a:xfrm>
+          <a:prstGeom prst="rect">
+            <a:avLst/>
+          </a:prstGeom>
+          <a:noFill/>
+        </p:spPr>
+        <p:txBody>
+          <a:bodyPr wrap="square" rtlCol="0">
+            <a:spAutoFit/>
+          </a:bodyPr>
+          <a:lstStyle/>
+          <a:p>
+            <a:r>
+              <a:rPr lang="en-US" dirty="0" err="1">
+                <a:solidFill>
+                  <a:schemeClr val="bg1"/>
+                </a:solidFill>
+              </a:rPr>
+              <a:t>Zurück</a:t>
+            </a:r>
+            <a:r>
+              <a:rPr lang="en-US" dirty="0">
+                <a:solidFill>
+                  <a:schemeClr val="bg1"/>
+                </a:solidFill>
+              </a:rPr>
+              <a:t> </a:t>
+            </a:r>
+            <a:r>
+              <a:rPr lang="en-US" dirty="0" err="1">
+                <a:solidFill>
+                  <a:schemeClr val="bg1"/>
+                </a:solidFill>
+              </a:rPr>
+              <a:t>zum</a:t>
+            </a:r>
+            <a:r>
+              <a:rPr lang="en-US" dirty="0">
+                <a:solidFill>
+                  <a:schemeClr val="bg1"/>
+                </a:solidFill>
+              </a:rPr>
+              <a:t> </a:t>
+            </a:r>
+            <a:r>
+              <a:rPr lang="en-US" dirty="0" err="1">
+                <a:solidFill>
+                  <a:schemeClr val="bg1"/>
+                </a:solidFill>
+              </a:rPr>
+              <a:t>Beispiel</a:t>
+            </a:r>
+            <a:r>
+              <a:rPr lang="en-US" dirty="0">
+                <a:solidFill>
+                  <a:schemeClr val="bg1"/>
+                </a:solidFill>
+              </a:rPr>
+              <a:t> </a:t>
+            </a:r>
+            <a:r>
+              <a:rPr lang="en-US" dirty="0" err="1">
+                <a:solidFill>
+                  <a:schemeClr val="bg1"/>
+                </a:solidFill>
+              </a:rPr>
+              <a:t>zweier</a:t>
+            </a:r>
+            <a:r>
+              <a:rPr lang="en-US" dirty="0">
+                <a:solidFill>
+                  <a:schemeClr val="bg1"/>
+                </a:solidFill>
+              </a:rPr>
+              <a:t> </a:t>
+            </a:r>
+            <a:r>
+              <a:rPr lang="en-US" dirty="0" err="1">
+                <a:solidFill>
+                  <a:schemeClr val="bg1"/>
+                </a:solidFill>
+              </a:rPr>
+              <a:t>Ereignisse</a:t>
+            </a:r>
+            <a:endParaRPr lang="en-US" dirty="0">
+              <a:solidFill>
+                <a:schemeClr val="bg1"/>
+              </a:solidFill>
+            </a:endParaRPr>
+          </a:p>
+          <a:p>
+            <a:endParaRPr lang="en-US" dirty="0">
+              <a:solidFill>
+                <a:schemeClr val="bg1"/>
+              </a:solidFill>
+            </a:endParaRPr>
+          </a:p>
+          <a:p>
+            <a:r>
+              <a:rPr lang="en-US" dirty="0" err="1">
+                <a:solidFill>
+                  <a:schemeClr val="bg1"/>
+                </a:solidFill>
+              </a:rPr>
+              <a:t>Jedes</a:t>
+            </a:r>
+            <a:r>
+              <a:rPr lang="en-US" dirty="0">
+                <a:solidFill>
+                  <a:schemeClr val="bg1"/>
+                </a:solidFill>
+              </a:rPr>
+              <a:t> der </a:t>
+            </a:r>
+            <a:r>
+              <a:rPr lang="en-US" dirty="0" err="1">
+                <a:solidFill>
+                  <a:schemeClr val="bg1"/>
+                </a:solidFill>
+              </a:rPr>
+              <a:t>Ereignisse</a:t>
+            </a:r>
+            <a:r>
+              <a:rPr lang="en-US" dirty="0">
+                <a:solidFill>
+                  <a:schemeClr val="bg1"/>
+                </a:solidFill>
+              </a:rPr>
+              <a:t> </a:t>
+            </a:r>
+            <a:r>
+              <a:rPr lang="en-US" dirty="0" err="1">
+                <a:solidFill>
+                  <a:schemeClr val="bg1"/>
+                </a:solidFill>
+              </a:rPr>
+              <a:t>besitzt</a:t>
+            </a:r>
+            <a:r>
+              <a:rPr lang="en-US" dirty="0">
+                <a:solidFill>
+                  <a:schemeClr val="bg1"/>
+                </a:solidFill>
+              </a:rPr>
+              <a:t> </a:t>
+            </a:r>
+            <a:r>
+              <a:rPr lang="en-US" dirty="0" err="1">
+                <a:solidFill>
+                  <a:schemeClr val="bg1"/>
+                </a:solidFill>
+              </a:rPr>
+              <a:t>eine</a:t>
+            </a:r>
+            <a:r>
+              <a:rPr lang="en-US" dirty="0">
+                <a:solidFill>
+                  <a:schemeClr val="bg1"/>
+                </a:solidFill>
+              </a:rPr>
+              <a:t> </a:t>
+            </a:r>
+            <a:r>
+              <a:rPr lang="en-US" dirty="0" err="1">
+                <a:solidFill>
+                  <a:schemeClr val="bg1"/>
+                </a:solidFill>
+              </a:rPr>
+              <a:t>eigene</a:t>
+            </a:r>
+            <a:r>
+              <a:rPr lang="en-US" dirty="0">
+                <a:solidFill>
+                  <a:schemeClr val="bg1"/>
+                </a:solidFill>
+              </a:rPr>
+              <a:t> Zukunft, die es </a:t>
+            </a:r>
+            <a:r>
+              <a:rPr lang="en-US" dirty="0" err="1">
+                <a:solidFill>
+                  <a:schemeClr val="bg1"/>
+                </a:solidFill>
+              </a:rPr>
+              <a:t>beeinflussen</a:t>
+            </a:r>
+            <a:r>
+              <a:rPr lang="en-US" dirty="0">
+                <a:solidFill>
+                  <a:schemeClr val="bg1"/>
+                </a:solidFill>
+              </a:rPr>
+              <a:t> </a:t>
+            </a:r>
+            <a:r>
+              <a:rPr lang="en-US" dirty="0" err="1">
+                <a:solidFill>
+                  <a:schemeClr val="bg1"/>
+                </a:solidFill>
+              </a:rPr>
+              <a:t>kann</a:t>
+            </a:r>
+            <a:endParaRPr lang="en-US" dirty="0">
+              <a:solidFill>
+                <a:schemeClr val="bg1"/>
+              </a:solidFill>
+            </a:endParaRPr>
+          </a:p>
+          <a:p>
+            <a:endParaRPr lang="en-US" dirty="0">
+              <a:solidFill>
+                <a:schemeClr val="bg1"/>
+              </a:solidFill>
+            </a:endParaRPr>
+          </a:p>
+          <a:p>
+            <a:endParaRPr lang="en-US" dirty="0">
+              <a:solidFill>
+                <a:schemeClr val="bg1"/>
+              </a:solidFill>
+            </a:endParaRPr>
+          </a:p>
+        </p:txBody>
+      </p:sp>
+    </p:spTree>
+    <p:extLst>
+      <p:ext uri="{BB962C8B-B14F-4D97-AF65-F5344CB8AC3E}">
+        <p14:creationId xmlns:p14="http://schemas.microsoft.com/office/powerpoint/2010/main" val="219980516"/>
+      </p:ext>
+    </p:extLst>
+  </p:cSld>
+  <p:clrMapOvr>
+    <a:masterClrMapping/>
+  </p:clrMapOvr>
+</p:sld>
+</file>
+
+<file path=ppt/slides/slide18.xml><?xml version="1.0" encoding="utf-8"?>
+<p:sld xmlns:a="http://schemas.openxmlformats.org/drawingml/2006/main" xmlns:r="http://schemas.openxmlformats.org/officeDocument/2006/relationships" xmlns:p="http://schemas.openxmlformats.org/presentationml/2006/main">
+  <p:cSld>
+    <p:spTree>
+      <p:nvGrpSpPr>
+        <p:cNvPr id="1" name="">
+          <a:extLst>
+            <a:ext uri="{FF2B5EF4-FFF2-40B4-BE49-F238E27FC236}">
+              <a16:creationId xmlns:a16="http://schemas.microsoft.com/office/drawing/2014/main" id="{ABE57F08-1F9E-DF57-DBDE-83242814B17F}"/>
+            </a:ext>
+          </a:extLst>
+        </p:cNvPr>
+        <p:cNvGrpSpPr/>
+        <p:nvPr/>
+      </p:nvGrpSpPr>
+      <p:grpSpPr>
+        <a:xfrm>
+          <a:off x="0" y="0"/>
+          <a:ext cx="0" cy="0"/>
+          <a:chOff x="0" y="0"/>
+          <a:chExt cx="0" cy="0"/>
+        </a:xfrm>
+      </p:grpSpPr>
+      <p:pic>
+        <p:nvPicPr>
+          <p:cNvPr id="4" name="Content Placeholder 3">
+            <a:extLst>
+              <a:ext uri="{FF2B5EF4-FFF2-40B4-BE49-F238E27FC236}">
+                <a16:creationId xmlns:a16="http://schemas.microsoft.com/office/drawing/2014/main" id="{D8CC5B10-F2B3-F829-84CA-7B47C44FC05F}"/>
+              </a:ext>
+            </a:extLst>
+          </p:cNvPr>
+          <p:cNvPicPr>
+            <a:picLocks noGrp="1" noChangeAspect="1"/>
+          </p:cNvPicPr>
+          <p:nvPr>
+            <p:ph idx="1"/>
+          </p:nvPr>
+        </p:nvPicPr>
+        <p:blipFill>
+          <a:blip r:link="rId2"/>
+          <a:srcRect/>
+          <a:stretch>
+            <a:fillRect/>
+          </a:stretch>
+        </p:blipFill>
+        <p:spPr>
+          <a:xfrm>
+            <a:off x="439948" y="-422692"/>
+            <a:ext cx="7556740" cy="7556740"/>
+          </a:xfrm>
+        </p:spPr>
+      </p:pic>
+      <p:sp>
+        <p:nvSpPr>
+          <p:cNvPr id="2" name="TextBox 1">
+            <a:extLst>
+              <a:ext uri="{FF2B5EF4-FFF2-40B4-BE49-F238E27FC236}">
+                <a16:creationId xmlns:a16="http://schemas.microsoft.com/office/drawing/2014/main" id="{BC8478A7-9ED6-57E8-DB58-5BA6FB334AF8}"/>
+              </a:ext>
+            </a:extLst>
+          </p:cNvPr>
+          <p:cNvSpPr txBox="1"/>
+          <p:nvPr/>
+        </p:nvSpPr>
+        <p:spPr>
+          <a:xfrm>
+            <a:off x="8547652" y="153348"/>
+            <a:ext cx="3475855" cy="3693319"/>
+          </a:xfrm>
+          <a:prstGeom prst="rect">
+            <a:avLst/>
+          </a:prstGeom>
+          <a:noFill/>
+        </p:spPr>
+        <p:txBody>
+          <a:bodyPr wrap="square" rtlCol="0">
+            <a:spAutoFit/>
+          </a:bodyPr>
+          <a:lstStyle/>
+          <a:p>
+            <a:r>
+              <a:rPr lang="en-US" dirty="0" err="1">
+                <a:solidFill>
+                  <a:schemeClr val="bg1"/>
+                </a:solidFill>
+              </a:rPr>
+              <a:t>Zurück</a:t>
+            </a:r>
+            <a:r>
+              <a:rPr lang="en-US" dirty="0">
+                <a:solidFill>
+                  <a:schemeClr val="bg1"/>
+                </a:solidFill>
+              </a:rPr>
+              <a:t> </a:t>
+            </a:r>
+            <a:r>
+              <a:rPr lang="en-US" dirty="0" err="1">
+                <a:solidFill>
+                  <a:schemeClr val="bg1"/>
+                </a:solidFill>
+              </a:rPr>
+              <a:t>zum</a:t>
+            </a:r>
+            <a:r>
+              <a:rPr lang="en-US" dirty="0">
+                <a:solidFill>
+                  <a:schemeClr val="bg1"/>
+                </a:solidFill>
+              </a:rPr>
+              <a:t> </a:t>
+            </a:r>
+            <a:r>
+              <a:rPr lang="en-US" dirty="0" err="1">
+                <a:solidFill>
+                  <a:schemeClr val="bg1"/>
+                </a:solidFill>
+              </a:rPr>
+              <a:t>Beispiel</a:t>
+            </a:r>
+            <a:r>
+              <a:rPr lang="en-US" dirty="0">
+                <a:solidFill>
+                  <a:schemeClr val="bg1"/>
+                </a:solidFill>
+              </a:rPr>
+              <a:t> </a:t>
+            </a:r>
+            <a:r>
+              <a:rPr lang="en-US" dirty="0" err="1">
+                <a:solidFill>
+                  <a:schemeClr val="bg1"/>
+                </a:solidFill>
+              </a:rPr>
+              <a:t>zweier</a:t>
+            </a:r>
+            <a:r>
+              <a:rPr lang="en-US" dirty="0">
+                <a:solidFill>
+                  <a:schemeClr val="bg1"/>
+                </a:solidFill>
+              </a:rPr>
+              <a:t> </a:t>
+            </a:r>
+            <a:r>
+              <a:rPr lang="en-US" dirty="0" err="1">
+                <a:solidFill>
+                  <a:schemeClr val="bg1"/>
+                </a:solidFill>
+              </a:rPr>
+              <a:t>Ereignisse</a:t>
+            </a:r>
+            <a:endParaRPr lang="en-US" dirty="0">
+              <a:solidFill>
+                <a:schemeClr val="bg1"/>
+              </a:solidFill>
+            </a:endParaRPr>
+          </a:p>
+          <a:p>
+            <a:endParaRPr lang="en-US" dirty="0">
+              <a:solidFill>
+                <a:schemeClr val="bg1"/>
+              </a:solidFill>
+            </a:endParaRPr>
+          </a:p>
+          <a:p>
+            <a:r>
+              <a:rPr lang="en-US" dirty="0" err="1">
+                <a:solidFill>
+                  <a:schemeClr val="bg1"/>
+                </a:solidFill>
+              </a:rPr>
+              <a:t>Jedes</a:t>
+            </a:r>
+            <a:r>
+              <a:rPr lang="en-US" dirty="0">
+                <a:solidFill>
+                  <a:schemeClr val="bg1"/>
+                </a:solidFill>
+              </a:rPr>
+              <a:t> der </a:t>
+            </a:r>
+            <a:r>
+              <a:rPr lang="en-US" dirty="0" err="1">
+                <a:solidFill>
+                  <a:schemeClr val="bg1"/>
+                </a:solidFill>
+              </a:rPr>
+              <a:t>Ereignisse</a:t>
+            </a:r>
+            <a:r>
+              <a:rPr lang="en-US" dirty="0">
+                <a:solidFill>
+                  <a:schemeClr val="bg1"/>
+                </a:solidFill>
+              </a:rPr>
+              <a:t> </a:t>
+            </a:r>
+            <a:r>
+              <a:rPr lang="en-US" dirty="0" err="1">
+                <a:solidFill>
+                  <a:schemeClr val="bg1"/>
+                </a:solidFill>
+              </a:rPr>
+              <a:t>besitzt</a:t>
+            </a:r>
+            <a:r>
+              <a:rPr lang="en-US" dirty="0">
+                <a:solidFill>
+                  <a:schemeClr val="bg1"/>
+                </a:solidFill>
+              </a:rPr>
+              <a:t> </a:t>
+            </a:r>
+            <a:r>
+              <a:rPr lang="en-US" dirty="0" err="1">
+                <a:solidFill>
+                  <a:schemeClr val="bg1"/>
+                </a:solidFill>
+              </a:rPr>
+              <a:t>eine</a:t>
+            </a:r>
+            <a:r>
+              <a:rPr lang="en-US" dirty="0">
+                <a:solidFill>
+                  <a:schemeClr val="bg1"/>
+                </a:solidFill>
+              </a:rPr>
+              <a:t> </a:t>
+            </a:r>
+            <a:r>
+              <a:rPr lang="en-US" dirty="0" err="1">
+                <a:solidFill>
+                  <a:schemeClr val="bg1"/>
+                </a:solidFill>
+              </a:rPr>
+              <a:t>eigene</a:t>
+            </a:r>
+            <a:r>
+              <a:rPr lang="en-US" dirty="0">
+                <a:solidFill>
+                  <a:schemeClr val="bg1"/>
+                </a:solidFill>
+              </a:rPr>
+              <a:t> Zukunft, die es </a:t>
+            </a:r>
+            <a:r>
+              <a:rPr lang="en-US" dirty="0" err="1">
+                <a:solidFill>
+                  <a:schemeClr val="bg1"/>
+                </a:solidFill>
+              </a:rPr>
+              <a:t>beeinflussen</a:t>
+            </a:r>
+            <a:r>
+              <a:rPr lang="en-US" dirty="0">
+                <a:solidFill>
+                  <a:schemeClr val="bg1"/>
+                </a:solidFill>
+              </a:rPr>
+              <a:t> </a:t>
+            </a:r>
+            <a:r>
+              <a:rPr lang="en-US" dirty="0" err="1">
+                <a:solidFill>
+                  <a:schemeClr val="bg1"/>
+                </a:solidFill>
+              </a:rPr>
+              <a:t>kann</a:t>
+            </a:r>
+            <a:endParaRPr lang="en-US" dirty="0">
+              <a:solidFill>
+                <a:schemeClr val="bg1"/>
+              </a:solidFill>
+            </a:endParaRPr>
+          </a:p>
+          <a:p>
+            <a:endParaRPr lang="en-US" dirty="0">
+              <a:solidFill>
+                <a:schemeClr val="bg1"/>
+              </a:solidFill>
+            </a:endParaRPr>
+          </a:p>
+          <a:p>
+            <a:r>
+              <a:rPr lang="en-US" dirty="0">
+                <a:solidFill>
+                  <a:schemeClr val="bg1"/>
+                </a:solidFill>
+              </a:rPr>
+              <a:t>Auf der </a:t>
+            </a:r>
+            <a:r>
+              <a:rPr lang="en-US" dirty="0" err="1">
+                <a:solidFill>
+                  <a:schemeClr val="bg1"/>
+                </a:solidFill>
+              </a:rPr>
+              <a:t>anderen</a:t>
+            </a:r>
+            <a:r>
+              <a:rPr lang="en-US" dirty="0">
+                <a:solidFill>
+                  <a:schemeClr val="bg1"/>
+                </a:solidFill>
+              </a:rPr>
+              <a:t> </a:t>
+            </a:r>
+            <a:r>
+              <a:rPr lang="en-US" dirty="0" err="1">
+                <a:solidFill>
+                  <a:schemeClr val="bg1"/>
+                </a:solidFill>
+              </a:rPr>
+              <a:t>Seite</a:t>
+            </a:r>
+            <a:r>
+              <a:rPr lang="en-US" dirty="0">
+                <a:solidFill>
+                  <a:schemeClr val="bg1"/>
+                </a:solidFill>
+              </a:rPr>
+              <a:t> </a:t>
+            </a:r>
+            <a:r>
+              <a:rPr lang="en-US" dirty="0" err="1">
+                <a:solidFill>
+                  <a:schemeClr val="bg1"/>
+                </a:solidFill>
+              </a:rPr>
+              <a:t>besitzt</a:t>
+            </a:r>
+            <a:r>
+              <a:rPr lang="en-US" dirty="0">
+                <a:solidFill>
+                  <a:schemeClr val="bg1"/>
+                </a:solidFill>
+              </a:rPr>
+              <a:t> </a:t>
+            </a:r>
+            <a:r>
+              <a:rPr lang="en-US" dirty="0" err="1">
+                <a:solidFill>
+                  <a:schemeClr val="bg1"/>
+                </a:solidFill>
+              </a:rPr>
+              <a:t>jedes</a:t>
+            </a:r>
+            <a:r>
+              <a:rPr lang="en-US" dirty="0">
+                <a:solidFill>
+                  <a:schemeClr val="bg1"/>
+                </a:solidFill>
+              </a:rPr>
+              <a:t> </a:t>
+            </a:r>
+            <a:r>
+              <a:rPr lang="en-US" dirty="0" err="1">
+                <a:solidFill>
+                  <a:schemeClr val="bg1"/>
+                </a:solidFill>
+              </a:rPr>
+              <a:t>Ereignis</a:t>
+            </a:r>
+            <a:r>
+              <a:rPr lang="en-US" dirty="0">
+                <a:solidFill>
+                  <a:schemeClr val="bg1"/>
+                </a:solidFill>
+              </a:rPr>
+              <a:t> </a:t>
+            </a:r>
+            <a:r>
+              <a:rPr lang="en-US" dirty="0" err="1">
+                <a:solidFill>
+                  <a:schemeClr val="bg1"/>
+                </a:solidFill>
+              </a:rPr>
+              <a:t>eine</a:t>
+            </a:r>
+            <a:r>
+              <a:rPr lang="en-US" dirty="0">
+                <a:solidFill>
+                  <a:schemeClr val="bg1"/>
+                </a:solidFill>
+              </a:rPr>
+              <a:t> </a:t>
+            </a:r>
+            <a:r>
+              <a:rPr lang="en-US" dirty="0" err="1">
+                <a:solidFill>
+                  <a:schemeClr val="bg1"/>
+                </a:solidFill>
+              </a:rPr>
+              <a:t>eigene</a:t>
+            </a:r>
+            <a:r>
+              <a:rPr lang="en-US" dirty="0">
+                <a:solidFill>
+                  <a:schemeClr val="bg1"/>
+                </a:solidFill>
+              </a:rPr>
+              <a:t> </a:t>
+            </a:r>
+            <a:r>
+              <a:rPr lang="en-US" dirty="0" err="1">
+                <a:solidFill>
+                  <a:schemeClr val="bg1"/>
+                </a:solidFill>
+              </a:rPr>
+              <a:t>Vergangenheit</a:t>
+            </a:r>
+            <a:r>
+              <a:rPr lang="en-US" dirty="0">
+                <a:solidFill>
+                  <a:schemeClr val="bg1"/>
+                </a:solidFill>
+              </a:rPr>
+              <a:t>, in der </a:t>
+            </a:r>
+            <a:r>
+              <a:rPr lang="en-US" dirty="0" err="1">
+                <a:solidFill>
+                  <a:schemeClr val="bg1"/>
+                </a:solidFill>
+              </a:rPr>
+              <a:t>Ereignisse</a:t>
+            </a:r>
+            <a:r>
+              <a:rPr lang="en-US" dirty="0">
+                <a:solidFill>
+                  <a:schemeClr val="bg1"/>
+                </a:solidFill>
+              </a:rPr>
+              <a:t> </a:t>
+            </a:r>
+            <a:r>
+              <a:rPr lang="en-US" dirty="0" err="1">
+                <a:solidFill>
+                  <a:schemeClr val="bg1"/>
+                </a:solidFill>
+              </a:rPr>
+              <a:t>Einfluss</a:t>
+            </a:r>
+            <a:r>
+              <a:rPr lang="en-US" dirty="0">
+                <a:solidFill>
+                  <a:schemeClr val="bg1"/>
+                </a:solidFill>
+              </a:rPr>
+              <a:t> </a:t>
+            </a:r>
+            <a:r>
+              <a:rPr lang="en-US" dirty="0" err="1">
+                <a:solidFill>
+                  <a:schemeClr val="bg1"/>
+                </a:solidFill>
+              </a:rPr>
+              <a:t>genommen</a:t>
+            </a:r>
+            <a:r>
+              <a:rPr lang="en-US" dirty="0">
+                <a:solidFill>
+                  <a:schemeClr val="bg1"/>
+                </a:solidFill>
+              </a:rPr>
+              <a:t> </a:t>
+            </a:r>
+            <a:r>
+              <a:rPr lang="en-US" dirty="0" err="1">
+                <a:solidFill>
+                  <a:schemeClr val="bg1"/>
+                </a:solidFill>
+              </a:rPr>
+              <a:t>haben</a:t>
+            </a:r>
+            <a:r>
+              <a:rPr lang="en-US" dirty="0">
+                <a:solidFill>
+                  <a:schemeClr val="bg1"/>
+                </a:solidFill>
+              </a:rPr>
+              <a:t> </a:t>
+            </a:r>
+            <a:r>
+              <a:rPr lang="en-US" dirty="0" err="1">
+                <a:solidFill>
+                  <a:schemeClr val="bg1"/>
+                </a:solidFill>
+              </a:rPr>
+              <a:t>können</a:t>
+            </a:r>
+            <a:r>
+              <a:rPr lang="en-US" dirty="0">
+                <a:solidFill>
+                  <a:schemeClr val="bg1"/>
+                </a:solidFill>
+              </a:rPr>
+              <a:t>.</a:t>
+            </a:r>
+          </a:p>
+          <a:p>
+            <a:endParaRPr lang="en-US" dirty="0">
+              <a:solidFill>
+                <a:schemeClr val="bg1"/>
+              </a:solidFill>
+            </a:endParaRPr>
+          </a:p>
+          <a:p>
+            <a:endParaRPr lang="en-US" dirty="0">
+              <a:solidFill>
+                <a:schemeClr val="bg1"/>
+              </a:solidFill>
+            </a:endParaRPr>
+          </a:p>
+        </p:txBody>
+      </p:sp>
+    </p:spTree>
+    <p:extLst>
+      <p:ext uri="{BB962C8B-B14F-4D97-AF65-F5344CB8AC3E}">
+        <p14:creationId xmlns:p14="http://schemas.microsoft.com/office/powerpoint/2010/main" val="4097801723"/>
+      </p:ext>
+    </p:extLst>
+  </p:cSld>
+  <p:clrMapOvr>
+    <a:masterClrMapping/>
+  </p:clrMapOvr>
+</p:sld>
+</file>
+
+<file path=ppt/slides/slide19.xml><?xml version="1.0" encoding="utf-8"?>
+<p:sld xmlns:a="http://schemas.openxmlformats.org/drawingml/2006/main" xmlns:r="http://schemas.openxmlformats.org/officeDocument/2006/relationships" xmlns:p="http://schemas.openxmlformats.org/presentationml/2006/main">
+  <p:cSld>
+    <p:spTree>
+      <p:nvGrpSpPr>
+        <p:cNvPr id="1" name="">
+          <a:extLst>
+            <a:ext uri="{FF2B5EF4-FFF2-40B4-BE49-F238E27FC236}">
+              <a16:creationId xmlns:a16="http://schemas.microsoft.com/office/drawing/2014/main" id="{0ED3E98E-FF21-C7EB-A27E-F8D7DD0AB0A1}"/>
+            </a:ext>
+          </a:extLst>
+        </p:cNvPr>
+        <p:cNvGrpSpPr/>
+        <p:nvPr/>
+      </p:nvGrpSpPr>
+      <p:grpSpPr>
+        <a:xfrm>
+          <a:off x="0" y="0"/>
+          <a:ext cx="0" cy="0"/>
+          <a:chOff x="0" y="0"/>
+          <a:chExt cx="0" cy="0"/>
+        </a:xfrm>
+      </p:grpSpPr>
+      <p:pic>
+        <p:nvPicPr>
+          <p:cNvPr id="4" name="Content Placeholder 3">
+            <a:extLst>
+              <a:ext uri="{FF2B5EF4-FFF2-40B4-BE49-F238E27FC236}">
+                <a16:creationId xmlns:a16="http://schemas.microsoft.com/office/drawing/2014/main" id="{FA034FA5-0F11-048F-FEAD-CDD8B9BADC02}"/>
+              </a:ext>
+            </a:extLst>
+          </p:cNvPr>
+          <p:cNvPicPr>
+            <a:picLocks noGrp="1" noChangeAspect="1"/>
+          </p:cNvPicPr>
+          <p:nvPr>
+            <p:ph idx="1"/>
+          </p:nvPr>
+        </p:nvPicPr>
+        <p:blipFill>
+          <a:blip r:link="rId2"/>
+          <a:srcRect/>
+          <a:stretch>
+            <a:fillRect/>
+          </a:stretch>
+        </p:blipFill>
+        <p:spPr>
+          <a:xfrm>
+            <a:off x="439948" y="-422692"/>
+            <a:ext cx="7556740" cy="7556740"/>
+          </a:xfrm>
+        </p:spPr>
+      </p:pic>
+      <p:sp>
+        <p:nvSpPr>
+          <p:cNvPr id="2" name="TextBox 1">
+            <a:extLst>
+              <a:ext uri="{FF2B5EF4-FFF2-40B4-BE49-F238E27FC236}">
+                <a16:creationId xmlns:a16="http://schemas.microsoft.com/office/drawing/2014/main" id="{952AAC2E-BF70-135A-BF31-305445B42E46}"/>
+              </a:ext>
+            </a:extLst>
+          </p:cNvPr>
+          <p:cNvSpPr txBox="1"/>
+          <p:nvPr/>
+        </p:nvSpPr>
+        <p:spPr>
+          <a:xfrm>
+            <a:off x="8547652" y="153348"/>
+            <a:ext cx="3475855" cy="5355312"/>
+          </a:xfrm>
+          <a:prstGeom prst="rect">
+            <a:avLst/>
+          </a:prstGeom>
+          <a:noFill/>
+        </p:spPr>
+        <p:txBody>
+          <a:bodyPr wrap="square" rtlCol="0">
+            <a:spAutoFit/>
+          </a:bodyPr>
+          <a:lstStyle/>
+          <a:p>
+            <a:r>
+              <a:rPr lang="en-US" dirty="0" err="1">
+                <a:solidFill>
+                  <a:schemeClr val="bg1"/>
+                </a:solidFill>
+              </a:rPr>
+              <a:t>Zurück</a:t>
+            </a:r>
+            <a:r>
+              <a:rPr lang="en-US" dirty="0">
+                <a:solidFill>
+                  <a:schemeClr val="bg1"/>
+                </a:solidFill>
+              </a:rPr>
+              <a:t> </a:t>
+            </a:r>
+            <a:r>
+              <a:rPr lang="en-US" dirty="0" err="1">
+                <a:solidFill>
+                  <a:schemeClr val="bg1"/>
+                </a:solidFill>
+              </a:rPr>
+              <a:t>zum</a:t>
+            </a:r>
+            <a:r>
+              <a:rPr lang="en-US" dirty="0">
+                <a:solidFill>
+                  <a:schemeClr val="bg1"/>
+                </a:solidFill>
+              </a:rPr>
+              <a:t> </a:t>
+            </a:r>
+            <a:r>
+              <a:rPr lang="en-US" dirty="0" err="1">
+                <a:solidFill>
+                  <a:schemeClr val="bg1"/>
+                </a:solidFill>
+              </a:rPr>
+              <a:t>Beispiel</a:t>
+            </a:r>
+            <a:r>
+              <a:rPr lang="en-US" dirty="0">
+                <a:solidFill>
+                  <a:schemeClr val="bg1"/>
+                </a:solidFill>
+              </a:rPr>
+              <a:t> </a:t>
+            </a:r>
+            <a:r>
+              <a:rPr lang="en-US" dirty="0" err="1">
+                <a:solidFill>
+                  <a:schemeClr val="bg1"/>
+                </a:solidFill>
+              </a:rPr>
+              <a:t>zweier</a:t>
+            </a:r>
+            <a:r>
+              <a:rPr lang="en-US" dirty="0">
+                <a:solidFill>
+                  <a:schemeClr val="bg1"/>
+                </a:solidFill>
+              </a:rPr>
+              <a:t> </a:t>
+            </a:r>
+            <a:r>
+              <a:rPr lang="en-US" dirty="0" err="1">
+                <a:solidFill>
+                  <a:schemeClr val="bg1"/>
+                </a:solidFill>
+              </a:rPr>
+              <a:t>Ereignisse</a:t>
+            </a:r>
+            <a:endParaRPr lang="en-US" dirty="0">
+              <a:solidFill>
+                <a:schemeClr val="bg1"/>
+              </a:solidFill>
+            </a:endParaRPr>
+          </a:p>
+          <a:p>
+            <a:endParaRPr lang="en-US" dirty="0">
+              <a:solidFill>
+                <a:schemeClr val="bg1"/>
+              </a:solidFill>
+            </a:endParaRPr>
+          </a:p>
+          <a:p>
+            <a:r>
+              <a:rPr lang="en-US" dirty="0" err="1">
+                <a:solidFill>
+                  <a:schemeClr val="bg1"/>
+                </a:solidFill>
+              </a:rPr>
+              <a:t>Jedes</a:t>
+            </a:r>
+            <a:r>
+              <a:rPr lang="en-US" dirty="0">
+                <a:solidFill>
+                  <a:schemeClr val="bg1"/>
+                </a:solidFill>
+              </a:rPr>
+              <a:t> der </a:t>
+            </a:r>
+            <a:r>
+              <a:rPr lang="en-US" dirty="0" err="1">
+                <a:solidFill>
+                  <a:schemeClr val="bg1"/>
+                </a:solidFill>
+              </a:rPr>
+              <a:t>Ereignisse</a:t>
+            </a:r>
+            <a:r>
+              <a:rPr lang="en-US" dirty="0">
+                <a:solidFill>
+                  <a:schemeClr val="bg1"/>
+                </a:solidFill>
+              </a:rPr>
+              <a:t> </a:t>
+            </a:r>
+            <a:r>
+              <a:rPr lang="en-US" dirty="0" err="1">
+                <a:solidFill>
+                  <a:schemeClr val="bg1"/>
+                </a:solidFill>
+              </a:rPr>
+              <a:t>besitzt</a:t>
+            </a:r>
+            <a:r>
+              <a:rPr lang="en-US" dirty="0">
+                <a:solidFill>
+                  <a:schemeClr val="bg1"/>
+                </a:solidFill>
+              </a:rPr>
+              <a:t> </a:t>
+            </a:r>
+            <a:r>
+              <a:rPr lang="en-US" dirty="0" err="1">
+                <a:solidFill>
+                  <a:schemeClr val="bg1"/>
+                </a:solidFill>
+              </a:rPr>
+              <a:t>eine</a:t>
+            </a:r>
+            <a:r>
+              <a:rPr lang="en-US" dirty="0">
+                <a:solidFill>
+                  <a:schemeClr val="bg1"/>
+                </a:solidFill>
+              </a:rPr>
+              <a:t> </a:t>
+            </a:r>
+            <a:r>
+              <a:rPr lang="en-US" dirty="0" err="1">
+                <a:solidFill>
+                  <a:schemeClr val="bg1"/>
+                </a:solidFill>
+              </a:rPr>
+              <a:t>eigene</a:t>
+            </a:r>
+            <a:r>
+              <a:rPr lang="en-US" dirty="0">
+                <a:solidFill>
+                  <a:schemeClr val="bg1"/>
+                </a:solidFill>
+              </a:rPr>
+              <a:t> Zukunft, die es </a:t>
+            </a:r>
+            <a:r>
+              <a:rPr lang="en-US" dirty="0" err="1">
+                <a:solidFill>
+                  <a:schemeClr val="bg1"/>
+                </a:solidFill>
+              </a:rPr>
+              <a:t>beeinflussen</a:t>
+            </a:r>
+            <a:r>
+              <a:rPr lang="en-US" dirty="0">
+                <a:solidFill>
+                  <a:schemeClr val="bg1"/>
+                </a:solidFill>
+              </a:rPr>
+              <a:t> </a:t>
+            </a:r>
+            <a:r>
+              <a:rPr lang="en-US" dirty="0" err="1">
+                <a:solidFill>
+                  <a:schemeClr val="bg1"/>
+                </a:solidFill>
+              </a:rPr>
+              <a:t>kann</a:t>
+            </a:r>
+            <a:endParaRPr lang="en-US" dirty="0">
+              <a:solidFill>
+                <a:schemeClr val="bg1"/>
+              </a:solidFill>
+            </a:endParaRPr>
+          </a:p>
+          <a:p>
+            <a:endParaRPr lang="en-US" dirty="0">
+              <a:solidFill>
+                <a:schemeClr val="bg1"/>
+              </a:solidFill>
+            </a:endParaRPr>
+          </a:p>
+          <a:p>
+            <a:r>
+              <a:rPr lang="en-US" dirty="0">
+                <a:solidFill>
+                  <a:schemeClr val="bg1"/>
+                </a:solidFill>
+              </a:rPr>
+              <a:t>Auf der </a:t>
+            </a:r>
+            <a:r>
+              <a:rPr lang="en-US" dirty="0" err="1">
+                <a:solidFill>
+                  <a:schemeClr val="bg1"/>
+                </a:solidFill>
+              </a:rPr>
+              <a:t>anderen</a:t>
+            </a:r>
+            <a:r>
+              <a:rPr lang="en-US" dirty="0">
+                <a:solidFill>
+                  <a:schemeClr val="bg1"/>
+                </a:solidFill>
+              </a:rPr>
+              <a:t> </a:t>
+            </a:r>
+            <a:r>
+              <a:rPr lang="en-US" dirty="0" err="1">
+                <a:solidFill>
+                  <a:schemeClr val="bg1"/>
+                </a:solidFill>
+              </a:rPr>
+              <a:t>Seite</a:t>
+            </a:r>
+            <a:r>
+              <a:rPr lang="en-US" dirty="0">
+                <a:solidFill>
+                  <a:schemeClr val="bg1"/>
+                </a:solidFill>
+              </a:rPr>
+              <a:t> </a:t>
+            </a:r>
+            <a:r>
+              <a:rPr lang="en-US" dirty="0" err="1">
+                <a:solidFill>
+                  <a:schemeClr val="bg1"/>
+                </a:solidFill>
+              </a:rPr>
+              <a:t>besitzt</a:t>
+            </a:r>
+            <a:r>
+              <a:rPr lang="en-US" dirty="0">
+                <a:solidFill>
+                  <a:schemeClr val="bg1"/>
+                </a:solidFill>
+              </a:rPr>
+              <a:t> </a:t>
+            </a:r>
+            <a:r>
+              <a:rPr lang="en-US" dirty="0" err="1">
+                <a:solidFill>
+                  <a:schemeClr val="bg1"/>
+                </a:solidFill>
+              </a:rPr>
+              <a:t>jedes</a:t>
+            </a:r>
+            <a:r>
+              <a:rPr lang="en-US" dirty="0">
+                <a:solidFill>
+                  <a:schemeClr val="bg1"/>
+                </a:solidFill>
+              </a:rPr>
+              <a:t> </a:t>
+            </a:r>
+            <a:r>
+              <a:rPr lang="en-US" dirty="0" err="1">
+                <a:solidFill>
+                  <a:schemeClr val="bg1"/>
+                </a:solidFill>
+              </a:rPr>
+              <a:t>Ereignis</a:t>
+            </a:r>
+            <a:r>
+              <a:rPr lang="en-US" dirty="0">
+                <a:solidFill>
+                  <a:schemeClr val="bg1"/>
+                </a:solidFill>
+              </a:rPr>
+              <a:t> </a:t>
+            </a:r>
+            <a:r>
+              <a:rPr lang="en-US" dirty="0" err="1">
+                <a:solidFill>
+                  <a:schemeClr val="bg1"/>
+                </a:solidFill>
+              </a:rPr>
+              <a:t>eine</a:t>
+            </a:r>
+            <a:r>
+              <a:rPr lang="en-US" dirty="0">
+                <a:solidFill>
+                  <a:schemeClr val="bg1"/>
+                </a:solidFill>
+              </a:rPr>
+              <a:t> </a:t>
+            </a:r>
+            <a:r>
+              <a:rPr lang="en-US" dirty="0" err="1">
+                <a:solidFill>
+                  <a:schemeClr val="bg1"/>
+                </a:solidFill>
+              </a:rPr>
+              <a:t>eigene</a:t>
+            </a:r>
+            <a:r>
+              <a:rPr lang="en-US" dirty="0">
+                <a:solidFill>
+                  <a:schemeClr val="bg1"/>
+                </a:solidFill>
+              </a:rPr>
+              <a:t> </a:t>
+            </a:r>
+            <a:r>
+              <a:rPr lang="en-US" dirty="0" err="1">
+                <a:solidFill>
+                  <a:schemeClr val="bg1"/>
+                </a:solidFill>
+              </a:rPr>
+              <a:t>Vergangenheit</a:t>
+            </a:r>
+            <a:r>
+              <a:rPr lang="en-US" dirty="0">
+                <a:solidFill>
+                  <a:schemeClr val="bg1"/>
+                </a:solidFill>
+              </a:rPr>
+              <a:t>, in der </a:t>
+            </a:r>
+            <a:r>
+              <a:rPr lang="en-US" dirty="0" err="1">
+                <a:solidFill>
+                  <a:schemeClr val="bg1"/>
+                </a:solidFill>
+              </a:rPr>
+              <a:t>Ereignisse</a:t>
+            </a:r>
+            <a:r>
+              <a:rPr lang="en-US" dirty="0">
+                <a:solidFill>
+                  <a:schemeClr val="bg1"/>
+                </a:solidFill>
+              </a:rPr>
+              <a:t> </a:t>
+            </a:r>
+            <a:r>
+              <a:rPr lang="en-US" dirty="0" err="1">
+                <a:solidFill>
+                  <a:schemeClr val="bg1"/>
+                </a:solidFill>
+              </a:rPr>
+              <a:t>Einfluss</a:t>
+            </a:r>
+            <a:r>
+              <a:rPr lang="en-US" dirty="0">
+                <a:solidFill>
+                  <a:schemeClr val="bg1"/>
+                </a:solidFill>
+              </a:rPr>
+              <a:t> </a:t>
+            </a:r>
+            <a:r>
+              <a:rPr lang="en-US" dirty="0" err="1">
+                <a:solidFill>
+                  <a:schemeClr val="bg1"/>
+                </a:solidFill>
+              </a:rPr>
+              <a:t>genommen</a:t>
+            </a:r>
+            <a:r>
+              <a:rPr lang="en-US" dirty="0">
+                <a:solidFill>
+                  <a:schemeClr val="bg1"/>
+                </a:solidFill>
+              </a:rPr>
+              <a:t> </a:t>
+            </a:r>
+            <a:r>
+              <a:rPr lang="en-US" dirty="0" err="1">
+                <a:solidFill>
+                  <a:schemeClr val="bg1"/>
+                </a:solidFill>
+              </a:rPr>
+              <a:t>haben</a:t>
+            </a:r>
+            <a:r>
+              <a:rPr lang="en-US" dirty="0">
+                <a:solidFill>
+                  <a:schemeClr val="bg1"/>
+                </a:solidFill>
+              </a:rPr>
+              <a:t> </a:t>
+            </a:r>
+            <a:r>
+              <a:rPr lang="en-US" dirty="0" err="1">
+                <a:solidFill>
+                  <a:schemeClr val="bg1"/>
+                </a:solidFill>
+              </a:rPr>
+              <a:t>können</a:t>
+            </a:r>
+            <a:r>
+              <a:rPr lang="en-US" dirty="0">
+                <a:solidFill>
+                  <a:schemeClr val="bg1"/>
+                </a:solidFill>
+              </a:rPr>
+              <a:t>.</a:t>
+            </a:r>
+          </a:p>
+          <a:p>
+            <a:endParaRPr lang="en-US" dirty="0">
+              <a:solidFill>
+                <a:schemeClr val="bg1"/>
+              </a:solidFill>
+            </a:endParaRPr>
+          </a:p>
+          <a:p>
+            <a:r>
+              <a:rPr lang="en-US" dirty="0">
+                <a:solidFill>
+                  <a:schemeClr val="bg1"/>
+                </a:solidFill>
+              </a:rPr>
+              <a:t>Die Zukunft, die </a:t>
+            </a:r>
+            <a:r>
+              <a:rPr lang="en-US" dirty="0" err="1">
+                <a:solidFill>
+                  <a:schemeClr val="bg1"/>
+                </a:solidFill>
+              </a:rPr>
+              <a:t>zwei</a:t>
+            </a:r>
+            <a:r>
+              <a:rPr lang="en-US" dirty="0">
+                <a:solidFill>
+                  <a:schemeClr val="bg1"/>
+                </a:solidFill>
+              </a:rPr>
+              <a:t> </a:t>
+            </a:r>
+            <a:r>
+              <a:rPr lang="en-US" dirty="0" err="1">
+                <a:solidFill>
+                  <a:schemeClr val="bg1"/>
+                </a:solidFill>
+              </a:rPr>
+              <a:t>Ereignisse</a:t>
+            </a:r>
+            <a:r>
+              <a:rPr lang="en-US" dirty="0">
+                <a:solidFill>
+                  <a:schemeClr val="bg1"/>
+                </a:solidFill>
+              </a:rPr>
+              <a:t> </a:t>
+            </a:r>
+            <a:r>
+              <a:rPr lang="en-US" dirty="0" err="1">
+                <a:solidFill>
+                  <a:schemeClr val="bg1"/>
+                </a:solidFill>
+              </a:rPr>
+              <a:t>teilen</a:t>
+            </a:r>
+            <a:r>
+              <a:rPr lang="en-US" dirty="0">
+                <a:solidFill>
+                  <a:schemeClr val="bg1"/>
+                </a:solidFill>
+              </a:rPr>
+              <a:t>, </a:t>
+            </a:r>
+            <a:r>
+              <a:rPr lang="en-US" dirty="0" err="1">
+                <a:solidFill>
+                  <a:schemeClr val="bg1"/>
+                </a:solidFill>
+              </a:rPr>
+              <a:t>nennen</a:t>
+            </a:r>
+            <a:r>
+              <a:rPr lang="en-US" dirty="0">
+                <a:solidFill>
+                  <a:schemeClr val="bg1"/>
+                </a:solidFill>
+              </a:rPr>
+              <a:t> </a:t>
+            </a:r>
+            <a:r>
+              <a:rPr lang="en-US" dirty="0" err="1">
+                <a:solidFill>
+                  <a:schemeClr val="bg1"/>
+                </a:solidFill>
+              </a:rPr>
+              <a:t>wir</a:t>
+            </a:r>
+            <a:r>
+              <a:rPr lang="en-US" dirty="0">
+                <a:solidFill>
+                  <a:schemeClr val="bg1"/>
+                </a:solidFill>
+              </a:rPr>
+              <a:t> die </a:t>
+            </a:r>
+            <a:r>
+              <a:rPr lang="en-US" dirty="0" err="1">
+                <a:solidFill>
+                  <a:schemeClr val="bg1"/>
+                </a:solidFill>
+              </a:rPr>
+              <a:t>gemeinsame</a:t>
+            </a:r>
+            <a:r>
+              <a:rPr lang="en-US" dirty="0">
+                <a:solidFill>
+                  <a:schemeClr val="bg1"/>
+                </a:solidFill>
+              </a:rPr>
+              <a:t> Zukunft </a:t>
+            </a:r>
+            <a:r>
+              <a:rPr lang="en-US" dirty="0" err="1">
+                <a:solidFill>
+                  <a:schemeClr val="bg1"/>
+                </a:solidFill>
+              </a:rPr>
+              <a:t>dieser</a:t>
+            </a:r>
+            <a:r>
+              <a:rPr lang="en-US" dirty="0">
+                <a:solidFill>
+                  <a:schemeClr val="bg1"/>
+                </a:solidFill>
+              </a:rPr>
+              <a:t> </a:t>
+            </a:r>
+            <a:r>
+              <a:rPr lang="en-US" dirty="0" err="1">
+                <a:solidFill>
+                  <a:schemeClr val="bg1"/>
+                </a:solidFill>
+              </a:rPr>
+              <a:t>Ereignisse</a:t>
+            </a:r>
+            <a:endParaRPr lang="en-US" dirty="0">
+              <a:solidFill>
+                <a:schemeClr val="bg1"/>
+              </a:solidFill>
+            </a:endParaRPr>
+          </a:p>
+          <a:p>
+            <a:endParaRPr lang="en-US" dirty="0">
+              <a:solidFill>
+                <a:schemeClr val="bg1"/>
+              </a:solidFill>
+            </a:endParaRPr>
+          </a:p>
+          <a:p>
+            <a:r>
+              <a:rPr lang="en-US" dirty="0">
+                <a:solidFill>
+                  <a:schemeClr val="bg1"/>
+                </a:solidFill>
+              </a:rPr>
+              <a:t>Die </a:t>
+            </a:r>
+            <a:r>
+              <a:rPr lang="en-US" dirty="0" err="1">
+                <a:solidFill>
+                  <a:schemeClr val="bg1"/>
+                </a:solidFill>
+              </a:rPr>
+              <a:t>gemeinsame</a:t>
+            </a:r>
+            <a:r>
+              <a:rPr lang="en-US" dirty="0">
+                <a:solidFill>
+                  <a:schemeClr val="bg1"/>
+                </a:solidFill>
+              </a:rPr>
+              <a:t> </a:t>
+            </a:r>
+            <a:r>
+              <a:rPr lang="en-US" dirty="0" err="1">
+                <a:solidFill>
+                  <a:schemeClr val="bg1"/>
+                </a:solidFill>
+              </a:rPr>
+              <a:t>Vergangenheit</a:t>
+            </a:r>
+            <a:r>
+              <a:rPr lang="en-US" dirty="0">
+                <a:solidFill>
+                  <a:schemeClr val="bg1"/>
+                </a:solidFill>
+              </a:rPr>
+              <a:t> </a:t>
+            </a:r>
+            <a:r>
+              <a:rPr lang="en-US" dirty="0" err="1">
+                <a:solidFill>
+                  <a:schemeClr val="bg1"/>
+                </a:solidFill>
+              </a:rPr>
+              <a:t>ist</a:t>
+            </a:r>
+            <a:r>
+              <a:rPr lang="en-US" dirty="0">
+                <a:solidFill>
+                  <a:schemeClr val="bg1"/>
+                </a:solidFill>
+              </a:rPr>
+              <a:t> die </a:t>
+            </a:r>
+            <a:r>
+              <a:rPr lang="en-US" dirty="0" err="1">
+                <a:solidFill>
+                  <a:schemeClr val="bg1"/>
+                </a:solidFill>
+              </a:rPr>
+              <a:t>Vergangenheit</a:t>
+            </a:r>
+            <a:r>
+              <a:rPr lang="en-US" dirty="0">
+                <a:solidFill>
+                  <a:schemeClr val="bg1"/>
+                </a:solidFill>
+              </a:rPr>
+              <a:t>, die </a:t>
+            </a:r>
+            <a:r>
+              <a:rPr lang="en-US" dirty="0" err="1">
+                <a:solidFill>
+                  <a:schemeClr val="bg1"/>
+                </a:solidFill>
+              </a:rPr>
+              <a:t>beide</a:t>
+            </a:r>
+            <a:r>
+              <a:rPr lang="en-US" dirty="0">
+                <a:solidFill>
+                  <a:schemeClr val="bg1"/>
+                </a:solidFill>
+              </a:rPr>
+              <a:t> </a:t>
+            </a:r>
+            <a:r>
+              <a:rPr lang="en-US" dirty="0" err="1">
+                <a:solidFill>
+                  <a:schemeClr val="bg1"/>
+                </a:solidFill>
+              </a:rPr>
+              <a:t>Ereignisse</a:t>
+            </a:r>
+            <a:r>
+              <a:rPr lang="en-US" dirty="0">
+                <a:solidFill>
+                  <a:schemeClr val="bg1"/>
+                </a:solidFill>
+              </a:rPr>
+              <a:t> </a:t>
+            </a:r>
+            <a:r>
+              <a:rPr lang="en-US" dirty="0" err="1">
+                <a:solidFill>
+                  <a:schemeClr val="bg1"/>
+                </a:solidFill>
+              </a:rPr>
+              <a:t>teilen</a:t>
+            </a:r>
+            <a:r>
+              <a:rPr lang="en-US" dirty="0">
+                <a:solidFill>
+                  <a:schemeClr val="bg1"/>
+                </a:solidFill>
+              </a:rPr>
+              <a:t>.</a:t>
+            </a:r>
+          </a:p>
+        </p:txBody>
+      </p:sp>
+    </p:spTree>
+    <p:extLst>
+      <p:ext uri="{BB962C8B-B14F-4D97-AF65-F5344CB8AC3E}">
+        <p14:creationId xmlns:p14="http://schemas.microsoft.com/office/powerpoint/2010/main" val="3862503025"/>
+      </p:ext>
+    </p:extLst>
+  </p:cSld>
+  <p:clrMapOvr>
+    <a:masterClrMapping/>
+  </p:clrMapOvr>
+</p:sld>
+</file>
+
 <file path=ppt/slides/slide2.xml><?xml version="1.0" encoding="utf-8"?>
 <p:sld xmlns:a="http://schemas.openxmlformats.org/drawingml/2006/main" xmlns:r="http://schemas.openxmlformats.org/officeDocument/2006/relationships" xmlns:p="http://schemas.openxmlformats.org/presentationml/2006/main">
   <p:cSld>
@@ -10972,7 +12803,7 @@
           <a:p>
             <a:fld id="{19A37E33-DCA0-4C7F-A116-3D7ECA99B758}" type="datetime2">
               <a:rPr lang="en-CA" smtClean="0"/>
-              <a:t>Friday, March 21, 2025</a:t>
+              <a:t>Monday, March 24, 2025</a:t>
             </a:fld>
             <a:endParaRPr lang="de-DE" dirty="0"/>
           </a:p>
@@ -11038,6 +12869,5208 @@
     <p:extLst>
       <p:ext uri="{BB962C8B-B14F-4D97-AF65-F5344CB8AC3E}">
         <p14:creationId xmlns:p14="http://schemas.microsoft.com/office/powerpoint/2010/main" val="986971376"/>
+      </p:ext>
+    </p:extLst>
+  </p:cSld>
+  <p:clrMapOvr>
+    <a:masterClrMapping/>
+  </p:clrMapOvr>
+</p:sld>
+</file>
+
+<file path=ppt/slides/slide20.xml><?xml version="1.0" encoding="utf-8"?>
+<p:sld xmlns:a="http://schemas.openxmlformats.org/drawingml/2006/main" xmlns:r="http://schemas.openxmlformats.org/officeDocument/2006/relationships" xmlns:p="http://schemas.openxmlformats.org/presentationml/2006/main">
+  <p:cSld>
+    <p:spTree>
+      <p:nvGrpSpPr>
+        <p:cNvPr id="1" name="">
+          <a:extLst>
+            <a:ext uri="{FF2B5EF4-FFF2-40B4-BE49-F238E27FC236}">
+              <a16:creationId xmlns:a16="http://schemas.microsoft.com/office/drawing/2014/main" id="{6C8F4C41-DB38-E33A-FD99-22A0D574FA4B}"/>
+            </a:ext>
+          </a:extLst>
+        </p:cNvPr>
+        <p:cNvGrpSpPr/>
+        <p:nvPr/>
+      </p:nvGrpSpPr>
+      <p:grpSpPr>
+        <a:xfrm>
+          <a:off x="0" y="0"/>
+          <a:ext cx="0" cy="0"/>
+          <a:chOff x="0" y="0"/>
+          <a:chExt cx="0" cy="0"/>
+        </a:xfrm>
+      </p:grpSpPr>
+      <p:pic>
+        <p:nvPicPr>
+          <p:cNvPr id="4" name="Content Placeholder 3">
+            <a:extLst>
+              <a:ext uri="{FF2B5EF4-FFF2-40B4-BE49-F238E27FC236}">
+                <a16:creationId xmlns:a16="http://schemas.microsoft.com/office/drawing/2014/main" id="{6A5ECB67-6B0C-F152-E829-33CCBDAE09AE}"/>
+              </a:ext>
+            </a:extLst>
+          </p:cNvPr>
+          <p:cNvPicPr>
+            <a:picLocks noGrp="1" noChangeAspect="1"/>
+          </p:cNvPicPr>
+          <p:nvPr>
+            <p:ph idx="1"/>
+          </p:nvPr>
+        </p:nvPicPr>
+        <p:blipFill>
+          <a:blip r:link="rId2"/>
+          <a:srcRect/>
+          <a:stretch>
+            <a:fillRect/>
+          </a:stretch>
+        </p:blipFill>
+        <p:spPr>
+          <a:xfrm>
+            <a:off x="439948" y="-422692"/>
+            <a:ext cx="7556740" cy="7556740"/>
+          </a:xfrm>
+        </p:spPr>
+      </p:pic>
+      <mc:AlternateContent xmlns:mc="http://schemas.openxmlformats.org/markup-compatibility/2006">
+        <mc:Choice xmlns:a14="http://schemas.microsoft.com/office/drawing/2010/main" Requires="a14">
+          <p:sp>
+            <p:nvSpPr>
+              <p:cNvPr id="2" name="TextBox 1">
+                <a:extLst>
+                  <a:ext uri="{FF2B5EF4-FFF2-40B4-BE49-F238E27FC236}">
+                    <a16:creationId xmlns:a16="http://schemas.microsoft.com/office/drawing/2014/main" id="{D423DCBD-CB22-BD0A-D8FB-8610F95154E4}"/>
+                  </a:ext>
+                </a:extLst>
+              </p:cNvPr>
+              <p:cNvSpPr txBox="1"/>
+              <p:nvPr/>
+            </p:nvSpPr>
+            <p:spPr>
+              <a:xfrm>
+                <a:off x="8547652" y="153348"/>
+                <a:ext cx="3475855" cy="923330"/>
+              </a:xfrm>
+              <a:prstGeom prst="rect">
+                <a:avLst/>
+              </a:prstGeom>
+              <a:noFill/>
+            </p:spPr>
+            <p:txBody>
+              <a:bodyPr wrap="square" rtlCol="0">
+                <a:spAutoFit/>
+              </a:bodyPr>
+              <a:lstStyle/>
+              <a:p>
+                <a:r>
+                  <a:rPr lang="en-US" dirty="0">
+                    <a:solidFill>
+                      <a:schemeClr val="bg1"/>
+                    </a:solidFill>
+                  </a:rPr>
+                  <a:t>Wir </a:t>
+                </a:r>
+                <a:r>
+                  <a:rPr lang="en-US" dirty="0" err="1">
+                    <a:solidFill>
+                      <a:schemeClr val="bg1"/>
+                    </a:solidFill>
+                  </a:rPr>
+                  <a:t>betrachten</a:t>
+                </a:r>
+                <a:r>
+                  <a:rPr lang="en-US" dirty="0">
+                    <a:solidFill>
+                      <a:schemeClr val="bg1"/>
+                    </a:solidFill>
+                  </a:rPr>
+                  <a:t> </a:t>
+                </a:r>
+                <a:r>
+                  <a:rPr lang="en-US" dirty="0" err="1">
+                    <a:solidFill>
+                      <a:schemeClr val="bg1"/>
+                    </a:solidFill>
+                  </a:rPr>
+                  <a:t>jetzt</a:t>
+                </a:r>
+                <a:r>
+                  <a:rPr lang="en-US" dirty="0">
+                    <a:solidFill>
+                      <a:schemeClr val="bg1"/>
+                    </a:solidFill>
+                  </a:rPr>
+                  <a:t> </a:t>
+                </a:r>
+                <a:r>
+                  <a:rPr lang="en-US" dirty="0" err="1">
+                    <a:solidFill>
+                      <a:schemeClr val="bg1"/>
+                    </a:solidFill>
+                  </a:rPr>
+                  <a:t>ein</a:t>
+                </a:r>
+                <a:r>
+                  <a:rPr lang="en-US" dirty="0">
+                    <a:solidFill>
+                      <a:schemeClr val="bg1"/>
+                    </a:solidFill>
+                  </a:rPr>
+                  <a:t> </a:t>
+                </a:r>
+                <a:r>
+                  <a:rPr lang="en-US" dirty="0" err="1">
+                    <a:solidFill>
+                      <a:schemeClr val="bg1"/>
+                    </a:solidFill>
+                  </a:rPr>
+                  <a:t>Bezugssystem</a:t>
+                </a:r>
+                <a:r>
+                  <a:rPr lang="en-US" dirty="0">
+                    <a:solidFill>
+                      <a:schemeClr val="bg1"/>
+                    </a:solidFill>
+                  </a:rPr>
+                  <a:t>, </a:t>
+                </a:r>
+                <a:r>
+                  <a:rPr lang="en-US" dirty="0" err="1">
+                    <a:solidFill>
+                      <a:schemeClr val="bg1"/>
+                    </a:solidFill>
+                  </a:rPr>
+                  <a:t>dass</a:t>
+                </a:r>
+                <a:r>
+                  <a:rPr lang="en-US" dirty="0">
+                    <a:solidFill>
+                      <a:schemeClr val="bg1"/>
+                    </a:solidFill>
+                  </a:rPr>
+                  <a:t> </a:t>
+                </a:r>
+                <a:r>
+                  <a:rPr lang="en-US" dirty="0" err="1">
+                    <a:solidFill>
+                      <a:schemeClr val="bg1"/>
+                    </a:solidFill>
+                  </a:rPr>
+                  <a:t>sich</a:t>
+                </a:r>
+                <a:r>
+                  <a:rPr lang="en-US" dirty="0">
+                    <a:solidFill>
+                      <a:schemeClr val="bg1"/>
+                    </a:solidFill>
+                  </a:rPr>
+                  <a:t> </a:t>
+                </a:r>
+                <a:r>
+                  <a:rPr lang="en-US" dirty="0" err="1">
+                    <a:solidFill>
+                      <a:schemeClr val="bg1"/>
+                    </a:solidFill>
+                  </a:rPr>
+                  <a:t>mit</a:t>
+                </a:r>
+                <a:r>
+                  <a:rPr lang="en-US" dirty="0">
+                    <a:solidFill>
+                      <a:schemeClr val="bg1"/>
+                    </a:solidFill>
+                  </a:rPr>
+                  <a:t> </a:t>
+                </a:r>
+              </a:p>
+              <a:p>
+                <a:pPr/>
+                <a14:m>
+                  <m:oMath xmlns:m="http://schemas.openxmlformats.org/officeDocument/2006/math">
+                    <m:r>
+                      <a:rPr lang="en-US" b="0" i="1" smtClean="0">
+                        <a:solidFill>
+                          <a:schemeClr val="bg1"/>
+                        </a:solidFill>
+                        <a:latin typeface="Cambria Math" panose="02040503050406030204" pitchFamily="18" charset="0"/>
+                      </a:rPr>
+                      <m:t>𝛽</m:t>
+                    </m:r>
+                    <m:r>
+                      <a:rPr lang="en-US" b="0" i="1" smtClean="0">
+                        <a:solidFill>
+                          <a:schemeClr val="bg1"/>
+                        </a:solidFill>
+                        <a:latin typeface="Cambria Math" panose="02040503050406030204" pitchFamily="18" charset="0"/>
+                      </a:rPr>
+                      <m:t>=0.6</m:t>
+                    </m:r>
+                  </m:oMath>
+                </a14:m>
+                <a:r>
+                  <a:rPr lang="en-US" dirty="0">
+                    <a:solidFill>
+                      <a:schemeClr val="bg1"/>
+                    </a:solidFill>
+                  </a:rPr>
+                  <a:t> </a:t>
+                </a:r>
+                <a:r>
+                  <a:rPr lang="en-US" dirty="0" err="1">
+                    <a:solidFill>
+                      <a:schemeClr val="bg1"/>
+                    </a:solidFill>
+                  </a:rPr>
+                  <a:t>fortbewegt</a:t>
+                </a:r>
+                <a:r>
+                  <a:rPr lang="en-US" dirty="0">
+                    <a:solidFill>
+                      <a:schemeClr val="bg1"/>
+                    </a:solidFill>
+                  </a:rPr>
+                  <a:t>.</a:t>
+                </a:r>
+              </a:p>
+            </p:txBody>
+          </p:sp>
+        </mc:Choice>
+        <mc:Fallback>
+          <p:sp>
+            <p:nvSpPr>
+              <p:cNvPr id="2" name="TextBox 1">
+                <a:extLst>
+                  <a:ext uri="{FF2B5EF4-FFF2-40B4-BE49-F238E27FC236}">
+                    <a16:creationId xmlns:a16="http://schemas.microsoft.com/office/drawing/2014/main" id="{D423DCBD-CB22-BD0A-D8FB-8610F95154E4}"/>
+                  </a:ext>
+                </a:extLst>
+              </p:cNvPr>
+              <p:cNvSpPr txBox="1">
+                <a:spLocks noRot="1" noChangeAspect="1" noMove="1" noResize="1" noEditPoints="1" noAdjustHandles="1" noChangeArrowheads="1" noChangeShapeType="1" noTextEdit="1"/>
+              </p:cNvSpPr>
+              <p:nvPr/>
+            </p:nvSpPr>
+            <p:spPr>
+              <a:xfrm>
+                <a:off x="8547652" y="153348"/>
+                <a:ext cx="3475855" cy="923330"/>
+              </a:xfrm>
+              <a:prstGeom prst="rect">
+                <a:avLst/>
+              </a:prstGeom>
+              <a:blipFill>
+                <a:blip r:embed="rId3"/>
+                <a:stretch>
+                  <a:fillRect l="-1404" t="-3289" b="-9211"/>
+                </a:stretch>
+              </a:blipFill>
+            </p:spPr>
+            <p:txBody>
+              <a:bodyPr/>
+              <a:lstStyle/>
+              <a:p>
+                <a:r>
+                  <a:rPr lang="en-CH">
+                    <a:noFill/>
+                  </a:rPr>
+                  <a:t> </a:t>
+                </a:r>
+              </a:p>
+            </p:txBody>
+          </p:sp>
+        </mc:Fallback>
+      </mc:AlternateContent>
+    </p:spTree>
+    <p:extLst>
+      <p:ext uri="{BB962C8B-B14F-4D97-AF65-F5344CB8AC3E}">
+        <p14:creationId xmlns:p14="http://schemas.microsoft.com/office/powerpoint/2010/main" val="1811193200"/>
+      </p:ext>
+    </p:extLst>
+  </p:cSld>
+  <p:clrMapOvr>
+    <a:masterClrMapping/>
+  </p:clrMapOvr>
+</p:sld>
+</file>
+
+<file path=ppt/slides/slide21.xml><?xml version="1.0" encoding="utf-8"?>
+<p:sld xmlns:a="http://schemas.openxmlformats.org/drawingml/2006/main" xmlns:r="http://schemas.openxmlformats.org/officeDocument/2006/relationships" xmlns:p="http://schemas.openxmlformats.org/presentationml/2006/main">
+  <p:cSld>
+    <p:spTree>
+      <p:nvGrpSpPr>
+        <p:cNvPr id="1" name="">
+          <a:extLst>
+            <a:ext uri="{FF2B5EF4-FFF2-40B4-BE49-F238E27FC236}">
+              <a16:creationId xmlns:a16="http://schemas.microsoft.com/office/drawing/2014/main" id="{41FBDC2E-B3C9-AD1E-9EFF-3E0A486AFE8C}"/>
+            </a:ext>
+          </a:extLst>
+        </p:cNvPr>
+        <p:cNvGrpSpPr/>
+        <p:nvPr/>
+      </p:nvGrpSpPr>
+      <p:grpSpPr>
+        <a:xfrm>
+          <a:off x="0" y="0"/>
+          <a:ext cx="0" cy="0"/>
+          <a:chOff x="0" y="0"/>
+          <a:chExt cx="0" cy="0"/>
+        </a:xfrm>
+      </p:grpSpPr>
+      <p:pic>
+        <p:nvPicPr>
+          <p:cNvPr id="4" name="Content Placeholder 3">
+            <a:extLst>
+              <a:ext uri="{FF2B5EF4-FFF2-40B4-BE49-F238E27FC236}">
+                <a16:creationId xmlns:a16="http://schemas.microsoft.com/office/drawing/2014/main" id="{686E6E7D-9B48-0310-F76D-6D5CEFC3725C}"/>
+              </a:ext>
+            </a:extLst>
+          </p:cNvPr>
+          <p:cNvPicPr>
+            <a:picLocks noGrp="1" noChangeAspect="1"/>
+          </p:cNvPicPr>
+          <p:nvPr>
+            <p:ph idx="1"/>
+          </p:nvPr>
+        </p:nvPicPr>
+        <p:blipFill>
+          <a:blip r:link="rId2"/>
+          <a:srcRect/>
+          <a:stretch>
+            <a:fillRect/>
+          </a:stretch>
+        </p:blipFill>
+        <p:spPr>
+          <a:xfrm>
+            <a:off x="439948" y="-422692"/>
+            <a:ext cx="7556740" cy="7556740"/>
+          </a:xfrm>
+        </p:spPr>
+      </p:pic>
+      <mc:AlternateContent xmlns:mc="http://schemas.openxmlformats.org/markup-compatibility/2006">
+        <mc:Choice xmlns:a14="http://schemas.microsoft.com/office/drawing/2010/main" Requires="a14">
+          <p:sp>
+            <p:nvSpPr>
+              <p:cNvPr id="2" name="TextBox 1">
+                <a:extLst>
+                  <a:ext uri="{FF2B5EF4-FFF2-40B4-BE49-F238E27FC236}">
+                    <a16:creationId xmlns:a16="http://schemas.microsoft.com/office/drawing/2014/main" id="{248810BD-090D-8411-E313-3646F6186F38}"/>
+                  </a:ext>
+                </a:extLst>
+              </p:cNvPr>
+              <p:cNvSpPr txBox="1"/>
+              <p:nvPr/>
+            </p:nvSpPr>
+            <p:spPr>
+              <a:xfrm>
+                <a:off x="8547652" y="153348"/>
+                <a:ext cx="3475855" cy="1754326"/>
+              </a:xfrm>
+              <a:prstGeom prst="rect">
+                <a:avLst/>
+              </a:prstGeom>
+              <a:noFill/>
+            </p:spPr>
+            <p:txBody>
+              <a:bodyPr wrap="square" rtlCol="0">
+                <a:spAutoFit/>
+              </a:bodyPr>
+              <a:lstStyle/>
+              <a:p>
+                <a:r>
+                  <a:rPr lang="en-US" dirty="0">
+                    <a:solidFill>
+                      <a:schemeClr val="bg1"/>
+                    </a:solidFill>
+                  </a:rPr>
+                  <a:t>Wir </a:t>
+                </a:r>
+                <a:r>
+                  <a:rPr lang="en-US" dirty="0" err="1">
+                    <a:solidFill>
+                      <a:schemeClr val="bg1"/>
+                    </a:solidFill>
+                  </a:rPr>
+                  <a:t>betrachten</a:t>
+                </a:r>
+                <a:r>
+                  <a:rPr lang="en-US" dirty="0">
+                    <a:solidFill>
+                      <a:schemeClr val="bg1"/>
+                    </a:solidFill>
+                  </a:rPr>
+                  <a:t> </a:t>
+                </a:r>
+                <a:r>
+                  <a:rPr lang="en-US" dirty="0" err="1">
+                    <a:solidFill>
+                      <a:schemeClr val="bg1"/>
+                    </a:solidFill>
+                  </a:rPr>
+                  <a:t>jetzt</a:t>
+                </a:r>
+                <a:r>
+                  <a:rPr lang="en-US" dirty="0">
+                    <a:solidFill>
+                      <a:schemeClr val="bg1"/>
+                    </a:solidFill>
+                  </a:rPr>
+                  <a:t> </a:t>
+                </a:r>
+                <a:r>
+                  <a:rPr lang="en-US" dirty="0" err="1">
+                    <a:solidFill>
+                      <a:schemeClr val="bg1"/>
+                    </a:solidFill>
+                  </a:rPr>
+                  <a:t>ein</a:t>
+                </a:r>
+                <a:r>
+                  <a:rPr lang="en-US" dirty="0">
+                    <a:solidFill>
+                      <a:schemeClr val="bg1"/>
+                    </a:solidFill>
+                  </a:rPr>
+                  <a:t> </a:t>
+                </a:r>
+                <a:r>
+                  <a:rPr lang="en-US" dirty="0" err="1">
+                    <a:solidFill>
+                      <a:schemeClr val="bg1"/>
+                    </a:solidFill>
+                  </a:rPr>
+                  <a:t>Bezugssystem</a:t>
+                </a:r>
+                <a:r>
+                  <a:rPr lang="en-US" dirty="0">
+                    <a:solidFill>
+                      <a:schemeClr val="bg1"/>
+                    </a:solidFill>
+                  </a:rPr>
+                  <a:t>, </a:t>
+                </a:r>
+                <a:r>
+                  <a:rPr lang="en-US" dirty="0" err="1">
+                    <a:solidFill>
+                      <a:schemeClr val="bg1"/>
+                    </a:solidFill>
+                  </a:rPr>
+                  <a:t>dass</a:t>
+                </a:r>
+                <a:r>
+                  <a:rPr lang="en-US" dirty="0">
+                    <a:solidFill>
+                      <a:schemeClr val="bg1"/>
+                    </a:solidFill>
+                  </a:rPr>
+                  <a:t> </a:t>
+                </a:r>
+                <a:r>
+                  <a:rPr lang="en-US" dirty="0" err="1">
+                    <a:solidFill>
+                      <a:schemeClr val="bg1"/>
+                    </a:solidFill>
+                  </a:rPr>
+                  <a:t>sich</a:t>
+                </a:r>
+                <a:r>
+                  <a:rPr lang="en-US" dirty="0">
+                    <a:solidFill>
+                      <a:schemeClr val="bg1"/>
+                    </a:solidFill>
+                  </a:rPr>
+                  <a:t> </a:t>
+                </a:r>
+                <a:r>
+                  <a:rPr lang="en-US" dirty="0" err="1">
+                    <a:solidFill>
+                      <a:schemeClr val="bg1"/>
+                    </a:solidFill>
+                  </a:rPr>
+                  <a:t>mit</a:t>
+                </a:r>
+                <a:r>
+                  <a:rPr lang="en-US" dirty="0">
+                    <a:solidFill>
+                      <a:schemeClr val="bg1"/>
+                    </a:solidFill>
+                  </a:rPr>
+                  <a:t> </a:t>
+                </a:r>
+              </a:p>
+              <a:p>
+                <a14:m>
+                  <m:oMath xmlns:m="http://schemas.openxmlformats.org/officeDocument/2006/math">
+                    <m:r>
+                      <a:rPr lang="en-US" b="0" i="1" smtClean="0">
+                        <a:solidFill>
+                          <a:schemeClr val="bg1"/>
+                        </a:solidFill>
+                        <a:latin typeface="Cambria Math" panose="02040503050406030204" pitchFamily="18" charset="0"/>
+                      </a:rPr>
+                      <m:t>𝛽</m:t>
+                    </m:r>
+                    <m:r>
+                      <a:rPr lang="en-US" b="0" i="1" smtClean="0">
+                        <a:solidFill>
+                          <a:schemeClr val="bg1"/>
+                        </a:solidFill>
+                        <a:latin typeface="Cambria Math" panose="02040503050406030204" pitchFamily="18" charset="0"/>
+                      </a:rPr>
+                      <m:t>=0.6</m:t>
+                    </m:r>
+                  </m:oMath>
+                </a14:m>
+                <a:r>
+                  <a:rPr lang="en-US" dirty="0">
+                    <a:solidFill>
+                      <a:schemeClr val="bg1"/>
+                    </a:solidFill>
+                  </a:rPr>
+                  <a:t> </a:t>
+                </a:r>
+                <a:r>
+                  <a:rPr lang="en-US" dirty="0" err="1">
+                    <a:solidFill>
+                      <a:schemeClr val="bg1"/>
+                    </a:solidFill>
+                  </a:rPr>
+                  <a:t>fortbewegt</a:t>
+                </a:r>
+                <a:r>
+                  <a:rPr lang="en-US" dirty="0">
+                    <a:solidFill>
+                      <a:schemeClr val="bg1"/>
+                    </a:solidFill>
+                  </a:rPr>
+                  <a:t>.</a:t>
+                </a:r>
+              </a:p>
+              <a:p>
+                <a:endParaRPr lang="en-US" dirty="0">
+                  <a:solidFill>
+                    <a:schemeClr val="bg1"/>
+                  </a:solidFill>
+                </a:endParaRPr>
+              </a:p>
+              <a:p>
+                <a:r>
+                  <a:rPr lang="en-US" dirty="0">
+                    <a:solidFill>
+                      <a:schemeClr val="bg1"/>
+                    </a:solidFill>
+                  </a:rPr>
+                  <a:t>Zum </a:t>
+                </a:r>
+                <a:r>
+                  <a:rPr lang="en-US" dirty="0" err="1">
+                    <a:solidFill>
+                      <a:schemeClr val="bg1"/>
+                    </a:solidFill>
+                  </a:rPr>
+                  <a:t>Zeitpunkt</a:t>
+                </a:r>
+                <a:r>
+                  <a:rPr lang="en-US" dirty="0">
+                    <a:solidFill>
+                      <a:schemeClr val="bg1"/>
+                    </a:solidFill>
+                  </a:rPr>
+                  <a:t> </a:t>
+                </a:r>
+                <a14:m>
+                  <m:oMath xmlns:m="http://schemas.openxmlformats.org/officeDocument/2006/math">
+                    <m:r>
+                      <a:rPr lang="en-US" b="0" i="1" smtClean="0">
+                        <a:solidFill>
+                          <a:schemeClr val="bg1"/>
+                        </a:solidFill>
+                        <a:latin typeface="Cambria Math" panose="02040503050406030204" pitchFamily="18" charset="0"/>
+                      </a:rPr>
+                      <m:t>𝑡</m:t>
+                    </m:r>
+                    <m:r>
+                      <a:rPr lang="en-US" b="0" i="1" smtClean="0">
+                        <a:solidFill>
+                          <a:schemeClr val="bg1"/>
+                        </a:solidFill>
+                        <a:latin typeface="Cambria Math" panose="02040503050406030204" pitchFamily="18" charset="0"/>
+                      </a:rPr>
+                      <m:t>=0</m:t>
+                    </m:r>
+                  </m:oMath>
+                </a14:m>
+                <a:r>
+                  <a:rPr lang="en-US" dirty="0">
+                    <a:solidFill>
+                      <a:schemeClr val="bg1"/>
+                    </a:solidFill>
+                  </a:rPr>
+                  <a:t> </a:t>
+                </a:r>
+                <a:r>
+                  <a:rPr lang="en-US" dirty="0" err="1">
+                    <a:solidFill>
+                      <a:schemeClr val="bg1"/>
+                    </a:solidFill>
+                  </a:rPr>
+                  <a:t>befinden</a:t>
+                </a:r>
+                <a:r>
+                  <a:rPr lang="en-US" dirty="0">
+                    <a:solidFill>
+                      <a:schemeClr val="bg1"/>
+                    </a:solidFill>
+                  </a:rPr>
+                  <a:t> </a:t>
+                </a:r>
+                <a:r>
+                  <a:rPr lang="en-US" dirty="0" err="1">
+                    <a:solidFill>
+                      <a:schemeClr val="bg1"/>
+                    </a:solidFill>
+                  </a:rPr>
+                  <a:t>wir</a:t>
+                </a:r>
+                <a:r>
+                  <a:rPr lang="en-US" dirty="0">
+                    <a:solidFill>
+                      <a:schemeClr val="bg1"/>
+                    </a:solidFill>
+                  </a:rPr>
+                  <a:t> </a:t>
+                </a:r>
+                <a:r>
+                  <a:rPr lang="en-US" dirty="0" err="1">
+                    <a:solidFill>
+                      <a:schemeClr val="bg1"/>
+                    </a:solidFill>
+                  </a:rPr>
+                  <a:t>uns</a:t>
+                </a:r>
+                <a:r>
+                  <a:rPr lang="en-US" dirty="0">
+                    <a:solidFill>
+                      <a:schemeClr val="bg1"/>
+                    </a:solidFill>
+                  </a:rPr>
+                  <a:t> </a:t>
+                </a:r>
+                <a:r>
+                  <a:rPr lang="en-US" dirty="0" err="1">
+                    <a:solidFill>
+                      <a:schemeClr val="bg1"/>
+                    </a:solidFill>
+                  </a:rPr>
+                  <a:t>im</a:t>
+                </a:r>
+                <a:r>
+                  <a:rPr lang="en-US" dirty="0">
+                    <a:solidFill>
+                      <a:schemeClr val="bg1"/>
+                    </a:solidFill>
+                  </a:rPr>
+                  <a:t> Ursprung</a:t>
+                </a:r>
+              </a:p>
+            </p:txBody>
+          </p:sp>
+        </mc:Choice>
+        <mc:Fallback>
+          <p:sp>
+            <p:nvSpPr>
+              <p:cNvPr id="2" name="TextBox 1">
+                <a:extLst>
+                  <a:ext uri="{FF2B5EF4-FFF2-40B4-BE49-F238E27FC236}">
+                    <a16:creationId xmlns:a16="http://schemas.microsoft.com/office/drawing/2014/main" id="{248810BD-090D-8411-E313-3646F6186F38}"/>
+                  </a:ext>
+                </a:extLst>
+              </p:cNvPr>
+              <p:cNvSpPr txBox="1">
+                <a:spLocks noRot="1" noChangeAspect="1" noMove="1" noResize="1" noEditPoints="1" noAdjustHandles="1" noChangeArrowheads="1" noChangeShapeType="1" noTextEdit="1"/>
+              </p:cNvSpPr>
+              <p:nvPr/>
+            </p:nvSpPr>
+            <p:spPr>
+              <a:xfrm>
+                <a:off x="8547652" y="153348"/>
+                <a:ext cx="3475855" cy="1754326"/>
+              </a:xfrm>
+              <a:prstGeom prst="rect">
+                <a:avLst/>
+              </a:prstGeom>
+              <a:blipFill>
+                <a:blip r:embed="rId3"/>
+                <a:stretch>
+                  <a:fillRect l="-1404" t="-1736" b="-4514"/>
+                </a:stretch>
+              </a:blipFill>
+            </p:spPr>
+            <p:txBody>
+              <a:bodyPr/>
+              <a:lstStyle/>
+              <a:p>
+                <a:r>
+                  <a:rPr lang="en-CH">
+                    <a:noFill/>
+                  </a:rPr>
+                  <a:t> </a:t>
+                </a:r>
+              </a:p>
+            </p:txBody>
+          </p:sp>
+        </mc:Fallback>
+      </mc:AlternateContent>
+    </p:spTree>
+    <p:extLst>
+      <p:ext uri="{BB962C8B-B14F-4D97-AF65-F5344CB8AC3E}">
+        <p14:creationId xmlns:p14="http://schemas.microsoft.com/office/powerpoint/2010/main" val="4085095171"/>
+      </p:ext>
+    </p:extLst>
+  </p:cSld>
+  <p:clrMapOvr>
+    <a:masterClrMapping/>
+  </p:clrMapOvr>
+</p:sld>
+</file>
+
+<file path=ppt/slides/slide22.xml><?xml version="1.0" encoding="utf-8"?>
+<p:sld xmlns:a="http://schemas.openxmlformats.org/drawingml/2006/main" xmlns:r="http://schemas.openxmlformats.org/officeDocument/2006/relationships" xmlns:p="http://schemas.openxmlformats.org/presentationml/2006/main">
+  <p:cSld>
+    <p:spTree>
+      <p:nvGrpSpPr>
+        <p:cNvPr id="1" name="">
+          <a:extLst>
+            <a:ext uri="{FF2B5EF4-FFF2-40B4-BE49-F238E27FC236}">
+              <a16:creationId xmlns:a16="http://schemas.microsoft.com/office/drawing/2014/main" id="{2C44FF12-65D7-79E0-7B97-16950D60D001}"/>
+            </a:ext>
+          </a:extLst>
+        </p:cNvPr>
+        <p:cNvGrpSpPr/>
+        <p:nvPr/>
+      </p:nvGrpSpPr>
+      <p:grpSpPr>
+        <a:xfrm>
+          <a:off x="0" y="0"/>
+          <a:ext cx="0" cy="0"/>
+          <a:chOff x="0" y="0"/>
+          <a:chExt cx="0" cy="0"/>
+        </a:xfrm>
+      </p:grpSpPr>
+      <p:pic>
+        <p:nvPicPr>
+          <p:cNvPr id="4" name="Content Placeholder 3">
+            <a:extLst>
+              <a:ext uri="{FF2B5EF4-FFF2-40B4-BE49-F238E27FC236}">
+                <a16:creationId xmlns:a16="http://schemas.microsoft.com/office/drawing/2014/main" id="{00E5CEEE-1939-38A0-6749-BAF6A584260E}"/>
+              </a:ext>
+            </a:extLst>
+          </p:cNvPr>
+          <p:cNvPicPr>
+            <a:picLocks noGrp="1" noChangeAspect="1"/>
+          </p:cNvPicPr>
+          <p:nvPr>
+            <p:ph idx="1"/>
+          </p:nvPr>
+        </p:nvPicPr>
+        <p:blipFill>
+          <a:blip r:link="rId2"/>
+          <a:srcRect/>
+          <a:stretch>
+            <a:fillRect/>
+          </a:stretch>
+        </p:blipFill>
+        <p:spPr>
+          <a:xfrm>
+            <a:off x="439948" y="-422692"/>
+            <a:ext cx="7556740" cy="7556740"/>
+          </a:xfrm>
+        </p:spPr>
+      </p:pic>
+      <mc:AlternateContent xmlns:mc="http://schemas.openxmlformats.org/markup-compatibility/2006">
+        <mc:Choice xmlns:a14="http://schemas.microsoft.com/office/drawing/2010/main" Requires="a14">
+          <p:sp>
+            <p:nvSpPr>
+              <p:cNvPr id="2" name="TextBox 1">
+                <a:extLst>
+                  <a:ext uri="{FF2B5EF4-FFF2-40B4-BE49-F238E27FC236}">
+                    <a16:creationId xmlns:a16="http://schemas.microsoft.com/office/drawing/2014/main" id="{0C5FB40C-85C1-2B88-6C30-CE7324896ECE}"/>
+                  </a:ext>
+                </a:extLst>
+              </p:cNvPr>
+              <p:cNvSpPr txBox="1"/>
+              <p:nvPr/>
+            </p:nvSpPr>
+            <p:spPr>
+              <a:xfrm>
+                <a:off x="8547652" y="153348"/>
+                <a:ext cx="3475855" cy="2585323"/>
+              </a:xfrm>
+              <a:prstGeom prst="rect">
+                <a:avLst/>
+              </a:prstGeom>
+              <a:noFill/>
+            </p:spPr>
+            <p:txBody>
+              <a:bodyPr wrap="square" rtlCol="0">
+                <a:spAutoFit/>
+              </a:bodyPr>
+              <a:lstStyle/>
+              <a:p>
+                <a:r>
+                  <a:rPr lang="en-US" dirty="0">
+                    <a:solidFill>
+                      <a:schemeClr val="bg1"/>
+                    </a:solidFill>
+                  </a:rPr>
+                  <a:t>Wir </a:t>
+                </a:r>
+                <a:r>
+                  <a:rPr lang="en-US" dirty="0" err="1">
+                    <a:solidFill>
+                      <a:schemeClr val="bg1"/>
+                    </a:solidFill>
+                  </a:rPr>
+                  <a:t>betrachten</a:t>
+                </a:r>
+                <a:r>
+                  <a:rPr lang="en-US" dirty="0">
+                    <a:solidFill>
+                      <a:schemeClr val="bg1"/>
+                    </a:solidFill>
+                  </a:rPr>
+                  <a:t> </a:t>
+                </a:r>
+                <a:r>
+                  <a:rPr lang="en-US" dirty="0" err="1">
+                    <a:solidFill>
+                      <a:schemeClr val="bg1"/>
+                    </a:solidFill>
+                  </a:rPr>
+                  <a:t>jetzt</a:t>
+                </a:r>
+                <a:r>
+                  <a:rPr lang="en-US" dirty="0">
+                    <a:solidFill>
+                      <a:schemeClr val="bg1"/>
+                    </a:solidFill>
+                  </a:rPr>
+                  <a:t> </a:t>
+                </a:r>
+                <a:r>
+                  <a:rPr lang="en-US" dirty="0" err="1">
+                    <a:solidFill>
+                      <a:schemeClr val="bg1"/>
+                    </a:solidFill>
+                  </a:rPr>
+                  <a:t>ein</a:t>
+                </a:r>
+                <a:r>
+                  <a:rPr lang="en-US" dirty="0">
+                    <a:solidFill>
+                      <a:schemeClr val="bg1"/>
+                    </a:solidFill>
+                  </a:rPr>
+                  <a:t> </a:t>
+                </a:r>
+                <a:r>
+                  <a:rPr lang="en-US" dirty="0" err="1">
+                    <a:solidFill>
+                      <a:schemeClr val="bg1"/>
+                    </a:solidFill>
+                  </a:rPr>
+                  <a:t>Bezugssystem</a:t>
+                </a:r>
+                <a:r>
+                  <a:rPr lang="en-US" dirty="0">
+                    <a:solidFill>
+                      <a:schemeClr val="bg1"/>
+                    </a:solidFill>
+                  </a:rPr>
+                  <a:t>, </a:t>
+                </a:r>
+                <a:r>
+                  <a:rPr lang="en-US" dirty="0" err="1">
+                    <a:solidFill>
+                      <a:schemeClr val="bg1"/>
+                    </a:solidFill>
+                  </a:rPr>
+                  <a:t>dass</a:t>
+                </a:r>
+                <a:r>
+                  <a:rPr lang="en-US" dirty="0">
+                    <a:solidFill>
+                      <a:schemeClr val="bg1"/>
+                    </a:solidFill>
+                  </a:rPr>
+                  <a:t> </a:t>
+                </a:r>
+                <a:r>
+                  <a:rPr lang="en-US" dirty="0" err="1">
+                    <a:solidFill>
+                      <a:schemeClr val="bg1"/>
+                    </a:solidFill>
+                  </a:rPr>
+                  <a:t>sich</a:t>
+                </a:r>
+                <a:r>
+                  <a:rPr lang="en-US" dirty="0">
+                    <a:solidFill>
+                      <a:schemeClr val="bg1"/>
+                    </a:solidFill>
+                  </a:rPr>
+                  <a:t> </a:t>
+                </a:r>
+                <a:r>
+                  <a:rPr lang="en-US" dirty="0" err="1">
+                    <a:solidFill>
+                      <a:schemeClr val="bg1"/>
+                    </a:solidFill>
+                  </a:rPr>
+                  <a:t>mit</a:t>
+                </a:r>
+                <a:r>
+                  <a:rPr lang="en-US" dirty="0">
+                    <a:solidFill>
+                      <a:schemeClr val="bg1"/>
+                    </a:solidFill>
+                  </a:rPr>
+                  <a:t> </a:t>
+                </a:r>
+              </a:p>
+              <a:p>
+                <a14:m>
+                  <m:oMath xmlns:m="http://schemas.openxmlformats.org/officeDocument/2006/math">
+                    <m:r>
+                      <a:rPr lang="en-US" b="0" i="1" smtClean="0">
+                        <a:solidFill>
+                          <a:schemeClr val="bg1"/>
+                        </a:solidFill>
+                        <a:latin typeface="Cambria Math" panose="02040503050406030204" pitchFamily="18" charset="0"/>
+                      </a:rPr>
+                      <m:t>𝛽</m:t>
+                    </m:r>
+                    <m:r>
+                      <a:rPr lang="en-US" b="0" i="1" smtClean="0">
+                        <a:solidFill>
+                          <a:schemeClr val="bg1"/>
+                        </a:solidFill>
+                        <a:latin typeface="Cambria Math" panose="02040503050406030204" pitchFamily="18" charset="0"/>
+                      </a:rPr>
+                      <m:t>=0.6</m:t>
+                    </m:r>
+                  </m:oMath>
+                </a14:m>
+                <a:r>
+                  <a:rPr lang="en-US" dirty="0">
+                    <a:solidFill>
+                      <a:schemeClr val="bg1"/>
+                    </a:solidFill>
+                  </a:rPr>
+                  <a:t> </a:t>
+                </a:r>
+                <a:r>
+                  <a:rPr lang="en-US" dirty="0" err="1">
+                    <a:solidFill>
+                      <a:schemeClr val="bg1"/>
+                    </a:solidFill>
+                  </a:rPr>
+                  <a:t>fortbewegt</a:t>
+                </a:r>
+                <a:r>
+                  <a:rPr lang="en-US" dirty="0">
+                    <a:solidFill>
+                      <a:schemeClr val="bg1"/>
+                    </a:solidFill>
+                  </a:rPr>
+                  <a:t>.</a:t>
+                </a:r>
+              </a:p>
+              <a:p>
+                <a:endParaRPr lang="en-US" dirty="0">
+                  <a:solidFill>
+                    <a:schemeClr val="bg1"/>
+                  </a:solidFill>
+                </a:endParaRPr>
+              </a:p>
+              <a:p>
+                <a:r>
+                  <a:rPr lang="en-US" dirty="0">
+                    <a:solidFill>
+                      <a:schemeClr val="bg1"/>
+                    </a:solidFill>
+                  </a:rPr>
+                  <a:t>Zum </a:t>
+                </a:r>
+                <a:r>
+                  <a:rPr lang="en-US" dirty="0" err="1">
+                    <a:solidFill>
+                      <a:schemeClr val="bg1"/>
+                    </a:solidFill>
+                  </a:rPr>
+                  <a:t>Zeitpunkt</a:t>
+                </a:r>
+                <a:r>
+                  <a:rPr lang="en-US" dirty="0">
+                    <a:solidFill>
+                      <a:schemeClr val="bg1"/>
+                    </a:solidFill>
+                  </a:rPr>
+                  <a:t> </a:t>
+                </a:r>
+                <a14:m>
+                  <m:oMath xmlns:m="http://schemas.openxmlformats.org/officeDocument/2006/math">
+                    <m:r>
+                      <a:rPr lang="en-US" b="0" i="1" smtClean="0">
+                        <a:solidFill>
+                          <a:schemeClr val="bg1"/>
+                        </a:solidFill>
+                        <a:latin typeface="Cambria Math" panose="02040503050406030204" pitchFamily="18" charset="0"/>
+                      </a:rPr>
+                      <m:t>𝑡</m:t>
+                    </m:r>
+                    <m:r>
+                      <a:rPr lang="en-US" b="0" i="1" smtClean="0">
+                        <a:solidFill>
+                          <a:schemeClr val="bg1"/>
+                        </a:solidFill>
+                        <a:latin typeface="Cambria Math" panose="02040503050406030204" pitchFamily="18" charset="0"/>
+                      </a:rPr>
+                      <m:t>=0</m:t>
+                    </m:r>
+                  </m:oMath>
+                </a14:m>
+                <a:r>
+                  <a:rPr lang="en-US" dirty="0">
+                    <a:solidFill>
+                      <a:schemeClr val="bg1"/>
+                    </a:solidFill>
+                  </a:rPr>
+                  <a:t> </a:t>
+                </a:r>
+                <a:r>
+                  <a:rPr lang="en-US" dirty="0" err="1">
+                    <a:solidFill>
+                      <a:schemeClr val="bg1"/>
+                    </a:solidFill>
+                  </a:rPr>
+                  <a:t>befinden</a:t>
+                </a:r>
+                <a:r>
+                  <a:rPr lang="en-US" dirty="0">
+                    <a:solidFill>
+                      <a:schemeClr val="bg1"/>
+                    </a:solidFill>
+                  </a:rPr>
+                  <a:t> </a:t>
+                </a:r>
+                <a:r>
+                  <a:rPr lang="en-US" dirty="0" err="1">
+                    <a:solidFill>
+                      <a:schemeClr val="bg1"/>
+                    </a:solidFill>
+                  </a:rPr>
+                  <a:t>wir</a:t>
+                </a:r>
+                <a:r>
+                  <a:rPr lang="en-US" dirty="0">
+                    <a:solidFill>
+                      <a:schemeClr val="bg1"/>
+                    </a:solidFill>
+                  </a:rPr>
+                  <a:t> </a:t>
+                </a:r>
+                <a:r>
+                  <a:rPr lang="en-US" dirty="0" err="1">
+                    <a:solidFill>
+                      <a:schemeClr val="bg1"/>
+                    </a:solidFill>
+                  </a:rPr>
+                  <a:t>uns</a:t>
+                </a:r>
+                <a:r>
+                  <a:rPr lang="en-US" dirty="0">
+                    <a:solidFill>
+                      <a:schemeClr val="bg1"/>
+                    </a:solidFill>
+                  </a:rPr>
+                  <a:t> </a:t>
+                </a:r>
+                <a:r>
+                  <a:rPr lang="en-US" dirty="0" err="1">
+                    <a:solidFill>
+                      <a:schemeClr val="bg1"/>
+                    </a:solidFill>
+                  </a:rPr>
+                  <a:t>im</a:t>
+                </a:r>
+                <a:r>
+                  <a:rPr lang="en-US" dirty="0">
+                    <a:solidFill>
+                      <a:schemeClr val="bg1"/>
+                    </a:solidFill>
+                  </a:rPr>
+                  <a:t> Ursprung</a:t>
+                </a:r>
+              </a:p>
+              <a:p>
+                <a:endParaRPr lang="en-US" dirty="0">
+                  <a:solidFill>
+                    <a:schemeClr val="bg1"/>
+                  </a:solidFill>
+                </a:endParaRPr>
+              </a:p>
+              <a:p>
+                <a:r>
+                  <a:rPr lang="en-US" dirty="0">
+                    <a:solidFill>
+                      <a:schemeClr val="bg1"/>
+                    </a:solidFill>
+                  </a:rPr>
+                  <a:t>Zum </a:t>
+                </a:r>
+                <a:r>
+                  <a:rPr lang="en-US" dirty="0" err="1">
+                    <a:solidFill>
+                      <a:schemeClr val="bg1"/>
+                    </a:solidFill>
+                  </a:rPr>
+                  <a:t>Zeitpunkt</a:t>
+                </a:r>
+                <a:r>
+                  <a:rPr lang="en-US" dirty="0">
+                    <a:solidFill>
+                      <a:schemeClr val="bg1"/>
+                    </a:solidFill>
+                  </a:rPr>
+                  <a:t> </a:t>
+                </a:r>
+                <a14:m>
+                  <m:oMath xmlns:m="http://schemas.openxmlformats.org/officeDocument/2006/math">
+                    <m:r>
+                      <a:rPr lang="en-US" b="0" i="1" smtClean="0">
+                        <a:solidFill>
+                          <a:schemeClr val="bg1"/>
+                        </a:solidFill>
+                        <a:latin typeface="Cambria Math" panose="02040503050406030204" pitchFamily="18" charset="0"/>
+                      </a:rPr>
+                      <m:t>𝑡</m:t>
+                    </m:r>
+                    <m:r>
+                      <a:rPr lang="en-US" b="0" i="1" smtClean="0">
+                        <a:solidFill>
+                          <a:schemeClr val="bg1"/>
+                        </a:solidFill>
+                        <a:latin typeface="Cambria Math" panose="02040503050406030204" pitchFamily="18" charset="0"/>
+                      </a:rPr>
+                      <m:t>=1</m:t>
+                    </m:r>
+                  </m:oMath>
+                </a14:m>
+                <a:r>
+                  <a:rPr lang="en-US" dirty="0">
+                    <a:solidFill>
+                      <a:schemeClr val="bg1"/>
+                    </a:solidFill>
+                  </a:rPr>
+                  <a:t> </a:t>
+                </a:r>
+                <a:r>
+                  <a:rPr lang="en-US" dirty="0" err="1">
+                    <a:solidFill>
+                      <a:schemeClr val="bg1"/>
+                    </a:solidFill>
+                  </a:rPr>
+                  <a:t>befinden</a:t>
+                </a:r>
+                <a:r>
+                  <a:rPr lang="en-US" dirty="0">
+                    <a:solidFill>
+                      <a:schemeClr val="bg1"/>
+                    </a:solidFill>
+                  </a:rPr>
+                  <a:t> </a:t>
+                </a:r>
+                <a:r>
+                  <a:rPr lang="en-US" dirty="0" err="1">
+                    <a:solidFill>
+                      <a:schemeClr val="bg1"/>
+                    </a:solidFill>
+                  </a:rPr>
+                  <a:t>wir</a:t>
+                </a:r>
+                <a:r>
+                  <a:rPr lang="en-US" dirty="0">
+                    <a:solidFill>
+                      <a:schemeClr val="bg1"/>
+                    </a:solidFill>
+                  </a:rPr>
+                  <a:t> </a:t>
+                </a:r>
+                <a:r>
+                  <a:rPr lang="en-US" dirty="0" err="1">
+                    <a:solidFill>
+                      <a:schemeClr val="bg1"/>
+                    </a:solidFill>
+                  </a:rPr>
+                  <a:t>uns</a:t>
+                </a:r>
+                <a:r>
+                  <a:rPr lang="en-US" dirty="0">
+                    <a:solidFill>
+                      <a:schemeClr val="bg1"/>
+                    </a:solidFill>
+                  </a:rPr>
+                  <a:t> </a:t>
+                </a:r>
+                <a:r>
+                  <a:rPr lang="en-US" dirty="0" err="1">
+                    <a:solidFill>
+                      <a:schemeClr val="bg1"/>
+                    </a:solidFill>
+                  </a:rPr>
+                  <a:t>bei</a:t>
+                </a:r>
+                <a:r>
+                  <a:rPr lang="en-US" dirty="0">
+                    <a:solidFill>
+                      <a:schemeClr val="bg1"/>
+                    </a:solidFill>
+                  </a:rPr>
+                  <a:t> </a:t>
+                </a:r>
+                <a14:m>
+                  <m:oMath xmlns:m="http://schemas.openxmlformats.org/officeDocument/2006/math">
+                    <m:r>
+                      <a:rPr lang="en-US" b="0" i="1" smtClean="0">
+                        <a:solidFill>
+                          <a:schemeClr val="bg1"/>
+                        </a:solidFill>
+                        <a:latin typeface="Cambria Math" panose="02040503050406030204" pitchFamily="18" charset="0"/>
+                      </a:rPr>
+                      <m:t>𝑧</m:t>
+                    </m:r>
+                    <m:r>
+                      <a:rPr lang="en-US" b="0" i="1" smtClean="0">
+                        <a:solidFill>
+                          <a:schemeClr val="bg1"/>
+                        </a:solidFill>
+                        <a:latin typeface="Cambria Math" panose="02040503050406030204" pitchFamily="18" charset="0"/>
+                      </a:rPr>
+                      <m:t>=0.6</m:t>
+                    </m:r>
+                  </m:oMath>
+                </a14:m>
+                <a:endParaRPr lang="en-US" dirty="0">
+                  <a:solidFill>
+                    <a:schemeClr val="bg1"/>
+                  </a:solidFill>
+                </a:endParaRPr>
+              </a:p>
+            </p:txBody>
+          </p:sp>
+        </mc:Choice>
+        <mc:Fallback>
+          <p:sp>
+            <p:nvSpPr>
+              <p:cNvPr id="2" name="TextBox 1">
+                <a:extLst>
+                  <a:ext uri="{FF2B5EF4-FFF2-40B4-BE49-F238E27FC236}">
+                    <a16:creationId xmlns:a16="http://schemas.microsoft.com/office/drawing/2014/main" id="{0C5FB40C-85C1-2B88-6C30-CE7324896ECE}"/>
+                  </a:ext>
+                </a:extLst>
+              </p:cNvPr>
+              <p:cNvSpPr txBox="1">
+                <a:spLocks noRot="1" noChangeAspect="1" noMove="1" noResize="1" noEditPoints="1" noAdjustHandles="1" noChangeArrowheads="1" noChangeShapeType="1" noTextEdit="1"/>
+              </p:cNvSpPr>
+              <p:nvPr/>
+            </p:nvSpPr>
+            <p:spPr>
+              <a:xfrm>
+                <a:off x="8547652" y="153348"/>
+                <a:ext cx="3475855" cy="2585323"/>
+              </a:xfrm>
+              <a:prstGeom prst="rect">
+                <a:avLst/>
+              </a:prstGeom>
+              <a:blipFill>
+                <a:blip r:embed="rId3"/>
+                <a:stretch>
+                  <a:fillRect l="-1404" t="-1179" b="-2830"/>
+                </a:stretch>
+              </a:blipFill>
+            </p:spPr>
+            <p:txBody>
+              <a:bodyPr/>
+              <a:lstStyle/>
+              <a:p>
+                <a:r>
+                  <a:rPr lang="en-CH">
+                    <a:noFill/>
+                  </a:rPr>
+                  <a:t> </a:t>
+                </a:r>
+              </a:p>
+            </p:txBody>
+          </p:sp>
+        </mc:Fallback>
+      </mc:AlternateContent>
+    </p:spTree>
+    <p:extLst>
+      <p:ext uri="{BB962C8B-B14F-4D97-AF65-F5344CB8AC3E}">
+        <p14:creationId xmlns:p14="http://schemas.microsoft.com/office/powerpoint/2010/main" val="620228070"/>
+      </p:ext>
+    </p:extLst>
+  </p:cSld>
+  <p:clrMapOvr>
+    <a:masterClrMapping/>
+  </p:clrMapOvr>
+</p:sld>
+</file>
+
+<file path=ppt/slides/slide23.xml><?xml version="1.0" encoding="utf-8"?>
+<p:sld xmlns:a="http://schemas.openxmlformats.org/drawingml/2006/main" xmlns:r="http://schemas.openxmlformats.org/officeDocument/2006/relationships" xmlns:p="http://schemas.openxmlformats.org/presentationml/2006/main">
+  <p:cSld>
+    <p:spTree>
+      <p:nvGrpSpPr>
+        <p:cNvPr id="1" name="">
+          <a:extLst>
+            <a:ext uri="{FF2B5EF4-FFF2-40B4-BE49-F238E27FC236}">
+              <a16:creationId xmlns:a16="http://schemas.microsoft.com/office/drawing/2014/main" id="{FAB4040F-70DA-08E4-7022-8695F90C7BC0}"/>
+            </a:ext>
+          </a:extLst>
+        </p:cNvPr>
+        <p:cNvGrpSpPr/>
+        <p:nvPr/>
+      </p:nvGrpSpPr>
+      <p:grpSpPr>
+        <a:xfrm>
+          <a:off x="0" y="0"/>
+          <a:ext cx="0" cy="0"/>
+          <a:chOff x="0" y="0"/>
+          <a:chExt cx="0" cy="0"/>
+        </a:xfrm>
+      </p:grpSpPr>
+      <p:pic>
+        <p:nvPicPr>
+          <p:cNvPr id="4" name="Content Placeholder 3">
+            <a:extLst>
+              <a:ext uri="{FF2B5EF4-FFF2-40B4-BE49-F238E27FC236}">
+                <a16:creationId xmlns:a16="http://schemas.microsoft.com/office/drawing/2014/main" id="{578B8C7D-4FB5-394E-3706-70D3C79DB7AE}"/>
+              </a:ext>
+            </a:extLst>
+          </p:cNvPr>
+          <p:cNvPicPr>
+            <a:picLocks noGrp="1" noChangeAspect="1"/>
+          </p:cNvPicPr>
+          <p:nvPr>
+            <p:ph idx="1"/>
+          </p:nvPr>
+        </p:nvPicPr>
+        <p:blipFill>
+          <a:blip r:link="rId2"/>
+          <a:srcRect/>
+          <a:stretch>
+            <a:fillRect/>
+          </a:stretch>
+        </p:blipFill>
+        <p:spPr>
+          <a:xfrm>
+            <a:off x="439948" y="-422692"/>
+            <a:ext cx="7556740" cy="7556740"/>
+          </a:xfrm>
+        </p:spPr>
+      </p:pic>
+      <mc:AlternateContent xmlns:mc="http://schemas.openxmlformats.org/markup-compatibility/2006">
+        <mc:Choice xmlns:a14="http://schemas.microsoft.com/office/drawing/2010/main" Requires="a14">
+          <p:sp>
+            <p:nvSpPr>
+              <p:cNvPr id="2" name="TextBox 1">
+                <a:extLst>
+                  <a:ext uri="{FF2B5EF4-FFF2-40B4-BE49-F238E27FC236}">
+                    <a16:creationId xmlns:a16="http://schemas.microsoft.com/office/drawing/2014/main" id="{5F57B016-D01C-B794-F727-AE4C41F13376}"/>
+                  </a:ext>
+                </a:extLst>
+              </p:cNvPr>
+              <p:cNvSpPr txBox="1"/>
+              <p:nvPr/>
+            </p:nvSpPr>
+            <p:spPr>
+              <a:xfrm>
+                <a:off x="8547652" y="153348"/>
+                <a:ext cx="3475855" cy="3693319"/>
+              </a:xfrm>
+              <a:prstGeom prst="rect">
+                <a:avLst/>
+              </a:prstGeom>
+              <a:noFill/>
+            </p:spPr>
+            <p:txBody>
+              <a:bodyPr wrap="square" rtlCol="0">
+                <a:spAutoFit/>
+              </a:bodyPr>
+              <a:lstStyle/>
+              <a:p>
+                <a:r>
+                  <a:rPr lang="en-US" dirty="0">
+                    <a:solidFill>
+                      <a:schemeClr val="bg1"/>
+                    </a:solidFill>
+                  </a:rPr>
+                  <a:t>Wir </a:t>
+                </a:r>
+                <a:r>
+                  <a:rPr lang="en-US" dirty="0" err="1">
+                    <a:solidFill>
+                      <a:schemeClr val="bg1"/>
+                    </a:solidFill>
+                  </a:rPr>
+                  <a:t>betrachten</a:t>
+                </a:r>
+                <a:r>
+                  <a:rPr lang="en-US" dirty="0">
+                    <a:solidFill>
+                      <a:schemeClr val="bg1"/>
+                    </a:solidFill>
+                  </a:rPr>
+                  <a:t> </a:t>
+                </a:r>
+                <a:r>
+                  <a:rPr lang="en-US" dirty="0" err="1">
+                    <a:solidFill>
+                      <a:schemeClr val="bg1"/>
+                    </a:solidFill>
+                  </a:rPr>
+                  <a:t>jetzt</a:t>
+                </a:r>
+                <a:r>
+                  <a:rPr lang="en-US" dirty="0">
+                    <a:solidFill>
+                      <a:schemeClr val="bg1"/>
+                    </a:solidFill>
+                  </a:rPr>
+                  <a:t> </a:t>
+                </a:r>
+                <a:r>
+                  <a:rPr lang="en-US" dirty="0" err="1">
+                    <a:solidFill>
+                      <a:schemeClr val="bg1"/>
+                    </a:solidFill>
+                  </a:rPr>
+                  <a:t>ein</a:t>
+                </a:r>
+                <a:r>
+                  <a:rPr lang="en-US" dirty="0">
+                    <a:solidFill>
+                      <a:schemeClr val="bg1"/>
+                    </a:solidFill>
+                  </a:rPr>
+                  <a:t> </a:t>
+                </a:r>
+                <a:r>
+                  <a:rPr lang="en-US" dirty="0" err="1">
+                    <a:solidFill>
+                      <a:schemeClr val="bg1"/>
+                    </a:solidFill>
+                  </a:rPr>
+                  <a:t>Bezugssystem</a:t>
+                </a:r>
+                <a:r>
+                  <a:rPr lang="en-US" dirty="0">
+                    <a:solidFill>
+                      <a:schemeClr val="bg1"/>
+                    </a:solidFill>
+                  </a:rPr>
+                  <a:t>, </a:t>
+                </a:r>
+                <a:r>
+                  <a:rPr lang="en-US" dirty="0" err="1">
+                    <a:solidFill>
+                      <a:schemeClr val="bg1"/>
+                    </a:solidFill>
+                  </a:rPr>
+                  <a:t>dass</a:t>
+                </a:r>
+                <a:r>
+                  <a:rPr lang="en-US" dirty="0">
+                    <a:solidFill>
+                      <a:schemeClr val="bg1"/>
+                    </a:solidFill>
+                  </a:rPr>
+                  <a:t> </a:t>
+                </a:r>
+                <a:r>
+                  <a:rPr lang="en-US" dirty="0" err="1">
+                    <a:solidFill>
+                      <a:schemeClr val="bg1"/>
+                    </a:solidFill>
+                  </a:rPr>
+                  <a:t>sich</a:t>
+                </a:r>
+                <a:r>
+                  <a:rPr lang="en-US" dirty="0">
+                    <a:solidFill>
+                      <a:schemeClr val="bg1"/>
+                    </a:solidFill>
+                  </a:rPr>
+                  <a:t> </a:t>
+                </a:r>
+                <a:r>
+                  <a:rPr lang="en-US" dirty="0" err="1">
+                    <a:solidFill>
+                      <a:schemeClr val="bg1"/>
+                    </a:solidFill>
+                  </a:rPr>
+                  <a:t>mit</a:t>
+                </a:r>
+                <a:r>
+                  <a:rPr lang="en-US" dirty="0">
+                    <a:solidFill>
+                      <a:schemeClr val="bg1"/>
+                    </a:solidFill>
+                  </a:rPr>
+                  <a:t> </a:t>
+                </a:r>
+              </a:p>
+              <a:p>
+                <a14:m>
+                  <m:oMath xmlns:m="http://schemas.openxmlformats.org/officeDocument/2006/math">
+                    <m:r>
+                      <a:rPr lang="en-US" b="0" i="1" smtClean="0">
+                        <a:solidFill>
+                          <a:schemeClr val="bg1"/>
+                        </a:solidFill>
+                        <a:latin typeface="Cambria Math" panose="02040503050406030204" pitchFamily="18" charset="0"/>
+                      </a:rPr>
+                      <m:t>𝛽</m:t>
+                    </m:r>
+                    <m:r>
+                      <a:rPr lang="en-US" b="0" i="1" smtClean="0">
+                        <a:solidFill>
+                          <a:schemeClr val="bg1"/>
+                        </a:solidFill>
+                        <a:latin typeface="Cambria Math" panose="02040503050406030204" pitchFamily="18" charset="0"/>
+                      </a:rPr>
+                      <m:t>=0.6</m:t>
+                    </m:r>
+                  </m:oMath>
+                </a14:m>
+                <a:r>
+                  <a:rPr lang="en-US" dirty="0">
+                    <a:solidFill>
+                      <a:schemeClr val="bg1"/>
+                    </a:solidFill>
+                  </a:rPr>
+                  <a:t> </a:t>
+                </a:r>
+                <a:r>
+                  <a:rPr lang="en-US" dirty="0" err="1">
+                    <a:solidFill>
+                      <a:schemeClr val="bg1"/>
+                    </a:solidFill>
+                  </a:rPr>
+                  <a:t>fortbewegt</a:t>
+                </a:r>
+                <a:r>
+                  <a:rPr lang="en-US" dirty="0">
+                    <a:solidFill>
+                      <a:schemeClr val="bg1"/>
+                    </a:solidFill>
+                  </a:rPr>
+                  <a:t>.</a:t>
+                </a:r>
+              </a:p>
+              <a:p>
+                <a:endParaRPr lang="en-US" dirty="0">
+                  <a:solidFill>
+                    <a:schemeClr val="bg1"/>
+                  </a:solidFill>
+                </a:endParaRPr>
+              </a:p>
+              <a:p>
+                <a:r>
+                  <a:rPr lang="en-US" dirty="0">
+                    <a:solidFill>
+                      <a:schemeClr val="bg1"/>
+                    </a:solidFill>
+                  </a:rPr>
+                  <a:t>Zum </a:t>
+                </a:r>
+                <a:r>
+                  <a:rPr lang="en-US" dirty="0" err="1">
+                    <a:solidFill>
+                      <a:schemeClr val="bg1"/>
+                    </a:solidFill>
+                  </a:rPr>
+                  <a:t>Zeitpunkt</a:t>
+                </a:r>
+                <a:r>
+                  <a:rPr lang="en-US" dirty="0">
+                    <a:solidFill>
+                      <a:schemeClr val="bg1"/>
+                    </a:solidFill>
+                  </a:rPr>
+                  <a:t> </a:t>
+                </a:r>
+                <a14:m>
+                  <m:oMath xmlns:m="http://schemas.openxmlformats.org/officeDocument/2006/math">
+                    <m:r>
+                      <a:rPr lang="en-US" b="0" i="1" smtClean="0">
+                        <a:solidFill>
+                          <a:schemeClr val="bg1"/>
+                        </a:solidFill>
+                        <a:latin typeface="Cambria Math" panose="02040503050406030204" pitchFamily="18" charset="0"/>
+                      </a:rPr>
+                      <m:t>𝑡</m:t>
+                    </m:r>
+                    <m:r>
+                      <a:rPr lang="en-US" b="0" i="1" smtClean="0">
+                        <a:solidFill>
+                          <a:schemeClr val="bg1"/>
+                        </a:solidFill>
+                        <a:latin typeface="Cambria Math" panose="02040503050406030204" pitchFamily="18" charset="0"/>
+                      </a:rPr>
+                      <m:t>=0</m:t>
+                    </m:r>
+                  </m:oMath>
+                </a14:m>
+                <a:r>
+                  <a:rPr lang="en-US" dirty="0">
+                    <a:solidFill>
+                      <a:schemeClr val="bg1"/>
+                    </a:solidFill>
+                  </a:rPr>
+                  <a:t> </a:t>
+                </a:r>
+                <a:r>
+                  <a:rPr lang="en-US" dirty="0" err="1">
+                    <a:solidFill>
+                      <a:schemeClr val="bg1"/>
+                    </a:solidFill>
+                  </a:rPr>
+                  <a:t>befinden</a:t>
+                </a:r>
+                <a:r>
+                  <a:rPr lang="en-US" dirty="0">
+                    <a:solidFill>
+                      <a:schemeClr val="bg1"/>
+                    </a:solidFill>
+                  </a:rPr>
+                  <a:t> </a:t>
+                </a:r>
+                <a:r>
+                  <a:rPr lang="en-US" dirty="0" err="1">
+                    <a:solidFill>
+                      <a:schemeClr val="bg1"/>
+                    </a:solidFill>
+                  </a:rPr>
+                  <a:t>wir</a:t>
+                </a:r>
+                <a:r>
+                  <a:rPr lang="en-US" dirty="0">
+                    <a:solidFill>
+                      <a:schemeClr val="bg1"/>
+                    </a:solidFill>
+                  </a:rPr>
+                  <a:t> </a:t>
+                </a:r>
+                <a:r>
+                  <a:rPr lang="en-US" dirty="0" err="1">
+                    <a:solidFill>
+                      <a:schemeClr val="bg1"/>
+                    </a:solidFill>
+                  </a:rPr>
+                  <a:t>uns</a:t>
+                </a:r>
+                <a:r>
+                  <a:rPr lang="en-US" dirty="0">
+                    <a:solidFill>
+                      <a:schemeClr val="bg1"/>
+                    </a:solidFill>
+                  </a:rPr>
+                  <a:t> </a:t>
+                </a:r>
+                <a:r>
+                  <a:rPr lang="en-US" dirty="0" err="1">
+                    <a:solidFill>
+                      <a:schemeClr val="bg1"/>
+                    </a:solidFill>
+                  </a:rPr>
+                  <a:t>im</a:t>
+                </a:r>
+                <a:r>
+                  <a:rPr lang="en-US" dirty="0">
+                    <a:solidFill>
+                      <a:schemeClr val="bg1"/>
+                    </a:solidFill>
+                  </a:rPr>
+                  <a:t> Ursprung</a:t>
+                </a:r>
+              </a:p>
+              <a:p>
+                <a:endParaRPr lang="en-US" dirty="0">
+                  <a:solidFill>
+                    <a:schemeClr val="bg1"/>
+                  </a:solidFill>
+                </a:endParaRPr>
+              </a:p>
+              <a:p>
+                <a:r>
+                  <a:rPr lang="en-US" dirty="0">
+                    <a:solidFill>
+                      <a:schemeClr val="bg1"/>
+                    </a:solidFill>
+                  </a:rPr>
+                  <a:t>Zum </a:t>
+                </a:r>
+                <a:r>
+                  <a:rPr lang="en-US" dirty="0" err="1">
+                    <a:solidFill>
+                      <a:schemeClr val="bg1"/>
+                    </a:solidFill>
+                  </a:rPr>
+                  <a:t>Zeitpunkt</a:t>
+                </a:r>
+                <a:r>
+                  <a:rPr lang="en-US" dirty="0">
+                    <a:solidFill>
+                      <a:schemeClr val="bg1"/>
+                    </a:solidFill>
+                  </a:rPr>
+                  <a:t> </a:t>
+                </a:r>
+                <a14:m>
+                  <m:oMath xmlns:m="http://schemas.openxmlformats.org/officeDocument/2006/math">
+                    <m:r>
+                      <a:rPr lang="en-US" b="0" i="1" smtClean="0">
+                        <a:solidFill>
+                          <a:schemeClr val="bg1"/>
+                        </a:solidFill>
+                        <a:latin typeface="Cambria Math" panose="02040503050406030204" pitchFamily="18" charset="0"/>
+                      </a:rPr>
+                      <m:t>𝑡</m:t>
+                    </m:r>
+                    <m:r>
+                      <a:rPr lang="en-US" b="0" i="1" smtClean="0">
+                        <a:solidFill>
+                          <a:schemeClr val="bg1"/>
+                        </a:solidFill>
+                        <a:latin typeface="Cambria Math" panose="02040503050406030204" pitchFamily="18" charset="0"/>
+                      </a:rPr>
+                      <m:t>=1</m:t>
+                    </m:r>
+                  </m:oMath>
+                </a14:m>
+                <a:r>
+                  <a:rPr lang="en-US" dirty="0">
+                    <a:solidFill>
+                      <a:schemeClr val="bg1"/>
+                    </a:solidFill>
+                  </a:rPr>
+                  <a:t> </a:t>
+                </a:r>
+                <a:r>
+                  <a:rPr lang="en-US" dirty="0" err="1">
+                    <a:solidFill>
+                      <a:schemeClr val="bg1"/>
+                    </a:solidFill>
+                  </a:rPr>
+                  <a:t>befinden</a:t>
+                </a:r>
+                <a:r>
+                  <a:rPr lang="en-US" dirty="0">
+                    <a:solidFill>
+                      <a:schemeClr val="bg1"/>
+                    </a:solidFill>
+                  </a:rPr>
+                  <a:t> </a:t>
+                </a:r>
+                <a:r>
+                  <a:rPr lang="en-US" dirty="0" err="1">
+                    <a:solidFill>
+                      <a:schemeClr val="bg1"/>
+                    </a:solidFill>
+                  </a:rPr>
+                  <a:t>wir</a:t>
+                </a:r>
+                <a:r>
+                  <a:rPr lang="en-US" dirty="0">
+                    <a:solidFill>
+                      <a:schemeClr val="bg1"/>
+                    </a:solidFill>
+                  </a:rPr>
+                  <a:t> </a:t>
+                </a:r>
+                <a:r>
+                  <a:rPr lang="en-US" dirty="0" err="1">
+                    <a:solidFill>
+                      <a:schemeClr val="bg1"/>
+                    </a:solidFill>
+                  </a:rPr>
+                  <a:t>uns</a:t>
+                </a:r>
+                <a:r>
+                  <a:rPr lang="en-US" dirty="0">
+                    <a:solidFill>
+                      <a:schemeClr val="bg1"/>
+                    </a:solidFill>
+                  </a:rPr>
+                  <a:t> </a:t>
+                </a:r>
+                <a:r>
+                  <a:rPr lang="en-US" dirty="0" err="1">
+                    <a:solidFill>
+                      <a:schemeClr val="bg1"/>
+                    </a:solidFill>
+                  </a:rPr>
+                  <a:t>bei</a:t>
+                </a:r>
+                <a:r>
+                  <a:rPr lang="en-US" dirty="0">
+                    <a:solidFill>
+                      <a:schemeClr val="bg1"/>
+                    </a:solidFill>
+                  </a:rPr>
+                  <a:t> </a:t>
+                </a:r>
+                <a14:m>
+                  <m:oMath xmlns:m="http://schemas.openxmlformats.org/officeDocument/2006/math">
+                    <m:r>
+                      <a:rPr lang="en-US" b="0" i="1" smtClean="0">
+                        <a:solidFill>
+                          <a:schemeClr val="bg1"/>
+                        </a:solidFill>
+                        <a:latin typeface="Cambria Math" panose="02040503050406030204" pitchFamily="18" charset="0"/>
+                      </a:rPr>
+                      <m:t>𝑧</m:t>
+                    </m:r>
+                    <m:r>
+                      <a:rPr lang="en-US" b="0" i="1" smtClean="0">
+                        <a:solidFill>
+                          <a:schemeClr val="bg1"/>
+                        </a:solidFill>
+                        <a:latin typeface="Cambria Math" panose="02040503050406030204" pitchFamily="18" charset="0"/>
+                      </a:rPr>
+                      <m:t>=0.6</m:t>
+                    </m:r>
+                  </m:oMath>
+                </a14:m>
+                <a:endParaRPr lang="en-US" dirty="0">
+                  <a:solidFill>
+                    <a:schemeClr val="bg1"/>
+                  </a:solidFill>
+                </a:endParaRPr>
+              </a:p>
+              <a:p>
+                <a:endParaRPr lang="en-US" dirty="0">
+                  <a:solidFill>
+                    <a:schemeClr val="bg1"/>
+                  </a:solidFill>
+                </a:endParaRPr>
+              </a:p>
+              <a:p>
+                <a:r>
+                  <a:rPr lang="en-US" dirty="0">
+                    <a:solidFill>
+                      <a:schemeClr val="bg1"/>
+                    </a:solidFill>
+                  </a:rPr>
+                  <a:t>Zum </a:t>
+                </a:r>
+                <a:r>
+                  <a:rPr lang="en-US" dirty="0" err="1">
+                    <a:solidFill>
+                      <a:schemeClr val="bg1"/>
+                    </a:solidFill>
+                  </a:rPr>
+                  <a:t>Zeitpunkt</a:t>
+                </a:r>
+                <a:r>
+                  <a:rPr lang="en-US" dirty="0">
+                    <a:solidFill>
+                      <a:schemeClr val="bg1"/>
+                    </a:solidFill>
+                  </a:rPr>
+                  <a:t> </a:t>
+                </a:r>
+                <a14:m>
+                  <m:oMath xmlns:m="http://schemas.openxmlformats.org/officeDocument/2006/math">
+                    <m:r>
+                      <a:rPr lang="en-US" b="0" i="1" smtClean="0">
+                        <a:solidFill>
+                          <a:schemeClr val="bg1"/>
+                        </a:solidFill>
+                        <a:latin typeface="Cambria Math" panose="02040503050406030204" pitchFamily="18" charset="0"/>
+                      </a:rPr>
+                      <m:t>𝑡</m:t>
+                    </m:r>
+                    <m:r>
+                      <a:rPr lang="en-US" b="0" i="1" smtClean="0">
+                        <a:solidFill>
+                          <a:schemeClr val="bg1"/>
+                        </a:solidFill>
+                        <a:latin typeface="Cambria Math" panose="02040503050406030204" pitchFamily="18" charset="0"/>
+                      </a:rPr>
+                      <m:t>=2</m:t>
+                    </m:r>
+                  </m:oMath>
+                </a14:m>
+                <a:r>
+                  <a:rPr lang="en-US" dirty="0">
+                    <a:solidFill>
+                      <a:schemeClr val="bg1"/>
+                    </a:solidFill>
+                  </a:rPr>
+                  <a:t> </a:t>
+                </a:r>
+                <a:r>
+                  <a:rPr lang="en-US" dirty="0" err="1">
+                    <a:solidFill>
+                      <a:schemeClr val="bg1"/>
+                    </a:solidFill>
+                  </a:rPr>
+                  <a:t>befinden</a:t>
+                </a:r>
+                <a:r>
+                  <a:rPr lang="en-US" dirty="0">
+                    <a:solidFill>
+                      <a:schemeClr val="bg1"/>
+                    </a:solidFill>
+                  </a:rPr>
+                  <a:t> </a:t>
+                </a:r>
+                <a:r>
+                  <a:rPr lang="en-US" dirty="0" err="1">
+                    <a:solidFill>
+                      <a:schemeClr val="bg1"/>
+                    </a:solidFill>
+                  </a:rPr>
+                  <a:t>wir</a:t>
+                </a:r>
+                <a:r>
+                  <a:rPr lang="en-US" dirty="0">
+                    <a:solidFill>
+                      <a:schemeClr val="bg1"/>
+                    </a:solidFill>
+                  </a:rPr>
+                  <a:t> </a:t>
+                </a:r>
+                <a:r>
+                  <a:rPr lang="en-US" dirty="0" err="1">
+                    <a:solidFill>
+                      <a:schemeClr val="bg1"/>
+                    </a:solidFill>
+                  </a:rPr>
+                  <a:t>uns</a:t>
+                </a:r>
+                <a:r>
+                  <a:rPr lang="en-US" dirty="0">
+                    <a:solidFill>
+                      <a:schemeClr val="bg1"/>
+                    </a:solidFill>
+                  </a:rPr>
+                  <a:t> </a:t>
+                </a:r>
+                <a:r>
+                  <a:rPr lang="en-US" dirty="0" err="1">
+                    <a:solidFill>
+                      <a:schemeClr val="bg1"/>
+                    </a:solidFill>
+                  </a:rPr>
+                  <a:t>bei</a:t>
+                </a:r>
+                <a:r>
+                  <a:rPr lang="en-US" dirty="0">
+                    <a:solidFill>
+                      <a:schemeClr val="bg1"/>
+                    </a:solidFill>
+                  </a:rPr>
+                  <a:t> </a:t>
+                </a:r>
+                <a14:m>
+                  <m:oMath xmlns:m="http://schemas.openxmlformats.org/officeDocument/2006/math">
+                    <m:r>
+                      <a:rPr lang="en-US" b="0" i="1" smtClean="0">
+                        <a:solidFill>
+                          <a:schemeClr val="bg1"/>
+                        </a:solidFill>
+                        <a:latin typeface="Cambria Math" panose="02040503050406030204" pitchFamily="18" charset="0"/>
+                      </a:rPr>
+                      <m:t>𝑧</m:t>
+                    </m:r>
+                    <m:r>
+                      <a:rPr lang="en-US" b="0" i="1" smtClean="0">
+                        <a:solidFill>
+                          <a:schemeClr val="bg1"/>
+                        </a:solidFill>
+                        <a:latin typeface="Cambria Math" panose="02040503050406030204" pitchFamily="18" charset="0"/>
+                      </a:rPr>
+                      <m:t>=1.2</m:t>
+                    </m:r>
+                  </m:oMath>
+                </a14:m>
+                <a:endParaRPr lang="en-US" dirty="0">
+                  <a:solidFill>
+                    <a:schemeClr val="bg1"/>
+                  </a:solidFill>
+                </a:endParaRPr>
+              </a:p>
+              <a:p>
+                <a:endParaRPr lang="en-US" dirty="0">
+                  <a:solidFill>
+                    <a:schemeClr val="bg1"/>
+                  </a:solidFill>
+                </a:endParaRPr>
+              </a:p>
+            </p:txBody>
+          </p:sp>
+        </mc:Choice>
+        <mc:Fallback>
+          <p:sp>
+            <p:nvSpPr>
+              <p:cNvPr id="2" name="TextBox 1">
+                <a:extLst>
+                  <a:ext uri="{FF2B5EF4-FFF2-40B4-BE49-F238E27FC236}">
+                    <a16:creationId xmlns:a16="http://schemas.microsoft.com/office/drawing/2014/main" id="{5F57B016-D01C-B794-F727-AE4C41F13376}"/>
+                  </a:ext>
+                </a:extLst>
+              </p:cNvPr>
+              <p:cNvSpPr txBox="1">
+                <a:spLocks noRot="1" noChangeAspect="1" noMove="1" noResize="1" noEditPoints="1" noAdjustHandles="1" noChangeArrowheads="1" noChangeShapeType="1" noTextEdit="1"/>
+              </p:cNvSpPr>
+              <p:nvPr/>
+            </p:nvSpPr>
+            <p:spPr>
+              <a:xfrm>
+                <a:off x="8547652" y="153348"/>
+                <a:ext cx="3475855" cy="3693319"/>
+              </a:xfrm>
+              <a:prstGeom prst="rect">
+                <a:avLst/>
+              </a:prstGeom>
+              <a:blipFill>
+                <a:blip r:embed="rId3"/>
+                <a:stretch>
+                  <a:fillRect l="-1404" t="-825"/>
+                </a:stretch>
+              </a:blipFill>
+            </p:spPr>
+            <p:txBody>
+              <a:bodyPr/>
+              <a:lstStyle/>
+              <a:p>
+                <a:r>
+                  <a:rPr lang="en-CH">
+                    <a:noFill/>
+                  </a:rPr>
+                  <a:t> </a:t>
+                </a:r>
+              </a:p>
+            </p:txBody>
+          </p:sp>
+        </mc:Fallback>
+      </mc:AlternateContent>
+    </p:spTree>
+    <p:extLst>
+      <p:ext uri="{BB962C8B-B14F-4D97-AF65-F5344CB8AC3E}">
+        <p14:creationId xmlns:p14="http://schemas.microsoft.com/office/powerpoint/2010/main" val="3177743990"/>
+      </p:ext>
+    </p:extLst>
+  </p:cSld>
+  <p:clrMapOvr>
+    <a:masterClrMapping/>
+  </p:clrMapOvr>
+</p:sld>
+</file>
+
+<file path=ppt/slides/slide24.xml><?xml version="1.0" encoding="utf-8"?>
+<p:sld xmlns:a="http://schemas.openxmlformats.org/drawingml/2006/main" xmlns:r="http://schemas.openxmlformats.org/officeDocument/2006/relationships" xmlns:p="http://schemas.openxmlformats.org/presentationml/2006/main">
+  <p:cSld>
+    <p:spTree>
+      <p:nvGrpSpPr>
+        <p:cNvPr id="1" name="">
+          <a:extLst>
+            <a:ext uri="{FF2B5EF4-FFF2-40B4-BE49-F238E27FC236}">
+              <a16:creationId xmlns:a16="http://schemas.microsoft.com/office/drawing/2014/main" id="{9DE766E3-E8FA-A942-2735-7F7507D39A9D}"/>
+            </a:ext>
+          </a:extLst>
+        </p:cNvPr>
+        <p:cNvGrpSpPr/>
+        <p:nvPr/>
+      </p:nvGrpSpPr>
+      <p:grpSpPr>
+        <a:xfrm>
+          <a:off x="0" y="0"/>
+          <a:ext cx="0" cy="0"/>
+          <a:chOff x="0" y="0"/>
+          <a:chExt cx="0" cy="0"/>
+        </a:xfrm>
+      </p:grpSpPr>
+      <p:pic>
+        <p:nvPicPr>
+          <p:cNvPr id="4" name="Content Placeholder 3">
+            <a:extLst>
+              <a:ext uri="{FF2B5EF4-FFF2-40B4-BE49-F238E27FC236}">
+                <a16:creationId xmlns:a16="http://schemas.microsoft.com/office/drawing/2014/main" id="{DE1D6DF8-4535-C81D-985C-2D2F3ED34AEA}"/>
+              </a:ext>
+            </a:extLst>
+          </p:cNvPr>
+          <p:cNvPicPr>
+            <a:picLocks noGrp="1" noChangeAspect="1"/>
+          </p:cNvPicPr>
+          <p:nvPr>
+            <p:ph idx="1"/>
+          </p:nvPr>
+        </p:nvPicPr>
+        <p:blipFill>
+          <a:blip r:link="rId2"/>
+          <a:srcRect/>
+          <a:stretch>
+            <a:fillRect/>
+          </a:stretch>
+        </p:blipFill>
+        <p:spPr>
+          <a:xfrm>
+            <a:off x="439948" y="-422692"/>
+            <a:ext cx="7556740" cy="7556740"/>
+          </a:xfrm>
+        </p:spPr>
+      </p:pic>
+      <mc:AlternateContent xmlns:mc="http://schemas.openxmlformats.org/markup-compatibility/2006">
+        <mc:Choice xmlns:a14="http://schemas.microsoft.com/office/drawing/2010/main" Requires="a14">
+          <p:sp>
+            <p:nvSpPr>
+              <p:cNvPr id="2" name="TextBox 1">
+                <a:extLst>
+                  <a:ext uri="{FF2B5EF4-FFF2-40B4-BE49-F238E27FC236}">
+                    <a16:creationId xmlns:a16="http://schemas.microsoft.com/office/drawing/2014/main" id="{662D735B-A4BE-22E0-F309-2A156115FF34}"/>
+                  </a:ext>
+                </a:extLst>
+              </p:cNvPr>
+              <p:cNvSpPr txBox="1"/>
+              <p:nvPr/>
+            </p:nvSpPr>
+            <p:spPr>
+              <a:xfrm>
+                <a:off x="8547652" y="153348"/>
+                <a:ext cx="3475855" cy="4247317"/>
+              </a:xfrm>
+              <a:prstGeom prst="rect">
+                <a:avLst/>
+              </a:prstGeom>
+              <a:noFill/>
+            </p:spPr>
+            <p:txBody>
+              <a:bodyPr wrap="square" rtlCol="0">
+                <a:spAutoFit/>
+              </a:bodyPr>
+              <a:lstStyle/>
+              <a:p>
+                <a:r>
+                  <a:rPr lang="en-US" dirty="0">
+                    <a:solidFill>
+                      <a:schemeClr val="bg1"/>
+                    </a:solidFill>
+                  </a:rPr>
+                  <a:t>Wir </a:t>
+                </a:r>
+                <a:r>
+                  <a:rPr lang="en-US" dirty="0" err="1">
+                    <a:solidFill>
+                      <a:schemeClr val="bg1"/>
+                    </a:solidFill>
+                  </a:rPr>
+                  <a:t>betrachten</a:t>
+                </a:r>
+                <a:r>
+                  <a:rPr lang="en-US" dirty="0">
+                    <a:solidFill>
+                      <a:schemeClr val="bg1"/>
+                    </a:solidFill>
+                  </a:rPr>
+                  <a:t> </a:t>
+                </a:r>
+                <a:r>
+                  <a:rPr lang="en-US" dirty="0" err="1">
+                    <a:solidFill>
+                      <a:schemeClr val="bg1"/>
+                    </a:solidFill>
+                  </a:rPr>
+                  <a:t>jetzt</a:t>
+                </a:r>
+                <a:r>
+                  <a:rPr lang="en-US" dirty="0">
+                    <a:solidFill>
+                      <a:schemeClr val="bg1"/>
+                    </a:solidFill>
+                  </a:rPr>
+                  <a:t> </a:t>
+                </a:r>
+                <a:r>
+                  <a:rPr lang="en-US" dirty="0" err="1">
+                    <a:solidFill>
+                      <a:schemeClr val="bg1"/>
+                    </a:solidFill>
+                  </a:rPr>
+                  <a:t>ein</a:t>
+                </a:r>
+                <a:r>
+                  <a:rPr lang="en-US" dirty="0">
+                    <a:solidFill>
+                      <a:schemeClr val="bg1"/>
+                    </a:solidFill>
+                  </a:rPr>
+                  <a:t> </a:t>
+                </a:r>
+                <a:r>
+                  <a:rPr lang="en-US" dirty="0" err="1">
+                    <a:solidFill>
+                      <a:schemeClr val="bg1"/>
+                    </a:solidFill>
+                  </a:rPr>
+                  <a:t>Bezugssystem</a:t>
+                </a:r>
+                <a:r>
+                  <a:rPr lang="en-US" dirty="0">
+                    <a:solidFill>
+                      <a:schemeClr val="bg1"/>
+                    </a:solidFill>
+                  </a:rPr>
+                  <a:t>, </a:t>
+                </a:r>
+                <a:r>
+                  <a:rPr lang="en-US" dirty="0" err="1">
+                    <a:solidFill>
+                      <a:schemeClr val="bg1"/>
+                    </a:solidFill>
+                  </a:rPr>
+                  <a:t>dass</a:t>
+                </a:r>
+                <a:r>
+                  <a:rPr lang="en-US" dirty="0">
+                    <a:solidFill>
+                      <a:schemeClr val="bg1"/>
+                    </a:solidFill>
+                  </a:rPr>
+                  <a:t> </a:t>
+                </a:r>
+                <a:r>
+                  <a:rPr lang="en-US" dirty="0" err="1">
+                    <a:solidFill>
+                      <a:schemeClr val="bg1"/>
+                    </a:solidFill>
+                  </a:rPr>
+                  <a:t>sich</a:t>
+                </a:r>
+                <a:r>
+                  <a:rPr lang="en-US" dirty="0">
+                    <a:solidFill>
+                      <a:schemeClr val="bg1"/>
+                    </a:solidFill>
+                  </a:rPr>
+                  <a:t> </a:t>
+                </a:r>
+                <a:r>
+                  <a:rPr lang="en-US" dirty="0" err="1">
+                    <a:solidFill>
+                      <a:schemeClr val="bg1"/>
+                    </a:solidFill>
+                  </a:rPr>
+                  <a:t>mit</a:t>
+                </a:r>
+                <a:r>
+                  <a:rPr lang="en-US" dirty="0">
+                    <a:solidFill>
+                      <a:schemeClr val="bg1"/>
+                    </a:solidFill>
+                  </a:rPr>
+                  <a:t> </a:t>
+                </a:r>
+              </a:p>
+              <a:p>
+                <a14:m>
+                  <m:oMath xmlns:m="http://schemas.openxmlformats.org/officeDocument/2006/math">
+                    <m:r>
+                      <a:rPr lang="en-US" b="0" i="1" smtClean="0">
+                        <a:solidFill>
+                          <a:schemeClr val="bg1"/>
+                        </a:solidFill>
+                        <a:latin typeface="Cambria Math" panose="02040503050406030204" pitchFamily="18" charset="0"/>
+                      </a:rPr>
+                      <m:t>𝛽</m:t>
+                    </m:r>
+                    <m:r>
+                      <a:rPr lang="en-US" b="0" i="1" smtClean="0">
+                        <a:solidFill>
+                          <a:schemeClr val="bg1"/>
+                        </a:solidFill>
+                        <a:latin typeface="Cambria Math" panose="02040503050406030204" pitchFamily="18" charset="0"/>
+                      </a:rPr>
+                      <m:t>=0.6</m:t>
+                    </m:r>
+                  </m:oMath>
+                </a14:m>
+                <a:r>
+                  <a:rPr lang="en-US" dirty="0">
+                    <a:solidFill>
+                      <a:schemeClr val="bg1"/>
+                    </a:solidFill>
+                  </a:rPr>
+                  <a:t> fortbewegt:</a:t>
+                </a:r>
+              </a:p>
+              <a:p>
+                <a:endParaRPr lang="en-US" dirty="0">
+                  <a:solidFill>
+                    <a:schemeClr val="bg1"/>
+                  </a:solidFill>
+                </a:endParaRPr>
+              </a:p>
+              <a:p>
+                <a:r>
+                  <a:rPr lang="en-US" dirty="0" err="1">
+                    <a:solidFill>
+                      <a:schemeClr val="bg1"/>
+                    </a:solidFill>
+                  </a:rPr>
+                  <a:t>zum</a:t>
+                </a:r>
+                <a:r>
+                  <a:rPr lang="en-US" dirty="0">
+                    <a:solidFill>
+                      <a:schemeClr val="bg1"/>
+                    </a:solidFill>
+                  </a:rPr>
+                  <a:t> </a:t>
+                </a:r>
+                <a:r>
+                  <a:rPr lang="en-US" dirty="0" err="1">
+                    <a:solidFill>
+                      <a:schemeClr val="bg1"/>
+                    </a:solidFill>
+                  </a:rPr>
+                  <a:t>Zeitpunkt</a:t>
+                </a:r>
+                <a:r>
+                  <a:rPr lang="en-US" dirty="0">
+                    <a:solidFill>
+                      <a:schemeClr val="bg1"/>
+                    </a:solidFill>
+                  </a:rPr>
+                  <a:t> </a:t>
+                </a:r>
+                <a14:m>
+                  <m:oMath xmlns:m="http://schemas.openxmlformats.org/officeDocument/2006/math">
+                    <m:r>
+                      <a:rPr lang="en-US" b="0" i="1" smtClean="0">
+                        <a:solidFill>
+                          <a:schemeClr val="bg1"/>
+                        </a:solidFill>
+                        <a:latin typeface="Cambria Math" panose="02040503050406030204" pitchFamily="18" charset="0"/>
+                      </a:rPr>
+                      <m:t>𝑡</m:t>
+                    </m:r>
+                    <m:r>
+                      <a:rPr lang="en-US" b="0" i="1" smtClean="0">
+                        <a:solidFill>
+                          <a:schemeClr val="bg1"/>
+                        </a:solidFill>
+                        <a:latin typeface="Cambria Math" panose="02040503050406030204" pitchFamily="18" charset="0"/>
+                      </a:rPr>
+                      <m:t>=0</m:t>
+                    </m:r>
+                  </m:oMath>
+                </a14:m>
+                <a:r>
+                  <a:rPr lang="en-US" dirty="0">
+                    <a:solidFill>
+                      <a:schemeClr val="bg1"/>
+                    </a:solidFill>
+                  </a:rPr>
+                  <a:t> </a:t>
+                </a:r>
+                <a:r>
+                  <a:rPr lang="en-US" dirty="0" err="1">
+                    <a:solidFill>
+                      <a:schemeClr val="bg1"/>
+                    </a:solidFill>
+                  </a:rPr>
+                  <a:t>befinden</a:t>
+                </a:r>
+                <a:r>
+                  <a:rPr lang="en-US" dirty="0">
+                    <a:solidFill>
+                      <a:schemeClr val="bg1"/>
+                    </a:solidFill>
+                  </a:rPr>
+                  <a:t> </a:t>
+                </a:r>
+                <a:r>
+                  <a:rPr lang="en-US" dirty="0" err="1">
+                    <a:solidFill>
+                      <a:schemeClr val="bg1"/>
+                    </a:solidFill>
+                  </a:rPr>
+                  <a:t>wir</a:t>
+                </a:r>
+                <a:r>
+                  <a:rPr lang="en-US" dirty="0">
+                    <a:solidFill>
+                      <a:schemeClr val="bg1"/>
+                    </a:solidFill>
+                  </a:rPr>
+                  <a:t> </a:t>
+                </a:r>
+                <a:r>
+                  <a:rPr lang="en-US" dirty="0" err="1">
+                    <a:solidFill>
+                      <a:schemeClr val="bg1"/>
+                    </a:solidFill>
+                  </a:rPr>
+                  <a:t>uns</a:t>
+                </a:r>
+                <a:r>
+                  <a:rPr lang="en-US" dirty="0">
+                    <a:solidFill>
+                      <a:schemeClr val="bg1"/>
+                    </a:solidFill>
+                  </a:rPr>
+                  <a:t> </a:t>
+                </a:r>
+                <a:r>
+                  <a:rPr lang="en-US" dirty="0" err="1">
+                    <a:solidFill>
+                      <a:schemeClr val="bg1"/>
+                    </a:solidFill>
+                  </a:rPr>
+                  <a:t>im</a:t>
+                </a:r>
+                <a:r>
+                  <a:rPr lang="en-US" dirty="0">
+                    <a:solidFill>
+                      <a:schemeClr val="bg1"/>
+                    </a:solidFill>
+                  </a:rPr>
+                  <a:t> Ursprung;</a:t>
+                </a:r>
+              </a:p>
+              <a:p>
+                <a:endParaRPr lang="en-US" dirty="0">
+                  <a:solidFill>
+                    <a:schemeClr val="bg1"/>
+                  </a:solidFill>
+                </a:endParaRPr>
+              </a:p>
+              <a:p>
+                <a:r>
+                  <a:rPr lang="en-US" dirty="0" err="1">
+                    <a:solidFill>
+                      <a:schemeClr val="bg1"/>
+                    </a:solidFill>
+                  </a:rPr>
+                  <a:t>zum</a:t>
+                </a:r>
+                <a:r>
+                  <a:rPr lang="en-US" dirty="0">
+                    <a:solidFill>
+                      <a:schemeClr val="bg1"/>
+                    </a:solidFill>
+                  </a:rPr>
+                  <a:t> </a:t>
+                </a:r>
+                <a:r>
+                  <a:rPr lang="en-US" dirty="0" err="1">
+                    <a:solidFill>
+                      <a:schemeClr val="bg1"/>
+                    </a:solidFill>
+                  </a:rPr>
+                  <a:t>Zeitpunkt</a:t>
+                </a:r>
+                <a:r>
+                  <a:rPr lang="en-US" dirty="0">
+                    <a:solidFill>
+                      <a:schemeClr val="bg1"/>
+                    </a:solidFill>
+                  </a:rPr>
+                  <a:t> </a:t>
+                </a:r>
+                <a14:m>
+                  <m:oMath xmlns:m="http://schemas.openxmlformats.org/officeDocument/2006/math">
+                    <m:r>
+                      <a:rPr lang="en-US" b="0" i="1" smtClean="0">
+                        <a:solidFill>
+                          <a:schemeClr val="bg1"/>
+                        </a:solidFill>
+                        <a:latin typeface="Cambria Math" panose="02040503050406030204" pitchFamily="18" charset="0"/>
+                      </a:rPr>
+                      <m:t>𝑡</m:t>
+                    </m:r>
+                    <m:r>
+                      <a:rPr lang="en-US" b="0" i="1" smtClean="0">
+                        <a:solidFill>
+                          <a:schemeClr val="bg1"/>
+                        </a:solidFill>
+                        <a:latin typeface="Cambria Math" panose="02040503050406030204" pitchFamily="18" charset="0"/>
+                      </a:rPr>
+                      <m:t>=1</m:t>
+                    </m:r>
+                  </m:oMath>
+                </a14:m>
+                <a:r>
+                  <a:rPr lang="en-US" dirty="0">
+                    <a:solidFill>
+                      <a:schemeClr val="bg1"/>
+                    </a:solidFill>
+                  </a:rPr>
+                  <a:t> </a:t>
+                </a:r>
+                <a:r>
+                  <a:rPr lang="en-US" dirty="0" err="1">
+                    <a:solidFill>
+                      <a:schemeClr val="bg1"/>
+                    </a:solidFill>
+                  </a:rPr>
+                  <a:t>befinden</a:t>
+                </a:r>
+                <a:r>
+                  <a:rPr lang="en-US" dirty="0">
+                    <a:solidFill>
+                      <a:schemeClr val="bg1"/>
+                    </a:solidFill>
+                  </a:rPr>
+                  <a:t> </a:t>
+                </a:r>
+                <a:r>
+                  <a:rPr lang="en-US" dirty="0" err="1">
+                    <a:solidFill>
+                      <a:schemeClr val="bg1"/>
+                    </a:solidFill>
+                  </a:rPr>
+                  <a:t>wir</a:t>
+                </a:r>
+                <a:r>
+                  <a:rPr lang="en-US" dirty="0">
+                    <a:solidFill>
+                      <a:schemeClr val="bg1"/>
+                    </a:solidFill>
+                  </a:rPr>
+                  <a:t> </a:t>
+                </a:r>
+                <a:r>
+                  <a:rPr lang="en-US" dirty="0" err="1">
+                    <a:solidFill>
+                      <a:schemeClr val="bg1"/>
+                    </a:solidFill>
+                  </a:rPr>
+                  <a:t>uns</a:t>
+                </a:r>
+                <a:r>
+                  <a:rPr lang="en-US" dirty="0">
+                    <a:solidFill>
+                      <a:schemeClr val="bg1"/>
+                    </a:solidFill>
+                  </a:rPr>
+                  <a:t> </a:t>
+                </a:r>
+                <a:r>
+                  <a:rPr lang="en-US" dirty="0" err="1">
+                    <a:solidFill>
+                      <a:schemeClr val="bg1"/>
+                    </a:solidFill>
+                  </a:rPr>
+                  <a:t>bei</a:t>
+                </a:r>
+                <a:r>
+                  <a:rPr lang="en-US" dirty="0">
+                    <a:solidFill>
+                      <a:schemeClr val="bg1"/>
+                    </a:solidFill>
+                  </a:rPr>
+                  <a:t> </a:t>
+                </a:r>
+                <a14:m>
+                  <m:oMath xmlns:m="http://schemas.openxmlformats.org/officeDocument/2006/math">
+                    <m:r>
+                      <a:rPr lang="en-US" b="0" i="1" smtClean="0">
+                        <a:solidFill>
+                          <a:schemeClr val="bg1"/>
+                        </a:solidFill>
+                        <a:latin typeface="Cambria Math" panose="02040503050406030204" pitchFamily="18" charset="0"/>
+                      </a:rPr>
+                      <m:t>𝑧</m:t>
+                    </m:r>
+                    <m:r>
+                      <a:rPr lang="en-US" b="0" i="1" smtClean="0">
+                        <a:solidFill>
+                          <a:schemeClr val="bg1"/>
+                        </a:solidFill>
+                        <a:latin typeface="Cambria Math" panose="02040503050406030204" pitchFamily="18" charset="0"/>
+                      </a:rPr>
+                      <m:t>=0.6</m:t>
+                    </m:r>
+                  </m:oMath>
+                </a14:m>
+                <a:r>
+                  <a:rPr lang="en-US" dirty="0">
+                    <a:solidFill>
+                      <a:schemeClr val="bg1"/>
+                    </a:solidFill>
+                  </a:rPr>
+                  <a:t>;</a:t>
+                </a:r>
+              </a:p>
+              <a:p>
+                <a:endParaRPr lang="en-US" dirty="0">
+                  <a:solidFill>
+                    <a:schemeClr val="bg1"/>
+                  </a:solidFill>
+                </a:endParaRPr>
+              </a:p>
+              <a:p>
+                <a:r>
+                  <a:rPr lang="en-US" dirty="0" err="1">
+                    <a:solidFill>
+                      <a:schemeClr val="bg1"/>
+                    </a:solidFill>
+                  </a:rPr>
+                  <a:t>zum</a:t>
+                </a:r>
+                <a:r>
+                  <a:rPr lang="en-US" dirty="0">
+                    <a:solidFill>
+                      <a:schemeClr val="bg1"/>
+                    </a:solidFill>
+                  </a:rPr>
+                  <a:t> </a:t>
+                </a:r>
+                <a:r>
+                  <a:rPr lang="en-US" dirty="0" err="1">
+                    <a:solidFill>
+                      <a:schemeClr val="bg1"/>
+                    </a:solidFill>
+                  </a:rPr>
+                  <a:t>Zeitpunkt</a:t>
+                </a:r>
+                <a:r>
+                  <a:rPr lang="en-US" dirty="0">
+                    <a:solidFill>
+                      <a:schemeClr val="bg1"/>
+                    </a:solidFill>
+                  </a:rPr>
+                  <a:t> </a:t>
+                </a:r>
+                <a14:m>
+                  <m:oMath xmlns:m="http://schemas.openxmlformats.org/officeDocument/2006/math">
+                    <m:r>
+                      <a:rPr lang="en-US" b="0" i="1" smtClean="0">
+                        <a:solidFill>
+                          <a:schemeClr val="bg1"/>
+                        </a:solidFill>
+                        <a:latin typeface="Cambria Math" panose="02040503050406030204" pitchFamily="18" charset="0"/>
+                      </a:rPr>
+                      <m:t>𝑡</m:t>
+                    </m:r>
+                    <m:r>
+                      <a:rPr lang="en-US" b="0" i="1" smtClean="0">
+                        <a:solidFill>
+                          <a:schemeClr val="bg1"/>
+                        </a:solidFill>
+                        <a:latin typeface="Cambria Math" panose="02040503050406030204" pitchFamily="18" charset="0"/>
+                      </a:rPr>
+                      <m:t>=2</m:t>
+                    </m:r>
+                  </m:oMath>
+                </a14:m>
+                <a:r>
+                  <a:rPr lang="en-US" dirty="0">
+                    <a:solidFill>
+                      <a:schemeClr val="bg1"/>
+                    </a:solidFill>
+                  </a:rPr>
+                  <a:t> </a:t>
+                </a:r>
+                <a:r>
+                  <a:rPr lang="en-US" dirty="0" err="1">
+                    <a:solidFill>
+                      <a:schemeClr val="bg1"/>
+                    </a:solidFill>
+                  </a:rPr>
+                  <a:t>befinden</a:t>
+                </a:r>
+                <a:r>
+                  <a:rPr lang="en-US" dirty="0">
+                    <a:solidFill>
+                      <a:schemeClr val="bg1"/>
+                    </a:solidFill>
+                  </a:rPr>
+                  <a:t> </a:t>
+                </a:r>
+                <a:r>
+                  <a:rPr lang="en-US" dirty="0" err="1">
+                    <a:solidFill>
+                      <a:schemeClr val="bg1"/>
+                    </a:solidFill>
+                  </a:rPr>
+                  <a:t>wir</a:t>
+                </a:r>
+                <a:r>
+                  <a:rPr lang="en-US" dirty="0">
+                    <a:solidFill>
+                      <a:schemeClr val="bg1"/>
+                    </a:solidFill>
+                  </a:rPr>
+                  <a:t> </a:t>
+                </a:r>
+                <a:r>
+                  <a:rPr lang="en-US" dirty="0" err="1">
+                    <a:solidFill>
+                      <a:schemeClr val="bg1"/>
+                    </a:solidFill>
+                  </a:rPr>
+                  <a:t>uns</a:t>
+                </a:r>
+                <a:r>
+                  <a:rPr lang="en-US" dirty="0">
+                    <a:solidFill>
+                      <a:schemeClr val="bg1"/>
+                    </a:solidFill>
+                  </a:rPr>
+                  <a:t> </a:t>
+                </a:r>
+                <a:r>
+                  <a:rPr lang="en-US" dirty="0" err="1">
+                    <a:solidFill>
+                      <a:schemeClr val="bg1"/>
+                    </a:solidFill>
+                  </a:rPr>
+                  <a:t>bei</a:t>
+                </a:r>
+                <a:r>
+                  <a:rPr lang="en-US" dirty="0">
+                    <a:solidFill>
+                      <a:schemeClr val="bg1"/>
+                    </a:solidFill>
+                  </a:rPr>
+                  <a:t> </a:t>
+                </a:r>
+                <a14:m>
+                  <m:oMath xmlns:m="http://schemas.openxmlformats.org/officeDocument/2006/math">
+                    <m:r>
+                      <a:rPr lang="en-US" b="0" i="1" smtClean="0">
+                        <a:solidFill>
+                          <a:schemeClr val="bg1"/>
+                        </a:solidFill>
+                        <a:latin typeface="Cambria Math" panose="02040503050406030204" pitchFamily="18" charset="0"/>
+                      </a:rPr>
+                      <m:t>𝑧</m:t>
+                    </m:r>
+                    <m:r>
+                      <a:rPr lang="en-US" b="0" i="1" smtClean="0">
+                        <a:solidFill>
+                          <a:schemeClr val="bg1"/>
+                        </a:solidFill>
+                        <a:latin typeface="Cambria Math" panose="02040503050406030204" pitchFamily="18" charset="0"/>
+                      </a:rPr>
+                      <m:t>=1.2</m:t>
+                    </m:r>
+                  </m:oMath>
+                </a14:m>
+                <a:endParaRPr lang="en-US" dirty="0">
+                  <a:solidFill>
+                    <a:schemeClr val="bg1"/>
+                  </a:solidFill>
+                </a:endParaRPr>
+              </a:p>
+              <a:p>
+                <a:endParaRPr lang="en-US" dirty="0">
+                  <a:solidFill>
+                    <a:schemeClr val="bg1"/>
+                  </a:solidFill>
+                </a:endParaRPr>
+              </a:p>
+              <a:p>
+                <a:r>
+                  <a:rPr lang="en-US" dirty="0">
+                    <a:solidFill>
+                      <a:schemeClr val="bg1"/>
+                    </a:solidFill>
+                  </a:rPr>
+                  <a:t>und </a:t>
+                </a:r>
+                <a:r>
+                  <a:rPr lang="en-US" dirty="0" err="1">
+                    <a:solidFill>
+                      <a:schemeClr val="bg1"/>
+                    </a:solidFill>
+                  </a:rPr>
+                  <a:t>zum</a:t>
+                </a:r>
+                <a:r>
+                  <a:rPr lang="en-US" dirty="0">
+                    <a:solidFill>
+                      <a:schemeClr val="bg1"/>
+                    </a:solidFill>
+                  </a:rPr>
+                  <a:t> </a:t>
+                </a:r>
+                <a:r>
+                  <a:rPr lang="en-US" dirty="0" err="1">
+                    <a:solidFill>
+                      <a:schemeClr val="bg1"/>
+                    </a:solidFill>
+                  </a:rPr>
+                  <a:t>Zeitpunkt</a:t>
+                </a:r>
+                <a:r>
+                  <a:rPr lang="en-US" dirty="0">
+                    <a:solidFill>
+                      <a:schemeClr val="bg1"/>
+                    </a:solidFill>
+                  </a:rPr>
+                  <a:t> </a:t>
+                </a:r>
+                <a14:m>
+                  <m:oMath xmlns:m="http://schemas.openxmlformats.org/officeDocument/2006/math">
+                    <m:r>
+                      <a:rPr lang="en-US" b="0" i="1" smtClean="0">
+                        <a:solidFill>
+                          <a:schemeClr val="bg1"/>
+                        </a:solidFill>
+                        <a:latin typeface="Cambria Math" panose="02040503050406030204" pitchFamily="18" charset="0"/>
+                      </a:rPr>
+                      <m:t>𝑡</m:t>
+                    </m:r>
+                    <m:r>
+                      <a:rPr lang="en-US" b="0" i="1" smtClean="0">
+                        <a:solidFill>
+                          <a:schemeClr val="bg1"/>
+                        </a:solidFill>
+                        <a:latin typeface="Cambria Math" panose="02040503050406030204" pitchFamily="18" charset="0"/>
+                      </a:rPr>
+                      <m:t>=3</m:t>
+                    </m:r>
+                  </m:oMath>
+                </a14:m>
+                <a:r>
+                  <a:rPr lang="en-US" dirty="0">
+                    <a:solidFill>
+                      <a:schemeClr val="bg1"/>
+                    </a:solidFill>
+                  </a:rPr>
+                  <a:t> </a:t>
+                </a:r>
+                <a:r>
+                  <a:rPr lang="en-US" dirty="0" err="1">
+                    <a:solidFill>
+                      <a:schemeClr val="bg1"/>
+                    </a:solidFill>
+                  </a:rPr>
+                  <a:t>befinden</a:t>
+                </a:r>
+                <a:r>
+                  <a:rPr lang="en-US" dirty="0">
+                    <a:solidFill>
+                      <a:schemeClr val="bg1"/>
+                    </a:solidFill>
+                  </a:rPr>
+                  <a:t> </a:t>
+                </a:r>
+                <a:r>
+                  <a:rPr lang="en-US" dirty="0" err="1">
+                    <a:solidFill>
+                      <a:schemeClr val="bg1"/>
+                    </a:solidFill>
+                  </a:rPr>
+                  <a:t>wir</a:t>
+                </a:r>
+                <a:r>
+                  <a:rPr lang="en-US" dirty="0">
+                    <a:solidFill>
+                      <a:schemeClr val="bg1"/>
+                    </a:solidFill>
+                  </a:rPr>
+                  <a:t> </a:t>
+                </a:r>
+                <a:r>
+                  <a:rPr lang="en-US" dirty="0" err="1">
+                    <a:solidFill>
+                      <a:schemeClr val="bg1"/>
+                    </a:solidFill>
+                  </a:rPr>
+                  <a:t>uns</a:t>
+                </a:r>
+                <a:r>
+                  <a:rPr lang="en-US" dirty="0">
+                    <a:solidFill>
+                      <a:schemeClr val="bg1"/>
+                    </a:solidFill>
+                  </a:rPr>
+                  <a:t> </a:t>
+                </a:r>
+                <a:r>
+                  <a:rPr lang="en-US" dirty="0" err="1">
+                    <a:solidFill>
+                      <a:schemeClr val="bg1"/>
+                    </a:solidFill>
+                  </a:rPr>
+                  <a:t>bei</a:t>
+                </a:r>
+                <a:r>
+                  <a:rPr lang="en-US" dirty="0">
+                    <a:solidFill>
+                      <a:schemeClr val="bg1"/>
+                    </a:solidFill>
+                  </a:rPr>
+                  <a:t> </a:t>
+                </a:r>
+                <a14:m>
+                  <m:oMath xmlns:m="http://schemas.openxmlformats.org/officeDocument/2006/math">
+                    <m:r>
+                      <a:rPr lang="en-US" b="0" i="1" smtClean="0">
+                        <a:solidFill>
+                          <a:schemeClr val="bg1"/>
+                        </a:solidFill>
+                        <a:latin typeface="Cambria Math" panose="02040503050406030204" pitchFamily="18" charset="0"/>
+                      </a:rPr>
+                      <m:t>𝑧</m:t>
+                    </m:r>
+                    <m:r>
+                      <a:rPr lang="en-US" b="0" i="1" smtClean="0">
+                        <a:solidFill>
+                          <a:schemeClr val="bg1"/>
+                        </a:solidFill>
+                        <a:latin typeface="Cambria Math" panose="02040503050406030204" pitchFamily="18" charset="0"/>
+                      </a:rPr>
+                      <m:t>=1.8</m:t>
+                    </m:r>
+                  </m:oMath>
+                </a14:m>
+                <a:endParaRPr lang="en-US" dirty="0">
+                  <a:solidFill>
+                    <a:schemeClr val="bg1"/>
+                  </a:solidFill>
+                </a:endParaRPr>
+              </a:p>
+            </p:txBody>
+          </p:sp>
+        </mc:Choice>
+        <mc:Fallback>
+          <p:sp>
+            <p:nvSpPr>
+              <p:cNvPr id="2" name="TextBox 1">
+                <a:extLst>
+                  <a:ext uri="{FF2B5EF4-FFF2-40B4-BE49-F238E27FC236}">
+                    <a16:creationId xmlns:a16="http://schemas.microsoft.com/office/drawing/2014/main" id="{662D735B-A4BE-22E0-F309-2A156115FF34}"/>
+                  </a:ext>
+                </a:extLst>
+              </p:cNvPr>
+              <p:cNvSpPr txBox="1">
+                <a:spLocks noRot="1" noChangeAspect="1" noMove="1" noResize="1" noEditPoints="1" noAdjustHandles="1" noChangeArrowheads="1" noChangeShapeType="1" noTextEdit="1"/>
+              </p:cNvSpPr>
+              <p:nvPr/>
+            </p:nvSpPr>
+            <p:spPr>
+              <a:xfrm>
+                <a:off x="8547652" y="153348"/>
+                <a:ext cx="3475855" cy="4247317"/>
+              </a:xfrm>
+              <a:prstGeom prst="rect">
+                <a:avLst/>
+              </a:prstGeom>
+              <a:blipFill>
+                <a:blip r:embed="rId3"/>
+                <a:stretch>
+                  <a:fillRect l="-1404" t="-717" b="-1291"/>
+                </a:stretch>
+              </a:blipFill>
+            </p:spPr>
+            <p:txBody>
+              <a:bodyPr/>
+              <a:lstStyle/>
+              <a:p>
+                <a:r>
+                  <a:rPr lang="en-CH">
+                    <a:noFill/>
+                  </a:rPr>
+                  <a:t> </a:t>
+                </a:r>
+              </a:p>
+            </p:txBody>
+          </p:sp>
+        </mc:Fallback>
+      </mc:AlternateContent>
+    </p:spTree>
+    <p:extLst>
+      <p:ext uri="{BB962C8B-B14F-4D97-AF65-F5344CB8AC3E}">
+        <p14:creationId xmlns:p14="http://schemas.microsoft.com/office/powerpoint/2010/main" val="2095999723"/>
+      </p:ext>
+    </p:extLst>
+  </p:cSld>
+  <p:clrMapOvr>
+    <a:masterClrMapping/>
+  </p:clrMapOvr>
+</p:sld>
+</file>
+
+<file path=ppt/slides/slide25.xml><?xml version="1.0" encoding="utf-8"?>
+<p:sld xmlns:a="http://schemas.openxmlformats.org/drawingml/2006/main" xmlns:r="http://schemas.openxmlformats.org/officeDocument/2006/relationships" xmlns:p="http://schemas.openxmlformats.org/presentationml/2006/main">
+  <p:cSld>
+    <p:spTree>
+      <p:nvGrpSpPr>
+        <p:cNvPr id="1" name="">
+          <a:extLst>
+            <a:ext uri="{FF2B5EF4-FFF2-40B4-BE49-F238E27FC236}">
+              <a16:creationId xmlns:a16="http://schemas.microsoft.com/office/drawing/2014/main" id="{924CF645-E0AF-5C3A-9737-FCADD88CB936}"/>
+            </a:ext>
+          </a:extLst>
+        </p:cNvPr>
+        <p:cNvGrpSpPr/>
+        <p:nvPr/>
+      </p:nvGrpSpPr>
+      <p:grpSpPr>
+        <a:xfrm>
+          <a:off x="0" y="0"/>
+          <a:ext cx="0" cy="0"/>
+          <a:chOff x="0" y="0"/>
+          <a:chExt cx="0" cy="0"/>
+        </a:xfrm>
+      </p:grpSpPr>
+      <p:pic>
+        <p:nvPicPr>
+          <p:cNvPr id="4" name="Content Placeholder 3">
+            <a:extLst>
+              <a:ext uri="{FF2B5EF4-FFF2-40B4-BE49-F238E27FC236}">
+                <a16:creationId xmlns:a16="http://schemas.microsoft.com/office/drawing/2014/main" id="{04BC72C8-8E32-6528-F219-8317B83D0442}"/>
+              </a:ext>
+            </a:extLst>
+          </p:cNvPr>
+          <p:cNvPicPr>
+            <a:picLocks noGrp="1" noChangeAspect="1"/>
+          </p:cNvPicPr>
+          <p:nvPr>
+            <p:ph idx="1"/>
+          </p:nvPr>
+        </p:nvPicPr>
+        <p:blipFill>
+          <a:blip r:link="rId2"/>
+          <a:srcRect/>
+          <a:stretch>
+            <a:fillRect/>
+          </a:stretch>
+        </p:blipFill>
+        <p:spPr>
+          <a:xfrm>
+            <a:off x="439948" y="-422692"/>
+            <a:ext cx="7556740" cy="7556740"/>
+          </a:xfrm>
+        </p:spPr>
+      </p:pic>
+      <mc:AlternateContent xmlns:mc="http://schemas.openxmlformats.org/markup-compatibility/2006">
+        <mc:Choice xmlns:a14="http://schemas.microsoft.com/office/drawing/2010/main" Requires="a14">
+          <p:sp>
+            <p:nvSpPr>
+              <p:cNvPr id="2" name="TextBox 1">
+                <a:extLst>
+                  <a:ext uri="{FF2B5EF4-FFF2-40B4-BE49-F238E27FC236}">
+                    <a16:creationId xmlns:a16="http://schemas.microsoft.com/office/drawing/2014/main" id="{E40365A2-DEF5-BF6A-A16D-BB157E5A1836}"/>
+                  </a:ext>
+                </a:extLst>
+              </p:cNvPr>
+              <p:cNvSpPr txBox="1"/>
+              <p:nvPr/>
+            </p:nvSpPr>
+            <p:spPr>
+              <a:xfrm>
+                <a:off x="8547652" y="153348"/>
+                <a:ext cx="3475855" cy="6753387"/>
+              </a:xfrm>
+              <a:prstGeom prst="rect">
+                <a:avLst/>
+              </a:prstGeom>
+              <a:noFill/>
+            </p:spPr>
+            <p:txBody>
+              <a:bodyPr wrap="square" rtlCol="0">
+                <a:spAutoFit/>
+              </a:bodyPr>
+              <a:lstStyle/>
+              <a:p>
+                <a:r>
+                  <a:rPr lang="en-US" dirty="0">
+                    <a:solidFill>
+                      <a:schemeClr val="bg1"/>
+                    </a:solidFill>
+                  </a:rPr>
+                  <a:t>Wir </a:t>
+                </a:r>
+                <a:r>
+                  <a:rPr lang="en-US" dirty="0" err="1">
+                    <a:solidFill>
+                      <a:schemeClr val="bg1"/>
+                    </a:solidFill>
+                  </a:rPr>
+                  <a:t>betrachten</a:t>
+                </a:r>
+                <a:r>
+                  <a:rPr lang="en-US" dirty="0">
+                    <a:solidFill>
+                      <a:schemeClr val="bg1"/>
+                    </a:solidFill>
+                  </a:rPr>
+                  <a:t> </a:t>
+                </a:r>
+                <a:r>
+                  <a:rPr lang="en-US" dirty="0" err="1">
+                    <a:solidFill>
+                      <a:schemeClr val="bg1"/>
+                    </a:solidFill>
+                  </a:rPr>
+                  <a:t>jetzt</a:t>
+                </a:r>
+                <a:r>
+                  <a:rPr lang="en-US" dirty="0">
+                    <a:solidFill>
+                      <a:schemeClr val="bg1"/>
+                    </a:solidFill>
+                  </a:rPr>
+                  <a:t> </a:t>
+                </a:r>
+                <a:r>
+                  <a:rPr lang="en-US" dirty="0" err="1">
+                    <a:solidFill>
+                      <a:schemeClr val="bg1"/>
+                    </a:solidFill>
+                  </a:rPr>
+                  <a:t>ein</a:t>
+                </a:r>
+                <a:r>
+                  <a:rPr lang="en-US" dirty="0">
+                    <a:solidFill>
+                      <a:schemeClr val="bg1"/>
+                    </a:solidFill>
+                  </a:rPr>
+                  <a:t> </a:t>
+                </a:r>
+                <a:r>
+                  <a:rPr lang="en-US" dirty="0" err="1">
+                    <a:solidFill>
+                      <a:schemeClr val="bg1"/>
+                    </a:solidFill>
+                  </a:rPr>
+                  <a:t>Bezugssystem</a:t>
+                </a:r>
+                <a:r>
+                  <a:rPr lang="en-US" dirty="0">
+                    <a:solidFill>
+                      <a:schemeClr val="bg1"/>
+                    </a:solidFill>
+                  </a:rPr>
+                  <a:t>, </a:t>
+                </a:r>
+                <a:r>
+                  <a:rPr lang="en-US" dirty="0" err="1">
+                    <a:solidFill>
+                      <a:schemeClr val="bg1"/>
+                    </a:solidFill>
+                  </a:rPr>
+                  <a:t>dass</a:t>
+                </a:r>
+                <a:r>
+                  <a:rPr lang="en-US" dirty="0">
+                    <a:solidFill>
+                      <a:schemeClr val="bg1"/>
+                    </a:solidFill>
+                  </a:rPr>
+                  <a:t> </a:t>
+                </a:r>
+                <a:r>
+                  <a:rPr lang="en-US" dirty="0" err="1">
+                    <a:solidFill>
+                      <a:schemeClr val="bg1"/>
+                    </a:solidFill>
+                  </a:rPr>
+                  <a:t>sich</a:t>
+                </a:r>
+                <a:r>
+                  <a:rPr lang="en-US" dirty="0">
+                    <a:solidFill>
+                      <a:schemeClr val="bg1"/>
+                    </a:solidFill>
+                  </a:rPr>
+                  <a:t> </a:t>
+                </a:r>
+                <a:r>
+                  <a:rPr lang="en-US" dirty="0" err="1">
+                    <a:solidFill>
+                      <a:schemeClr val="bg1"/>
+                    </a:solidFill>
+                  </a:rPr>
+                  <a:t>mit</a:t>
+                </a:r>
+                <a:r>
+                  <a:rPr lang="en-US" dirty="0">
+                    <a:solidFill>
+                      <a:schemeClr val="bg1"/>
+                    </a:solidFill>
+                  </a:rPr>
+                  <a:t> </a:t>
+                </a:r>
+              </a:p>
+              <a:p>
+                <a14:m>
+                  <m:oMath xmlns:m="http://schemas.openxmlformats.org/officeDocument/2006/math">
+                    <m:r>
+                      <a:rPr lang="en-US" b="0" i="1" smtClean="0">
+                        <a:solidFill>
+                          <a:schemeClr val="bg1"/>
+                        </a:solidFill>
+                        <a:latin typeface="Cambria Math" panose="02040503050406030204" pitchFamily="18" charset="0"/>
+                      </a:rPr>
+                      <m:t>𝛽</m:t>
+                    </m:r>
+                    <m:r>
+                      <a:rPr lang="en-US" b="0" i="1" smtClean="0">
+                        <a:solidFill>
+                          <a:schemeClr val="bg1"/>
+                        </a:solidFill>
+                        <a:latin typeface="Cambria Math" panose="02040503050406030204" pitchFamily="18" charset="0"/>
+                      </a:rPr>
+                      <m:t>=0.6</m:t>
+                    </m:r>
+                  </m:oMath>
+                </a14:m>
+                <a:r>
+                  <a:rPr lang="en-US" dirty="0">
+                    <a:solidFill>
+                      <a:schemeClr val="bg1"/>
+                    </a:solidFill>
+                  </a:rPr>
+                  <a:t> fortbewegt:</a:t>
+                </a:r>
+              </a:p>
+              <a:p>
+                <a:endParaRPr lang="en-US" dirty="0">
+                  <a:solidFill>
+                    <a:schemeClr val="bg1"/>
+                  </a:solidFill>
+                </a:endParaRPr>
+              </a:p>
+              <a:p>
+                <a:r>
+                  <a:rPr lang="en-US" dirty="0" err="1">
+                    <a:solidFill>
+                      <a:schemeClr val="bg1"/>
+                    </a:solidFill>
+                  </a:rPr>
+                  <a:t>zum</a:t>
+                </a:r>
+                <a:r>
+                  <a:rPr lang="en-US" dirty="0">
+                    <a:solidFill>
+                      <a:schemeClr val="bg1"/>
+                    </a:solidFill>
+                  </a:rPr>
+                  <a:t> </a:t>
+                </a:r>
+                <a:r>
+                  <a:rPr lang="en-US" dirty="0" err="1">
+                    <a:solidFill>
+                      <a:schemeClr val="bg1"/>
+                    </a:solidFill>
+                  </a:rPr>
+                  <a:t>Zeitpunkt</a:t>
+                </a:r>
+                <a:r>
+                  <a:rPr lang="en-US" dirty="0">
+                    <a:solidFill>
+                      <a:schemeClr val="bg1"/>
+                    </a:solidFill>
+                  </a:rPr>
+                  <a:t> </a:t>
+                </a:r>
+                <a14:m>
+                  <m:oMath xmlns:m="http://schemas.openxmlformats.org/officeDocument/2006/math">
+                    <m:r>
+                      <a:rPr lang="en-US" b="0" i="1" smtClean="0">
+                        <a:solidFill>
+                          <a:schemeClr val="bg1"/>
+                        </a:solidFill>
+                        <a:latin typeface="Cambria Math" panose="02040503050406030204" pitchFamily="18" charset="0"/>
+                      </a:rPr>
+                      <m:t>𝑡</m:t>
+                    </m:r>
+                    <m:r>
+                      <a:rPr lang="en-US" b="0" i="1" smtClean="0">
+                        <a:solidFill>
+                          <a:schemeClr val="bg1"/>
+                        </a:solidFill>
+                        <a:latin typeface="Cambria Math" panose="02040503050406030204" pitchFamily="18" charset="0"/>
+                      </a:rPr>
+                      <m:t>=0</m:t>
+                    </m:r>
+                  </m:oMath>
+                </a14:m>
+                <a:r>
+                  <a:rPr lang="en-US" dirty="0">
+                    <a:solidFill>
+                      <a:schemeClr val="bg1"/>
+                    </a:solidFill>
+                  </a:rPr>
+                  <a:t> </a:t>
+                </a:r>
+                <a:r>
+                  <a:rPr lang="en-US" dirty="0" err="1">
+                    <a:solidFill>
+                      <a:schemeClr val="bg1"/>
+                    </a:solidFill>
+                  </a:rPr>
+                  <a:t>befinden</a:t>
+                </a:r>
+                <a:r>
+                  <a:rPr lang="en-US" dirty="0">
+                    <a:solidFill>
+                      <a:schemeClr val="bg1"/>
+                    </a:solidFill>
+                  </a:rPr>
+                  <a:t> </a:t>
+                </a:r>
+                <a:r>
+                  <a:rPr lang="en-US" dirty="0" err="1">
+                    <a:solidFill>
+                      <a:schemeClr val="bg1"/>
+                    </a:solidFill>
+                  </a:rPr>
+                  <a:t>wir</a:t>
+                </a:r>
+                <a:r>
+                  <a:rPr lang="en-US" dirty="0">
+                    <a:solidFill>
+                      <a:schemeClr val="bg1"/>
+                    </a:solidFill>
+                  </a:rPr>
+                  <a:t> </a:t>
+                </a:r>
+                <a:r>
+                  <a:rPr lang="en-US" dirty="0" err="1">
+                    <a:solidFill>
+                      <a:schemeClr val="bg1"/>
+                    </a:solidFill>
+                  </a:rPr>
+                  <a:t>uns</a:t>
+                </a:r>
+                <a:r>
+                  <a:rPr lang="en-US" dirty="0">
+                    <a:solidFill>
+                      <a:schemeClr val="bg1"/>
+                    </a:solidFill>
+                  </a:rPr>
+                  <a:t> </a:t>
+                </a:r>
+                <a:r>
+                  <a:rPr lang="en-US" dirty="0" err="1">
+                    <a:solidFill>
+                      <a:schemeClr val="bg1"/>
+                    </a:solidFill>
+                  </a:rPr>
+                  <a:t>im</a:t>
+                </a:r>
+                <a:r>
+                  <a:rPr lang="en-US" dirty="0">
+                    <a:solidFill>
+                      <a:schemeClr val="bg1"/>
+                    </a:solidFill>
+                  </a:rPr>
+                  <a:t> Ursprung;</a:t>
+                </a:r>
+              </a:p>
+              <a:p>
+                <a:endParaRPr lang="en-US" dirty="0">
+                  <a:solidFill>
+                    <a:schemeClr val="bg1"/>
+                  </a:solidFill>
+                </a:endParaRPr>
+              </a:p>
+              <a:p>
+                <a:r>
+                  <a:rPr lang="en-US" dirty="0" err="1">
+                    <a:solidFill>
+                      <a:schemeClr val="bg1"/>
+                    </a:solidFill>
+                  </a:rPr>
+                  <a:t>zum</a:t>
+                </a:r>
+                <a:r>
+                  <a:rPr lang="en-US" dirty="0">
+                    <a:solidFill>
+                      <a:schemeClr val="bg1"/>
+                    </a:solidFill>
+                  </a:rPr>
+                  <a:t> </a:t>
+                </a:r>
+                <a:r>
+                  <a:rPr lang="en-US" dirty="0" err="1">
+                    <a:solidFill>
+                      <a:schemeClr val="bg1"/>
+                    </a:solidFill>
+                  </a:rPr>
+                  <a:t>Zeitpunkt</a:t>
+                </a:r>
+                <a:r>
+                  <a:rPr lang="en-US" dirty="0">
+                    <a:solidFill>
+                      <a:schemeClr val="bg1"/>
+                    </a:solidFill>
+                  </a:rPr>
+                  <a:t> </a:t>
+                </a:r>
+                <a14:m>
+                  <m:oMath xmlns:m="http://schemas.openxmlformats.org/officeDocument/2006/math">
+                    <m:r>
+                      <a:rPr lang="en-US" b="0" i="1" smtClean="0">
+                        <a:solidFill>
+                          <a:schemeClr val="bg1"/>
+                        </a:solidFill>
+                        <a:latin typeface="Cambria Math" panose="02040503050406030204" pitchFamily="18" charset="0"/>
+                      </a:rPr>
+                      <m:t>𝑡</m:t>
+                    </m:r>
+                    <m:r>
+                      <a:rPr lang="en-US" b="0" i="1" smtClean="0">
+                        <a:solidFill>
+                          <a:schemeClr val="bg1"/>
+                        </a:solidFill>
+                        <a:latin typeface="Cambria Math" panose="02040503050406030204" pitchFamily="18" charset="0"/>
+                      </a:rPr>
+                      <m:t>=1</m:t>
+                    </m:r>
+                  </m:oMath>
+                </a14:m>
+                <a:r>
+                  <a:rPr lang="en-US" dirty="0">
+                    <a:solidFill>
+                      <a:schemeClr val="bg1"/>
+                    </a:solidFill>
+                  </a:rPr>
+                  <a:t> </a:t>
+                </a:r>
+                <a:r>
+                  <a:rPr lang="en-US" dirty="0" err="1">
+                    <a:solidFill>
+                      <a:schemeClr val="bg1"/>
+                    </a:solidFill>
+                  </a:rPr>
+                  <a:t>befinden</a:t>
+                </a:r>
+                <a:r>
+                  <a:rPr lang="en-US" dirty="0">
+                    <a:solidFill>
+                      <a:schemeClr val="bg1"/>
+                    </a:solidFill>
+                  </a:rPr>
+                  <a:t> </a:t>
+                </a:r>
+                <a:r>
+                  <a:rPr lang="en-US" dirty="0" err="1">
+                    <a:solidFill>
+                      <a:schemeClr val="bg1"/>
+                    </a:solidFill>
+                  </a:rPr>
+                  <a:t>wir</a:t>
+                </a:r>
+                <a:r>
+                  <a:rPr lang="en-US" dirty="0">
+                    <a:solidFill>
+                      <a:schemeClr val="bg1"/>
+                    </a:solidFill>
+                  </a:rPr>
+                  <a:t> </a:t>
+                </a:r>
+                <a:r>
+                  <a:rPr lang="en-US" dirty="0" err="1">
+                    <a:solidFill>
+                      <a:schemeClr val="bg1"/>
+                    </a:solidFill>
+                  </a:rPr>
+                  <a:t>uns</a:t>
+                </a:r>
+                <a:r>
+                  <a:rPr lang="en-US" dirty="0">
+                    <a:solidFill>
+                      <a:schemeClr val="bg1"/>
+                    </a:solidFill>
+                  </a:rPr>
+                  <a:t> </a:t>
+                </a:r>
+                <a:r>
+                  <a:rPr lang="en-US" dirty="0" err="1">
+                    <a:solidFill>
+                      <a:schemeClr val="bg1"/>
+                    </a:solidFill>
+                  </a:rPr>
+                  <a:t>bei</a:t>
+                </a:r>
+                <a:r>
+                  <a:rPr lang="en-US" dirty="0">
+                    <a:solidFill>
+                      <a:schemeClr val="bg1"/>
+                    </a:solidFill>
+                  </a:rPr>
+                  <a:t> </a:t>
+                </a:r>
+                <a14:m>
+                  <m:oMath xmlns:m="http://schemas.openxmlformats.org/officeDocument/2006/math">
+                    <m:r>
+                      <a:rPr lang="en-US" b="0" i="1" smtClean="0">
+                        <a:solidFill>
+                          <a:schemeClr val="bg1"/>
+                        </a:solidFill>
+                        <a:latin typeface="Cambria Math" panose="02040503050406030204" pitchFamily="18" charset="0"/>
+                      </a:rPr>
+                      <m:t>𝑧</m:t>
+                    </m:r>
+                    <m:r>
+                      <a:rPr lang="en-US" b="0" i="1" smtClean="0">
+                        <a:solidFill>
+                          <a:schemeClr val="bg1"/>
+                        </a:solidFill>
+                        <a:latin typeface="Cambria Math" panose="02040503050406030204" pitchFamily="18" charset="0"/>
+                      </a:rPr>
+                      <m:t>=0.6</m:t>
+                    </m:r>
+                  </m:oMath>
+                </a14:m>
+                <a:r>
+                  <a:rPr lang="en-US" dirty="0">
+                    <a:solidFill>
+                      <a:schemeClr val="bg1"/>
+                    </a:solidFill>
+                  </a:rPr>
+                  <a:t>;</a:t>
+                </a:r>
+              </a:p>
+              <a:p>
+                <a:endParaRPr lang="en-US" dirty="0">
+                  <a:solidFill>
+                    <a:schemeClr val="bg1"/>
+                  </a:solidFill>
+                </a:endParaRPr>
+              </a:p>
+              <a:p>
+                <a:r>
+                  <a:rPr lang="en-US" dirty="0" err="1">
+                    <a:solidFill>
+                      <a:schemeClr val="bg1"/>
+                    </a:solidFill>
+                  </a:rPr>
+                  <a:t>zum</a:t>
+                </a:r>
+                <a:r>
+                  <a:rPr lang="en-US" dirty="0">
+                    <a:solidFill>
+                      <a:schemeClr val="bg1"/>
+                    </a:solidFill>
+                  </a:rPr>
+                  <a:t> </a:t>
+                </a:r>
+                <a:r>
+                  <a:rPr lang="en-US" dirty="0" err="1">
+                    <a:solidFill>
+                      <a:schemeClr val="bg1"/>
+                    </a:solidFill>
+                  </a:rPr>
+                  <a:t>Zeitpunkt</a:t>
+                </a:r>
+                <a:r>
+                  <a:rPr lang="en-US" dirty="0">
+                    <a:solidFill>
+                      <a:schemeClr val="bg1"/>
+                    </a:solidFill>
+                  </a:rPr>
+                  <a:t> </a:t>
+                </a:r>
+                <a14:m>
+                  <m:oMath xmlns:m="http://schemas.openxmlformats.org/officeDocument/2006/math">
+                    <m:r>
+                      <a:rPr lang="en-US" b="0" i="1" smtClean="0">
+                        <a:solidFill>
+                          <a:schemeClr val="bg1"/>
+                        </a:solidFill>
+                        <a:latin typeface="Cambria Math" panose="02040503050406030204" pitchFamily="18" charset="0"/>
+                      </a:rPr>
+                      <m:t>𝑡</m:t>
+                    </m:r>
+                    <m:r>
+                      <a:rPr lang="en-US" b="0" i="1" smtClean="0">
+                        <a:solidFill>
+                          <a:schemeClr val="bg1"/>
+                        </a:solidFill>
+                        <a:latin typeface="Cambria Math" panose="02040503050406030204" pitchFamily="18" charset="0"/>
+                      </a:rPr>
+                      <m:t>=2</m:t>
+                    </m:r>
+                  </m:oMath>
+                </a14:m>
+                <a:r>
+                  <a:rPr lang="en-US" dirty="0">
+                    <a:solidFill>
+                      <a:schemeClr val="bg1"/>
+                    </a:solidFill>
+                  </a:rPr>
+                  <a:t> </a:t>
+                </a:r>
+                <a:r>
+                  <a:rPr lang="en-US" dirty="0" err="1">
+                    <a:solidFill>
+                      <a:schemeClr val="bg1"/>
+                    </a:solidFill>
+                  </a:rPr>
+                  <a:t>befinden</a:t>
+                </a:r>
+                <a:r>
+                  <a:rPr lang="en-US" dirty="0">
+                    <a:solidFill>
+                      <a:schemeClr val="bg1"/>
+                    </a:solidFill>
+                  </a:rPr>
+                  <a:t> </a:t>
+                </a:r>
+                <a:r>
+                  <a:rPr lang="en-US" dirty="0" err="1">
+                    <a:solidFill>
+                      <a:schemeClr val="bg1"/>
+                    </a:solidFill>
+                  </a:rPr>
+                  <a:t>wir</a:t>
+                </a:r>
+                <a:r>
+                  <a:rPr lang="en-US" dirty="0">
+                    <a:solidFill>
+                      <a:schemeClr val="bg1"/>
+                    </a:solidFill>
+                  </a:rPr>
+                  <a:t> </a:t>
+                </a:r>
+                <a:r>
+                  <a:rPr lang="en-US" dirty="0" err="1">
+                    <a:solidFill>
+                      <a:schemeClr val="bg1"/>
+                    </a:solidFill>
+                  </a:rPr>
+                  <a:t>uns</a:t>
+                </a:r>
+                <a:r>
+                  <a:rPr lang="en-US" dirty="0">
+                    <a:solidFill>
+                      <a:schemeClr val="bg1"/>
+                    </a:solidFill>
+                  </a:rPr>
+                  <a:t> </a:t>
+                </a:r>
+                <a:r>
+                  <a:rPr lang="en-US" dirty="0" err="1">
+                    <a:solidFill>
+                      <a:schemeClr val="bg1"/>
+                    </a:solidFill>
+                  </a:rPr>
+                  <a:t>bei</a:t>
+                </a:r>
+                <a:r>
+                  <a:rPr lang="en-US" dirty="0">
+                    <a:solidFill>
+                      <a:schemeClr val="bg1"/>
+                    </a:solidFill>
+                  </a:rPr>
+                  <a:t> </a:t>
+                </a:r>
+                <a14:m>
+                  <m:oMath xmlns:m="http://schemas.openxmlformats.org/officeDocument/2006/math">
+                    <m:r>
+                      <a:rPr lang="en-US" b="0" i="1" smtClean="0">
+                        <a:solidFill>
+                          <a:schemeClr val="bg1"/>
+                        </a:solidFill>
+                        <a:latin typeface="Cambria Math" panose="02040503050406030204" pitchFamily="18" charset="0"/>
+                      </a:rPr>
+                      <m:t>𝑧</m:t>
+                    </m:r>
+                    <m:r>
+                      <a:rPr lang="en-US" b="0" i="1" smtClean="0">
+                        <a:solidFill>
+                          <a:schemeClr val="bg1"/>
+                        </a:solidFill>
+                        <a:latin typeface="Cambria Math" panose="02040503050406030204" pitchFamily="18" charset="0"/>
+                      </a:rPr>
+                      <m:t>=1.2</m:t>
+                    </m:r>
+                  </m:oMath>
+                </a14:m>
+                <a:endParaRPr lang="en-US" dirty="0">
+                  <a:solidFill>
+                    <a:schemeClr val="bg1"/>
+                  </a:solidFill>
+                </a:endParaRPr>
+              </a:p>
+              <a:p>
+                <a:endParaRPr lang="en-US" dirty="0">
+                  <a:solidFill>
+                    <a:schemeClr val="bg1"/>
+                  </a:solidFill>
+                </a:endParaRPr>
+              </a:p>
+              <a:p>
+                <a:r>
+                  <a:rPr lang="en-US" dirty="0">
+                    <a:solidFill>
+                      <a:schemeClr val="bg1"/>
+                    </a:solidFill>
+                  </a:rPr>
+                  <a:t>und </a:t>
+                </a:r>
+                <a:r>
+                  <a:rPr lang="en-US" dirty="0" err="1">
+                    <a:solidFill>
+                      <a:schemeClr val="bg1"/>
+                    </a:solidFill>
+                  </a:rPr>
+                  <a:t>zum</a:t>
+                </a:r>
+                <a:r>
+                  <a:rPr lang="en-US" dirty="0">
+                    <a:solidFill>
+                      <a:schemeClr val="bg1"/>
+                    </a:solidFill>
+                  </a:rPr>
+                  <a:t> </a:t>
+                </a:r>
+                <a:r>
+                  <a:rPr lang="en-US" dirty="0" err="1">
+                    <a:solidFill>
+                      <a:schemeClr val="bg1"/>
+                    </a:solidFill>
+                  </a:rPr>
+                  <a:t>Zeitpunkt</a:t>
+                </a:r>
+                <a:r>
+                  <a:rPr lang="en-US" dirty="0">
+                    <a:solidFill>
+                      <a:schemeClr val="bg1"/>
+                    </a:solidFill>
+                  </a:rPr>
+                  <a:t> </a:t>
+                </a:r>
+                <a14:m>
+                  <m:oMath xmlns:m="http://schemas.openxmlformats.org/officeDocument/2006/math">
+                    <m:r>
+                      <a:rPr lang="en-US" b="0" i="1" smtClean="0">
+                        <a:solidFill>
+                          <a:schemeClr val="bg1"/>
+                        </a:solidFill>
+                        <a:latin typeface="Cambria Math" panose="02040503050406030204" pitchFamily="18" charset="0"/>
+                      </a:rPr>
+                      <m:t>𝑡</m:t>
+                    </m:r>
+                    <m:r>
+                      <a:rPr lang="en-US" b="0" i="1" smtClean="0">
+                        <a:solidFill>
+                          <a:schemeClr val="bg1"/>
+                        </a:solidFill>
+                        <a:latin typeface="Cambria Math" panose="02040503050406030204" pitchFamily="18" charset="0"/>
+                      </a:rPr>
+                      <m:t>=3</m:t>
+                    </m:r>
+                  </m:oMath>
+                </a14:m>
+                <a:r>
+                  <a:rPr lang="en-US" dirty="0">
+                    <a:solidFill>
+                      <a:schemeClr val="bg1"/>
+                    </a:solidFill>
+                  </a:rPr>
+                  <a:t> </a:t>
+                </a:r>
+                <a:r>
+                  <a:rPr lang="en-US" dirty="0" err="1">
+                    <a:solidFill>
+                      <a:schemeClr val="bg1"/>
+                    </a:solidFill>
+                  </a:rPr>
+                  <a:t>befinden</a:t>
+                </a:r>
+                <a:r>
+                  <a:rPr lang="en-US" dirty="0">
+                    <a:solidFill>
+                      <a:schemeClr val="bg1"/>
+                    </a:solidFill>
+                  </a:rPr>
+                  <a:t> </a:t>
+                </a:r>
+                <a:r>
+                  <a:rPr lang="en-US" dirty="0" err="1">
+                    <a:solidFill>
+                      <a:schemeClr val="bg1"/>
+                    </a:solidFill>
+                  </a:rPr>
+                  <a:t>wir</a:t>
+                </a:r>
+                <a:r>
+                  <a:rPr lang="en-US" dirty="0">
+                    <a:solidFill>
+                      <a:schemeClr val="bg1"/>
+                    </a:solidFill>
+                  </a:rPr>
+                  <a:t> </a:t>
+                </a:r>
+                <a:r>
+                  <a:rPr lang="en-US" dirty="0" err="1">
+                    <a:solidFill>
+                      <a:schemeClr val="bg1"/>
+                    </a:solidFill>
+                  </a:rPr>
+                  <a:t>uns</a:t>
+                </a:r>
+                <a:r>
+                  <a:rPr lang="en-US" dirty="0">
+                    <a:solidFill>
+                      <a:schemeClr val="bg1"/>
+                    </a:solidFill>
+                  </a:rPr>
+                  <a:t> </a:t>
+                </a:r>
+                <a:r>
+                  <a:rPr lang="en-US" dirty="0" err="1">
+                    <a:solidFill>
+                      <a:schemeClr val="bg1"/>
+                    </a:solidFill>
+                  </a:rPr>
+                  <a:t>bei</a:t>
+                </a:r>
+                <a:r>
+                  <a:rPr lang="en-US" dirty="0">
+                    <a:solidFill>
+                      <a:schemeClr val="bg1"/>
+                    </a:solidFill>
+                  </a:rPr>
+                  <a:t> </a:t>
+                </a:r>
+                <a14:m>
+                  <m:oMath xmlns:m="http://schemas.openxmlformats.org/officeDocument/2006/math">
+                    <m:r>
+                      <a:rPr lang="en-US" b="0" i="1" smtClean="0">
+                        <a:solidFill>
+                          <a:schemeClr val="bg1"/>
+                        </a:solidFill>
+                        <a:latin typeface="Cambria Math" panose="02040503050406030204" pitchFamily="18" charset="0"/>
+                      </a:rPr>
+                      <m:t>𝑧</m:t>
+                    </m:r>
+                    <m:r>
+                      <a:rPr lang="en-US" b="0" i="1" smtClean="0">
+                        <a:solidFill>
+                          <a:schemeClr val="bg1"/>
+                        </a:solidFill>
+                        <a:latin typeface="Cambria Math" panose="02040503050406030204" pitchFamily="18" charset="0"/>
+                      </a:rPr>
+                      <m:t>=1.8</m:t>
+                    </m:r>
+                  </m:oMath>
+                </a14:m>
+                <a:endParaRPr lang="en-US" dirty="0">
+                  <a:solidFill>
+                    <a:schemeClr val="bg1"/>
+                  </a:solidFill>
+                </a:endParaRPr>
+              </a:p>
+              <a:p>
+                <a:endParaRPr lang="en-US" dirty="0">
+                  <a:solidFill>
+                    <a:schemeClr val="bg1"/>
+                  </a:solidFill>
+                </a:endParaRPr>
+              </a:p>
+              <a:p>
+                <a:r>
+                  <a:rPr lang="en-US" dirty="0" err="1">
+                    <a:solidFill>
+                      <a:schemeClr val="bg1"/>
+                    </a:solidFill>
+                  </a:rPr>
+                  <a:t>Allgemein</a:t>
+                </a:r>
+                <a:r>
+                  <a:rPr lang="en-US" dirty="0">
+                    <a:solidFill>
+                      <a:schemeClr val="bg1"/>
+                    </a:solidFill>
+                  </a:rPr>
+                  <a:t> gilt </a:t>
+                </a:r>
+                <a14:m>
+                  <m:oMath xmlns:m="http://schemas.openxmlformats.org/officeDocument/2006/math">
+                    <m:r>
+                      <m:rPr>
+                        <m:sty m:val="p"/>
+                      </m:rPr>
+                      <a:rPr lang="en-US" b="0" i="0" smtClean="0">
+                        <a:solidFill>
+                          <a:schemeClr val="bg1"/>
+                        </a:solidFill>
+                        <a:latin typeface="Cambria Math" panose="02040503050406030204" pitchFamily="18" charset="0"/>
+                      </a:rPr>
+                      <m:t>Δ</m:t>
+                    </m:r>
+                    <m:r>
+                      <a:rPr lang="en-US" b="0" i="1" smtClean="0">
+                        <a:solidFill>
+                          <a:schemeClr val="bg1"/>
+                        </a:solidFill>
+                        <a:latin typeface="Cambria Math" panose="02040503050406030204" pitchFamily="18" charset="0"/>
+                      </a:rPr>
+                      <m:t>𝑧</m:t>
+                    </m:r>
+                    <m:r>
+                      <a:rPr lang="en-US" b="0" i="1" smtClean="0">
+                        <a:solidFill>
+                          <a:schemeClr val="bg1"/>
+                        </a:solidFill>
+                        <a:latin typeface="Cambria Math" panose="02040503050406030204" pitchFamily="18" charset="0"/>
+                      </a:rPr>
+                      <m:t>=</m:t>
+                    </m:r>
+                    <m:r>
+                      <a:rPr lang="en-US" b="0" i="1" smtClean="0">
+                        <a:solidFill>
+                          <a:schemeClr val="bg1"/>
+                        </a:solidFill>
+                        <a:latin typeface="Cambria Math" panose="02040503050406030204" pitchFamily="18" charset="0"/>
+                      </a:rPr>
+                      <m:t>𝛽</m:t>
+                    </m:r>
+                    <m:r>
+                      <a:rPr lang="en-US" b="0" i="1" smtClean="0">
+                        <a:solidFill>
+                          <a:schemeClr val="bg1"/>
+                        </a:solidFill>
+                        <a:latin typeface="Cambria Math" panose="02040503050406030204" pitchFamily="18" charset="0"/>
+                      </a:rPr>
+                      <m:t>𝑐</m:t>
+                    </m:r>
+                    <m:r>
+                      <m:rPr>
+                        <m:sty m:val="p"/>
+                      </m:rPr>
+                      <a:rPr lang="en-US" b="0" i="0" smtClean="0">
+                        <a:solidFill>
+                          <a:schemeClr val="bg1"/>
+                        </a:solidFill>
+                        <a:latin typeface="Cambria Math" panose="02040503050406030204" pitchFamily="18" charset="0"/>
+                      </a:rPr>
+                      <m:t>Δ</m:t>
+                    </m:r>
+                    <m:r>
+                      <a:rPr lang="en-US" b="0" i="1" smtClean="0">
+                        <a:solidFill>
+                          <a:schemeClr val="bg1"/>
+                        </a:solidFill>
+                        <a:latin typeface="Cambria Math" panose="02040503050406030204" pitchFamily="18" charset="0"/>
+                      </a:rPr>
+                      <m:t>𝑡</m:t>
+                    </m:r>
+                  </m:oMath>
+                </a14:m>
+                <a:r>
+                  <a:rPr lang="en-US" dirty="0">
+                    <a:solidFill>
+                      <a:schemeClr val="bg1"/>
+                    </a:solidFill>
+                  </a:rPr>
+                  <a:t> und </a:t>
+                </a:r>
+                <a:r>
+                  <a:rPr lang="en-US" dirty="0" err="1">
+                    <a:solidFill>
+                      <a:schemeClr val="bg1"/>
+                    </a:solidFill>
+                  </a:rPr>
+                  <a:t>damit</a:t>
+                </a:r>
+                <a:r>
+                  <a:rPr lang="en-US" dirty="0">
+                    <a:solidFill>
+                      <a:schemeClr val="bg1"/>
+                    </a:solidFill>
+                  </a:rPr>
+                  <a:t> die </a:t>
+                </a:r>
+                <a:r>
+                  <a:rPr lang="en-US" dirty="0" err="1">
+                    <a:solidFill>
+                      <a:schemeClr val="bg1"/>
+                    </a:solidFill>
+                  </a:rPr>
+                  <a:t>Funktion</a:t>
+                </a:r>
+                <a:endParaRPr lang="en-US" dirty="0">
+                  <a:solidFill>
+                    <a:schemeClr val="bg1"/>
+                  </a:solidFill>
+                </a:endParaRPr>
+              </a:p>
+              <a:p>
+                <a:pPr/>
+                <a14:m>
+                  <m:oMathPara xmlns:m="http://schemas.openxmlformats.org/officeDocument/2006/math">
+                    <m:oMathParaPr>
+                      <m:jc m:val="left"/>
+                    </m:oMathParaPr>
+                    <m:oMath xmlns:m="http://schemas.openxmlformats.org/officeDocument/2006/math">
+                      <m:r>
+                        <a:rPr lang="en-US" b="0" i="1" smtClean="0">
+                          <a:solidFill>
+                            <a:schemeClr val="bg1"/>
+                          </a:solidFill>
+                          <a:latin typeface="Cambria Math" panose="02040503050406030204" pitchFamily="18" charset="0"/>
+                        </a:rPr>
+                        <m:t>𝑐</m:t>
+                      </m:r>
+                      <m:r>
+                        <a:rPr lang="en-US" b="0" i="1" smtClean="0">
+                          <a:solidFill>
+                            <a:schemeClr val="bg1"/>
+                          </a:solidFill>
+                          <a:latin typeface="Cambria Math" panose="02040503050406030204" pitchFamily="18" charset="0"/>
+                        </a:rPr>
+                        <m:t> </m:t>
+                      </m:r>
+                      <m:r>
+                        <a:rPr lang="en-US" b="0" i="1" smtClean="0">
+                          <a:solidFill>
+                            <a:schemeClr val="bg1"/>
+                          </a:solidFill>
+                          <a:latin typeface="Cambria Math" panose="02040503050406030204" pitchFamily="18" charset="0"/>
+                        </a:rPr>
+                        <m:t>𝑡</m:t>
+                      </m:r>
+                      <m:d>
+                        <m:dPr>
+                          <m:ctrlPr>
+                            <a:rPr lang="en-US" b="0" i="1" smtClean="0">
+                              <a:solidFill>
+                                <a:schemeClr val="bg1"/>
+                              </a:solidFill>
+                              <a:latin typeface="Cambria Math" panose="02040503050406030204" pitchFamily="18" charset="0"/>
+                            </a:rPr>
+                          </m:ctrlPr>
+                        </m:dPr>
+                        <m:e>
+                          <m:r>
+                            <a:rPr lang="en-US" b="0" i="1" smtClean="0">
+                              <a:solidFill>
+                                <a:schemeClr val="bg1"/>
+                              </a:solidFill>
+                              <a:latin typeface="Cambria Math" panose="02040503050406030204" pitchFamily="18" charset="0"/>
+                            </a:rPr>
+                            <m:t>𝑧</m:t>
+                          </m:r>
+                        </m:e>
+                      </m:d>
+                      <m:r>
+                        <a:rPr lang="en-US" b="0" i="1" smtClean="0">
+                          <a:solidFill>
+                            <a:schemeClr val="bg1"/>
+                          </a:solidFill>
+                          <a:latin typeface="Cambria Math" panose="02040503050406030204" pitchFamily="18" charset="0"/>
+                        </a:rPr>
+                        <m:t>=</m:t>
+                      </m:r>
+                      <m:f>
+                        <m:fPr>
+                          <m:ctrlPr>
+                            <a:rPr lang="en-US" b="0" i="1" smtClean="0">
+                              <a:solidFill>
+                                <a:schemeClr val="bg1"/>
+                              </a:solidFill>
+                              <a:latin typeface="Cambria Math" panose="02040503050406030204" pitchFamily="18" charset="0"/>
+                            </a:rPr>
+                          </m:ctrlPr>
+                        </m:fPr>
+                        <m:num>
+                          <m:r>
+                            <a:rPr lang="en-US" b="0" i="1" smtClean="0">
+                              <a:solidFill>
+                                <a:schemeClr val="bg1"/>
+                              </a:solidFill>
+                              <a:latin typeface="Cambria Math" panose="02040503050406030204" pitchFamily="18" charset="0"/>
+                            </a:rPr>
+                            <m:t>1</m:t>
+                          </m:r>
+                        </m:num>
+                        <m:den>
+                          <m:r>
+                            <a:rPr lang="en-US" b="0" i="1" smtClean="0">
+                              <a:solidFill>
+                                <a:schemeClr val="bg1"/>
+                              </a:solidFill>
+                              <a:latin typeface="Cambria Math" panose="02040503050406030204" pitchFamily="18" charset="0"/>
+                            </a:rPr>
+                            <m:t>𝛽</m:t>
+                          </m:r>
+                        </m:den>
+                      </m:f>
+                      <m:r>
+                        <a:rPr lang="en-US" b="0" i="1" smtClean="0">
+                          <a:solidFill>
+                            <a:schemeClr val="bg1"/>
+                          </a:solidFill>
+                          <a:latin typeface="Cambria Math" panose="02040503050406030204" pitchFamily="18" charset="0"/>
+                        </a:rPr>
+                        <m:t> </m:t>
+                      </m:r>
+                      <m:r>
+                        <a:rPr lang="en-US" b="0" i="1" smtClean="0">
+                          <a:solidFill>
+                            <a:schemeClr val="bg1"/>
+                          </a:solidFill>
+                          <a:latin typeface="Cambria Math" panose="02040503050406030204" pitchFamily="18" charset="0"/>
+                        </a:rPr>
+                        <m:t>𝑧</m:t>
+                      </m:r>
+                    </m:oMath>
+                  </m:oMathPara>
+                </a14:m>
+                <a:endParaRPr lang="en-US" dirty="0">
+                  <a:solidFill>
+                    <a:schemeClr val="bg1"/>
+                  </a:solidFill>
+                </a:endParaRPr>
+              </a:p>
+              <a:p>
+                <a:pPr/>
+                <a:endParaRPr lang="en-US" dirty="0">
+                  <a:solidFill>
+                    <a:schemeClr val="bg1"/>
+                  </a:solidFill>
+                </a:endParaRPr>
+              </a:p>
+              <a:p>
+                <a:pPr/>
+                <a:r>
+                  <a:rPr lang="en-US" dirty="0">
+                    <a:solidFill>
+                      <a:schemeClr val="bg1"/>
+                    </a:solidFill>
+                  </a:rPr>
+                  <a:t>Alle Orte auf </a:t>
+                </a:r>
+                <a:r>
+                  <a:rPr lang="en-US" dirty="0" err="1">
+                    <a:solidFill>
+                      <a:schemeClr val="bg1"/>
+                    </a:solidFill>
+                  </a:rPr>
+                  <a:t>dieser</a:t>
+                </a:r>
+                <a:r>
+                  <a:rPr lang="en-US" dirty="0">
+                    <a:solidFill>
+                      <a:schemeClr val="bg1"/>
+                    </a:solidFill>
+                  </a:rPr>
+                  <a:t> Linie </a:t>
+                </a:r>
+                <a:r>
+                  <a:rPr lang="en-US" dirty="0" err="1">
+                    <a:solidFill>
+                      <a:schemeClr val="bg1"/>
+                    </a:solidFill>
+                  </a:rPr>
+                  <a:t>sind</a:t>
+                </a:r>
+                <a:r>
+                  <a:rPr lang="en-US" dirty="0">
+                    <a:solidFill>
+                      <a:schemeClr val="bg1"/>
+                    </a:solidFill>
+                  </a:rPr>
+                  <a:t> </a:t>
+                </a:r>
+                <a:r>
+                  <a:rPr lang="en-US" dirty="0" err="1">
+                    <a:solidFill>
+                      <a:schemeClr val="bg1"/>
+                    </a:solidFill>
+                  </a:rPr>
+                  <a:t>im</a:t>
+                </a:r>
+                <a:r>
+                  <a:rPr lang="en-US" dirty="0">
+                    <a:solidFill>
+                      <a:schemeClr val="bg1"/>
+                    </a:solidFill>
+                  </a:rPr>
+                  <a:t> </a:t>
+                </a:r>
+                <a:r>
+                  <a:rPr lang="en-US" dirty="0" err="1">
+                    <a:solidFill>
+                      <a:schemeClr val="bg1"/>
+                    </a:solidFill>
+                  </a:rPr>
+                  <a:t>bewegten</a:t>
+                </a:r>
+                <a:r>
+                  <a:rPr lang="en-US" dirty="0">
+                    <a:solidFill>
+                      <a:schemeClr val="bg1"/>
+                    </a:solidFill>
+                  </a:rPr>
+                  <a:t> </a:t>
+                </a:r>
+                <a:r>
+                  <a:rPr lang="en-US" dirty="0" err="1">
+                    <a:solidFill>
+                      <a:schemeClr val="bg1"/>
+                    </a:solidFill>
+                  </a:rPr>
+                  <a:t>Bezugssystem</a:t>
+                </a:r>
+                <a:r>
+                  <a:rPr lang="en-US" dirty="0">
+                    <a:solidFill>
+                      <a:schemeClr val="bg1"/>
+                    </a:solidFill>
+                  </a:rPr>
+                  <a:t> am Gleichen Ort</a:t>
+                </a:r>
+              </a:p>
+            </p:txBody>
+          </p:sp>
+        </mc:Choice>
+        <mc:Fallback>
+          <p:sp>
+            <p:nvSpPr>
+              <p:cNvPr id="2" name="TextBox 1">
+                <a:extLst>
+                  <a:ext uri="{FF2B5EF4-FFF2-40B4-BE49-F238E27FC236}">
+                    <a16:creationId xmlns:a16="http://schemas.microsoft.com/office/drawing/2014/main" id="{E40365A2-DEF5-BF6A-A16D-BB157E5A1836}"/>
+                  </a:ext>
+                </a:extLst>
+              </p:cNvPr>
+              <p:cNvSpPr txBox="1">
+                <a:spLocks noRot="1" noChangeAspect="1" noMove="1" noResize="1" noEditPoints="1" noAdjustHandles="1" noChangeArrowheads="1" noChangeShapeType="1" noTextEdit="1"/>
+              </p:cNvSpPr>
+              <p:nvPr/>
+            </p:nvSpPr>
+            <p:spPr>
+              <a:xfrm>
+                <a:off x="8547652" y="153348"/>
+                <a:ext cx="3475855" cy="6753387"/>
+              </a:xfrm>
+              <a:prstGeom prst="rect">
+                <a:avLst/>
+              </a:prstGeom>
+              <a:blipFill>
+                <a:blip r:embed="rId3"/>
+                <a:stretch>
+                  <a:fillRect l="-1404" t="-451" b="-451"/>
+                </a:stretch>
+              </a:blipFill>
+            </p:spPr>
+            <p:txBody>
+              <a:bodyPr/>
+              <a:lstStyle/>
+              <a:p>
+                <a:r>
+                  <a:rPr lang="en-CH">
+                    <a:noFill/>
+                  </a:rPr>
+                  <a:t> </a:t>
+                </a:r>
+              </a:p>
+            </p:txBody>
+          </p:sp>
+        </mc:Fallback>
+      </mc:AlternateContent>
+    </p:spTree>
+    <p:extLst>
+      <p:ext uri="{BB962C8B-B14F-4D97-AF65-F5344CB8AC3E}">
+        <p14:creationId xmlns:p14="http://schemas.microsoft.com/office/powerpoint/2010/main" val="2009097856"/>
+      </p:ext>
+    </p:extLst>
+  </p:cSld>
+  <p:clrMapOvr>
+    <a:masterClrMapping/>
+  </p:clrMapOvr>
+</p:sld>
+</file>
+
+<file path=ppt/slides/slide26.xml><?xml version="1.0" encoding="utf-8"?>
+<p:sld xmlns:a="http://schemas.openxmlformats.org/drawingml/2006/main" xmlns:r="http://schemas.openxmlformats.org/officeDocument/2006/relationships" xmlns:p="http://schemas.openxmlformats.org/presentationml/2006/main">
+  <p:cSld>
+    <p:spTree>
+      <p:nvGrpSpPr>
+        <p:cNvPr id="1" name="">
+          <a:extLst>
+            <a:ext uri="{FF2B5EF4-FFF2-40B4-BE49-F238E27FC236}">
+              <a16:creationId xmlns:a16="http://schemas.microsoft.com/office/drawing/2014/main" id="{754317F5-6DCF-203F-E469-744F24752E49}"/>
+            </a:ext>
+          </a:extLst>
+        </p:cNvPr>
+        <p:cNvGrpSpPr/>
+        <p:nvPr/>
+      </p:nvGrpSpPr>
+      <p:grpSpPr>
+        <a:xfrm>
+          <a:off x="0" y="0"/>
+          <a:ext cx="0" cy="0"/>
+          <a:chOff x="0" y="0"/>
+          <a:chExt cx="0" cy="0"/>
+        </a:xfrm>
+      </p:grpSpPr>
+      <p:pic>
+        <p:nvPicPr>
+          <p:cNvPr id="4" name="Content Placeholder 3">
+            <a:extLst>
+              <a:ext uri="{FF2B5EF4-FFF2-40B4-BE49-F238E27FC236}">
+                <a16:creationId xmlns:a16="http://schemas.microsoft.com/office/drawing/2014/main" id="{E44C2D90-30D7-F50A-3468-7D495C4DBE4E}"/>
+              </a:ext>
+            </a:extLst>
+          </p:cNvPr>
+          <p:cNvPicPr>
+            <a:picLocks noGrp="1" noChangeAspect="1"/>
+          </p:cNvPicPr>
+          <p:nvPr>
+            <p:ph idx="1"/>
+          </p:nvPr>
+        </p:nvPicPr>
+        <p:blipFill>
+          <a:blip r:link="rId2"/>
+          <a:srcRect/>
+          <a:stretch>
+            <a:fillRect/>
+          </a:stretch>
+        </p:blipFill>
+        <p:spPr>
+          <a:xfrm>
+            <a:off x="439948" y="-422692"/>
+            <a:ext cx="7556740" cy="7556740"/>
+          </a:xfrm>
+        </p:spPr>
+      </p:pic>
+      <mc:AlternateContent xmlns:mc="http://schemas.openxmlformats.org/markup-compatibility/2006">
+        <mc:Choice xmlns:a14="http://schemas.microsoft.com/office/drawing/2010/main" Requires="a14">
+          <p:sp>
+            <p:nvSpPr>
+              <p:cNvPr id="2" name="TextBox 1">
+                <a:extLst>
+                  <a:ext uri="{FF2B5EF4-FFF2-40B4-BE49-F238E27FC236}">
+                    <a16:creationId xmlns:a16="http://schemas.microsoft.com/office/drawing/2014/main" id="{F6A5681F-7D47-70F4-7EB2-B7D1B405D680}"/>
+                  </a:ext>
+                </a:extLst>
+              </p:cNvPr>
+              <p:cNvSpPr txBox="1"/>
+              <p:nvPr/>
+            </p:nvSpPr>
+            <p:spPr>
+              <a:xfrm>
+                <a:off x="8547652" y="153348"/>
+                <a:ext cx="3475855" cy="4260397"/>
+              </a:xfrm>
+              <a:prstGeom prst="rect">
+                <a:avLst/>
+              </a:prstGeom>
+              <a:noFill/>
+            </p:spPr>
+            <p:txBody>
+              <a:bodyPr wrap="square" rtlCol="0">
+                <a:spAutoFit/>
+              </a:bodyPr>
+              <a:lstStyle/>
+              <a:p>
+                <a:r>
+                  <a:rPr lang="en-US" dirty="0">
+                    <a:solidFill>
+                      <a:schemeClr val="bg1"/>
+                    </a:solidFill>
+                  </a:rPr>
+                  <a:t>Allgemein gilt </a:t>
+                </a:r>
+                <a14:m>
+                  <m:oMath xmlns:m="http://schemas.openxmlformats.org/officeDocument/2006/math">
+                    <m:r>
+                      <m:rPr>
+                        <m:sty m:val="p"/>
+                      </m:rPr>
+                      <a:rPr lang="en-US" b="0" i="0" smtClean="0">
+                        <a:solidFill>
+                          <a:schemeClr val="bg1"/>
+                        </a:solidFill>
+                        <a:latin typeface="Cambria Math" panose="02040503050406030204" pitchFamily="18" charset="0"/>
+                      </a:rPr>
+                      <m:t>Δ</m:t>
+                    </m:r>
+                    <m:r>
+                      <a:rPr lang="en-US" b="0" i="1" smtClean="0">
+                        <a:solidFill>
+                          <a:schemeClr val="bg1"/>
+                        </a:solidFill>
+                        <a:latin typeface="Cambria Math" panose="02040503050406030204" pitchFamily="18" charset="0"/>
+                      </a:rPr>
+                      <m:t>𝑧</m:t>
+                    </m:r>
+                    <m:r>
+                      <a:rPr lang="en-US" b="0" i="1" smtClean="0">
+                        <a:solidFill>
+                          <a:schemeClr val="bg1"/>
+                        </a:solidFill>
+                        <a:latin typeface="Cambria Math" panose="02040503050406030204" pitchFamily="18" charset="0"/>
+                      </a:rPr>
+                      <m:t>=</m:t>
+                    </m:r>
+                    <m:r>
+                      <a:rPr lang="en-US" b="0" i="1" smtClean="0">
+                        <a:solidFill>
+                          <a:schemeClr val="bg1"/>
+                        </a:solidFill>
+                        <a:latin typeface="Cambria Math" panose="02040503050406030204" pitchFamily="18" charset="0"/>
+                      </a:rPr>
+                      <m:t>𝛽</m:t>
+                    </m:r>
+                    <m:r>
+                      <a:rPr lang="en-US" b="0" i="1" smtClean="0">
+                        <a:solidFill>
+                          <a:schemeClr val="bg1"/>
+                        </a:solidFill>
+                        <a:latin typeface="Cambria Math" panose="02040503050406030204" pitchFamily="18" charset="0"/>
+                      </a:rPr>
+                      <m:t>𝑐</m:t>
+                    </m:r>
+                    <m:r>
+                      <m:rPr>
+                        <m:sty m:val="p"/>
+                      </m:rPr>
+                      <a:rPr lang="en-US" b="0" i="0" smtClean="0">
+                        <a:solidFill>
+                          <a:schemeClr val="bg1"/>
+                        </a:solidFill>
+                        <a:latin typeface="Cambria Math" panose="02040503050406030204" pitchFamily="18" charset="0"/>
+                      </a:rPr>
+                      <m:t>Δ</m:t>
+                    </m:r>
+                    <m:r>
+                      <a:rPr lang="en-US" b="0" i="1" smtClean="0">
+                        <a:solidFill>
+                          <a:schemeClr val="bg1"/>
+                        </a:solidFill>
+                        <a:latin typeface="Cambria Math" panose="02040503050406030204" pitchFamily="18" charset="0"/>
+                      </a:rPr>
+                      <m:t>𝑡</m:t>
+                    </m:r>
+                  </m:oMath>
+                </a14:m>
+                <a:r>
+                  <a:rPr lang="en-US" dirty="0">
+                    <a:solidFill>
+                      <a:schemeClr val="bg1"/>
+                    </a:solidFill>
+                  </a:rPr>
+                  <a:t> und </a:t>
+                </a:r>
+                <a:r>
+                  <a:rPr lang="en-US" dirty="0" err="1">
+                    <a:solidFill>
+                      <a:schemeClr val="bg1"/>
+                    </a:solidFill>
+                  </a:rPr>
+                  <a:t>damit</a:t>
+                </a:r>
+                <a:r>
+                  <a:rPr lang="en-US" dirty="0">
+                    <a:solidFill>
+                      <a:schemeClr val="bg1"/>
+                    </a:solidFill>
+                  </a:rPr>
+                  <a:t> die </a:t>
+                </a:r>
+                <a:r>
+                  <a:rPr lang="en-US" dirty="0" err="1">
+                    <a:solidFill>
+                      <a:schemeClr val="bg1"/>
+                    </a:solidFill>
+                  </a:rPr>
+                  <a:t>Funktion</a:t>
+                </a:r>
+                <a:endParaRPr lang="en-US" dirty="0">
+                  <a:solidFill>
+                    <a:schemeClr val="bg1"/>
+                  </a:solidFill>
+                </a:endParaRPr>
+              </a:p>
+              <a:p>
+                <a:pPr/>
+                <a14:m>
+                  <m:oMathPara xmlns:m="http://schemas.openxmlformats.org/officeDocument/2006/math">
+                    <m:oMathParaPr>
+                      <m:jc m:val="left"/>
+                    </m:oMathParaPr>
+                    <m:oMath xmlns:m="http://schemas.openxmlformats.org/officeDocument/2006/math">
+                      <m:r>
+                        <a:rPr lang="en-US" b="0" i="1" smtClean="0">
+                          <a:solidFill>
+                            <a:schemeClr val="bg1"/>
+                          </a:solidFill>
+                          <a:latin typeface="Cambria Math" panose="02040503050406030204" pitchFamily="18" charset="0"/>
+                        </a:rPr>
+                        <m:t>𝑐</m:t>
+                      </m:r>
+                      <m:r>
+                        <a:rPr lang="en-US" b="0" i="1" smtClean="0">
+                          <a:solidFill>
+                            <a:schemeClr val="bg1"/>
+                          </a:solidFill>
+                          <a:latin typeface="Cambria Math" panose="02040503050406030204" pitchFamily="18" charset="0"/>
+                        </a:rPr>
+                        <m:t> </m:t>
+                      </m:r>
+                      <m:r>
+                        <a:rPr lang="en-US" b="0" i="1" smtClean="0">
+                          <a:solidFill>
+                            <a:schemeClr val="bg1"/>
+                          </a:solidFill>
+                          <a:latin typeface="Cambria Math" panose="02040503050406030204" pitchFamily="18" charset="0"/>
+                        </a:rPr>
+                        <m:t>𝑡</m:t>
+                      </m:r>
+                      <m:d>
+                        <m:dPr>
+                          <m:ctrlPr>
+                            <a:rPr lang="en-US" b="0" i="1" smtClean="0">
+                              <a:solidFill>
+                                <a:schemeClr val="bg1"/>
+                              </a:solidFill>
+                              <a:latin typeface="Cambria Math" panose="02040503050406030204" pitchFamily="18" charset="0"/>
+                            </a:rPr>
+                          </m:ctrlPr>
+                        </m:dPr>
+                        <m:e>
+                          <m:r>
+                            <a:rPr lang="en-US" b="0" i="1" smtClean="0">
+                              <a:solidFill>
+                                <a:schemeClr val="bg1"/>
+                              </a:solidFill>
+                              <a:latin typeface="Cambria Math" panose="02040503050406030204" pitchFamily="18" charset="0"/>
+                            </a:rPr>
+                            <m:t>𝑧</m:t>
+                          </m:r>
+                        </m:e>
+                      </m:d>
+                      <m:r>
+                        <a:rPr lang="en-US" b="0" i="1" smtClean="0">
+                          <a:solidFill>
+                            <a:schemeClr val="bg1"/>
+                          </a:solidFill>
+                          <a:latin typeface="Cambria Math" panose="02040503050406030204" pitchFamily="18" charset="0"/>
+                        </a:rPr>
+                        <m:t>=</m:t>
+                      </m:r>
+                      <m:f>
+                        <m:fPr>
+                          <m:ctrlPr>
+                            <a:rPr lang="en-US" b="0" i="1" smtClean="0">
+                              <a:solidFill>
+                                <a:schemeClr val="bg1"/>
+                              </a:solidFill>
+                              <a:latin typeface="Cambria Math" panose="02040503050406030204" pitchFamily="18" charset="0"/>
+                            </a:rPr>
+                          </m:ctrlPr>
+                        </m:fPr>
+                        <m:num>
+                          <m:r>
+                            <a:rPr lang="en-US" b="0" i="1" smtClean="0">
+                              <a:solidFill>
+                                <a:schemeClr val="bg1"/>
+                              </a:solidFill>
+                              <a:latin typeface="Cambria Math" panose="02040503050406030204" pitchFamily="18" charset="0"/>
+                            </a:rPr>
+                            <m:t>1</m:t>
+                          </m:r>
+                        </m:num>
+                        <m:den>
+                          <m:r>
+                            <a:rPr lang="en-US" b="0" i="1" smtClean="0">
+                              <a:solidFill>
+                                <a:schemeClr val="bg1"/>
+                              </a:solidFill>
+                              <a:latin typeface="Cambria Math" panose="02040503050406030204" pitchFamily="18" charset="0"/>
+                            </a:rPr>
+                            <m:t>𝛽</m:t>
+                          </m:r>
+                        </m:den>
+                      </m:f>
+                      <m:r>
+                        <a:rPr lang="en-US" b="0" i="1" smtClean="0">
+                          <a:solidFill>
+                            <a:schemeClr val="bg1"/>
+                          </a:solidFill>
+                          <a:latin typeface="Cambria Math" panose="02040503050406030204" pitchFamily="18" charset="0"/>
+                        </a:rPr>
+                        <m:t> </m:t>
+                      </m:r>
+                      <m:r>
+                        <a:rPr lang="en-US" b="0" i="1" smtClean="0">
+                          <a:solidFill>
+                            <a:schemeClr val="bg1"/>
+                          </a:solidFill>
+                          <a:latin typeface="Cambria Math" panose="02040503050406030204" pitchFamily="18" charset="0"/>
+                        </a:rPr>
+                        <m:t>𝑧</m:t>
+                      </m:r>
+                    </m:oMath>
+                  </m:oMathPara>
+                </a14:m>
+                <a:endParaRPr lang="en-US" dirty="0">
+                  <a:solidFill>
+                    <a:schemeClr val="bg1"/>
+                  </a:solidFill>
+                </a:endParaRPr>
+              </a:p>
+              <a:p>
+                <a:pPr/>
+                <a:endParaRPr lang="en-US" dirty="0">
+                  <a:solidFill>
+                    <a:schemeClr val="bg1"/>
+                  </a:solidFill>
+                </a:endParaRPr>
+              </a:p>
+              <a:p>
+                <a:pPr/>
+                <a:r>
+                  <a:rPr lang="en-US" dirty="0">
+                    <a:solidFill>
+                      <a:schemeClr val="bg1"/>
+                    </a:solidFill>
+                  </a:rPr>
+                  <a:t>Wir </a:t>
+                </a:r>
+                <a:r>
+                  <a:rPr lang="en-US" dirty="0" err="1">
+                    <a:solidFill>
+                      <a:schemeClr val="bg1"/>
+                    </a:solidFill>
+                  </a:rPr>
+                  <a:t>können</a:t>
+                </a:r>
+                <a:r>
+                  <a:rPr lang="en-US" dirty="0">
+                    <a:solidFill>
+                      <a:schemeClr val="bg1"/>
+                    </a:solidFill>
+                  </a:rPr>
+                  <a:t> dies </a:t>
+                </a:r>
+                <a:r>
+                  <a:rPr lang="en-US" dirty="0" err="1">
+                    <a:solidFill>
+                      <a:schemeClr val="bg1"/>
+                    </a:solidFill>
+                  </a:rPr>
+                  <a:t>auch</a:t>
+                </a:r>
+                <a:r>
+                  <a:rPr lang="en-US" dirty="0">
+                    <a:solidFill>
+                      <a:schemeClr val="bg1"/>
+                    </a:solidFill>
+                  </a:rPr>
+                  <a:t> </a:t>
+                </a:r>
+                <a:r>
+                  <a:rPr lang="en-US" dirty="0" err="1">
+                    <a:solidFill>
+                      <a:schemeClr val="bg1"/>
+                    </a:solidFill>
+                  </a:rPr>
+                  <a:t>aus</a:t>
+                </a:r>
+                <a:r>
+                  <a:rPr lang="en-US" dirty="0">
+                    <a:solidFill>
+                      <a:schemeClr val="bg1"/>
+                    </a:solidFill>
+                  </a:rPr>
+                  <a:t> der Formel für z</a:t>
+                </a:r>
+                <a14:m>
+                  <m:oMath xmlns:m="http://schemas.openxmlformats.org/officeDocument/2006/math">
+                    <m:r>
+                      <a:rPr lang="en-US" b="0" i="1" smtClean="0">
+                        <a:solidFill>
+                          <a:schemeClr val="bg1"/>
+                        </a:solidFill>
+                        <a:latin typeface="Cambria Math" panose="02040503050406030204" pitchFamily="18" charset="0"/>
+                      </a:rPr>
+                      <m:t>′</m:t>
+                    </m:r>
+                  </m:oMath>
+                </a14:m>
+                <a:r>
+                  <a:rPr lang="en-US" dirty="0">
+                    <a:solidFill>
+                      <a:schemeClr val="bg1"/>
+                    </a:solidFill>
+                  </a:rPr>
+                  <a:t> </a:t>
+                </a:r>
+                <a:r>
+                  <a:rPr lang="en-US" dirty="0" err="1">
+                    <a:solidFill>
+                      <a:schemeClr val="bg1"/>
+                    </a:solidFill>
+                  </a:rPr>
+                  <a:t>herleiten</a:t>
+                </a:r>
+                <a:r>
+                  <a:rPr lang="en-US" dirty="0">
+                    <a:solidFill>
+                      <a:schemeClr val="bg1"/>
+                    </a:solidFill>
+                  </a:rPr>
+                  <a:t>:</a:t>
+                </a:r>
+              </a:p>
+              <a:p>
+                <a:pPr/>
+                <a:endParaRPr lang="en-US" dirty="0">
+                  <a:solidFill>
+                    <a:schemeClr val="bg1"/>
+                  </a:solidFill>
+                </a:endParaRPr>
+              </a:p>
+              <a:p>
+                <a:pPr/>
+                <a14:m>
+                  <m:oMathPara xmlns:m="http://schemas.openxmlformats.org/officeDocument/2006/math">
+                    <m:oMathParaPr>
+                      <m:jc m:val="left"/>
+                    </m:oMathParaPr>
+                    <m:oMath xmlns:m="http://schemas.openxmlformats.org/officeDocument/2006/math">
+                      <m:sSup>
+                        <m:sSupPr>
+                          <m:ctrlPr>
+                            <a:rPr lang="en-US" i="1">
+                              <a:solidFill>
+                                <a:schemeClr val="bg1"/>
+                              </a:solidFill>
+                              <a:latin typeface="Cambria Math" panose="02040503050406030204" pitchFamily="18" charset="0"/>
+                            </a:rPr>
+                          </m:ctrlPr>
+                        </m:sSupPr>
+                        <m:e>
+                          <m:r>
+                            <a:rPr lang="en-US" b="0" i="1" smtClean="0">
+                              <a:solidFill>
+                                <a:schemeClr val="bg1"/>
+                              </a:solidFill>
+                              <a:latin typeface="Cambria Math" panose="02040503050406030204" pitchFamily="18" charset="0"/>
+                            </a:rPr>
+                            <m:t>𝑧</m:t>
+                          </m:r>
+                        </m:e>
+                        <m:sup>
+                          <m:r>
+                            <a:rPr lang="en-US" i="1">
+                              <a:solidFill>
+                                <a:schemeClr val="bg1"/>
+                              </a:solidFill>
+                              <a:latin typeface="Cambria Math" panose="02040503050406030204" pitchFamily="18" charset="0"/>
+                            </a:rPr>
+                            <m:t>′</m:t>
+                          </m:r>
+                        </m:sup>
+                      </m:sSup>
+                      <m:r>
+                        <a:rPr lang="en-US" i="1">
+                          <a:solidFill>
+                            <a:schemeClr val="bg1"/>
+                          </a:solidFill>
+                          <a:latin typeface="Cambria Math" panose="02040503050406030204" pitchFamily="18" charset="0"/>
+                        </a:rPr>
+                        <m:t>=</m:t>
+                      </m:r>
+                      <m:r>
+                        <a:rPr lang="en-US" i="1">
+                          <a:solidFill>
+                            <a:schemeClr val="bg1"/>
+                          </a:solidFill>
+                          <a:latin typeface="Cambria Math" panose="02040503050406030204" pitchFamily="18" charset="0"/>
+                        </a:rPr>
+                        <m:t>𝛾</m:t>
+                      </m:r>
+                      <m:r>
+                        <a:rPr lang="en-US" i="1">
+                          <a:solidFill>
+                            <a:schemeClr val="bg1"/>
+                          </a:solidFill>
+                          <a:latin typeface="Cambria Math" panose="02040503050406030204" pitchFamily="18" charset="0"/>
+                        </a:rPr>
+                        <m:t> </m:t>
+                      </m:r>
+                      <m:d>
+                        <m:dPr>
+                          <m:ctrlPr>
+                            <a:rPr lang="en-US" i="1">
+                              <a:solidFill>
+                                <a:schemeClr val="bg1"/>
+                              </a:solidFill>
+                              <a:latin typeface="Cambria Math" panose="02040503050406030204" pitchFamily="18" charset="0"/>
+                            </a:rPr>
+                          </m:ctrlPr>
+                        </m:dPr>
+                        <m:e>
+                          <m:r>
+                            <a:rPr lang="en-US" i="1">
+                              <a:solidFill>
+                                <a:schemeClr val="bg1"/>
+                              </a:solidFill>
+                              <a:latin typeface="Cambria Math" panose="02040503050406030204" pitchFamily="18" charset="0"/>
+                            </a:rPr>
+                            <m:t>𝑧</m:t>
+                          </m:r>
+                          <m:r>
+                            <a:rPr lang="en-US" b="0" i="1" smtClean="0">
+                              <a:solidFill>
+                                <a:schemeClr val="bg1"/>
+                              </a:solidFill>
+                              <a:latin typeface="Cambria Math" panose="02040503050406030204" pitchFamily="18" charset="0"/>
+                            </a:rPr>
+                            <m:t> −</m:t>
+                          </m:r>
+                          <m:r>
+                            <a:rPr lang="en-US" b="0" i="1" smtClean="0">
+                              <a:solidFill>
+                                <a:schemeClr val="bg1"/>
+                              </a:solidFill>
+                              <a:latin typeface="Cambria Math" panose="02040503050406030204" pitchFamily="18" charset="0"/>
+                            </a:rPr>
+                            <m:t>𝛽</m:t>
+                          </m:r>
+                          <m:r>
+                            <a:rPr lang="en-US" b="0" i="1" smtClean="0">
+                              <a:solidFill>
+                                <a:schemeClr val="bg1"/>
+                              </a:solidFill>
+                              <a:latin typeface="Cambria Math" panose="02040503050406030204" pitchFamily="18" charset="0"/>
+                            </a:rPr>
+                            <m:t>𝑐</m:t>
+                          </m:r>
+                          <m:r>
+                            <a:rPr lang="en-US" b="0" i="1" smtClean="0">
+                              <a:solidFill>
+                                <a:schemeClr val="bg1"/>
+                              </a:solidFill>
+                              <a:latin typeface="Cambria Math" panose="02040503050406030204" pitchFamily="18" charset="0"/>
+                            </a:rPr>
+                            <m:t> </m:t>
+                          </m:r>
+                          <m:r>
+                            <a:rPr lang="en-US" b="0" i="1" smtClean="0">
+                              <a:solidFill>
+                                <a:schemeClr val="bg1"/>
+                              </a:solidFill>
+                              <a:latin typeface="Cambria Math" panose="02040503050406030204" pitchFamily="18" charset="0"/>
+                            </a:rPr>
+                            <m:t>𝑡</m:t>
+                          </m:r>
+                        </m:e>
+                      </m:d>
+                      <m:r>
+                        <a:rPr lang="en-US" b="0" i="1" smtClean="0">
+                          <a:solidFill>
+                            <a:schemeClr val="bg1"/>
+                          </a:solidFill>
+                          <a:latin typeface="Cambria Math" panose="02040503050406030204" pitchFamily="18" charset="0"/>
+                        </a:rPr>
+                        <m:t>  </m:t>
+                      </m:r>
+                      <m:r>
+                        <a:rPr lang="en-US" i="1" smtClean="0">
+                          <a:solidFill>
+                            <a:schemeClr val="bg1"/>
+                          </a:solidFill>
+                          <a:latin typeface="Cambria Math" panose="02040503050406030204" pitchFamily="18" charset="0"/>
+                          <a:ea typeface="Cambria Math" panose="02040503050406030204" pitchFamily="18" charset="0"/>
+                        </a:rPr>
+                        <m:t>≡</m:t>
+                      </m:r>
+                      <m:r>
+                        <a:rPr lang="en-US" b="0" i="1" smtClean="0">
+                          <a:solidFill>
+                            <a:schemeClr val="bg1"/>
+                          </a:solidFill>
+                          <a:latin typeface="Cambria Math" panose="02040503050406030204" pitchFamily="18" charset="0"/>
+                          <a:ea typeface="Cambria Math" panose="02040503050406030204" pitchFamily="18" charset="0"/>
+                        </a:rPr>
+                        <m:t>  0</m:t>
+                      </m:r>
+                    </m:oMath>
+                  </m:oMathPara>
+                </a14:m>
+                <a:endParaRPr lang="en-US" i="1" dirty="0">
+                  <a:solidFill>
+                    <a:schemeClr val="bg1"/>
+                  </a:solidFill>
+                  <a:latin typeface="Cambria Math" panose="02040503050406030204" pitchFamily="18" charset="0"/>
+                </a:endParaRPr>
+              </a:p>
+              <a:p>
+                <a:pPr/>
+                <a:endParaRPr lang="en-US" dirty="0">
+                  <a:solidFill>
+                    <a:schemeClr val="bg1"/>
+                  </a:solidFill>
+                </a:endParaRPr>
+              </a:p>
+              <a:p>
+                <a:pPr/>
+                <a:r>
+                  <a:rPr lang="en-US" dirty="0">
+                    <a:solidFill>
+                      <a:schemeClr val="bg1"/>
+                    </a:solidFill>
+                  </a:rPr>
+                  <a:t>Dies </a:t>
+                </a:r>
+                <a:r>
+                  <a:rPr lang="en-US" dirty="0" err="1">
+                    <a:solidFill>
+                      <a:schemeClr val="bg1"/>
+                    </a:solidFill>
+                  </a:rPr>
+                  <a:t>nennen</a:t>
+                </a:r>
+                <a:r>
+                  <a:rPr lang="en-US" dirty="0">
+                    <a:solidFill>
+                      <a:schemeClr val="bg1"/>
+                    </a:solidFill>
+                  </a:rPr>
+                  <a:t> </a:t>
+                </a:r>
+                <a:r>
+                  <a:rPr lang="en-US" dirty="0" err="1">
+                    <a:solidFill>
+                      <a:schemeClr val="bg1"/>
+                    </a:solidFill>
+                  </a:rPr>
+                  <a:t>wir</a:t>
+                </a:r>
+                <a:r>
+                  <a:rPr lang="en-US" dirty="0">
+                    <a:solidFill>
+                      <a:schemeClr val="bg1"/>
+                    </a:solidFill>
+                  </a:rPr>
+                  <a:t> </a:t>
+                </a:r>
+                <a:r>
+                  <a:rPr lang="en-US" dirty="0" err="1">
+                    <a:solidFill>
+                      <a:schemeClr val="bg1"/>
+                    </a:solidFill>
+                  </a:rPr>
+                  <a:t>eine</a:t>
+                </a:r>
+                <a:r>
+                  <a:rPr lang="en-US" dirty="0">
+                    <a:solidFill>
+                      <a:schemeClr val="bg1"/>
+                    </a:solidFill>
+                  </a:rPr>
+                  <a:t> </a:t>
+                </a:r>
+                <a:r>
+                  <a:rPr lang="en-US" dirty="0" err="1">
+                    <a:solidFill>
+                      <a:schemeClr val="bg1"/>
+                    </a:solidFill>
+                  </a:rPr>
+                  <a:t>Weltlinie</a:t>
+                </a:r>
+                <a:r>
+                  <a:rPr lang="en-US" dirty="0">
+                    <a:solidFill>
+                      <a:schemeClr val="bg1"/>
+                    </a:solidFill>
+                  </a:rPr>
+                  <a:t>. </a:t>
+                </a:r>
+                <a:r>
+                  <a:rPr lang="en-US" dirty="0" err="1">
+                    <a:solidFill>
+                      <a:schemeClr val="bg1"/>
+                    </a:solidFill>
+                  </a:rPr>
+                  <a:t>Gleichzeitig</a:t>
+                </a:r>
+                <a:r>
+                  <a:rPr lang="en-US" dirty="0">
+                    <a:solidFill>
+                      <a:schemeClr val="bg1"/>
+                    </a:solidFill>
+                  </a:rPr>
+                  <a:t> </a:t>
+                </a:r>
+                <a:r>
+                  <a:rPr lang="en-US" dirty="0" err="1">
+                    <a:solidFill>
+                      <a:schemeClr val="bg1"/>
+                    </a:solidFill>
+                  </a:rPr>
+                  <a:t>handelt</a:t>
+                </a:r>
+                <a:r>
+                  <a:rPr lang="en-US" dirty="0">
+                    <a:solidFill>
+                      <a:schemeClr val="bg1"/>
+                    </a:solidFill>
+                  </a:rPr>
+                  <a:t> es </a:t>
+                </a:r>
+                <a:r>
+                  <a:rPr lang="en-US" dirty="0" err="1">
+                    <a:solidFill>
+                      <a:schemeClr val="bg1"/>
+                    </a:solidFill>
+                  </a:rPr>
+                  <a:t>sich</a:t>
+                </a:r>
+                <a:r>
+                  <a:rPr lang="en-US" dirty="0">
+                    <a:solidFill>
+                      <a:schemeClr val="bg1"/>
+                    </a:solidFill>
+                  </a:rPr>
+                  <a:t> um die </a:t>
+                </a:r>
+                <a:r>
+                  <a:rPr lang="en-US" dirty="0" err="1">
+                    <a:solidFill>
+                      <a:schemeClr val="bg1"/>
+                    </a:solidFill>
+                  </a:rPr>
+                  <a:t>Zeitachse</a:t>
+                </a:r>
+                <a:r>
+                  <a:rPr lang="en-US" dirty="0">
+                    <a:solidFill>
+                      <a:schemeClr val="bg1"/>
+                    </a:solidFill>
+                  </a:rPr>
+                  <a:t> </a:t>
+                </a:r>
+                <a:r>
+                  <a:rPr lang="en-US" dirty="0" err="1">
+                    <a:solidFill>
+                      <a:schemeClr val="bg1"/>
+                    </a:solidFill>
+                  </a:rPr>
+                  <a:t>im</a:t>
+                </a:r>
+                <a:r>
+                  <a:rPr lang="en-US" dirty="0">
+                    <a:solidFill>
+                      <a:schemeClr val="bg1"/>
+                    </a:solidFill>
+                  </a:rPr>
+                  <a:t> </a:t>
+                </a:r>
+                <a:r>
+                  <a:rPr lang="en-US" dirty="0" err="1">
+                    <a:solidFill>
+                      <a:schemeClr val="bg1"/>
+                    </a:solidFill>
+                  </a:rPr>
+                  <a:t>bewegten</a:t>
+                </a:r>
+                <a:r>
+                  <a:rPr lang="en-US" dirty="0">
+                    <a:solidFill>
+                      <a:schemeClr val="bg1"/>
+                    </a:solidFill>
+                  </a:rPr>
+                  <a:t> </a:t>
+                </a:r>
+                <a:r>
+                  <a:rPr lang="en-US" dirty="0" err="1">
+                    <a:solidFill>
+                      <a:schemeClr val="bg1"/>
+                    </a:solidFill>
+                  </a:rPr>
+                  <a:t>Koordinatensystem</a:t>
+                </a:r>
+                <a:endParaRPr lang="en-US" dirty="0">
+                  <a:solidFill>
+                    <a:schemeClr val="bg1"/>
+                  </a:solidFill>
+                </a:endParaRPr>
+              </a:p>
+              <a:p>
+                <a:pPr/>
+                <a:endParaRPr lang="en-US" dirty="0">
+                  <a:solidFill>
+                    <a:schemeClr val="bg1"/>
+                  </a:solidFill>
+                </a:endParaRPr>
+              </a:p>
+            </p:txBody>
+          </p:sp>
+        </mc:Choice>
+        <mc:Fallback>
+          <p:sp>
+            <p:nvSpPr>
+              <p:cNvPr id="2" name="TextBox 1">
+                <a:extLst>
+                  <a:ext uri="{FF2B5EF4-FFF2-40B4-BE49-F238E27FC236}">
+                    <a16:creationId xmlns:a16="http://schemas.microsoft.com/office/drawing/2014/main" id="{F6A5681F-7D47-70F4-7EB2-B7D1B405D680}"/>
+                  </a:ext>
+                </a:extLst>
+              </p:cNvPr>
+              <p:cNvSpPr txBox="1">
+                <a:spLocks noRot="1" noChangeAspect="1" noMove="1" noResize="1" noEditPoints="1" noAdjustHandles="1" noChangeArrowheads="1" noChangeShapeType="1" noTextEdit="1"/>
+              </p:cNvSpPr>
+              <p:nvPr/>
+            </p:nvSpPr>
+            <p:spPr>
+              <a:xfrm>
+                <a:off x="8547652" y="153348"/>
+                <a:ext cx="3475855" cy="4260397"/>
+              </a:xfrm>
+              <a:prstGeom prst="rect">
+                <a:avLst/>
+              </a:prstGeom>
+              <a:blipFill>
+                <a:blip r:embed="rId3"/>
+                <a:stretch>
+                  <a:fillRect l="-1404" t="-715"/>
+                </a:stretch>
+              </a:blipFill>
+            </p:spPr>
+            <p:txBody>
+              <a:bodyPr/>
+              <a:lstStyle/>
+              <a:p>
+                <a:r>
+                  <a:rPr lang="en-CH">
+                    <a:noFill/>
+                  </a:rPr>
+                  <a:t> </a:t>
+                </a:r>
+              </a:p>
+            </p:txBody>
+          </p:sp>
+        </mc:Fallback>
+      </mc:AlternateContent>
+    </p:spTree>
+    <p:extLst>
+      <p:ext uri="{BB962C8B-B14F-4D97-AF65-F5344CB8AC3E}">
+        <p14:creationId xmlns:p14="http://schemas.microsoft.com/office/powerpoint/2010/main" val="2325496869"/>
       </p:ext>
     </p:extLst>
   </p:cSld>

--- a/slides/minkowski.pptx
+++ b/slides/minkowski.pptx
@@ -223,7 +223,7 @@
           <a:p>
             <a:fld id="{FE946714-66A9-4331-9687-D7DE69600F8C}" type="datetimeFigureOut">
               <a:rPr lang="de-DE" smtClean="0"/>
-              <a:t>24.03.2025</a:t>
+              <a:t>27.03.2025</a:t>
             </a:fld>
             <a:endParaRPr lang="de-DE"/>
           </a:p>
@@ -906,7 +906,7 @@
           <a:p>
             <a:fld id="{BC81DDBC-4466-4E4D-8348-9E61A07BBB23}" type="datetime2">
               <a:rPr lang="en-CA" smtClean="0"/>
-              <a:t>Monday, March 24, 2025</a:t>
+              <a:t>Thursday, March 27, 2025</a:t>
             </a:fld>
             <a:endParaRPr lang="de-DE"/>
           </a:p>
@@ -1315,7 +1315,7 @@
           <a:p>
             <a:fld id="{4A011472-C2FB-4557-976A-45B9E45E41B8}" type="datetime2">
               <a:rPr lang="en-CA" smtClean="0"/>
-              <a:t>Monday, March 24, 2025</a:t>
+              <a:t>Thursday, March 27, 2025</a:t>
             </a:fld>
             <a:endParaRPr lang="de-DE"/>
           </a:p>
@@ -1603,7 +1603,7 @@
           <a:p>
             <a:fld id="{0AB1A5E8-2D2A-4061-8930-BA891F6E5824}" type="datetime2">
               <a:rPr lang="en-CA" smtClean="0"/>
-              <a:t>Monday, March 24, 2025</a:t>
+              <a:t>Thursday, March 27, 2025</a:t>
             </a:fld>
             <a:endParaRPr lang="de-DE"/>
           </a:p>
@@ -1832,7 +1832,7 @@
           <a:p>
             <a:fld id="{5FB79B12-0087-499C-8708-C48C1D5EFD8A}" type="datetime2">
               <a:rPr lang="en-CA" smtClean="0"/>
-              <a:t>Monday, March 24, 2025</a:t>
+              <a:t>Thursday, March 27, 2025</a:t>
             </a:fld>
             <a:endParaRPr lang="de-DE"/>
           </a:p>
@@ -2066,7 +2066,7 @@
           <a:p>
             <a:fld id="{1F664A41-A95B-4B58-B281-ED13D91A7603}" type="datetime2">
               <a:rPr lang="en-CA" smtClean="0"/>
-              <a:t>Monday, March 24, 2025</a:t>
+              <a:t>Thursday, March 27, 2025</a:t>
             </a:fld>
             <a:endParaRPr lang="de-DE"/>
           </a:p>
@@ -2228,7 +2228,7 @@
           <a:p>
             <a:fld id="{12F3EEEF-9270-448B-8799-2AA9B50D0F5B}" type="datetime2">
               <a:rPr lang="en-CA" smtClean="0"/>
-              <a:t>Monday, March 24, 2025</a:t>
+              <a:t>Thursday, March 27, 2025</a:t>
             </a:fld>
             <a:endParaRPr lang="de-DE" dirty="0"/>
           </a:p>
@@ -2500,7 +2500,7 @@
           <a:p>
             <a:fld id="{19A37E33-DCA0-4C7F-A116-3D7ECA99B758}" type="datetime2">
               <a:rPr lang="en-CA" smtClean="0"/>
-              <a:t>Monday, March 24, 2025</a:t>
+              <a:t>Thursday, March 27, 2025</a:t>
             </a:fld>
             <a:endParaRPr lang="de-DE"/>
           </a:p>
@@ -2806,7 +2806,7 @@
           <a:p>
             <a:fld id="{5B55F0DF-0DE4-46A6-89EE-D85721A78BFF}" type="datetime2">
               <a:rPr lang="en-CA" smtClean="0"/>
-              <a:t>Monday, March 24, 2025</a:t>
+              <a:t>Thursday, March 27, 2025</a:t>
             </a:fld>
             <a:endParaRPr lang="de-DE"/>
           </a:p>
@@ -3107,7 +3107,7 @@
           <a:p>
             <a:fld id="{E996B742-5549-4C1E-A4A7-964958457E23}" type="datetime2">
               <a:rPr lang="en-CA" smtClean="0"/>
-              <a:t>Monday, March 24, 2025</a:t>
+              <a:t>Thursday, March 27, 2025</a:t>
             </a:fld>
             <a:endParaRPr lang="de-DE"/>
           </a:p>
@@ -3274,7 +3274,7 @@
           <a:p>
             <a:fld id="{E6E52A30-8CC1-4184-BF4D-47E2B21E4EAF}" type="datetime2">
               <a:rPr lang="en-CA" smtClean="0"/>
-              <a:t>Monday, March 24, 2025</a:t>
+              <a:t>Thursday, March 27, 2025</a:t>
             </a:fld>
             <a:endParaRPr lang="de-DE"/>
           </a:p>
@@ -3434,7 +3434,7 @@
           <a:p>
             <a:fld id="{32A64B94-830A-44DB-B256-EB4AB7B8943B}" type="datetime2">
               <a:rPr lang="en-CA" smtClean="0"/>
-              <a:t>Monday, March 24, 2025</a:t>
+              <a:t>Thursday, March 27, 2025</a:t>
             </a:fld>
             <a:endParaRPr lang="de-DE"/>
           </a:p>
@@ -3855,7 +3855,7 @@
           <a:p>
             <a:fld id="{4BA684CD-BF8B-4444-AC4B-E9077F770D42}" type="datetime2">
               <a:rPr lang="en-CA" smtClean="0"/>
-              <a:t>Monday, March 24, 2025</a:t>
+              <a:t>Thursday, March 27, 2025</a:t>
             </a:fld>
             <a:endParaRPr lang="de-DE"/>
           </a:p>
@@ -3949,7 +3949,7 @@
           <a:p>
             <a:fld id="{B72ED8E9-D70F-45C4-8048-A836134AE31C}" type="datetime2">
               <a:rPr lang="en-CA" smtClean="0"/>
-              <a:t>Monday, March 24, 2025</a:t>
+              <a:t>Thursday, March 27, 2025</a:t>
             </a:fld>
             <a:endParaRPr lang="de-DE"/>
           </a:p>
@@ -4110,7 +4110,7 @@
           <a:p>
             <a:fld id="{E2FEC878-C261-4EEC-84F8-2911246240CC}" type="datetime2">
               <a:rPr lang="en-CA" smtClean="0"/>
-              <a:t>Monday, March 24, 2025</a:t>
+              <a:t>Thursday, March 27, 2025</a:t>
             </a:fld>
             <a:endParaRPr lang="de-DE"/>
           </a:p>
@@ -5185,7 +5185,7 @@
           <a:p>
             <a:fld id="{5B784850-771A-44E0-8EA9-A966A4C42E11}" type="datetime2">
               <a:rPr lang="en-CA" smtClean="0"/>
-              <a:t>Monday, March 24, 2025</a:t>
+              <a:t>Thursday, March 27, 2025</a:t>
             </a:fld>
             <a:endParaRPr lang="de-DE" dirty="0"/>
           </a:p>
@@ -12803,7 +12803,7 @@
           <a:p>
             <a:fld id="{19A37E33-DCA0-4C7F-A116-3D7ECA99B758}" type="datetime2">
               <a:rPr lang="en-CA" smtClean="0"/>
-              <a:t>Monday, March 24, 2025</a:t>
+              <a:t>Thursday, March 27, 2025</a:t>
             </a:fld>
             <a:endParaRPr lang="de-DE" dirty="0"/>
           </a:p>
@@ -12931,8 +12931,8 @@
           </a:xfrm>
         </p:spPr>
       </p:pic>
-      <mc:AlternateContent xmlns:mc="http://schemas.openxmlformats.org/markup-compatibility/2006">
-        <mc:Choice xmlns:a14="http://schemas.microsoft.com/office/drawing/2010/main" Requires="a14">
+      <mc:AlternateContent xmlns:mc="http://schemas.openxmlformats.org/markup-compatibility/2006" xmlns:a14="http://schemas.microsoft.com/office/drawing/2010/main">
+        <mc:Choice Requires="a14">
           <p:sp>
             <p:nvSpPr>
               <p:cNvPr id="2" name="TextBox 1">
@@ -13083,7 +13083,6 @@
                 </a:r>
               </a:p>
               <a:p>
-                <a:pPr/>
                 <a14:m>
                   <m:oMath xmlns:m="http://schemas.openxmlformats.org/officeDocument/2006/math">
                     <m:r>
@@ -13134,7 +13133,7 @@
             </p:txBody>
           </p:sp>
         </mc:Choice>
-        <mc:Fallback>
+        <mc:Fallback xmlns="">
           <p:sp>
             <p:nvSpPr>
               <p:cNvPr id="2" name="TextBox 1">
@@ -13245,8 +13244,8 @@
           </a:xfrm>
         </p:spPr>
       </p:pic>
-      <mc:AlternateContent xmlns:mc="http://schemas.openxmlformats.org/markup-compatibility/2006">
-        <mc:Choice xmlns:a14="http://schemas.microsoft.com/office/drawing/2010/main" Requires="a14">
+      <mc:AlternateContent xmlns:mc="http://schemas.openxmlformats.org/markup-compatibility/2006" xmlns:a14="http://schemas.microsoft.com/office/drawing/2010/main">
+        <mc:Choice Requires="a14">
           <p:sp>
             <p:nvSpPr>
               <p:cNvPr id="2" name="TextBox 1">
@@ -13574,7 +13573,7 @@
             </p:txBody>
           </p:sp>
         </mc:Choice>
-        <mc:Fallback>
+        <mc:Fallback xmlns="">
           <p:sp>
             <p:nvSpPr>
               <p:cNvPr id="2" name="TextBox 1">
@@ -13685,8 +13684,8 @@
           </a:xfrm>
         </p:spPr>
       </p:pic>
-      <mc:AlternateContent xmlns:mc="http://schemas.openxmlformats.org/markup-compatibility/2006">
-        <mc:Choice xmlns:a14="http://schemas.microsoft.com/office/drawing/2010/main" Requires="a14">
+      <mc:AlternateContent xmlns:mc="http://schemas.openxmlformats.org/markup-compatibility/2006" xmlns:a14="http://schemas.microsoft.com/office/drawing/2010/main">
+        <mc:Choice Requires="a14">
           <p:sp>
             <p:nvSpPr>
               <p:cNvPr id="2" name="TextBox 1">
@@ -14168,7 +14167,7 @@
             </p:txBody>
           </p:sp>
         </mc:Choice>
-        <mc:Fallback>
+        <mc:Fallback xmlns="">
           <p:sp>
             <p:nvSpPr>
               <p:cNvPr id="2" name="TextBox 1">
@@ -14279,8 +14278,8 @@
           </a:xfrm>
         </p:spPr>
       </p:pic>
-      <mc:AlternateContent xmlns:mc="http://schemas.openxmlformats.org/markup-compatibility/2006">
-        <mc:Choice xmlns:a14="http://schemas.microsoft.com/office/drawing/2010/main" Requires="a14">
+      <mc:AlternateContent xmlns:mc="http://schemas.openxmlformats.org/markup-compatibility/2006" xmlns:a14="http://schemas.microsoft.com/office/drawing/2010/main">
+        <mc:Choice Requires="a14">
           <p:sp>
             <p:nvSpPr>
               <p:cNvPr id="2" name="TextBox 1">
@@ -14923,7 +14922,7 @@
             </p:txBody>
           </p:sp>
         </mc:Choice>
-        <mc:Fallback>
+        <mc:Fallback xmlns="">
           <p:sp>
             <p:nvSpPr>
               <p:cNvPr id="2" name="TextBox 1">
@@ -15034,8 +15033,8 @@
           </a:xfrm>
         </p:spPr>
       </p:pic>
-      <mc:AlternateContent xmlns:mc="http://schemas.openxmlformats.org/markup-compatibility/2006">
-        <mc:Choice xmlns:a14="http://schemas.microsoft.com/office/drawing/2010/main" Requires="a14">
+      <mc:AlternateContent xmlns:mc="http://schemas.openxmlformats.org/markup-compatibility/2006" xmlns:a14="http://schemas.microsoft.com/office/drawing/2010/main">
+        <mc:Choice Requires="a14">
           <p:sp>
             <p:nvSpPr>
               <p:cNvPr id="2" name="TextBox 1">
@@ -15852,7 +15851,7 @@
             </p:txBody>
           </p:sp>
         </mc:Choice>
-        <mc:Fallback>
+        <mc:Fallback xmlns="">
           <p:sp>
             <p:nvSpPr>
               <p:cNvPr id="2" name="TextBox 1">
@@ -15963,8 +15962,8 @@
           </a:xfrm>
         </p:spPr>
       </p:pic>
-      <mc:AlternateContent xmlns:mc="http://schemas.openxmlformats.org/markup-compatibility/2006">
-        <mc:Choice xmlns:a14="http://schemas.microsoft.com/office/drawing/2010/main" Requires="a14">
+      <mc:AlternateContent xmlns:mc="http://schemas.openxmlformats.org/markup-compatibility/2006" xmlns:a14="http://schemas.microsoft.com/office/drawing/2010/main">
+        <mc:Choice Requires="a14">
           <p:sp>
             <p:nvSpPr>
               <p:cNvPr id="2" name="TextBox 1">
@@ -17042,7 +17041,6 @@
                 </a:endParaRPr>
               </a:p>
               <a:p>
-                <a:pPr/>
                 <a:endParaRPr lang="en-US" dirty="0">
                   <a:solidFill>
                     <a:schemeClr val="bg1"/>
@@ -17050,7 +17048,6 @@
                 </a:endParaRPr>
               </a:p>
               <a:p>
-                <a:pPr/>
                 <a:r>
                   <a:rPr lang="en-US" dirty="0">
                     <a:solidFill>
@@ -17143,7 +17140,7 @@
             </p:txBody>
           </p:sp>
         </mc:Choice>
-        <mc:Fallback>
+        <mc:Fallback xmlns="">
           <p:sp>
             <p:nvSpPr>
               <p:cNvPr id="2" name="TextBox 1">
@@ -17254,8 +17251,8 @@
           </a:xfrm>
         </p:spPr>
       </p:pic>
-      <mc:AlternateContent xmlns:mc="http://schemas.openxmlformats.org/markup-compatibility/2006">
-        <mc:Choice xmlns:a14="http://schemas.microsoft.com/office/drawing/2010/main" Requires="a14">
+      <mc:AlternateContent xmlns:mc="http://schemas.openxmlformats.org/markup-compatibility/2006" xmlns:a14="http://schemas.microsoft.com/office/drawing/2010/main">
+        <mc:Choice Requires="a14">
           <p:sp>
             <p:nvSpPr>
               <p:cNvPr id="2" name="TextBox 1">
@@ -17532,7 +17529,6 @@
                 </a:endParaRPr>
               </a:p>
               <a:p>
-                <a:pPr/>
                 <a:endParaRPr lang="en-US" dirty="0">
                   <a:solidFill>
                     <a:schemeClr val="bg1"/>
@@ -17540,7 +17536,6 @@
                 </a:endParaRPr>
               </a:p>
               <a:p>
-                <a:pPr/>
                 <a:r>
                   <a:rPr lang="en-US" dirty="0">
                     <a:solidFill>
@@ -17636,7 +17631,6 @@
                 </a:r>
               </a:p>
               <a:p>
-                <a:pPr/>
                 <a:endParaRPr lang="en-US" dirty="0">
                   <a:solidFill>
                     <a:schemeClr val="bg1"/>
@@ -17820,7 +17814,6 @@
                 </a:endParaRPr>
               </a:p>
               <a:p>
-                <a:pPr/>
                 <a:endParaRPr lang="en-US" dirty="0">
                   <a:solidFill>
                     <a:schemeClr val="bg1"/>
@@ -17828,7 +17821,6 @@
                 </a:endParaRPr>
               </a:p>
               <a:p>
-                <a:pPr/>
                 <a:r>
                   <a:rPr lang="en-US" dirty="0">
                     <a:solidFill>
@@ -18012,7 +18004,6 @@
                 </a:endParaRPr>
               </a:p>
               <a:p>
-                <a:pPr/>
                 <a:endParaRPr lang="en-US" dirty="0">
                   <a:solidFill>
                     <a:schemeClr val="bg1"/>
@@ -18022,7 +18013,7 @@
             </p:txBody>
           </p:sp>
         </mc:Choice>
-        <mc:Fallback>
+        <mc:Fallback xmlns="">
           <p:sp>
             <p:nvSpPr>
               <p:cNvPr id="2" name="TextBox 1">
